--- a/MRP - Lusha Zhang 0318.pptx
+++ b/MRP - Lusha Zhang 0318.pptx
@@ -33,26 +33,22 @@
       <p:boldItalic r:id="rId19"/>
     </p:embeddedFont>
     <p:embeddedFont>
-      <p:font typeface="Cambria Math" panose="02040503050406030204" pitchFamily="18" charset="0"/>
+      <p:font typeface="Raleway" pitchFamily="2" charset="77"/>
       <p:regular r:id="rId20"/>
-    </p:embeddedFont>
-    <p:embeddedFont>
-      <p:font typeface="Raleway" pitchFamily="2" charset="77"/>
-      <p:regular r:id="rId21"/>
-      <p:bold r:id="rId22"/>
-      <p:italic r:id="rId23"/>
-      <p:boldItalic r:id="rId24"/>
+      <p:bold r:id="rId21"/>
+      <p:italic r:id="rId22"/>
+      <p:boldItalic r:id="rId23"/>
     </p:embeddedFont>
     <p:embeddedFont>
       <p:font typeface="Red Hat Mono" panose="02010509040201060303" pitchFamily="49" charset="0"/>
-      <p:regular r:id="rId25"/>
-      <p:bold r:id="rId26"/>
-      <p:italic r:id="rId27"/>
-      <p:boldItalic r:id="rId28"/>
+      <p:regular r:id="rId24"/>
+      <p:bold r:id="rId25"/>
+      <p:italic r:id="rId26"/>
+      <p:boldItalic r:id="rId27"/>
     </p:embeddedFont>
     <p:embeddedFont>
       <p:font typeface="VT323" pitchFamily="49" charset="77"/>
-      <p:regular r:id="rId29"/>
+      <p:regular r:id="rId28"/>
     </p:embeddedFont>
   </p:embeddedFontLst>
   <p:defaultTextStyle>
@@ -519,6 +515,90 @@
 </inkml:ink>
 </file>
 
+<file path=ppt/ink/ink17.xml><?xml version="1.0" encoding="utf-8"?>
+<inkml:ink xmlns:inkml="http://www.w3.org/2003/InkML">
+  <inkml:definitions>
+    <inkml:context xml:id="ctx0">
+      <inkml:inkSource xml:id="inkSrc0">
+        <inkml:traceFormat>
+          <inkml:channel name="X" type="integer" min="-2.14748E9" max="2.14748E9" units="cm"/>
+          <inkml:channel name="Y" type="integer" min="-2.14748E9" max="2.14748E9" units="cm"/>
+        </inkml:traceFormat>
+        <inkml:channelProperties>
+          <inkml:channelProperty channel="X" name="resolution" value="1000" units="1/cm"/>
+          <inkml:channelProperty channel="Y" name="resolution" value="1000" units="1/cm"/>
+        </inkml:channelProperties>
+      </inkml:inkSource>
+      <inkml:timestamp xml:id="ts0" timeString="2026-03-19T07:46:27.603"/>
+    </inkml:context>
+    <inkml:brush xml:id="br0">
+      <inkml:brushProperty name="width" value="0.2" units="cm"/>
+      <inkml:brushProperty name="height" value="0.4" units="cm"/>
+      <inkml:brushProperty name="color" value="#00FDFF"/>
+      <inkml:brushProperty name="tip" value="rectangle"/>
+      <inkml:brushProperty name="rasterOp" value="maskPen"/>
+    </inkml:brush>
+  </inkml:definitions>
+  <inkml:trace contextRef="#ctx0" brushRef="#br0">1 11,'57'0,"0"0,13 0,4 0,11 0,5 0,-17 0,3 0,1 0,3 0,1 0,1 0,0 0,1 0,5 0,-1 0,6 0,-2 0,-10 0,12 0,-4 0,0 0,4 0,-18 0,-12 0,10 0,-25 0,-16 0,-11 0,-12 0,-2-5,-5-1</inkml:trace>
+</inkml:ink>
+</file>
+
+<file path=ppt/ink/ink18.xml><?xml version="1.0" encoding="utf-8"?>
+<inkml:ink xmlns:inkml="http://www.w3.org/2003/InkML">
+  <inkml:definitions>
+    <inkml:context xml:id="ctx0">
+      <inkml:inkSource xml:id="inkSrc0">
+        <inkml:traceFormat>
+          <inkml:channel name="X" type="integer" min="-2.14748E9" max="2.14748E9" units="cm"/>
+          <inkml:channel name="Y" type="integer" min="-2.14748E9" max="2.14748E9" units="cm"/>
+        </inkml:traceFormat>
+        <inkml:channelProperties>
+          <inkml:channelProperty channel="X" name="resolution" value="1000" units="1/cm"/>
+          <inkml:channelProperty channel="Y" name="resolution" value="1000" units="1/cm"/>
+        </inkml:channelProperties>
+      </inkml:inkSource>
+      <inkml:timestamp xml:id="ts0" timeString="2026-03-19T07:46:53.432"/>
+    </inkml:context>
+    <inkml:brush xml:id="br0">
+      <inkml:brushProperty name="width" value="0.2" units="cm"/>
+      <inkml:brushProperty name="height" value="0.4" units="cm"/>
+      <inkml:brushProperty name="color" value="#00FDFF"/>
+      <inkml:brushProperty name="tip" value="rectangle"/>
+      <inkml:brushProperty name="rasterOp" value="maskPen"/>
+    </inkml:brush>
+  </inkml:definitions>
+  <inkml:trace contextRef="#ctx0" brushRef="#br0">1 96,'71'0,"-15"0,28 0,6 0,3 0,-36 0,4 0,20 0,1 0,-19 0,1 0,21 0,0 0,-24 0,-2 0,-2 0,0 0,3 0,1 0,-5 0,0 0,0 0,0 0,-4 0,1 0,6 0,0 0,41 0,-45 0,1 0,39 0,-24 0,12 0,-27 0,22 0,-16 0,8 0,-16 0,5 0,12 0,-26 0,50-6,-54 5,43-8,-36 8,11-7,-12 7,4-7,-9 7,9-3,-9 1,0 2,-7-3,-5 4,-4-3,-2 2,-6-2,-5 3,-1 0,-6 0,7 0,4 0,-2 0,8 0,-2 0,1 0,7 0,-3-3,4 2,0-6,0 6,-8-2,2 3,-10 0,-1 0,-4 0,-1-12,1-2</inkml:trace>
+</inkml:ink>
+</file>
+
+<file path=ppt/ink/ink19.xml><?xml version="1.0" encoding="utf-8"?>
+<inkml:ink xmlns:inkml="http://www.w3.org/2003/InkML">
+  <inkml:definitions>
+    <inkml:context xml:id="ctx0">
+      <inkml:inkSource xml:id="inkSrc0">
+        <inkml:traceFormat>
+          <inkml:channel name="X" type="integer" min="-2.14748E9" max="2.14748E9" units="cm"/>
+          <inkml:channel name="Y" type="integer" min="-2.14748E9" max="2.14748E9" units="cm"/>
+        </inkml:traceFormat>
+        <inkml:channelProperties>
+          <inkml:channelProperty channel="X" name="resolution" value="1000" units="1/cm"/>
+          <inkml:channelProperty channel="Y" name="resolution" value="1000" units="1/cm"/>
+        </inkml:channelProperties>
+      </inkml:inkSource>
+      <inkml:timestamp xml:id="ts0" timeString="2026-03-19T07:47:02.784"/>
+    </inkml:context>
+    <inkml:brush xml:id="br0">
+      <inkml:brushProperty name="width" value="0.2" units="cm"/>
+      <inkml:brushProperty name="height" value="0.4" units="cm"/>
+      <inkml:brushProperty name="color" value="#00FDFF"/>
+      <inkml:brushProperty name="tip" value="rectangle"/>
+      <inkml:brushProperty name="rasterOp" value="maskPen"/>
+    </inkml:brush>
+  </inkml:definitions>
+  <inkml:trace contextRef="#ctx0" brushRef="#br0">1 138,'88'0,"-3"0,-27 0,2 0,-2 0,-1 0,-4 0,2 0,16 0,0 0,-15 0,1 0,18 0,6 0,17 0,-4 0,-31 0,-1 0,3 0,6 0,-6 0,-2 0,-3 0,15 0,3 0,4 0,1 0,-2 0,0 0,1 0,0 0,2 0,0 0,-8 0,-2 0,-3 0,-1 0,-4-3,-2 1,-6-1,-3 0,-3-2,-1-1,45-10,-25 9,5-7,-21 5,10 3,-10-6,2 7,-15-3,4 3,-6-2,-4 6,-1-3,-5 1,0 2,-2-3,1 1,-2 2,3-2,-4 3,-1 0,-4 0,-4 0,3 0,-7 0,3 0,-3 0,-3 0,1 0,-1 0,3 0,-1-3,1 2,-1-2,-2 3,2 0,-3 0,3 0,-1 0,0 0,1 0,-4 0,4 0,-3 0,3 0,0 0,-4 3,0 7,-5 0,0 3,-3-5</inkml:trace>
+</inkml:ink>
+</file>
+
 <file path=ppt/ink/ink2.xml><?xml version="1.0" encoding="utf-8"?>
 <inkml:ink xmlns:inkml="http://www.w3.org/2003/InkML">
   <inkml:definitions>
@@ -544,6 +624,62 @@
     </inkml:brush>
   </inkml:definitions>
   <inkml:trace contextRef="#ctx0" brushRef="#br0">1 42,'55'0,"-3"0,-12 0,12 0,-3 0,15 0,-4 0,6 0,6 0,-5 0,11 0,-11 0,12 0,-6 0,14 0,-11 0,16 0,-10 0,14 0,-8 0,6 0,-5-5,-18 4,-17-4,-3 0,-5 3,44-3,-40 5,16 0,12 0,-24 0,15 0,-27 0,30 0,-15 0,21 0,-34 0,18 0,-6 0,0 0,7 0,-10 0,1 0,5 0,-1 0,-4 0,5 0,-7 0,1 0,-1 0,1 0,-6 0,9 0,-8-4,4 3,-1-3,-8 4,53-2,7 0,-28 1,25-2,-11 1,-64 2,10 0,-12 0,6 0,-8 0,-4 0,0 0,1 0,-4 3,6-2,-4 4,0-4,5 1,-7-2,5 0,-3 0,-2 0,8 0,-12 0,14 0,-11 0,6 0,-4 0,0 0,3 0,-4 0,0 15,-9 3</inkml:trace>
+</inkml:ink>
+</file>
+
+<file path=ppt/ink/ink20.xml><?xml version="1.0" encoding="utf-8"?>
+<inkml:ink xmlns:inkml="http://www.w3.org/2003/InkML">
+  <inkml:definitions>
+    <inkml:context xml:id="ctx0">
+      <inkml:inkSource xml:id="inkSrc0">
+        <inkml:traceFormat>
+          <inkml:channel name="X" type="integer" min="-2.14748E9" max="2.14748E9" units="cm"/>
+          <inkml:channel name="Y" type="integer" min="-2.14748E9" max="2.14748E9" units="cm"/>
+        </inkml:traceFormat>
+        <inkml:channelProperties>
+          <inkml:channelProperty channel="X" name="resolution" value="1000" units="1/cm"/>
+          <inkml:channelProperty channel="Y" name="resolution" value="1000" units="1/cm"/>
+        </inkml:channelProperties>
+      </inkml:inkSource>
+      <inkml:timestamp xml:id="ts0" timeString="2026-03-19T07:47:16.513"/>
+    </inkml:context>
+    <inkml:brush xml:id="br0">
+      <inkml:brushProperty name="width" value="0.2" units="cm"/>
+      <inkml:brushProperty name="height" value="0.4" units="cm"/>
+      <inkml:brushProperty name="color" value="#FFFC00"/>
+      <inkml:brushProperty name="tip" value="rectangle"/>
+      <inkml:brushProperty name="rasterOp" value="maskPen"/>
+    </inkml:brush>
+  </inkml:definitions>
+  <inkml:trace contextRef="#ctx0" brushRef="#br0">1 1,'87'0,"-8"0,-22 0,2 0,-5 0,0 0,16 0,-1 0,-17 0,0 0,14 0,-1 0,-14 0,0 0,18 0,1 0,-8 0,0 0,7 0,-1 0,-6 0,-2 0,-2 0,-1 0,0 0,-3 0,35 0,-2 0,-14 0,-1 0,-22 0,6 0,-23 0,11 0,-12 0,-5 0,-7 0,-7 0,-1 0,-2 0,1 2,-3 1</inkml:trace>
+</inkml:ink>
+</file>
+
+<file path=ppt/ink/ink21.xml><?xml version="1.0" encoding="utf-8"?>
+<inkml:ink xmlns:inkml="http://www.w3.org/2003/InkML">
+  <inkml:definitions>
+    <inkml:context xml:id="ctx0">
+      <inkml:inkSource xml:id="inkSrc0">
+        <inkml:traceFormat>
+          <inkml:channel name="X" type="integer" min="-2.14748E9" max="2.14748E9" units="cm"/>
+          <inkml:channel name="Y" type="integer" min="-2.14748E9" max="2.14748E9" units="cm"/>
+        </inkml:traceFormat>
+        <inkml:channelProperties>
+          <inkml:channelProperty channel="X" name="resolution" value="1000" units="1/cm"/>
+          <inkml:channelProperty channel="Y" name="resolution" value="1000" units="1/cm"/>
+        </inkml:channelProperties>
+      </inkml:inkSource>
+      <inkml:timestamp xml:id="ts0" timeString="2026-03-19T08:03:06.031"/>
+    </inkml:context>
+    <inkml:brush xml:id="br0">
+      <inkml:brushProperty name="width" value="0.2" units="cm"/>
+      <inkml:brushProperty name="height" value="0.4" units="cm"/>
+      <inkml:brushProperty name="color" value="#0069AF"/>
+      <inkml:brushProperty name="tip" value="rectangle"/>
+      <inkml:brushProperty name="rasterOp" value="maskPen"/>
+    </inkml:brush>
+  </inkml:definitions>
+  <inkml:trace contextRef="#ctx0" brushRef="#br0">1 1,'64'0,"30"0,-33 0,5 0,27 0,5 0,-29 0,0 0,3 0,12 0,3 0,0 0,0 0,0 0,1 0,7 0,2 0,-1 0,-7 0,-2 0,2 0,7 0,1 0,-5 0,4 0,1 0,-21 0,7 0,-1 0,-6 0,24 0,-4 0,-14 0,4 0,-3 0,-8 0,-2 0,-4 0,10 0,0 0,-8 0,3 0,-4 0,-1 0,-2 0,8 0,-4 0,10 0,-26 0,-1 0,18 0,2 0,-33 0,-4 0,-15 0,-5 0,-2 3,-7-2,4 3,-2-4,-2 0,6 0,-6 3,5-2,-1 2</inkml:trace>
 </inkml:ink>
 </file>
 
@@ -11996,8 +12132,8 @@
         </p:nvSpPr>
         <p:spPr>
           <a:xfrm>
-            <a:off x="4303644" y="1342008"/>
-            <a:ext cx="4397943" cy="2881761"/>
+            <a:off x="3713259" y="1130869"/>
+            <a:ext cx="5107597" cy="2881761"/>
           </a:xfrm>
           <a:prstGeom prst="rect">
             <a:avLst/>
@@ -12020,11 +12156,15 @@
             </a:pPr>
             <a:r>
               <a:rPr lang="en-US" dirty="0"/>
-              <a:t>Optimizing Mathematical Reasoning with </a:t>
+              <a:t>Exploring </a:t>
             </a:r>
             <a:r>
               <a:rPr lang="en-US" dirty="0" err="1"/>
               <a:t>LoRA</a:t>
+            </a:r>
+            <a:r>
+              <a:rPr lang="en-US" dirty="0"/>
+              <a:t> for Math Reasoning</a:t>
             </a:r>
             <a:endParaRPr dirty="0"/>
           </a:p>
@@ -12108,7 +12248,7 @@
             </a:pPr>
             <a:r>
               <a:rPr lang="en-US" sz="5400" dirty="0"/>
-              <a:t>From SFT to GRPO: </a:t>
+              <a:t>With SFT and GRPO </a:t>
             </a:r>
             <a:endParaRPr sz="11500" dirty="0"/>
           </a:p>
@@ -12163,8 +12303,8 @@
         </p:nvSpPr>
         <p:spPr>
           <a:xfrm>
-            <a:off x="228600" y="342540"/>
-            <a:ext cx="8686800" cy="572700"/>
+            <a:off x="6210219" y="358971"/>
+            <a:ext cx="2729285" cy="572700"/>
           </a:xfrm>
           <a:prstGeom prst="rect">
             <a:avLst/>
@@ -12187,7 +12327,7 @@
             </a:pPr>
             <a:r>
               <a:rPr lang="en" dirty="0"/>
-              <a:t>THREE IDEAS</a:t>
+              <a:t>Concepts</a:t>
             </a:r>
             <a:endParaRPr dirty="0"/>
           </a:p>
@@ -12195,10 +12335,10 @@
       </p:sp>
       <p:sp>
         <p:nvSpPr>
-          <p:cNvPr id="235" name="Google Shape;235;p34">
+          <p:cNvPr id="236" name="Google Shape;236;p34">
             <a:extLst>
               <a:ext uri="{FF2B5EF4-FFF2-40B4-BE49-F238E27FC236}">
-                <a16:creationId xmlns:a16="http://schemas.microsoft.com/office/drawing/2014/main" id="{3E531A14-DFCC-DF90-BC70-7EFE02280CAB}"/>
+                <a16:creationId xmlns:a16="http://schemas.microsoft.com/office/drawing/2014/main" id="{57F34D90-DE72-B817-F197-8108A8DF1A3B}"/>
               </a:ext>
             </a:extLst>
           </p:cNvPr>
@@ -12206,13 +12346,13 @@
             <a:spLocks noGrp="1"/>
           </p:cNvSpPr>
           <p:nvPr>
-            <p:ph type="subTitle" idx="1"/>
+            <p:ph type="subTitle" idx="2"/>
           </p:nvPr>
         </p:nvSpPr>
         <p:spPr>
           <a:xfrm>
-            <a:off x="2017726" y="2519050"/>
-            <a:ext cx="5911800" cy="738600"/>
+            <a:off x="2664045" y="342540"/>
+            <a:ext cx="3260036" cy="738600"/>
           </a:xfrm>
           <a:prstGeom prst="rect">
             <a:avLst/>
@@ -12224,524 +12364,20 @@
           </a:bodyPr>
           <a:lstStyle/>
           <a:p>
-            <a:pPr marL="0" lvl="0" indent="0" algn="l" rtl="0">
-              <a:spcBef>
-                <a:spcPts val="0"/>
-              </a:spcBef>
-              <a:spcAft>
-                <a:spcPts val="0"/>
-              </a:spcAft>
-              <a:buNone/>
-            </a:pPr>
+            <a:pPr marL="0" lvl="0" indent="0"/>
             <a:r>
-              <a:rPr lang="en" dirty="0"/>
-              <a:t>Venus has a beautiful name, it is very hot and is the second planet in our Solar System. Its atmosphere is extremely poisonous. It’s the second-brightest natural object in the night sky after the Moon</a:t>
+              <a:rPr lang="en-US" sz="1100" dirty="0"/>
+              <a:t>Keeps the base model frozen and learns </a:t>
             </a:r>
-            <a:endParaRPr dirty="0"/>
-          </a:p>
-        </p:txBody>
-      </p:sp>
-      <mc:AlternateContent xmlns:mc="http://schemas.openxmlformats.org/markup-compatibility/2006">
-        <mc:Choice xmlns:a14="http://schemas.microsoft.com/office/drawing/2010/main" Requires="a14">
-          <p:sp>
-            <p:nvSpPr>
-              <p:cNvPr id="236" name="Google Shape;236;p34">
-                <a:extLst>
-                  <a:ext uri="{FF2B5EF4-FFF2-40B4-BE49-F238E27FC236}">
-                    <a16:creationId xmlns:a16="http://schemas.microsoft.com/office/drawing/2014/main" id="{57F34D90-DE72-B817-F197-8108A8DF1A3B}"/>
-                  </a:ext>
-                </a:extLst>
-              </p:cNvPr>
-              <p:cNvSpPr txBox="1">
-                <a:spLocks noGrp="1"/>
-              </p:cNvSpPr>
-              <p:nvPr>
-                <p:ph type="subTitle" idx="2"/>
-              </p:nvPr>
-            </p:nvSpPr>
-            <p:spPr>
-              <a:xfrm>
-                <a:off x="1214429" y="960891"/>
-                <a:ext cx="6800572" cy="738600"/>
-              </a:xfrm>
-              <a:prstGeom prst="rect">
-                <a:avLst/>
-              </a:prstGeom>
-            </p:spPr>
-            <p:txBody>
-              <a:bodyPr spcFirstLastPara="1" wrap="square" lIns="91425" tIns="91425" rIns="91425" bIns="91425" anchor="t" anchorCtr="0">
-                <a:noAutofit/>
-              </a:bodyPr>
-              <a:lstStyle/>
-              <a:p>
-                <a:pPr marL="0" lvl="0" indent="0"/>
-                <a:r>
-                  <a:rPr lang="en-US" dirty="0"/>
-                  <a:t>Low-rank adaptation, or </a:t>
-                </a:r>
-                <a:r>
-                  <a:rPr lang="en-US" dirty="0" err="1"/>
-                  <a:t>LoRA</a:t>
-                </a:r>
-                <a:r>
-                  <a:rPr lang="en-US" dirty="0"/>
-                  <a:t> (Hu et al., 2021), adapts a frozen linear layer </a:t>
-                </a:r>
-                <a14:m>
-                  <m:oMath xmlns:m="http://schemas.openxmlformats.org/officeDocument/2006/math">
-                    <m:r>
-                      <a:rPr lang="en-US" b="0" i="1" smtClean="0">
-                        <a:latin typeface="Cambria Math" panose="02040503050406030204" pitchFamily="18" charset="0"/>
-                        <a:ea typeface="Cambria Math" panose="02040503050406030204" pitchFamily="18" charset="0"/>
-                      </a:rPr>
-                      <m:t>𝑊</m:t>
-                    </m:r>
-                    <m:r>
-                      <a:rPr lang="en-US" b="0" i="0" smtClean="0">
-                        <a:latin typeface="Cambria Math" panose="02040503050406030204" pitchFamily="18" charset="0"/>
-                        <a:ea typeface="Cambria Math" panose="02040503050406030204" pitchFamily="18" charset="0"/>
-                      </a:rPr>
-                      <m:t> </m:t>
-                    </m:r>
-                    <m:r>
-                      <m:rPr>
-                        <m:nor/>
-                      </m:rPr>
-                      <a:rPr lang="en-US" dirty="0"/>
-                      <m:t>∈</m:t>
-                    </m:r>
-                    <m:r>
-                      <m:rPr>
-                        <m:nor/>
-                      </m:rPr>
-                      <a:rPr lang="en-US" b="0" i="0" dirty="0" smtClean="0"/>
-                      <m:t> </m:t>
-                    </m:r>
-                    <m:sSup>
-                      <m:sSupPr>
-                        <m:ctrlPr>
-                          <a:rPr lang="en-US" i="1" smtClean="0">
-                            <a:latin typeface="Cambria Math" panose="02040503050406030204" pitchFamily="18" charset="0"/>
-                            <a:ea typeface="Cambria Math" panose="02040503050406030204" pitchFamily="18" charset="0"/>
-                          </a:rPr>
-                        </m:ctrlPr>
-                      </m:sSupPr>
-                      <m:e>
-                        <m:r>
-                          <a:rPr lang="en-US" i="1">
-                            <a:latin typeface="Cambria Math" panose="02040503050406030204" pitchFamily="18" charset="0"/>
-                            <a:ea typeface="Cambria Math" panose="02040503050406030204" pitchFamily="18" charset="0"/>
-                          </a:rPr>
-                          <m:t>ℝ</m:t>
-                        </m:r>
-                      </m:e>
-                      <m:sup>
-                        <m:r>
-                          <a:rPr lang="en-US" b="0" i="1" smtClean="0">
-                            <a:latin typeface="Cambria Math" panose="02040503050406030204" pitchFamily="18" charset="0"/>
-                            <a:ea typeface="Cambria Math" panose="02040503050406030204" pitchFamily="18" charset="0"/>
-                          </a:rPr>
-                          <m:t>𝑑</m:t>
-                        </m:r>
-                        <m:r>
-                          <a:rPr lang="en-US" b="0" i="1" smtClean="0">
-                            <a:latin typeface="Cambria Math" panose="02040503050406030204" pitchFamily="18" charset="0"/>
-                            <a:ea typeface="Cambria Math" panose="02040503050406030204" pitchFamily="18" charset="0"/>
-                          </a:rPr>
-                          <m:t>×</m:t>
-                        </m:r>
-                        <m:r>
-                          <a:rPr lang="en-US" b="0" i="1" smtClean="0">
-                            <a:latin typeface="Cambria Math" panose="02040503050406030204" pitchFamily="18" charset="0"/>
-                            <a:ea typeface="Cambria Math" panose="02040503050406030204" pitchFamily="18" charset="0"/>
-                          </a:rPr>
-                          <m:t>𝑘</m:t>
-                        </m:r>
-                        <m:r>
-                          <a:rPr lang="en-US" b="0" i="1" smtClean="0">
-                            <a:latin typeface="Cambria Math" panose="02040503050406030204" pitchFamily="18" charset="0"/>
-                            <a:ea typeface="Cambria Math" panose="02040503050406030204" pitchFamily="18" charset="0"/>
-                          </a:rPr>
-                          <m:t> </m:t>
-                        </m:r>
-                      </m:sup>
-                    </m:sSup>
-                  </m:oMath>
-                </a14:m>
-                <a:r>
-                  <a:rPr lang="en-US" dirty="0"/>
-                  <a:t>  with a low-rank update:</a:t>
-                </a:r>
-              </a:p>
-              <a:p>
-                <a:pPr marL="0" lvl="0" indent="0"/>
-                <a14:m>
-                  <m:oMathPara xmlns:m="http://schemas.openxmlformats.org/officeDocument/2006/math">
-                    <m:oMathParaPr>
-                      <m:jc m:val="centerGroup"/>
-                    </m:oMathParaPr>
-                    <m:oMath xmlns:m="http://schemas.openxmlformats.org/officeDocument/2006/math">
-                      <m:sSup>
-                        <m:sSupPr>
-                          <m:ctrlPr>
-                            <a:rPr lang="en-US" i="1" smtClean="0">
-                              <a:latin typeface="Cambria Math" panose="02040503050406030204" pitchFamily="18" charset="0"/>
-                            </a:rPr>
-                          </m:ctrlPr>
-                        </m:sSupPr>
-                        <m:e>
-                          <m:r>
-                            <a:rPr lang="en-US" b="0" i="1" smtClean="0">
-                              <a:latin typeface="Cambria Math" panose="02040503050406030204" pitchFamily="18" charset="0"/>
-                            </a:rPr>
-                            <m:t>𝑊</m:t>
-                          </m:r>
-                        </m:e>
-                        <m:sup>
-                          <m:r>
-                            <a:rPr lang="en-US" b="0" i="1" smtClean="0">
-                              <a:latin typeface="Cambria Math" panose="02040503050406030204" pitchFamily="18" charset="0"/>
-                            </a:rPr>
-                            <m:t>′</m:t>
-                          </m:r>
-                        </m:sup>
-                      </m:sSup>
-                      <m:r>
-                        <a:rPr lang="en-US" b="0" i="1" smtClean="0">
-                          <a:latin typeface="Cambria Math" panose="02040503050406030204" pitchFamily="18" charset="0"/>
-                        </a:rPr>
-                        <m:t>=</m:t>
-                      </m:r>
-                      <m:r>
-                        <a:rPr lang="en-US" b="0" i="1" smtClean="0">
-                          <a:latin typeface="Cambria Math" panose="02040503050406030204" pitchFamily="18" charset="0"/>
-                        </a:rPr>
-                        <m:t>𝑊</m:t>
-                      </m:r>
-                      <m:r>
-                        <a:rPr lang="en-US" b="0" i="1" smtClean="0">
-                          <a:latin typeface="Cambria Math" panose="02040503050406030204" pitchFamily="18" charset="0"/>
-                        </a:rPr>
-                        <m:t>+</m:t>
-                      </m:r>
-                      <m:r>
-                        <a:rPr lang="en-US" b="0" i="1" smtClean="0">
-                          <a:latin typeface="Cambria Math" panose="02040503050406030204" pitchFamily="18" charset="0"/>
-                        </a:rPr>
-                        <m:t>𝐴𝐵</m:t>
-                      </m:r>
-                    </m:oMath>
-                  </m:oMathPara>
-                </a14:m>
-                <a:endParaRPr lang="en-US" dirty="0"/>
-              </a:p>
-              <a:p>
-                <a:pPr marL="0" lvl="0" indent="0"/>
-                <a:r>
-                  <a:rPr lang="en-US" dirty="0"/>
-                  <a:t>Where </a:t>
-                </a:r>
-                <a14:m>
-                  <m:oMath xmlns:m="http://schemas.openxmlformats.org/officeDocument/2006/math">
-                    <m:sSup>
-                      <m:sSupPr>
-                        <m:ctrlPr>
-                          <a:rPr lang="en-US" i="1">
-                            <a:latin typeface="Cambria Math" panose="02040503050406030204" pitchFamily="18" charset="0"/>
-                            <a:ea typeface="Cambria Math" panose="02040503050406030204" pitchFamily="18" charset="0"/>
-                          </a:rPr>
-                        </m:ctrlPr>
-                      </m:sSupPr>
-                      <m:e>
-                        <m:r>
-                          <a:rPr lang="en-US" i="1">
-                            <a:latin typeface="Cambria Math" panose="02040503050406030204" pitchFamily="18" charset="0"/>
-                            <a:ea typeface="Cambria Math" panose="02040503050406030204" pitchFamily="18" charset="0"/>
-                          </a:rPr>
-                          <m:t>𝐴</m:t>
-                        </m:r>
-                        <m:r>
-                          <a:rPr lang="en-US">
-                            <a:latin typeface="Cambria Math" panose="02040503050406030204" pitchFamily="18" charset="0"/>
-                            <a:ea typeface="Cambria Math" panose="02040503050406030204" pitchFamily="18" charset="0"/>
-                          </a:rPr>
-                          <m:t> </m:t>
-                        </m:r>
-                        <m:r>
-                          <m:rPr>
-                            <m:nor/>
-                          </m:rPr>
-                          <a:rPr lang="en-US" dirty="0"/>
-                          <m:t>∈</m:t>
-                        </m:r>
-                        <m:r>
-                          <m:rPr>
-                            <m:nor/>
-                          </m:rPr>
-                          <a:rPr lang="en-US" b="0" i="0" dirty="0" smtClean="0"/>
-                          <m:t> </m:t>
-                        </m:r>
-                        <m:r>
-                          <a:rPr lang="en-US" i="1">
-                            <a:latin typeface="Cambria Math" panose="02040503050406030204" pitchFamily="18" charset="0"/>
-                            <a:ea typeface="Cambria Math" panose="02040503050406030204" pitchFamily="18" charset="0"/>
-                          </a:rPr>
-                          <m:t>ℝ</m:t>
-                        </m:r>
-                      </m:e>
-                      <m:sup>
-                        <m:r>
-                          <a:rPr lang="en-US" i="1">
-                            <a:latin typeface="Cambria Math" panose="02040503050406030204" pitchFamily="18" charset="0"/>
-                            <a:ea typeface="Cambria Math" panose="02040503050406030204" pitchFamily="18" charset="0"/>
-                          </a:rPr>
-                          <m:t>𝑑</m:t>
-                        </m:r>
-                        <m:r>
-                          <a:rPr lang="en-US" i="1">
-                            <a:latin typeface="Cambria Math" panose="02040503050406030204" pitchFamily="18" charset="0"/>
-                            <a:ea typeface="Cambria Math" panose="02040503050406030204" pitchFamily="18" charset="0"/>
-                          </a:rPr>
-                          <m:t>×</m:t>
-                        </m:r>
-                        <m:r>
-                          <a:rPr lang="en-US" b="0" i="1" smtClean="0">
-                            <a:latin typeface="Cambria Math" panose="02040503050406030204" pitchFamily="18" charset="0"/>
-                            <a:ea typeface="Cambria Math" panose="02040503050406030204" pitchFamily="18" charset="0"/>
-                          </a:rPr>
-                          <m:t>𝑟</m:t>
-                        </m:r>
-                      </m:sup>
-                    </m:sSup>
-                  </m:oMath>
-                </a14:m>
-                <a:r>
-                  <a:rPr lang="en-US" dirty="0"/>
-                  <a:t> and </a:t>
-                </a:r>
-                <a14:m>
-                  <m:oMath xmlns:m="http://schemas.openxmlformats.org/officeDocument/2006/math">
-                    <m:sSup>
-                      <m:sSupPr>
-                        <m:ctrlPr>
-                          <a:rPr lang="en-US" i="1">
-                            <a:latin typeface="Cambria Math" panose="02040503050406030204" pitchFamily="18" charset="0"/>
-                            <a:ea typeface="Cambria Math" panose="02040503050406030204" pitchFamily="18" charset="0"/>
-                          </a:rPr>
-                        </m:ctrlPr>
-                      </m:sSupPr>
-                      <m:e>
-                        <m:r>
-                          <a:rPr lang="en-US" b="0" i="1" smtClean="0">
-                            <a:latin typeface="Cambria Math" panose="02040503050406030204" pitchFamily="18" charset="0"/>
-                            <a:ea typeface="Cambria Math" panose="02040503050406030204" pitchFamily="18" charset="0"/>
-                          </a:rPr>
-                          <m:t>𝐵</m:t>
-                        </m:r>
-                        <m:r>
-                          <a:rPr lang="en-US">
-                            <a:latin typeface="Cambria Math" panose="02040503050406030204" pitchFamily="18" charset="0"/>
-                            <a:ea typeface="Cambria Math" panose="02040503050406030204" pitchFamily="18" charset="0"/>
-                          </a:rPr>
-                          <m:t> </m:t>
-                        </m:r>
-                        <m:r>
-                          <m:rPr>
-                            <m:nor/>
-                          </m:rPr>
-                          <a:rPr lang="en-US" dirty="0"/>
-                          <m:t>∈</m:t>
-                        </m:r>
-                        <m:r>
-                          <m:rPr>
-                            <m:nor/>
-                          </m:rPr>
-                          <a:rPr lang="en-US" dirty="0"/>
-                          <m:t> </m:t>
-                        </m:r>
-                        <m:r>
-                          <a:rPr lang="en-US" i="1">
-                            <a:latin typeface="Cambria Math" panose="02040503050406030204" pitchFamily="18" charset="0"/>
-                            <a:ea typeface="Cambria Math" panose="02040503050406030204" pitchFamily="18" charset="0"/>
-                          </a:rPr>
-                          <m:t>ℝ</m:t>
-                        </m:r>
-                      </m:e>
-                      <m:sup>
-                        <m:r>
-                          <a:rPr lang="en-US" i="1">
-                            <a:latin typeface="Cambria Math" panose="02040503050406030204" pitchFamily="18" charset="0"/>
-                            <a:ea typeface="Cambria Math" panose="02040503050406030204" pitchFamily="18" charset="0"/>
-                          </a:rPr>
-                          <m:t>𝑑</m:t>
-                        </m:r>
-                        <m:r>
-                          <a:rPr lang="en-US" i="1">
-                            <a:latin typeface="Cambria Math" panose="02040503050406030204" pitchFamily="18" charset="0"/>
-                            <a:ea typeface="Cambria Math" panose="02040503050406030204" pitchFamily="18" charset="0"/>
-                          </a:rPr>
-                          <m:t>×</m:t>
-                        </m:r>
-                        <m:r>
-                          <a:rPr lang="en-US" i="1">
-                            <a:latin typeface="Cambria Math" panose="02040503050406030204" pitchFamily="18" charset="0"/>
-                            <a:ea typeface="Cambria Math" panose="02040503050406030204" pitchFamily="18" charset="0"/>
-                          </a:rPr>
-                          <m:t>𝑟</m:t>
-                        </m:r>
-                      </m:sup>
-                    </m:sSup>
-                  </m:oMath>
-                </a14:m>
-                <a:r>
-                  <a:rPr lang="en-US" dirty="0"/>
-                  <a:t> aretrainable, and W remains frozen. The number of trainable parameters scales as O(dr) per module. Applying LoRA to m modules across n layers yields O(nmdr) total parameters—typically millions for billion-parameter models (Biderman et al., 2024; Schulman and Lab, 2025).</a:t>
-                </a:r>
-                <a:endParaRPr dirty="0"/>
-              </a:p>
-            </p:txBody>
-          </p:sp>
-        </mc:Choice>
-        <mc:Fallback>
-          <p:sp>
-            <p:nvSpPr>
-              <p:cNvPr id="236" name="Google Shape;236;p34">
-                <a:extLst>
-                  <a:ext uri="{FF2B5EF4-FFF2-40B4-BE49-F238E27FC236}">
-                    <a16:creationId xmlns:a16="http://schemas.microsoft.com/office/drawing/2014/main" id="{57F34D90-DE72-B817-F197-8108A8DF1A3B}"/>
-                  </a:ext>
-                </a:extLst>
-              </p:cNvPr>
-              <p:cNvSpPr txBox="1">
-                <a:spLocks noGrp="1" noRot="1" noChangeAspect="1" noMove="1" noResize="1" noEditPoints="1" noAdjustHandles="1" noChangeArrowheads="1" noChangeShapeType="1" noTextEdit="1"/>
-              </p:cNvSpPr>
-              <p:nvPr>
-                <p:ph type="subTitle" idx="2"/>
-              </p:nvPr>
-            </p:nvSpPr>
-            <p:spPr>
-              <a:xfrm>
-                <a:off x="1214429" y="960891"/>
-                <a:ext cx="6800572" cy="738600"/>
-              </a:xfrm>
-              <a:prstGeom prst="rect">
-                <a:avLst/>
-              </a:prstGeom>
-              <a:blipFill>
-                <a:blip r:embed="rId3"/>
-                <a:stretch>
-                  <a:fillRect b="-98305"/>
-                </a:stretch>
-              </a:blipFill>
-            </p:spPr>
-            <p:txBody>
-              <a:bodyPr/>
-              <a:lstStyle/>
-              <a:p>
-                <a:r>
-                  <a:rPr lang="en-US">
-                    <a:noFill/>
-                  </a:rPr>
-                  <a:t> </a:t>
-                </a:r>
-              </a:p>
-            </p:txBody>
-          </p:sp>
-        </mc:Fallback>
-      </mc:AlternateContent>
-      <p:sp>
-        <p:nvSpPr>
-          <p:cNvPr id="237" name="Google Shape;237;p34">
-            <a:extLst>
-              <a:ext uri="{FF2B5EF4-FFF2-40B4-BE49-F238E27FC236}">
-                <a16:creationId xmlns:a16="http://schemas.microsoft.com/office/drawing/2014/main" id="{BAD6828F-15D7-0E8C-9D70-A59706B6CF64}"/>
-              </a:ext>
-            </a:extLst>
-          </p:cNvPr>
-          <p:cNvSpPr txBox="1">
-            <a:spLocks noGrp="1"/>
-          </p:cNvSpPr>
-          <p:nvPr>
-            <p:ph type="subTitle" idx="3"/>
-          </p:nvPr>
-        </p:nvSpPr>
-        <p:spPr>
-          <a:xfrm>
-            <a:off x="2017752" y="3832400"/>
-            <a:ext cx="5911800" cy="738600"/>
-          </a:xfrm>
-          <a:prstGeom prst="rect">
-            <a:avLst/>
-          </a:prstGeom>
-        </p:spPr>
-        <p:txBody>
-          <a:bodyPr spcFirstLastPara="1" wrap="square" lIns="91425" tIns="91425" rIns="91425" bIns="91425" anchor="t" anchorCtr="0">
-            <a:noAutofit/>
-          </a:bodyPr>
-          <a:lstStyle/>
-          <a:p>
-            <a:pPr marL="0" lvl="0" indent="0" algn="l" rtl="0">
-              <a:spcBef>
-                <a:spcPts val="0"/>
-              </a:spcBef>
-              <a:spcAft>
-                <a:spcPts val="0"/>
-              </a:spcAft>
-              <a:buNone/>
-            </a:pPr>
             <a:r>
-              <a:rPr lang="en"/>
-              <a:t>Jupiter is a gas giant and the biggest planet in the Solar System. It’s the fourth-brightest object in the night sky and it has around eighty moons. It was named after the Roman god of the skies</a:t>
+              <a:rPr lang="en-US" sz="1100" b="1" dirty="0"/>
+              <a:t>a low-rank update</a:t>
             </a:r>
-            <a:endParaRPr/>
-          </a:p>
-        </p:txBody>
-      </p:sp>
-      <p:sp>
-        <p:nvSpPr>
-          <p:cNvPr id="238" name="Google Shape;238;p34">
-            <a:extLst>
-              <a:ext uri="{FF2B5EF4-FFF2-40B4-BE49-F238E27FC236}">
-                <a16:creationId xmlns:a16="http://schemas.microsoft.com/office/drawing/2014/main" id="{10B00F88-6760-F532-749C-1E5EB36A0F51}"/>
-              </a:ext>
-            </a:extLst>
-          </p:cNvPr>
-          <p:cNvSpPr txBox="1">
-            <a:spLocks noGrp="1"/>
-          </p:cNvSpPr>
-          <p:nvPr>
-            <p:ph type="title"/>
-          </p:nvPr>
-        </p:nvSpPr>
-        <p:spPr>
-          <a:xfrm>
-            <a:off x="1214429" y="2702041"/>
-            <a:ext cx="930300" cy="310800"/>
-          </a:xfrm>
-          <a:prstGeom prst="rect">
-            <a:avLst/>
-          </a:prstGeom>
-        </p:spPr>
-        <p:txBody>
-          <a:bodyPr spcFirstLastPara="1" wrap="square" lIns="91425" tIns="91425" rIns="91425" bIns="91425" anchor="ctr" anchorCtr="0">
-            <a:noAutofit/>
-          </a:bodyPr>
-          <a:lstStyle/>
-          <a:p>
-            <a:pPr marL="0" lvl="0" indent="0" algn="l" rtl="0">
-              <a:spcBef>
-                <a:spcPts val="0"/>
-              </a:spcBef>
-              <a:spcAft>
-                <a:spcPts val="0"/>
-              </a:spcAft>
-              <a:buNone/>
-            </a:pPr>
             <a:r>
-              <a:rPr lang="en"/>
-              <a:t>02</a:t>
+              <a:rPr lang="en-US" sz="1100" dirty="0"/>
+              <a:t> through small adapter weights.</a:t>
             </a:r>
-            <a:endParaRPr/>
+            <a:endParaRPr sz="1100" dirty="0"/>
           </a:p>
         </p:txBody>
       </p:sp>
@@ -12763,8 +12399,8 @@
         </p:nvSpPr>
         <p:spPr>
           <a:xfrm>
-            <a:off x="411838" y="1144032"/>
-            <a:ext cx="928500" cy="310500"/>
+            <a:off x="1708258" y="474491"/>
+            <a:ext cx="1544183" cy="310500"/>
           </a:xfrm>
           <a:prstGeom prst="rect">
             <a:avLst/>
@@ -12786,61 +12422,2271 @@
               <a:buNone/>
             </a:pPr>
             <a:r>
-              <a:rPr lang="en" dirty="0"/>
-              <a:t>01</a:t>
+              <a:rPr lang="en" sz="4000" dirty="0" err="1"/>
+              <a:t>LoRA</a:t>
             </a:r>
-            <a:endParaRPr dirty="0"/>
+            <a:endParaRPr sz="4000" dirty="0"/>
           </a:p>
         </p:txBody>
       </p:sp>
       <p:sp>
         <p:nvSpPr>
-          <p:cNvPr id="240" name="Google Shape;240;p34">
+          <p:cNvPr id="10" name="Google Shape;236;p34">
             <a:extLst>
               <a:ext uri="{FF2B5EF4-FFF2-40B4-BE49-F238E27FC236}">
-                <a16:creationId xmlns:a16="http://schemas.microsoft.com/office/drawing/2014/main" id="{0F78BB30-2E42-5002-F697-7D328E68DE26}"/>
+                <a16:creationId xmlns:a16="http://schemas.microsoft.com/office/drawing/2014/main" id="{1CC5F6CD-FB7E-A6F8-EFE8-737B7679BED3}"/>
               </a:ext>
             </a:extLst>
           </p:cNvPr>
           <p:cNvSpPr txBox="1">
-            <a:spLocks noGrp="1"/>
+            <a:spLocks/>
           </p:cNvSpPr>
-          <p:nvPr>
-            <p:ph type="title" idx="5"/>
-          </p:nvPr>
+          <p:nvPr/>
         </p:nvSpPr>
         <p:spPr>
           <a:xfrm>
-            <a:off x="1215241" y="4015391"/>
-            <a:ext cx="930300" cy="310800"/>
+            <a:off x="2664043" y="940991"/>
+            <a:ext cx="3432757" cy="738600"/>
           </a:xfrm>
           <a:prstGeom prst="rect">
             <a:avLst/>
           </a:prstGeom>
+          <a:noFill/>
+          <a:ln>
+            <a:noFill/>
+          </a:ln>
+        </p:spPr>
+        <p:txBody>
+          <a:bodyPr spcFirstLastPara="1" wrap="square" lIns="91425" tIns="91425" rIns="91425" bIns="91425" anchor="t" anchorCtr="0">
+            <a:noAutofit/>
+          </a:bodyPr>
+          <a:lstStyle>
+            <a:defPPr marR="0" lvl="0" algn="l" rtl="0">
+              <a:lnSpc>
+                <a:spcPct val="100000"/>
+              </a:lnSpc>
+              <a:spcBef>
+                <a:spcPts val="0"/>
+              </a:spcBef>
+              <a:spcAft>
+                <a:spcPts val="0"/>
+              </a:spcAft>
+            </a:defPPr>
+            <a:lvl1pPr marL="457200" marR="0" lvl="0" indent="-317500" algn="l" rtl="0">
+              <a:lnSpc>
+                <a:spcPct val="100000"/>
+              </a:lnSpc>
+              <a:spcBef>
+                <a:spcPts val="0"/>
+              </a:spcBef>
+              <a:spcAft>
+                <a:spcPts val="0"/>
+              </a:spcAft>
+              <a:buClr>
+                <a:schemeClr val="dk1"/>
+              </a:buClr>
+              <a:buSzPts val="1400"/>
+              <a:buFont typeface="Archivo"/>
+              <a:buNone/>
+              <a:defRPr sz="1200" b="0" i="0" u="none" strike="noStrike" cap="none">
+                <a:solidFill>
+                  <a:schemeClr val="dk1"/>
+                </a:solidFill>
+                <a:latin typeface="Archivo"/>
+                <a:ea typeface="Archivo"/>
+                <a:cs typeface="Archivo"/>
+                <a:sym typeface="Archivo"/>
+              </a:defRPr>
+            </a:lvl1pPr>
+            <a:lvl2pPr marL="914400" marR="0" lvl="1" indent="-317500" algn="ctr" rtl="0">
+              <a:lnSpc>
+                <a:spcPct val="100000"/>
+              </a:lnSpc>
+              <a:spcBef>
+                <a:spcPts val="0"/>
+              </a:spcBef>
+              <a:spcAft>
+                <a:spcPts val="0"/>
+              </a:spcAft>
+              <a:buClr>
+                <a:schemeClr val="dk1"/>
+              </a:buClr>
+              <a:buSzPts val="1400"/>
+              <a:buFont typeface="Archivo"/>
+              <a:buNone/>
+              <a:defRPr sz="1400" b="0" i="0" u="none" strike="noStrike" cap="none">
+                <a:solidFill>
+                  <a:schemeClr val="dk1"/>
+                </a:solidFill>
+                <a:latin typeface="Archivo"/>
+                <a:ea typeface="Archivo"/>
+                <a:cs typeface="Archivo"/>
+                <a:sym typeface="Archivo"/>
+              </a:defRPr>
+            </a:lvl2pPr>
+            <a:lvl3pPr marL="1371600" marR="0" lvl="2" indent="-317500" algn="ctr" rtl="0">
+              <a:lnSpc>
+                <a:spcPct val="100000"/>
+              </a:lnSpc>
+              <a:spcBef>
+                <a:spcPts val="0"/>
+              </a:spcBef>
+              <a:spcAft>
+                <a:spcPts val="0"/>
+              </a:spcAft>
+              <a:buClr>
+                <a:schemeClr val="dk1"/>
+              </a:buClr>
+              <a:buSzPts val="1400"/>
+              <a:buFont typeface="Archivo"/>
+              <a:buNone/>
+              <a:defRPr sz="1400" b="0" i="0" u="none" strike="noStrike" cap="none">
+                <a:solidFill>
+                  <a:schemeClr val="dk1"/>
+                </a:solidFill>
+                <a:latin typeface="Archivo"/>
+                <a:ea typeface="Archivo"/>
+                <a:cs typeface="Archivo"/>
+                <a:sym typeface="Archivo"/>
+              </a:defRPr>
+            </a:lvl3pPr>
+            <a:lvl4pPr marL="1828800" marR="0" lvl="3" indent="-317500" algn="ctr" rtl="0">
+              <a:lnSpc>
+                <a:spcPct val="100000"/>
+              </a:lnSpc>
+              <a:spcBef>
+                <a:spcPts val="0"/>
+              </a:spcBef>
+              <a:spcAft>
+                <a:spcPts val="0"/>
+              </a:spcAft>
+              <a:buClr>
+                <a:schemeClr val="dk1"/>
+              </a:buClr>
+              <a:buSzPts val="1400"/>
+              <a:buFont typeface="Archivo"/>
+              <a:buNone/>
+              <a:defRPr sz="1400" b="0" i="0" u="none" strike="noStrike" cap="none">
+                <a:solidFill>
+                  <a:schemeClr val="dk1"/>
+                </a:solidFill>
+                <a:latin typeface="Archivo"/>
+                <a:ea typeface="Archivo"/>
+                <a:cs typeface="Archivo"/>
+                <a:sym typeface="Archivo"/>
+              </a:defRPr>
+            </a:lvl4pPr>
+            <a:lvl5pPr marL="2286000" marR="0" lvl="4" indent="-317500" algn="ctr" rtl="0">
+              <a:lnSpc>
+                <a:spcPct val="100000"/>
+              </a:lnSpc>
+              <a:spcBef>
+                <a:spcPts val="0"/>
+              </a:spcBef>
+              <a:spcAft>
+                <a:spcPts val="0"/>
+              </a:spcAft>
+              <a:buClr>
+                <a:schemeClr val="dk1"/>
+              </a:buClr>
+              <a:buSzPts val="1400"/>
+              <a:buFont typeface="Archivo"/>
+              <a:buNone/>
+              <a:defRPr sz="1400" b="0" i="0" u="none" strike="noStrike" cap="none">
+                <a:solidFill>
+                  <a:schemeClr val="dk1"/>
+                </a:solidFill>
+                <a:latin typeface="Archivo"/>
+                <a:ea typeface="Archivo"/>
+                <a:cs typeface="Archivo"/>
+                <a:sym typeface="Archivo"/>
+              </a:defRPr>
+            </a:lvl5pPr>
+            <a:lvl6pPr marL="2743200" marR="0" lvl="5" indent="-317500" algn="ctr" rtl="0">
+              <a:lnSpc>
+                <a:spcPct val="100000"/>
+              </a:lnSpc>
+              <a:spcBef>
+                <a:spcPts val="0"/>
+              </a:spcBef>
+              <a:spcAft>
+                <a:spcPts val="0"/>
+              </a:spcAft>
+              <a:buClr>
+                <a:schemeClr val="dk1"/>
+              </a:buClr>
+              <a:buSzPts val="1400"/>
+              <a:buFont typeface="Archivo"/>
+              <a:buNone/>
+              <a:defRPr sz="1400" b="0" i="0" u="none" strike="noStrike" cap="none">
+                <a:solidFill>
+                  <a:schemeClr val="dk1"/>
+                </a:solidFill>
+                <a:latin typeface="Archivo"/>
+                <a:ea typeface="Archivo"/>
+                <a:cs typeface="Archivo"/>
+                <a:sym typeface="Archivo"/>
+              </a:defRPr>
+            </a:lvl6pPr>
+            <a:lvl7pPr marL="3200400" marR="0" lvl="6" indent="-317500" algn="ctr" rtl="0">
+              <a:lnSpc>
+                <a:spcPct val="100000"/>
+              </a:lnSpc>
+              <a:spcBef>
+                <a:spcPts val="0"/>
+              </a:spcBef>
+              <a:spcAft>
+                <a:spcPts val="0"/>
+              </a:spcAft>
+              <a:buClr>
+                <a:schemeClr val="dk1"/>
+              </a:buClr>
+              <a:buSzPts val="1400"/>
+              <a:buFont typeface="Archivo"/>
+              <a:buNone/>
+              <a:defRPr sz="1400" b="0" i="0" u="none" strike="noStrike" cap="none">
+                <a:solidFill>
+                  <a:schemeClr val="dk1"/>
+                </a:solidFill>
+                <a:latin typeface="Archivo"/>
+                <a:ea typeface="Archivo"/>
+                <a:cs typeface="Archivo"/>
+                <a:sym typeface="Archivo"/>
+              </a:defRPr>
+            </a:lvl7pPr>
+            <a:lvl8pPr marL="3657600" marR="0" lvl="7" indent="-317500" algn="ctr" rtl="0">
+              <a:lnSpc>
+                <a:spcPct val="100000"/>
+              </a:lnSpc>
+              <a:spcBef>
+                <a:spcPts val="0"/>
+              </a:spcBef>
+              <a:spcAft>
+                <a:spcPts val="0"/>
+              </a:spcAft>
+              <a:buClr>
+                <a:schemeClr val="dk1"/>
+              </a:buClr>
+              <a:buSzPts val="1400"/>
+              <a:buFont typeface="Archivo"/>
+              <a:buNone/>
+              <a:defRPr sz="1400" b="0" i="0" u="none" strike="noStrike" cap="none">
+                <a:solidFill>
+                  <a:schemeClr val="dk1"/>
+                </a:solidFill>
+                <a:latin typeface="Archivo"/>
+                <a:ea typeface="Archivo"/>
+                <a:cs typeface="Archivo"/>
+                <a:sym typeface="Archivo"/>
+              </a:defRPr>
+            </a:lvl8pPr>
+            <a:lvl9pPr marL="4114800" marR="0" lvl="8" indent="-317500" algn="ctr" rtl="0">
+              <a:lnSpc>
+                <a:spcPct val="100000"/>
+              </a:lnSpc>
+              <a:spcBef>
+                <a:spcPts val="0"/>
+              </a:spcBef>
+              <a:spcAft>
+                <a:spcPts val="0"/>
+              </a:spcAft>
+              <a:buClr>
+                <a:schemeClr val="dk1"/>
+              </a:buClr>
+              <a:buSzPts val="1400"/>
+              <a:buFont typeface="Archivo"/>
+              <a:buNone/>
+              <a:defRPr sz="1400" b="0" i="0" u="none" strike="noStrike" cap="none">
+                <a:solidFill>
+                  <a:schemeClr val="dk1"/>
+                </a:solidFill>
+                <a:latin typeface="Archivo"/>
+                <a:ea typeface="Archivo"/>
+                <a:cs typeface="Archivo"/>
+                <a:sym typeface="Archivo"/>
+              </a:defRPr>
+            </a:lvl9pPr>
+          </a:lstStyle>
+          <a:p>
+            <a:pPr marL="0" indent="0"/>
+            <a:r>
+              <a:rPr lang="en-US" sz="1100" dirty="0"/>
+              <a:t>Builds on </a:t>
+            </a:r>
+            <a:r>
+              <a:rPr lang="en-US" sz="1100" dirty="0" err="1"/>
+              <a:t>LoRA</a:t>
+            </a:r>
+            <a:r>
+              <a:rPr lang="en-US" sz="1100" dirty="0"/>
+              <a:t> by using </a:t>
+            </a:r>
+            <a:r>
+              <a:rPr lang="en-US" sz="1100" b="1" dirty="0"/>
+              <a:t>fixed SVD directions</a:t>
+            </a:r>
+            <a:r>
+              <a:rPr lang="en-US" sz="1100" dirty="0"/>
+              <a:t> from the base weights and training only a much smaller core.</a:t>
+            </a:r>
+          </a:p>
+        </p:txBody>
+      </p:sp>
+      <p:sp>
+        <p:nvSpPr>
+          <p:cNvPr id="11" name="Google Shape;239;p34">
+            <a:extLst>
+              <a:ext uri="{FF2B5EF4-FFF2-40B4-BE49-F238E27FC236}">
+                <a16:creationId xmlns:a16="http://schemas.microsoft.com/office/drawing/2014/main" id="{83431F94-2920-DD62-FE85-47DE01E05831}"/>
+              </a:ext>
+            </a:extLst>
+          </p:cNvPr>
+          <p:cNvSpPr txBox="1">
+            <a:spLocks/>
+          </p:cNvSpPr>
+          <p:nvPr/>
+        </p:nvSpPr>
+        <p:spPr>
+          <a:xfrm>
+            <a:off x="1119861" y="1100395"/>
+            <a:ext cx="2132580" cy="310500"/>
+          </a:xfrm>
+          <a:prstGeom prst="rect">
+            <a:avLst/>
+          </a:prstGeom>
+          <a:noFill/>
+          <a:ln>
+            <a:noFill/>
+          </a:ln>
         </p:spPr>
         <p:txBody>
           <a:bodyPr spcFirstLastPara="1" wrap="square" lIns="91425" tIns="91425" rIns="91425" bIns="91425" anchor="ctr" anchorCtr="0">
             <a:noAutofit/>
           </a:bodyPr>
-          <a:lstStyle/>
+          <a:lstStyle>
+            <a:defPPr marR="0" lvl="0" algn="l" rtl="0">
+              <a:lnSpc>
+                <a:spcPct val="100000"/>
+              </a:lnSpc>
+              <a:spcBef>
+                <a:spcPts val="0"/>
+              </a:spcBef>
+              <a:spcAft>
+                <a:spcPts val="0"/>
+              </a:spcAft>
+            </a:defPPr>
+            <a:lvl1pPr marR="0" lvl="0" algn="l" rtl="0">
+              <a:lnSpc>
+                <a:spcPct val="85000"/>
+              </a:lnSpc>
+              <a:spcBef>
+                <a:spcPts val="0"/>
+              </a:spcBef>
+              <a:spcAft>
+                <a:spcPts val="0"/>
+              </a:spcAft>
+              <a:buClr>
+                <a:schemeClr val="dk1"/>
+              </a:buClr>
+              <a:buSzPts val="3000"/>
+              <a:buFont typeface="Red Hat Mono"/>
+              <a:buNone/>
+              <a:defRPr sz="4900" b="0" i="0" u="none" strike="noStrike" cap="none">
+                <a:solidFill>
+                  <a:schemeClr val="dk2"/>
+                </a:solidFill>
+                <a:latin typeface="VT323"/>
+                <a:ea typeface="VT323"/>
+                <a:cs typeface="VT323"/>
+                <a:sym typeface="VT323"/>
+              </a:defRPr>
+            </a:lvl1pPr>
+            <a:lvl2pPr marR="0" lvl="1" algn="ctr" rtl="0">
+              <a:lnSpc>
+                <a:spcPct val="85000"/>
+              </a:lnSpc>
+              <a:spcBef>
+                <a:spcPts val="0"/>
+              </a:spcBef>
+              <a:spcAft>
+                <a:spcPts val="0"/>
+              </a:spcAft>
+              <a:buClr>
+                <a:schemeClr val="dk1"/>
+              </a:buClr>
+              <a:buSzPts val="9600"/>
+              <a:buFont typeface="Red Hat Mono"/>
+              <a:buNone/>
+              <a:defRPr sz="9600" b="0" i="0" u="none" strike="noStrike" cap="none">
+                <a:solidFill>
+                  <a:schemeClr val="dk1"/>
+                </a:solidFill>
+                <a:latin typeface="Red Hat Mono"/>
+                <a:ea typeface="Red Hat Mono"/>
+                <a:cs typeface="Red Hat Mono"/>
+                <a:sym typeface="Red Hat Mono"/>
+              </a:defRPr>
+            </a:lvl2pPr>
+            <a:lvl3pPr marR="0" lvl="2" algn="ctr" rtl="0">
+              <a:lnSpc>
+                <a:spcPct val="85000"/>
+              </a:lnSpc>
+              <a:spcBef>
+                <a:spcPts val="0"/>
+              </a:spcBef>
+              <a:spcAft>
+                <a:spcPts val="0"/>
+              </a:spcAft>
+              <a:buClr>
+                <a:schemeClr val="dk1"/>
+              </a:buClr>
+              <a:buSzPts val="9600"/>
+              <a:buFont typeface="Red Hat Mono"/>
+              <a:buNone/>
+              <a:defRPr sz="9600" b="0" i="0" u="none" strike="noStrike" cap="none">
+                <a:solidFill>
+                  <a:schemeClr val="dk1"/>
+                </a:solidFill>
+                <a:latin typeface="Red Hat Mono"/>
+                <a:ea typeface="Red Hat Mono"/>
+                <a:cs typeface="Red Hat Mono"/>
+                <a:sym typeface="Red Hat Mono"/>
+              </a:defRPr>
+            </a:lvl3pPr>
+            <a:lvl4pPr marR="0" lvl="3" algn="ctr" rtl="0">
+              <a:lnSpc>
+                <a:spcPct val="85000"/>
+              </a:lnSpc>
+              <a:spcBef>
+                <a:spcPts val="0"/>
+              </a:spcBef>
+              <a:spcAft>
+                <a:spcPts val="0"/>
+              </a:spcAft>
+              <a:buClr>
+                <a:schemeClr val="dk1"/>
+              </a:buClr>
+              <a:buSzPts val="9600"/>
+              <a:buFont typeface="Red Hat Mono"/>
+              <a:buNone/>
+              <a:defRPr sz="9600" b="0" i="0" u="none" strike="noStrike" cap="none">
+                <a:solidFill>
+                  <a:schemeClr val="dk1"/>
+                </a:solidFill>
+                <a:latin typeface="Red Hat Mono"/>
+                <a:ea typeface="Red Hat Mono"/>
+                <a:cs typeface="Red Hat Mono"/>
+                <a:sym typeface="Red Hat Mono"/>
+              </a:defRPr>
+            </a:lvl4pPr>
+            <a:lvl5pPr marR="0" lvl="4" algn="ctr" rtl="0">
+              <a:lnSpc>
+                <a:spcPct val="85000"/>
+              </a:lnSpc>
+              <a:spcBef>
+                <a:spcPts val="0"/>
+              </a:spcBef>
+              <a:spcAft>
+                <a:spcPts val="0"/>
+              </a:spcAft>
+              <a:buClr>
+                <a:schemeClr val="dk1"/>
+              </a:buClr>
+              <a:buSzPts val="9600"/>
+              <a:buFont typeface="Red Hat Mono"/>
+              <a:buNone/>
+              <a:defRPr sz="9600" b="0" i="0" u="none" strike="noStrike" cap="none">
+                <a:solidFill>
+                  <a:schemeClr val="dk1"/>
+                </a:solidFill>
+                <a:latin typeface="Red Hat Mono"/>
+                <a:ea typeface="Red Hat Mono"/>
+                <a:cs typeface="Red Hat Mono"/>
+                <a:sym typeface="Red Hat Mono"/>
+              </a:defRPr>
+            </a:lvl5pPr>
+            <a:lvl6pPr marR="0" lvl="5" algn="ctr" rtl="0">
+              <a:lnSpc>
+                <a:spcPct val="85000"/>
+              </a:lnSpc>
+              <a:spcBef>
+                <a:spcPts val="0"/>
+              </a:spcBef>
+              <a:spcAft>
+                <a:spcPts val="0"/>
+              </a:spcAft>
+              <a:buClr>
+                <a:schemeClr val="dk1"/>
+              </a:buClr>
+              <a:buSzPts val="9600"/>
+              <a:buFont typeface="Red Hat Mono"/>
+              <a:buNone/>
+              <a:defRPr sz="9600" b="0" i="0" u="none" strike="noStrike" cap="none">
+                <a:solidFill>
+                  <a:schemeClr val="dk1"/>
+                </a:solidFill>
+                <a:latin typeface="Red Hat Mono"/>
+                <a:ea typeface="Red Hat Mono"/>
+                <a:cs typeface="Red Hat Mono"/>
+                <a:sym typeface="Red Hat Mono"/>
+              </a:defRPr>
+            </a:lvl6pPr>
+            <a:lvl7pPr marR="0" lvl="6" algn="ctr" rtl="0">
+              <a:lnSpc>
+                <a:spcPct val="85000"/>
+              </a:lnSpc>
+              <a:spcBef>
+                <a:spcPts val="0"/>
+              </a:spcBef>
+              <a:spcAft>
+                <a:spcPts val="0"/>
+              </a:spcAft>
+              <a:buClr>
+                <a:schemeClr val="dk1"/>
+              </a:buClr>
+              <a:buSzPts val="9600"/>
+              <a:buFont typeface="Red Hat Mono"/>
+              <a:buNone/>
+              <a:defRPr sz="9600" b="0" i="0" u="none" strike="noStrike" cap="none">
+                <a:solidFill>
+                  <a:schemeClr val="dk1"/>
+                </a:solidFill>
+                <a:latin typeface="Red Hat Mono"/>
+                <a:ea typeface="Red Hat Mono"/>
+                <a:cs typeface="Red Hat Mono"/>
+                <a:sym typeface="Red Hat Mono"/>
+              </a:defRPr>
+            </a:lvl7pPr>
+            <a:lvl8pPr marR="0" lvl="7" algn="ctr" rtl="0">
+              <a:lnSpc>
+                <a:spcPct val="85000"/>
+              </a:lnSpc>
+              <a:spcBef>
+                <a:spcPts val="0"/>
+              </a:spcBef>
+              <a:spcAft>
+                <a:spcPts val="0"/>
+              </a:spcAft>
+              <a:buClr>
+                <a:schemeClr val="dk1"/>
+              </a:buClr>
+              <a:buSzPts val="9600"/>
+              <a:buFont typeface="Red Hat Mono"/>
+              <a:buNone/>
+              <a:defRPr sz="9600" b="0" i="0" u="none" strike="noStrike" cap="none">
+                <a:solidFill>
+                  <a:schemeClr val="dk1"/>
+                </a:solidFill>
+                <a:latin typeface="Red Hat Mono"/>
+                <a:ea typeface="Red Hat Mono"/>
+                <a:cs typeface="Red Hat Mono"/>
+                <a:sym typeface="Red Hat Mono"/>
+              </a:defRPr>
+            </a:lvl8pPr>
+            <a:lvl9pPr marR="0" lvl="8" algn="ctr" rtl="0">
+              <a:lnSpc>
+                <a:spcPct val="85000"/>
+              </a:lnSpc>
+              <a:spcBef>
+                <a:spcPts val="0"/>
+              </a:spcBef>
+              <a:spcAft>
+                <a:spcPts val="0"/>
+              </a:spcAft>
+              <a:buClr>
+                <a:schemeClr val="dk1"/>
+              </a:buClr>
+              <a:buSzPts val="9600"/>
+              <a:buFont typeface="Red Hat Mono"/>
+              <a:buNone/>
+              <a:defRPr sz="9600" b="0" i="0" u="none" strike="noStrike" cap="none">
+                <a:solidFill>
+                  <a:schemeClr val="dk1"/>
+                </a:solidFill>
+                <a:latin typeface="Red Hat Mono"/>
+                <a:ea typeface="Red Hat Mono"/>
+                <a:cs typeface="Red Hat Mono"/>
+                <a:sym typeface="Red Hat Mono"/>
+              </a:defRPr>
+            </a:lvl9pPr>
+          </a:lstStyle>
           <a:p>
-            <a:pPr marL="0" lvl="0" indent="0" algn="l" rtl="0">
-              <a:spcBef>
-                <a:spcPts val="0"/>
-              </a:spcBef>
-              <a:spcAft>
-                <a:spcPts val="0"/>
-              </a:spcAft>
-              <a:buNone/>
-            </a:pPr>
             <a:r>
-              <a:rPr lang="en"/>
-              <a:t>03</a:t>
+              <a:rPr lang="en-US" sz="4000" dirty="0" err="1"/>
+              <a:t>LoRA</a:t>
             </a:r>
-            <a:endParaRPr/>
+            <a:r>
+              <a:rPr lang="en-US" sz="4000" dirty="0"/>
+              <a:t>-XS</a:t>
+            </a:r>
+            <a:endParaRPr lang="en-US" sz="3600" dirty="0"/>
           </a:p>
         </p:txBody>
       </p:sp>
+      <p:sp>
+        <p:nvSpPr>
+          <p:cNvPr id="12" name="Google Shape;236;p34">
+            <a:extLst>
+              <a:ext uri="{FF2B5EF4-FFF2-40B4-BE49-F238E27FC236}">
+                <a16:creationId xmlns:a16="http://schemas.microsoft.com/office/drawing/2014/main" id="{31D53663-66CA-6689-5705-2BCC275E163D}"/>
+              </a:ext>
+            </a:extLst>
+          </p:cNvPr>
+          <p:cNvSpPr txBox="1">
+            <a:spLocks/>
+          </p:cNvSpPr>
+          <p:nvPr/>
+        </p:nvSpPr>
+        <p:spPr>
+          <a:xfrm>
+            <a:off x="2664045" y="1587822"/>
+            <a:ext cx="3574996" cy="572700"/>
+          </a:xfrm>
+          <a:prstGeom prst="rect">
+            <a:avLst/>
+          </a:prstGeom>
+          <a:noFill/>
+          <a:ln>
+            <a:noFill/>
+          </a:ln>
+        </p:spPr>
+        <p:txBody>
+          <a:bodyPr spcFirstLastPara="1" wrap="square" lIns="91425" tIns="91425" rIns="91425" bIns="91425" anchor="t" anchorCtr="0">
+            <a:noAutofit/>
+          </a:bodyPr>
+          <a:lstStyle>
+            <a:defPPr marR="0" lvl="0" algn="l" rtl="0">
+              <a:lnSpc>
+                <a:spcPct val="100000"/>
+              </a:lnSpc>
+              <a:spcBef>
+                <a:spcPts val="0"/>
+              </a:spcBef>
+              <a:spcAft>
+                <a:spcPts val="0"/>
+              </a:spcAft>
+            </a:defPPr>
+            <a:lvl1pPr marL="457200" marR="0" lvl="0" indent="-317500" algn="l" rtl="0">
+              <a:lnSpc>
+                <a:spcPct val="100000"/>
+              </a:lnSpc>
+              <a:spcBef>
+                <a:spcPts val="0"/>
+              </a:spcBef>
+              <a:spcAft>
+                <a:spcPts val="0"/>
+              </a:spcAft>
+              <a:buClr>
+                <a:schemeClr val="dk1"/>
+              </a:buClr>
+              <a:buSzPts val="1400"/>
+              <a:buFont typeface="Archivo"/>
+              <a:buNone/>
+              <a:defRPr sz="1200" b="0" i="0" u="none" strike="noStrike" cap="none">
+                <a:solidFill>
+                  <a:schemeClr val="dk1"/>
+                </a:solidFill>
+                <a:latin typeface="Archivo"/>
+                <a:ea typeface="Archivo"/>
+                <a:cs typeface="Archivo"/>
+                <a:sym typeface="Archivo"/>
+              </a:defRPr>
+            </a:lvl1pPr>
+            <a:lvl2pPr marL="914400" marR="0" lvl="1" indent="-317500" algn="ctr" rtl="0">
+              <a:lnSpc>
+                <a:spcPct val="100000"/>
+              </a:lnSpc>
+              <a:spcBef>
+                <a:spcPts val="0"/>
+              </a:spcBef>
+              <a:spcAft>
+                <a:spcPts val="0"/>
+              </a:spcAft>
+              <a:buClr>
+                <a:schemeClr val="dk1"/>
+              </a:buClr>
+              <a:buSzPts val="1400"/>
+              <a:buFont typeface="Archivo"/>
+              <a:buNone/>
+              <a:defRPr sz="1400" b="0" i="0" u="none" strike="noStrike" cap="none">
+                <a:solidFill>
+                  <a:schemeClr val="dk1"/>
+                </a:solidFill>
+                <a:latin typeface="Archivo"/>
+                <a:ea typeface="Archivo"/>
+                <a:cs typeface="Archivo"/>
+                <a:sym typeface="Archivo"/>
+              </a:defRPr>
+            </a:lvl2pPr>
+            <a:lvl3pPr marL="1371600" marR="0" lvl="2" indent="-317500" algn="ctr" rtl="0">
+              <a:lnSpc>
+                <a:spcPct val="100000"/>
+              </a:lnSpc>
+              <a:spcBef>
+                <a:spcPts val="0"/>
+              </a:spcBef>
+              <a:spcAft>
+                <a:spcPts val="0"/>
+              </a:spcAft>
+              <a:buClr>
+                <a:schemeClr val="dk1"/>
+              </a:buClr>
+              <a:buSzPts val="1400"/>
+              <a:buFont typeface="Archivo"/>
+              <a:buNone/>
+              <a:defRPr sz="1400" b="0" i="0" u="none" strike="noStrike" cap="none">
+                <a:solidFill>
+                  <a:schemeClr val="dk1"/>
+                </a:solidFill>
+                <a:latin typeface="Archivo"/>
+                <a:ea typeface="Archivo"/>
+                <a:cs typeface="Archivo"/>
+                <a:sym typeface="Archivo"/>
+              </a:defRPr>
+            </a:lvl3pPr>
+            <a:lvl4pPr marL="1828800" marR="0" lvl="3" indent="-317500" algn="ctr" rtl="0">
+              <a:lnSpc>
+                <a:spcPct val="100000"/>
+              </a:lnSpc>
+              <a:spcBef>
+                <a:spcPts val="0"/>
+              </a:spcBef>
+              <a:spcAft>
+                <a:spcPts val="0"/>
+              </a:spcAft>
+              <a:buClr>
+                <a:schemeClr val="dk1"/>
+              </a:buClr>
+              <a:buSzPts val="1400"/>
+              <a:buFont typeface="Archivo"/>
+              <a:buNone/>
+              <a:defRPr sz="1400" b="0" i="0" u="none" strike="noStrike" cap="none">
+                <a:solidFill>
+                  <a:schemeClr val="dk1"/>
+                </a:solidFill>
+                <a:latin typeface="Archivo"/>
+                <a:ea typeface="Archivo"/>
+                <a:cs typeface="Archivo"/>
+                <a:sym typeface="Archivo"/>
+              </a:defRPr>
+            </a:lvl4pPr>
+            <a:lvl5pPr marL="2286000" marR="0" lvl="4" indent="-317500" algn="ctr" rtl="0">
+              <a:lnSpc>
+                <a:spcPct val="100000"/>
+              </a:lnSpc>
+              <a:spcBef>
+                <a:spcPts val="0"/>
+              </a:spcBef>
+              <a:spcAft>
+                <a:spcPts val="0"/>
+              </a:spcAft>
+              <a:buClr>
+                <a:schemeClr val="dk1"/>
+              </a:buClr>
+              <a:buSzPts val="1400"/>
+              <a:buFont typeface="Archivo"/>
+              <a:buNone/>
+              <a:defRPr sz="1400" b="0" i="0" u="none" strike="noStrike" cap="none">
+                <a:solidFill>
+                  <a:schemeClr val="dk1"/>
+                </a:solidFill>
+                <a:latin typeface="Archivo"/>
+                <a:ea typeface="Archivo"/>
+                <a:cs typeface="Archivo"/>
+                <a:sym typeface="Archivo"/>
+              </a:defRPr>
+            </a:lvl5pPr>
+            <a:lvl6pPr marL="2743200" marR="0" lvl="5" indent="-317500" algn="ctr" rtl="0">
+              <a:lnSpc>
+                <a:spcPct val="100000"/>
+              </a:lnSpc>
+              <a:spcBef>
+                <a:spcPts val="0"/>
+              </a:spcBef>
+              <a:spcAft>
+                <a:spcPts val="0"/>
+              </a:spcAft>
+              <a:buClr>
+                <a:schemeClr val="dk1"/>
+              </a:buClr>
+              <a:buSzPts val="1400"/>
+              <a:buFont typeface="Archivo"/>
+              <a:buNone/>
+              <a:defRPr sz="1400" b="0" i="0" u="none" strike="noStrike" cap="none">
+                <a:solidFill>
+                  <a:schemeClr val="dk1"/>
+                </a:solidFill>
+                <a:latin typeface="Archivo"/>
+                <a:ea typeface="Archivo"/>
+                <a:cs typeface="Archivo"/>
+                <a:sym typeface="Archivo"/>
+              </a:defRPr>
+            </a:lvl6pPr>
+            <a:lvl7pPr marL="3200400" marR="0" lvl="6" indent="-317500" algn="ctr" rtl="0">
+              <a:lnSpc>
+                <a:spcPct val="100000"/>
+              </a:lnSpc>
+              <a:spcBef>
+                <a:spcPts val="0"/>
+              </a:spcBef>
+              <a:spcAft>
+                <a:spcPts val="0"/>
+              </a:spcAft>
+              <a:buClr>
+                <a:schemeClr val="dk1"/>
+              </a:buClr>
+              <a:buSzPts val="1400"/>
+              <a:buFont typeface="Archivo"/>
+              <a:buNone/>
+              <a:defRPr sz="1400" b="0" i="0" u="none" strike="noStrike" cap="none">
+                <a:solidFill>
+                  <a:schemeClr val="dk1"/>
+                </a:solidFill>
+                <a:latin typeface="Archivo"/>
+                <a:ea typeface="Archivo"/>
+                <a:cs typeface="Archivo"/>
+                <a:sym typeface="Archivo"/>
+              </a:defRPr>
+            </a:lvl7pPr>
+            <a:lvl8pPr marL="3657600" marR="0" lvl="7" indent="-317500" algn="ctr" rtl="0">
+              <a:lnSpc>
+                <a:spcPct val="100000"/>
+              </a:lnSpc>
+              <a:spcBef>
+                <a:spcPts val="0"/>
+              </a:spcBef>
+              <a:spcAft>
+                <a:spcPts val="0"/>
+              </a:spcAft>
+              <a:buClr>
+                <a:schemeClr val="dk1"/>
+              </a:buClr>
+              <a:buSzPts val="1400"/>
+              <a:buFont typeface="Archivo"/>
+              <a:buNone/>
+              <a:defRPr sz="1400" b="0" i="0" u="none" strike="noStrike" cap="none">
+                <a:solidFill>
+                  <a:schemeClr val="dk1"/>
+                </a:solidFill>
+                <a:latin typeface="Archivo"/>
+                <a:ea typeface="Archivo"/>
+                <a:cs typeface="Archivo"/>
+                <a:sym typeface="Archivo"/>
+              </a:defRPr>
+            </a:lvl8pPr>
+            <a:lvl9pPr marL="4114800" marR="0" lvl="8" indent="-317500" algn="ctr" rtl="0">
+              <a:lnSpc>
+                <a:spcPct val="100000"/>
+              </a:lnSpc>
+              <a:spcBef>
+                <a:spcPts val="0"/>
+              </a:spcBef>
+              <a:spcAft>
+                <a:spcPts val="0"/>
+              </a:spcAft>
+              <a:buClr>
+                <a:schemeClr val="dk1"/>
+              </a:buClr>
+              <a:buSzPts val="1400"/>
+              <a:buFont typeface="Archivo"/>
+              <a:buNone/>
+              <a:defRPr sz="1400" b="0" i="0" u="none" strike="noStrike" cap="none">
+                <a:solidFill>
+                  <a:schemeClr val="dk1"/>
+                </a:solidFill>
+                <a:latin typeface="Archivo"/>
+                <a:ea typeface="Archivo"/>
+                <a:cs typeface="Archivo"/>
+                <a:sym typeface="Archivo"/>
+              </a:defRPr>
+            </a:lvl9pPr>
+          </a:lstStyle>
+          <a:p>
+            <a:pPr marL="0" indent="0"/>
+            <a:r>
+              <a:rPr lang="en-US" sz="1100" dirty="0"/>
+              <a:t>Pushes parameter reduction even further by replacing the trainable core with a </a:t>
+            </a:r>
+            <a:r>
+              <a:rPr lang="en-US" sz="1100" b="1" dirty="0"/>
+              <a:t>tiny projected trainable vector</a:t>
+            </a:r>
+            <a:r>
+              <a:rPr lang="en-US" sz="1100" dirty="0"/>
+              <a:t>.</a:t>
+            </a:r>
+          </a:p>
+        </p:txBody>
+      </p:sp>
+      <p:sp>
+        <p:nvSpPr>
+          <p:cNvPr id="13" name="Google Shape;239;p34">
+            <a:extLst>
+              <a:ext uri="{FF2B5EF4-FFF2-40B4-BE49-F238E27FC236}">
+                <a16:creationId xmlns:a16="http://schemas.microsoft.com/office/drawing/2014/main" id="{74F58D1C-6A57-A7E9-9660-1425B1F08BF3}"/>
+              </a:ext>
+            </a:extLst>
+          </p:cNvPr>
+          <p:cNvSpPr txBox="1">
+            <a:spLocks/>
+          </p:cNvSpPr>
+          <p:nvPr/>
+        </p:nvSpPr>
+        <p:spPr>
+          <a:xfrm>
+            <a:off x="904818" y="1750711"/>
+            <a:ext cx="2283655" cy="310500"/>
+          </a:xfrm>
+          <a:prstGeom prst="rect">
+            <a:avLst/>
+          </a:prstGeom>
+          <a:noFill/>
+          <a:ln>
+            <a:noFill/>
+          </a:ln>
+        </p:spPr>
+        <p:txBody>
+          <a:bodyPr spcFirstLastPara="1" wrap="square" lIns="91425" tIns="91425" rIns="91425" bIns="91425" anchor="ctr" anchorCtr="0">
+            <a:noAutofit/>
+          </a:bodyPr>
+          <a:lstStyle>
+            <a:defPPr marR="0" lvl="0" algn="l" rtl="0">
+              <a:lnSpc>
+                <a:spcPct val="100000"/>
+              </a:lnSpc>
+              <a:spcBef>
+                <a:spcPts val="0"/>
+              </a:spcBef>
+              <a:spcAft>
+                <a:spcPts val="0"/>
+              </a:spcAft>
+            </a:defPPr>
+            <a:lvl1pPr marR="0" lvl="0" algn="l" rtl="0">
+              <a:lnSpc>
+                <a:spcPct val="85000"/>
+              </a:lnSpc>
+              <a:spcBef>
+                <a:spcPts val="0"/>
+              </a:spcBef>
+              <a:spcAft>
+                <a:spcPts val="0"/>
+              </a:spcAft>
+              <a:buClr>
+                <a:schemeClr val="dk1"/>
+              </a:buClr>
+              <a:buSzPts val="3000"/>
+              <a:buFont typeface="Red Hat Mono"/>
+              <a:buNone/>
+              <a:defRPr sz="4900" b="0" i="0" u="none" strike="noStrike" cap="none">
+                <a:solidFill>
+                  <a:schemeClr val="dk2"/>
+                </a:solidFill>
+                <a:latin typeface="VT323"/>
+                <a:ea typeface="VT323"/>
+                <a:cs typeface="VT323"/>
+                <a:sym typeface="VT323"/>
+              </a:defRPr>
+            </a:lvl1pPr>
+            <a:lvl2pPr marR="0" lvl="1" algn="ctr" rtl="0">
+              <a:lnSpc>
+                <a:spcPct val="85000"/>
+              </a:lnSpc>
+              <a:spcBef>
+                <a:spcPts val="0"/>
+              </a:spcBef>
+              <a:spcAft>
+                <a:spcPts val="0"/>
+              </a:spcAft>
+              <a:buClr>
+                <a:schemeClr val="dk1"/>
+              </a:buClr>
+              <a:buSzPts val="9600"/>
+              <a:buFont typeface="Red Hat Mono"/>
+              <a:buNone/>
+              <a:defRPr sz="9600" b="0" i="0" u="none" strike="noStrike" cap="none">
+                <a:solidFill>
+                  <a:schemeClr val="dk1"/>
+                </a:solidFill>
+                <a:latin typeface="Red Hat Mono"/>
+                <a:ea typeface="Red Hat Mono"/>
+                <a:cs typeface="Red Hat Mono"/>
+                <a:sym typeface="Red Hat Mono"/>
+              </a:defRPr>
+            </a:lvl2pPr>
+            <a:lvl3pPr marR="0" lvl="2" algn="ctr" rtl="0">
+              <a:lnSpc>
+                <a:spcPct val="85000"/>
+              </a:lnSpc>
+              <a:spcBef>
+                <a:spcPts val="0"/>
+              </a:spcBef>
+              <a:spcAft>
+                <a:spcPts val="0"/>
+              </a:spcAft>
+              <a:buClr>
+                <a:schemeClr val="dk1"/>
+              </a:buClr>
+              <a:buSzPts val="9600"/>
+              <a:buFont typeface="Red Hat Mono"/>
+              <a:buNone/>
+              <a:defRPr sz="9600" b="0" i="0" u="none" strike="noStrike" cap="none">
+                <a:solidFill>
+                  <a:schemeClr val="dk1"/>
+                </a:solidFill>
+                <a:latin typeface="Red Hat Mono"/>
+                <a:ea typeface="Red Hat Mono"/>
+                <a:cs typeface="Red Hat Mono"/>
+                <a:sym typeface="Red Hat Mono"/>
+              </a:defRPr>
+            </a:lvl3pPr>
+            <a:lvl4pPr marR="0" lvl="3" algn="ctr" rtl="0">
+              <a:lnSpc>
+                <a:spcPct val="85000"/>
+              </a:lnSpc>
+              <a:spcBef>
+                <a:spcPts val="0"/>
+              </a:spcBef>
+              <a:spcAft>
+                <a:spcPts val="0"/>
+              </a:spcAft>
+              <a:buClr>
+                <a:schemeClr val="dk1"/>
+              </a:buClr>
+              <a:buSzPts val="9600"/>
+              <a:buFont typeface="Red Hat Mono"/>
+              <a:buNone/>
+              <a:defRPr sz="9600" b="0" i="0" u="none" strike="noStrike" cap="none">
+                <a:solidFill>
+                  <a:schemeClr val="dk1"/>
+                </a:solidFill>
+                <a:latin typeface="Red Hat Mono"/>
+                <a:ea typeface="Red Hat Mono"/>
+                <a:cs typeface="Red Hat Mono"/>
+                <a:sym typeface="Red Hat Mono"/>
+              </a:defRPr>
+            </a:lvl4pPr>
+            <a:lvl5pPr marR="0" lvl="4" algn="ctr" rtl="0">
+              <a:lnSpc>
+                <a:spcPct val="85000"/>
+              </a:lnSpc>
+              <a:spcBef>
+                <a:spcPts val="0"/>
+              </a:spcBef>
+              <a:spcAft>
+                <a:spcPts val="0"/>
+              </a:spcAft>
+              <a:buClr>
+                <a:schemeClr val="dk1"/>
+              </a:buClr>
+              <a:buSzPts val="9600"/>
+              <a:buFont typeface="Red Hat Mono"/>
+              <a:buNone/>
+              <a:defRPr sz="9600" b="0" i="0" u="none" strike="noStrike" cap="none">
+                <a:solidFill>
+                  <a:schemeClr val="dk1"/>
+                </a:solidFill>
+                <a:latin typeface="Red Hat Mono"/>
+                <a:ea typeface="Red Hat Mono"/>
+                <a:cs typeface="Red Hat Mono"/>
+                <a:sym typeface="Red Hat Mono"/>
+              </a:defRPr>
+            </a:lvl5pPr>
+            <a:lvl6pPr marR="0" lvl="5" algn="ctr" rtl="0">
+              <a:lnSpc>
+                <a:spcPct val="85000"/>
+              </a:lnSpc>
+              <a:spcBef>
+                <a:spcPts val="0"/>
+              </a:spcBef>
+              <a:spcAft>
+                <a:spcPts val="0"/>
+              </a:spcAft>
+              <a:buClr>
+                <a:schemeClr val="dk1"/>
+              </a:buClr>
+              <a:buSzPts val="9600"/>
+              <a:buFont typeface="Red Hat Mono"/>
+              <a:buNone/>
+              <a:defRPr sz="9600" b="0" i="0" u="none" strike="noStrike" cap="none">
+                <a:solidFill>
+                  <a:schemeClr val="dk1"/>
+                </a:solidFill>
+                <a:latin typeface="Red Hat Mono"/>
+                <a:ea typeface="Red Hat Mono"/>
+                <a:cs typeface="Red Hat Mono"/>
+                <a:sym typeface="Red Hat Mono"/>
+              </a:defRPr>
+            </a:lvl6pPr>
+            <a:lvl7pPr marR="0" lvl="6" algn="ctr" rtl="0">
+              <a:lnSpc>
+                <a:spcPct val="85000"/>
+              </a:lnSpc>
+              <a:spcBef>
+                <a:spcPts val="0"/>
+              </a:spcBef>
+              <a:spcAft>
+                <a:spcPts val="0"/>
+              </a:spcAft>
+              <a:buClr>
+                <a:schemeClr val="dk1"/>
+              </a:buClr>
+              <a:buSzPts val="9600"/>
+              <a:buFont typeface="Red Hat Mono"/>
+              <a:buNone/>
+              <a:defRPr sz="9600" b="0" i="0" u="none" strike="noStrike" cap="none">
+                <a:solidFill>
+                  <a:schemeClr val="dk1"/>
+                </a:solidFill>
+                <a:latin typeface="Red Hat Mono"/>
+                <a:ea typeface="Red Hat Mono"/>
+                <a:cs typeface="Red Hat Mono"/>
+                <a:sym typeface="Red Hat Mono"/>
+              </a:defRPr>
+            </a:lvl7pPr>
+            <a:lvl8pPr marR="0" lvl="7" algn="ctr" rtl="0">
+              <a:lnSpc>
+                <a:spcPct val="85000"/>
+              </a:lnSpc>
+              <a:spcBef>
+                <a:spcPts val="0"/>
+              </a:spcBef>
+              <a:spcAft>
+                <a:spcPts val="0"/>
+              </a:spcAft>
+              <a:buClr>
+                <a:schemeClr val="dk1"/>
+              </a:buClr>
+              <a:buSzPts val="9600"/>
+              <a:buFont typeface="Red Hat Mono"/>
+              <a:buNone/>
+              <a:defRPr sz="9600" b="0" i="0" u="none" strike="noStrike" cap="none">
+                <a:solidFill>
+                  <a:schemeClr val="dk1"/>
+                </a:solidFill>
+                <a:latin typeface="Red Hat Mono"/>
+                <a:ea typeface="Red Hat Mono"/>
+                <a:cs typeface="Red Hat Mono"/>
+                <a:sym typeface="Red Hat Mono"/>
+              </a:defRPr>
+            </a:lvl8pPr>
+            <a:lvl9pPr marR="0" lvl="8" algn="ctr" rtl="0">
+              <a:lnSpc>
+                <a:spcPct val="85000"/>
+              </a:lnSpc>
+              <a:spcBef>
+                <a:spcPts val="0"/>
+              </a:spcBef>
+              <a:spcAft>
+                <a:spcPts val="0"/>
+              </a:spcAft>
+              <a:buClr>
+                <a:schemeClr val="dk1"/>
+              </a:buClr>
+              <a:buSzPts val="9600"/>
+              <a:buFont typeface="Red Hat Mono"/>
+              <a:buNone/>
+              <a:defRPr sz="9600" b="0" i="0" u="none" strike="noStrike" cap="none">
+                <a:solidFill>
+                  <a:schemeClr val="dk1"/>
+                </a:solidFill>
+                <a:latin typeface="Red Hat Mono"/>
+                <a:ea typeface="Red Hat Mono"/>
+                <a:cs typeface="Red Hat Mono"/>
+                <a:sym typeface="Red Hat Mono"/>
+              </a:defRPr>
+            </a:lvl9pPr>
+          </a:lstStyle>
+          <a:p>
+            <a:r>
+              <a:rPr lang="en-US" sz="4000" dirty="0" err="1"/>
+              <a:t>TinyLoRA</a:t>
+            </a:r>
+            <a:endParaRPr lang="en-US" sz="4000" dirty="0"/>
+          </a:p>
+        </p:txBody>
+      </p:sp>
+      <p:graphicFrame>
+        <p:nvGraphicFramePr>
+          <p:cNvPr id="18" name="Google Shape;294;p38">
+            <a:extLst>
+              <a:ext uri="{FF2B5EF4-FFF2-40B4-BE49-F238E27FC236}">
+                <a16:creationId xmlns:a16="http://schemas.microsoft.com/office/drawing/2014/main" id="{3243B17C-2E40-5CB1-CC4F-DC8A5D5A3686}"/>
+              </a:ext>
+            </a:extLst>
+          </p:cNvPr>
+          <p:cNvGraphicFramePr/>
+          <p:nvPr>
+            <p:extLst>
+              <p:ext uri="{D42A27DB-BD31-4B8C-83A1-F6EECF244321}">
+                <p14:modId xmlns:p14="http://schemas.microsoft.com/office/powerpoint/2010/main" val="500829377"/>
+              </p:ext>
+            </p:extLst>
+          </p:nvPr>
+        </p:nvGraphicFramePr>
+        <p:xfrm>
+          <a:off x="904818" y="2347738"/>
+          <a:ext cx="7529664" cy="2368117"/>
+        </p:xfrm>
+        <a:graphic>
+          <a:graphicData uri="http://schemas.openxmlformats.org/drawingml/2006/table">
+            <a:tbl>
+              <a:tblPr>
+                <a:noFill/>
+                <a:tableStyleId>{7B959B7B-5EBC-4252-BE56-7F1E977C57D6}</a:tableStyleId>
+              </a:tblPr>
+              <a:tblGrid>
+                <a:gridCol w="987592">
+                  <a:extLst>
+                    <a:ext uri="{9D8B030D-6E8A-4147-A177-3AD203B41FA5}">
+                      <a16:colId xmlns:a16="http://schemas.microsoft.com/office/drawing/2014/main" val="20000"/>
+                    </a:ext>
+                  </a:extLst>
+                </a:gridCol>
+                <a:gridCol w="1892411">
+                  <a:extLst>
+                    <a:ext uri="{9D8B030D-6E8A-4147-A177-3AD203B41FA5}">
+                      <a16:colId xmlns:a16="http://schemas.microsoft.com/office/drawing/2014/main" val="20001"/>
+                    </a:ext>
+                  </a:extLst>
+                </a:gridCol>
+                <a:gridCol w="2504661">
+                  <a:extLst>
+                    <a:ext uri="{9D8B030D-6E8A-4147-A177-3AD203B41FA5}">
+                      <a16:colId xmlns:a16="http://schemas.microsoft.com/office/drawing/2014/main" val="20002"/>
+                    </a:ext>
+                  </a:extLst>
+                </a:gridCol>
+                <a:gridCol w="2145000">
+                  <a:extLst>
+                    <a:ext uri="{9D8B030D-6E8A-4147-A177-3AD203B41FA5}">
+                      <a16:colId xmlns:a16="http://schemas.microsoft.com/office/drawing/2014/main" val="2845801008"/>
+                    </a:ext>
+                  </a:extLst>
+                </a:gridCol>
+              </a:tblGrid>
+              <a:tr h="450275">
+                <a:tc>
+                  <a:txBody>
+                    <a:bodyPr/>
+                    <a:lstStyle/>
+                    <a:p>
+                      <a:pPr>
+                        <a:buNone/>
+                      </a:pPr>
+                      <a:r>
+                        <a:rPr lang="en-US" sz="1200" b="1" dirty="0"/>
+                        <a:t>Method</a:t>
+                      </a:r>
+                    </a:p>
+                  </a:txBody>
+                  <a:tcPr anchor="ctr">
+                    <a:lnL w="9525" cap="flat" cmpd="sng">
+                      <a:solidFill>
+                        <a:schemeClr val="lt1">
+                          <a:alpha val="0"/>
+                        </a:schemeClr>
+                      </a:solidFill>
+                      <a:prstDash val="solid"/>
+                      <a:round/>
+                      <a:headEnd type="none" w="sm" len="sm"/>
+                      <a:tailEnd type="none" w="sm" len="sm"/>
+                    </a:lnL>
+                    <a:lnR w="9525" cap="flat" cmpd="sng">
+                      <a:solidFill>
+                        <a:schemeClr val="dk1">
+                          <a:alpha val="0"/>
+                        </a:schemeClr>
+                      </a:solidFill>
+                      <a:prstDash val="solid"/>
+                      <a:round/>
+                      <a:headEnd type="none" w="sm" len="sm"/>
+                      <a:tailEnd type="none" w="sm" len="sm"/>
+                    </a:lnR>
+                    <a:lnT w="9525" cap="flat" cmpd="sng">
+                      <a:solidFill>
+                        <a:schemeClr val="lt1">
+                          <a:alpha val="0"/>
+                        </a:schemeClr>
+                      </a:solidFill>
+                      <a:prstDash val="solid"/>
+                      <a:round/>
+                      <a:headEnd type="none" w="sm" len="sm"/>
+                      <a:tailEnd type="none" w="sm" len="sm"/>
+                    </a:lnT>
+                    <a:lnB w="9525" cap="flat" cmpd="sng">
+                      <a:solidFill>
+                        <a:schemeClr val="lt2"/>
+                      </a:solidFill>
+                      <a:prstDash val="solid"/>
+                      <a:round/>
+                      <a:headEnd type="none" w="sm" len="sm"/>
+                      <a:tailEnd type="none" w="sm" len="sm"/>
+                    </a:lnB>
+                  </a:tcPr>
+                </a:tc>
+                <a:tc>
+                  <a:txBody>
+                    <a:bodyPr/>
+                    <a:lstStyle/>
+                    <a:p>
+                      <a:pPr>
+                        <a:buNone/>
+                      </a:pPr>
+                      <a:r>
+                        <a:rPr lang="en-US" sz="1200" b="1" dirty="0"/>
+                        <a:t>Main idea</a:t>
+                      </a:r>
+                    </a:p>
+                  </a:txBody>
+                  <a:tcPr anchor="ctr">
+                    <a:lnL w="9525" cap="flat" cmpd="sng">
+                      <a:solidFill>
+                        <a:schemeClr val="dk1">
+                          <a:alpha val="0"/>
+                        </a:schemeClr>
+                      </a:solidFill>
+                      <a:prstDash val="solid"/>
+                      <a:round/>
+                      <a:headEnd type="none" w="sm" len="sm"/>
+                      <a:tailEnd type="none" w="sm" len="sm"/>
+                    </a:lnL>
+                    <a:lnR w="9525" cap="flat" cmpd="sng">
+                      <a:solidFill>
+                        <a:schemeClr val="dk1">
+                          <a:alpha val="0"/>
+                        </a:schemeClr>
+                      </a:solidFill>
+                      <a:prstDash val="solid"/>
+                      <a:round/>
+                      <a:headEnd type="none" w="sm" len="sm"/>
+                      <a:tailEnd type="none" w="sm" len="sm"/>
+                    </a:lnR>
+                    <a:lnT w="9525" cap="flat" cmpd="sng">
+                      <a:solidFill>
+                        <a:schemeClr val="lt1">
+                          <a:alpha val="0"/>
+                        </a:schemeClr>
+                      </a:solidFill>
+                      <a:prstDash val="solid"/>
+                      <a:round/>
+                      <a:headEnd type="none" w="sm" len="sm"/>
+                      <a:tailEnd type="none" w="sm" len="sm"/>
+                    </a:lnT>
+                    <a:lnB w="9525" cap="flat" cmpd="sng">
+                      <a:solidFill>
+                        <a:schemeClr val="lt2"/>
+                      </a:solidFill>
+                      <a:prstDash val="solid"/>
+                      <a:round/>
+                      <a:headEnd type="none" w="sm" len="sm"/>
+                      <a:tailEnd type="none" w="sm" len="sm"/>
+                    </a:lnB>
+                  </a:tcPr>
+                </a:tc>
+                <a:tc>
+                  <a:txBody>
+                    <a:bodyPr/>
+                    <a:lstStyle/>
+                    <a:p>
+                      <a:pPr>
+                        <a:buNone/>
+                      </a:pPr>
+                      <a:r>
+                        <a:rPr lang="en-US" sz="1200" b="1" dirty="0"/>
+                        <a:t>Pros</a:t>
+                      </a:r>
+                    </a:p>
+                  </a:txBody>
+                  <a:tcPr anchor="ctr">
+                    <a:lnL w="9525" cap="flat" cmpd="sng">
+                      <a:solidFill>
+                        <a:schemeClr val="dk1">
+                          <a:alpha val="0"/>
+                        </a:schemeClr>
+                      </a:solidFill>
+                      <a:prstDash val="solid"/>
+                      <a:round/>
+                      <a:headEnd type="none" w="sm" len="sm"/>
+                      <a:tailEnd type="none" w="sm" len="sm"/>
+                    </a:lnL>
+                    <a:lnR w="9525" cap="flat" cmpd="sng" algn="ctr">
+                      <a:solidFill>
+                        <a:schemeClr val="dk1">
+                          <a:alpha val="0"/>
+                        </a:schemeClr>
+                      </a:solidFill>
+                      <a:prstDash val="solid"/>
+                      <a:round/>
+                      <a:headEnd type="none" w="sm" len="sm"/>
+                      <a:tailEnd type="none" w="sm" len="sm"/>
+                    </a:lnR>
+                    <a:lnT w="9525" cap="flat" cmpd="sng">
+                      <a:solidFill>
+                        <a:schemeClr val="lt1">
+                          <a:alpha val="0"/>
+                        </a:schemeClr>
+                      </a:solidFill>
+                      <a:prstDash val="solid"/>
+                      <a:round/>
+                      <a:headEnd type="none" w="sm" len="sm"/>
+                      <a:tailEnd type="none" w="sm" len="sm"/>
+                    </a:lnT>
+                    <a:lnB w="9525" cap="flat" cmpd="sng">
+                      <a:solidFill>
+                        <a:schemeClr val="lt2"/>
+                      </a:solidFill>
+                      <a:prstDash val="solid"/>
+                      <a:round/>
+                      <a:headEnd type="none" w="sm" len="sm"/>
+                      <a:tailEnd type="none" w="sm" len="sm"/>
+                    </a:lnB>
+                  </a:tcPr>
+                </a:tc>
+                <a:tc>
+                  <a:txBody>
+                    <a:bodyPr/>
+                    <a:lstStyle/>
+                    <a:p>
+                      <a:pPr>
+                        <a:buNone/>
+                      </a:pPr>
+                      <a:r>
+                        <a:rPr lang="en-US" sz="1200" b="1" dirty="0"/>
+                        <a:t>Cons</a:t>
+                      </a:r>
+                    </a:p>
+                  </a:txBody>
+                  <a:tcPr anchor="ctr">
+                    <a:lnL w="9525" cap="flat" cmpd="sng">
+                      <a:solidFill>
+                        <a:schemeClr val="dk1">
+                          <a:alpha val="0"/>
+                        </a:schemeClr>
+                      </a:solidFill>
+                      <a:prstDash val="solid"/>
+                      <a:round/>
+                      <a:headEnd type="none" w="sm" len="sm"/>
+                      <a:tailEnd type="none" w="sm" len="sm"/>
+                    </a:lnL>
+                    <a:lnR w="9525" cap="flat" cmpd="sng">
+                      <a:solidFill>
+                        <a:schemeClr val="lt1">
+                          <a:alpha val="0"/>
+                        </a:schemeClr>
+                      </a:solidFill>
+                      <a:prstDash val="solid"/>
+                      <a:round/>
+                      <a:headEnd type="none" w="sm" len="sm"/>
+                      <a:tailEnd type="none" w="sm" len="sm"/>
+                    </a:lnR>
+                    <a:lnT w="9525" cap="flat" cmpd="sng">
+                      <a:solidFill>
+                        <a:schemeClr val="lt1">
+                          <a:alpha val="0"/>
+                        </a:schemeClr>
+                      </a:solidFill>
+                      <a:prstDash val="solid"/>
+                      <a:round/>
+                      <a:headEnd type="none" w="sm" len="sm"/>
+                      <a:tailEnd type="none" w="sm" len="sm"/>
+                    </a:lnT>
+                    <a:lnB w="9525" cap="flat" cmpd="sng" algn="ctr">
+                      <a:solidFill>
+                        <a:schemeClr val="lt2"/>
+                      </a:solidFill>
+                      <a:prstDash val="solid"/>
+                      <a:round/>
+                      <a:headEnd type="none" w="sm" len="sm"/>
+                      <a:tailEnd type="none" w="sm" len="sm"/>
+                    </a:lnB>
+                  </a:tcPr>
+                </a:tc>
+                <a:extLst>
+                  <a:ext uri="{0D108BD9-81ED-4DB2-BD59-A6C34878D82A}">
+                    <a16:rowId xmlns:a16="http://schemas.microsoft.com/office/drawing/2014/main" val="10000"/>
+                  </a:ext>
+                </a:extLst>
+              </a:tr>
+              <a:tr h="665884">
+                <a:tc>
+                  <a:txBody>
+                    <a:bodyPr/>
+                    <a:lstStyle/>
+                    <a:p>
+                      <a:pPr>
+                        <a:buNone/>
+                      </a:pPr>
+                      <a:r>
+                        <a:rPr lang="en-US" sz="1200" b="1"/>
+                        <a:t>LoRA</a:t>
+                      </a:r>
+                      <a:endParaRPr lang="en-US" sz="1200"/>
+                    </a:p>
+                  </a:txBody>
+                  <a:tcPr anchor="ctr">
+                    <a:lnL w="9525" cap="flat" cmpd="sng">
+                      <a:solidFill>
+                        <a:schemeClr val="lt1">
+                          <a:alpha val="0"/>
+                        </a:schemeClr>
+                      </a:solidFill>
+                      <a:prstDash val="solid"/>
+                      <a:round/>
+                      <a:headEnd type="none" w="sm" len="sm"/>
+                      <a:tailEnd type="none" w="sm" len="sm"/>
+                    </a:lnL>
+                    <a:lnR w="9525" cap="flat" cmpd="sng">
+                      <a:solidFill>
+                        <a:schemeClr val="lt2"/>
+                      </a:solidFill>
+                      <a:prstDash val="solid"/>
+                      <a:round/>
+                      <a:headEnd type="none" w="sm" len="sm"/>
+                      <a:tailEnd type="none" w="sm" len="sm"/>
+                    </a:lnR>
+                    <a:lnT w="9525" cap="flat" cmpd="sng">
+                      <a:solidFill>
+                        <a:schemeClr val="lt2"/>
+                      </a:solidFill>
+                      <a:prstDash val="solid"/>
+                      <a:round/>
+                      <a:headEnd type="none" w="sm" len="sm"/>
+                      <a:tailEnd type="none" w="sm" len="sm"/>
+                    </a:lnT>
+                    <a:lnB w="9525" cap="flat" cmpd="sng">
+                      <a:solidFill>
+                        <a:schemeClr val="lt2"/>
+                      </a:solidFill>
+                      <a:prstDash val="solid"/>
+                      <a:round/>
+                      <a:headEnd type="none" w="sm" len="sm"/>
+                      <a:tailEnd type="none" w="sm" len="sm"/>
+                    </a:lnB>
+                  </a:tcPr>
+                </a:tc>
+                <a:tc>
+                  <a:txBody>
+                    <a:bodyPr/>
+                    <a:lstStyle/>
+                    <a:p>
+                      <a:pPr>
+                        <a:buNone/>
+                      </a:pPr>
+                      <a:r>
+                        <a:rPr lang="en-US" sz="1200" dirty="0"/>
+                        <a:t>Low-rank adapters</a:t>
+                      </a:r>
+                    </a:p>
+                  </a:txBody>
+                  <a:tcPr anchor="ctr">
+                    <a:lnL w="9525" cap="flat" cmpd="sng">
+                      <a:solidFill>
+                        <a:schemeClr val="lt2"/>
+                      </a:solidFill>
+                      <a:prstDash val="solid"/>
+                      <a:round/>
+                      <a:headEnd type="none" w="sm" len="sm"/>
+                      <a:tailEnd type="none" w="sm" len="sm"/>
+                    </a:lnL>
+                    <a:lnR w="9525" cap="flat" cmpd="sng">
+                      <a:solidFill>
+                        <a:schemeClr val="lt2"/>
+                      </a:solidFill>
+                      <a:prstDash val="solid"/>
+                      <a:round/>
+                      <a:headEnd type="none" w="sm" len="sm"/>
+                      <a:tailEnd type="none" w="sm" len="sm"/>
+                    </a:lnR>
+                    <a:lnT w="9525" cap="flat" cmpd="sng">
+                      <a:solidFill>
+                        <a:schemeClr val="lt2"/>
+                      </a:solidFill>
+                      <a:prstDash val="solid"/>
+                      <a:round/>
+                      <a:headEnd type="none" w="sm" len="sm"/>
+                      <a:tailEnd type="none" w="sm" len="sm"/>
+                    </a:lnT>
+                    <a:lnB w="9525" cap="flat" cmpd="sng">
+                      <a:solidFill>
+                        <a:schemeClr val="lt2"/>
+                      </a:solidFill>
+                      <a:prstDash val="solid"/>
+                      <a:round/>
+                      <a:headEnd type="none" w="sm" len="sm"/>
+                      <a:tailEnd type="none" w="sm" len="sm"/>
+                    </a:lnB>
+                  </a:tcPr>
+                </a:tc>
+                <a:tc>
+                  <a:txBody>
+                    <a:bodyPr/>
+                    <a:lstStyle/>
+                    <a:p>
+                      <a:pPr>
+                        <a:buNone/>
+                      </a:pPr>
+                      <a:r>
+                        <a:rPr lang="en-US" sz="1200" dirty="0"/>
+                        <a:t>Simple, effective, widely used</a:t>
+                      </a:r>
+                    </a:p>
+                  </a:txBody>
+                  <a:tcPr anchor="ctr">
+                    <a:lnL w="9525" cap="flat" cmpd="sng">
+                      <a:solidFill>
+                        <a:schemeClr val="lt2"/>
+                      </a:solidFill>
+                      <a:prstDash val="solid"/>
+                      <a:round/>
+                      <a:headEnd type="none" w="sm" len="sm"/>
+                      <a:tailEnd type="none" w="sm" len="sm"/>
+                    </a:lnL>
+                    <a:lnR w="9525" cap="flat" cmpd="sng" algn="ctr">
+                      <a:solidFill>
+                        <a:schemeClr val="lt2"/>
+                      </a:solidFill>
+                      <a:prstDash val="solid"/>
+                      <a:round/>
+                      <a:headEnd type="none" w="sm" len="sm"/>
+                      <a:tailEnd type="none" w="sm" len="sm"/>
+                    </a:lnR>
+                    <a:lnT w="9525" cap="flat" cmpd="sng">
+                      <a:solidFill>
+                        <a:schemeClr val="lt2"/>
+                      </a:solidFill>
+                      <a:prstDash val="solid"/>
+                      <a:round/>
+                      <a:headEnd type="none" w="sm" len="sm"/>
+                      <a:tailEnd type="none" w="sm" len="sm"/>
+                    </a:lnT>
+                    <a:lnB w="9525" cap="flat" cmpd="sng">
+                      <a:solidFill>
+                        <a:schemeClr val="lt2"/>
+                      </a:solidFill>
+                      <a:prstDash val="solid"/>
+                      <a:round/>
+                      <a:headEnd type="none" w="sm" len="sm"/>
+                      <a:tailEnd type="none" w="sm" len="sm"/>
+                    </a:lnB>
+                  </a:tcPr>
+                </a:tc>
+                <a:tc>
+                  <a:txBody>
+                    <a:bodyPr/>
+                    <a:lstStyle/>
+                    <a:p>
+                      <a:pPr>
+                        <a:buNone/>
+                      </a:pPr>
+                      <a:r>
+                        <a:rPr lang="en-US" sz="1200" dirty="0"/>
+                        <a:t>Still needs more parameters than newer variants</a:t>
+                      </a:r>
+                    </a:p>
+                  </a:txBody>
+                  <a:tcPr anchor="ctr">
+                    <a:lnL w="9525" cap="flat" cmpd="sng">
+                      <a:solidFill>
+                        <a:schemeClr val="lt2"/>
+                      </a:solidFill>
+                      <a:prstDash val="solid"/>
+                      <a:round/>
+                      <a:headEnd type="none" w="sm" len="sm"/>
+                      <a:tailEnd type="none" w="sm" len="sm"/>
+                    </a:lnL>
+                    <a:lnR w="9525" cap="flat" cmpd="sng">
+                      <a:solidFill>
+                        <a:schemeClr val="lt1">
+                          <a:alpha val="0"/>
+                        </a:schemeClr>
+                      </a:solidFill>
+                      <a:prstDash val="solid"/>
+                      <a:round/>
+                      <a:headEnd type="none" w="sm" len="sm"/>
+                      <a:tailEnd type="none" w="sm" len="sm"/>
+                    </a:lnR>
+                    <a:lnT w="9525" cap="flat" cmpd="sng" algn="ctr">
+                      <a:solidFill>
+                        <a:schemeClr val="lt2"/>
+                      </a:solidFill>
+                      <a:prstDash val="solid"/>
+                      <a:round/>
+                      <a:headEnd type="none" w="sm" len="sm"/>
+                      <a:tailEnd type="none" w="sm" len="sm"/>
+                    </a:lnT>
+                    <a:lnB w="9525" cap="flat" cmpd="sng" algn="ctr">
+                      <a:solidFill>
+                        <a:schemeClr val="lt2"/>
+                      </a:solidFill>
+                      <a:prstDash val="solid"/>
+                      <a:round/>
+                      <a:headEnd type="none" w="sm" len="sm"/>
+                      <a:tailEnd type="none" w="sm" len="sm"/>
+                    </a:lnB>
+                  </a:tcPr>
+                </a:tc>
+                <a:extLst>
+                  <a:ext uri="{0D108BD9-81ED-4DB2-BD59-A6C34878D82A}">
+                    <a16:rowId xmlns:a16="http://schemas.microsoft.com/office/drawing/2014/main" val="10001"/>
+                  </a:ext>
+                </a:extLst>
+              </a:tr>
+              <a:tr h="625979">
+                <a:tc>
+                  <a:txBody>
+                    <a:bodyPr/>
+                    <a:lstStyle/>
+                    <a:p>
+                      <a:pPr>
+                        <a:buNone/>
+                      </a:pPr>
+                      <a:r>
+                        <a:rPr lang="en-US" sz="1200" b="1"/>
+                        <a:t>LoRA-XS</a:t>
+                      </a:r>
+                      <a:endParaRPr lang="en-US" sz="1200"/>
+                    </a:p>
+                  </a:txBody>
+                  <a:tcPr anchor="ctr">
+                    <a:lnL w="9525" cap="flat" cmpd="sng">
+                      <a:solidFill>
+                        <a:schemeClr val="lt1">
+                          <a:alpha val="0"/>
+                        </a:schemeClr>
+                      </a:solidFill>
+                      <a:prstDash val="solid"/>
+                      <a:round/>
+                      <a:headEnd type="none" w="sm" len="sm"/>
+                      <a:tailEnd type="none" w="sm" len="sm"/>
+                    </a:lnL>
+                    <a:lnR w="9525" cap="flat" cmpd="sng">
+                      <a:solidFill>
+                        <a:schemeClr val="lt2"/>
+                      </a:solidFill>
+                      <a:prstDash val="solid"/>
+                      <a:round/>
+                      <a:headEnd type="none" w="sm" len="sm"/>
+                      <a:tailEnd type="none" w="sm" len="sm"/>
+                    </a:lnR>
+                    <a:lnT w="9525" cap="flat" cmpd="sng">
+                      <a:solidFill>
+                        <a:schemeClr val="lt2"/>
+                      </a:solidFill>
+                      <a:prstDash val="solid"/>
+                      <a:round/>
+                      <a:headEnd type="none" w="sm" len="sm"/>
+                      <a:tailEnd type="none" w="sm" len="sm"/>
+                    </a:lnT>
+                    <a:lnB w="9525" cap="flat" cmpd="sng">
+                      <a:solidFill>
+                        <a:schemeClr val="lt2"/>
+                      </a:solidFill>
+                      <a:prstDash val="solid"/>
+                      <a:round/>
+                      <a:headEnd type="none" w="sm" len="sm"/>
+                      <a:tailEnd type="none" w="sm" len="sm"/>
+                    </a:lnB>
+                  </a:tcPr>
+                </a:tc>
+                <a:tc>
+                  <a:txBody>
+                    <a:bodyPr/>
+                    <a:lstStyle/>
+                    <a:p>
+                      <a:pPr>
+                        <a:buNone/>
+                      </a:pPr>
+                      <a:r>
+                        <a:rPr lang="en-US" sz="1200" dirty="0"/>
+                        <a:t>Fixed SVD structure + small core</a:t>
+                      </a:r>
+                    </a:p>
+                  </a:txBody>
+                  <a:tcPr anchor="ctr">
+                    <a:lnL w="9525" cap="flat" cmpd="sng">
+                      <a:solidFill>
+                        <a:schemeClr val="lt2"/>
+                      </a:solidFill>
+                      <a:prstDash val="solid"/>
+                      <a:round/>
+                      <a:headEnd type="none" w="sm" len="sm"/>
+                      <a:tailEnd type="none" w="sm" len="sm"/>
+                    </a:lnL>
+                    <a:lnR w="9525" cap="flat" cmpd="sng">
+                      <a:solidFill>
+                        <a:schemeClr val="lt2"/>
+                      </a:solidFill>
+                      <a:prstDash val="solid"/>
+                      <a:round/>
+                      <a:headEnd type="none" w="sm" len="sm"/>
+                      <a:tailEnd type="none" w="sm" len="sm"/>
+                    </a:lnR>
+                    <a:lnT w="9525" cap="flat" cmpd="sng">
+                      <a:solidFill>
+                        <a:schemeClr val="lt2"/>
+                      </a:solidFill>
+                      <a:prstDash val="solid"/>
+                      <a:round/>
+                      <a:headEnd type="none" w="sm" len="sm"/>
+                      <a:tailEnd type="none" w="sm" len="sm"/>
+                    </a:lnT>
+                    <a:lnB w="9525" cap="flat" cmpd="sng">
+                      <a:solidFill>
+                        <a:schemeClr val="lt2"/>
+                      </a:solidFill>
+                      <a:prstDash val="solid"/>
+                      <a:round/>
+                      <a:headEnd type="none" w="sm" len="sm"/>
+                      <a:tailEnd type="none" w="sm" len="sm"/>
+                    </a:lnB>
+                  </a:tcPr>
+                </a:tc>
+                <a:tc>
+                  <a:txBody>
+                    <a:bodyPr/>
+                    <a:lstStyle/>
+                    <a:p>
+                      <a:pPr>
+                        <a:buNone/>
+                      </a:pPr>
+                      <a:r>
+                        <a:rPr lang="en-US" sz="1200"/>
+                        <a:t>Smaller and more parameter-efficient than LoRA</a:t>
+                      </a:r>
+                    </a:p>
+                  </a:txBody>
+                  <a:tcPr anchor="ctr">
+                    <a:lnL w="9525" cap="flat" cmpd="sng">
+                      <a:solidFill>
+                        <a:schemeClr val="lt2"/>
+                      </a:solidFill>
+                      <a:prstDash val="solid"/>
+                      <a:round/>
+                      <a:headEnd type="none" w="sm" len="sm"/>
+                      <a:tailEnd type="none" w="sm" len="sm"/>
+                    </a:lnL>
+                    <a:lnR w="9525" cap="flat" cmpd="sng" algn="ctr">
+                      <a:solidFill>
+                        <a:schemeClr val="lt2"/>
+                      </a:solidFill>
+                      <a:prstDash val="solid"/>
+                      <a:round/>
+                      <a:headEnd type="none" w="sm" len="sm"/>
+                      <a:tailEnd type="none" w="sm" len="sm"/>
+                    </a:lnR>
+                    <a:lnT w="9525" cap="flat" cmpd="sng">
+                      <a:solidFill>
+                        <a:schemeClr val="lt2"/>
+                      </a:solidFill>
+                      <a:prstDash val="solid"/>
+                      <a:round/>
+                      <a:headEnd type="none" w="sm" len="sm"/>
+                      <a:tailEnd type="none" w="sm" len="sm"/>
+                    </a:lnT>
+                    <a:lnB w="9525" cap="flat" cmpd="sng">
+                      <a:solidFill>
+                        <a:schemeClr val="lt2"/>
+                      </a:solidFill>
+                      <a:prstDash val="solid"/>
+                      <a:round/>
+                      <a:headEnd type="none" w="sm" len="sm"/>
+                      <a:tailEnd type="none" w="sm" len="sm"/>
+                    </a:lnB>
+                  </a:tcPr>
+                </a:tc>
+                <a:tc>
+                  <a:txBody>
+                    <a:bodyPr/>
+                    <a:lstStyle/>
+                    <a:p>
+                      <a:pPr>
+                        <a:buNone/>
+                      </a:pPr>
+                      <a:r>
+                        <a:rPr lang="en-US" sz="1200" dirty="0"/>
+                        <a:t>More specialized, less standard</a:t>
+                      </a:r>
+                    </a:p>
+                  </a:txBody>
+                  <a:tcPr anchor="ctr">
+                    <a:lnL w="9525" cap="flat" cmpd="sng">
+                      <a:solidFill>
+                        <a:schemeClr val="lt2"/>
+                      </a:solidFill>
+                      <a:prstDash val="solid"/>
+                      <a:round/>
+                      <a:headEnd type="none" w="sm" len="sm"/>
+                      <a:tailEnd type="none" w="sm" len="sm"/>
+                    </a:lnL>
+                    <a:lnR w="9525" cap="flat" cmpd="sng">
+                      <a:solidFill>
+                        <a:schemeClr val="lt1">
+                          <a:alpha val="0"/>
+                        </a:schemeClr>
+                      </a:solidFill>
+                      <a:prstDash val="solid"/>
+                      <a:round/>
+                      <a:headEnd type="none" w="sm" len="sm"/>
+                      <a:tailEnd type="none" w="sm" len="sm"/>
+                    </a:lnR>
+                    <a:lnT w="9525" cap="flat" cmpd="sng" algn="ctr">
+                      <a:solidFill>
+                        <a:schemeClr val="lt2"/>
+                      </a:solidFill>
+                      <a:prstDash val="solid"/>
+                      <a:round/>
+                      <a:headEnd type="none" w="sm" len="sm"/>
+                      <a:tailEnd type="none" w="sm" len="sm"/>
+                    </a:lnT>
+                    <a:lnB w="9525" cap="flat" cmpd="sng" algn="ctr">
+                      <a:solidFill>
+                        <a:schemeClr val="lt2"/>
+                      </a:solidFill>
+                      <a:prstDash val="solid"/>
+                      <a:round/>
+                      <a:headEnd type="none" w="sm" len="sm"/>
+                      <a:tailEnd type="none" w="sm" len="sm"/>
+                    </a:lnB>
+                  </a:tcPr>
+                </a:tc>
+                <a:extLst>
+                  <a:ext uri="{0D108BD9-81ED-4DB2-BD59-A6C34878D82A}">
+                    <a16:rowId xmlns:a16="http://schemas.microsoft.com/office/drawing/2014/main" val="10002"/>
+                  </a:ext>
+                </a:extLst>
+              </a:tr>
+              <a:tr h="625979">
+                <a:tc>
+                  <a:txBody>
+                    <a:bodyPr/>
+                    <a:lstStyle/>
+                    <a:p>
+                      <a:pPr>
+                        <a:buNone/>
+                      </a:pPr>
+                      <a:r>
+                        <a:rPr lang="en-US" sz="1200" b="1"/>
+                        <a:t>TinyLoRA</a:t>
+                      </a:r>
+                      <a:endParaRPr lang="en-US" sz="1200"/>
+                    </a:p>
+                  </a:txBody>
+                  <a:tcPr anchor="ctr">
+                    <a:lnL w="9525" cap="flat" cmpd="sng">
+                      <a:solidFill>
+                        <a:schemeClr val="lt1">
+                          <a:alpha val="0"/>
+                        </a:schemeClr>
+                      </a:solidFill>
+                      <a:prstDash val="solid"/>
+                      <a:round/>
+                      <a:headEnd type="none" w="sm" len="sm"/>
+                      <a:tailEnd type="none" w="sm" len="sm"/>
+                    </a:lnL>
+                    <a:lnR w="9525" cap="flat" cmpd="sng">
+                      <a:solidFill>
+                        <a:schemeClr val="lt2"/>
+                      </a:solidFill>
+                      <a:prstDash val="solid"/>
+                      <a:round/>
+                      <a:headEnd type="none" w="sm" len="sm"/>
+                      <a:tailEnd type="none" w="sm" len="sm"/>
+                    </a:lnR>
+                    <a:lnT w="9525" cap="flat" cmpd="sng">
+                      <a:solidFill>
+                        <a:schemeClr val="lt2"/>
+                      </a:solidFill>
+                      <a:prstDash val="solid"/>
+                      <a:round/>
+                      <a:headEnd type="none" w="sm" len="sm"/>
+                      <a:tailEnd type="none" w="sm" len="sm"/>
+                    </a:lnT>
+                    <a:lnB w="9525" cap="flat" cmpd="sng">
+                      <a:solidFill>
+                        <a:schemeClr val="lt2"/>
+                      </a:solidFill>
+                      <a:prstDash val="solid"/>
+                      <a:round/>
+                      <a:headEnd type="none" w="sm" len="sm"/>
+                      <a:tailEnd type="none" w="sm" len="sm"/>
+                    </a:lnB>
+                  </a:tcPr>
+                </a:tc>
+                <a:tc>
+                  <a:txBody>
+                    <a:bodyPr/>
+                    <a:lstStyle/>
+                    <a:p>
+                      <a:pPr>
+                        <a:buNone/>
+                      </a:pPr>
+                      <a:r>
+                        <a:rPr lang="en-US" sz="1200" dirty="0"/>
+                        <a:t>Tiny projected trainable vector</a:t>
+                      </a:r>
+                    </a:p>
+                  </a:txBody>
+                  <a:tcPr anchor="ctr">
+                    <a:lnL w="9525" cap="flat" cmpd="sng">
+                      <a:solidFill>
+                        <a:schemeClr val="lt2"/>
+                      </a:solidFill>
+                      <a:prstDash val="solid"/>
+                      <a:round/>
+                      <a:headEnd type="none" w="sm" len="sm"/>
+                      <a:tailEnd type="none" w="sm" len="sm"/>
+                    </a:lnL>
+                    <a:lnR w="9525" cap="flat" cmpd="sng">
+                      <a:solidFill>
+                        <a:schemeClr val="lt2"/>
+                      </a:solidFill>
+                      <a:prstDash val="solid"/>
+                      <a:round/>
+                      <a:headEnd type="none" w="sm" len="sm"/>
+                      <a:tailEnd type="none" w="sm" len="sm"/>
+                    </a:lnR>
+                    <a:lnT w="9525" cap="flat" cmpd="sng">
+                      <a:solidFill>
+                        <a:schemeClr val="lt2"/>
+                      </a:solidFill>
+                      <a:prstDash val="solid"/>
+                      <a:round/>
+                      <a:headEnd type="none" w="sm" len="sm"/>
+                      <a:tailEnd type="none" w="sm" len="sm"/>
+                    </a:lnT>
+                    <a:lnB w="9525" cap="flat" cmpd="sng">
+                      <a:solidFill>
+                        <a:schemeClr val="lt2"/>
+                      </a:solidFill>
+                      <a:prstDash val="solid"/>
+                      <a:round/>
+                      <a:headEnd type="none" w="sm" len="sm"/>
+                      <a:tailEnd type="none" w="sm" len="sm"/>
+                    </a:lnB>
+                  </a:tcPr>
+                </a:tc>
+                <a:tc>
+                  <a:txBody>
+                    <a:bodyPr/>
+                    <a:lstStyle/>
+                    <a:p>
+                      <a:pPr>
+                        <a:buNone/>
+                      </a:pPr>
+                      <a:r>
+                        <a:rPr lang="en-US" sz="1200"/>
+                        <a:t>Extreme parameter efficiency</a:t>
+                      </a:r>
+                    </a:p>
+                  </a:txBody>
+                  <a:tcPr anchor="ctr">
+                    <a:lnL w="9525" cap="flat" cmpd="sng">
+                      <a:solidFill>
+                        <a:schemeClr val="lt2"/>
+                      </a:solidFill>
+                      <a:prstDash val="solid"/>
+                      <a:round/>
+                      <a:headEnd type="none" w="sm" len="sm"/>
+                      <a:tailEnd type="none" w="sm" len="sm"/>
+                    </a:lnL>
+                    <a:lnR w="9525" cap="flat" cmpd="sng" algn="ctr">
+                      <a:solidFill>
+                        <a:schemeClr val="lt2"/>
+                      </a:solidFill>
+                      <a:prstDash val="solid"/>
+                      <a:round/>
+                      <a:headEnd type="none" w="sm" len="sm"/>
+                      <a:tailEnd type="none" w="sm" len="sm"/>
+                    </a:lnR>
+                    <a:lnT w="9525" cap="flat" cmpd="sng">
+                      <a:solidFill>
+                        <a:schemeClr val="lt2"/>
+                      </a:solidFill>
+                      <a:prstDash val="solid"/>
+                      <a:round/>
+                      <a:headEnd type="none" w="sm" len="sm"/>
+                      <a:tailEnd type="none" w="sm" len="sm"/>
+                    </a:lnT>
+                    <a:lnB w="9525" cap="flat" cmpd="sng">
+                      <a:solidFill>
+                        <a:schemeClr val="lt2"/>
+                      </a:solidFill>
+                      <a:prstDash val="solid"/>
+                      <a:round/>
+                      <a:headEnd type="none" w="sm" len="sm"/>
+                      <a:tailEnd type="none" w="sm" len="sm"/>
+                    </a:lnB>
+                  </a:tcPr>
+                </a:tc>
+                <a:tc>
+                  <a:txBody>
+                    <a:bodyPr/>
+                    <a:lstStyle/>
+                    <a:p>
+                      <a:pPr>
+                        <a:buNone/>
+                      </a:pPr>
+                      <a:r>
+                        <a:rPr lang="en-US" sz="1200" dirty="0"/>
+                        <a:t>More experimental, harder to validate broadly</a:t>
+                      </a:r>
+                    </a:p>
+                  </a:txBody>
+                  <a:tcPr anchor="ctr">
+                    <a:lnL w="9525" cap="flat" cmpd="sng">
+                      <a:solidFill>
+                        <a:schemeClr val="lt2"/>
+                      </a:solidFill>
+                      <a:prstDash val="solid"/>
+                      <a:round/>
+                      <a:headEnd type="none" w="sm" len="sm"/>
+                      <a:tailEnd type="none" w="sm" len="sm"/>
+                    </a:lnL>
+                    <a:lnR w="9525" cap="flat" cmpd="sng">
+                      <a:solidFill>
+                        <a:schemeClr val="lt1">
+                          <a:alpha val="0"/>
+                        </a:schemeClr>
+                      </a:solidFill>
+                      <a:prstDash val="solid"/>
+                      <a:round/>
+                      <a:headEnd type="none" w="sm" len="sm"/>
+                      <a:tailEnd type="none" w="sm" len="sm"/>
+                    </a:lnR>
+                    <a:lnT w="9525" cap="flat" cmpd="sng" algn="ctr">
+                      <a:solidFill>
+                        <a:schemeClr val="lt2"/>
+                      </a:solidFill>
+                      <a:prstDash val="solid"/>
+                      <a:round/>
+                      <a:headEnd type="none" w="sm" len="sm"/>
+                      <a:tailEnd type="none" w="sm" len="sm"/>
+                    </a:lnT>
+                    <a:lnB w="9525" cap="flat" cmpd="sng">
+                      <a:solidFill>
+                        <a:schemeClr val="lt2"/>
+                      </a:solidFill>
+                      <a:prstDash val="solid"/>
+                      <a:round/>
+                      <a:headEnd type="none" w="sm" len="sm"/>
+                      <a:tailEnd type="none" w="sm" len="sm"/>
+                    </a:lnB>
+                  </a:tcPr>
+                </a:tc>
+                <a:extLst>
+                  <a:ext uri="{0D108BD9-81ED-4DB2-BD59-A6C34878D82A}">
+                    <a16:rowId xmlns:a16="http://schemas.microsoft.com/office/drawing/2014/main" val="10003"/>
+                  </a:ext>
+                </a:extLst>
+              </a:tr>
+            </a:tbl>
+          </a:graphicData>
+        </a:graphic>
+      </p:graphicFrame>
+      <p:sp>
+        <p:nvSpPr>
+          <p:cNvPr id="19" name="Rectangle 18">
+            <a:extLst>
+              <a:ext uri="{FF2B5EF4-FFF2-40B4-BE49-F238E27FC236}">
+                <a16:creationId xmlns:a16="http://schemas.microsoft.com/office/drawing/2014/main" id="{CA5D6E6A-A07D-CB23-8A86-C38629EBBB90}"/>
+              </a:ext>
+            </a:extLst>
+          </p:cNvPr>
+          <p:cNvSpPr/>
+          <p:nvPr/>
+        </p:nvSpPr>
+        <p:spPr>
+          <a:xfrm>
+            <a:off x="904818" y="342540"/>
+            <a:ext cx="5334223" cy="1889102"/>
+          </a:xfrm>
+          <a:prstGeom prst="rect">
+            <a:avLst/>
+          </a:prstGeom>
+          <a:noFill/>
+          <a:ln w="28575" cmpd="thickThin">
+            <a:solidFill>
+              <a:schemeClr val="tx1"/>
+            </a:solidFill>
+            <a:prstDash val="sysDot"/>
+          </a:ln>
+        </p:spPr>
+        <p:style>
+          <a:lnRef idx="2">
+            <a:schemeClr val="accent1">
+              <a:shade val="15000"/>
+            </a:schemeClr>
+          </a:lnRef>
+          <a:fillRef idx="1">
+            <a:schemeClr val="accent1"/>
+          </a:fillRef>
+          <a:effectRef idx="0">
+            <a:schemeClr val="accent1"/>
+          </a:effectRef>
+          <a:fontRef idx="minor">
+            <a:schemeClr val="lt1"/>
+          </a:fontRef>
+        </p:style>
+        <p:txBody>
+          <a:bodyPr rtlCol="0" anchor="ctr"/>
+          <a:lstStyle/>
+          <a:p>
+            <a:pPr algn="ctr"/>
+            <a:endParaRPr lang="en-US"/>
+          </a:p>
+        </p:txBody>
+      </p:sp>
+      <mc:AlternateContent xmlns:mc="http://schemas.openxmlformats.org/markup-compatibility/2006">
+        <mc:Choice xmlns:p14="http://schemas.microsoft.com/office/powerpoint/2010/main" Requires="p14">
+          <p:contentPart p14:bwMode="auto" r:id="rId3">
+            <p14:nvContentPartPr>
+              <p14:cNvPr id="21" name="Ink 20">
+                <a:extLst>
+                  <a:ext uri="{FF2B5EF4-FFF2-40B4-BE49-F238E27FC236}">
+                    <a16:creationId xmlns:a16="http://schemas.microsoft.com/office/drawing/2014/main" id="{96D653E0-4795-D8DF-14EF-FB78219237BC}"/>
+                  </a:ext>
+                </a:extLst>
+              </p14:cNvPr>
+              <p14:cNvContentPartPr/>
+              <p14:nvPr/>
+            </p14:nvContentPartPr>
+            <p14:xfrm>
+              <a:off x="7256360" y="683480"/>
+              <a:ext cx="1593720" cy="5760"/>
+            </p14:xfrm>
+          </p:contentPart>
+        </mc:Choice>
+        <mc:Fallback>
+          <p:pic>
+            <p:nvPicPr>
+              <p:cNvPr id="21" name="Ink 20">
+                <a:extLst>
+                  <a:ext uri="{FF2B5EF4-FFF2-40B4-BE49-F238E27FC236}">
+                    <a16:creationId xmlns:a16="http://schemas.microsoft.com/office/drawing/2014/main" id="{96D653E0-4795-D8DF-14EF-FB78219237BC}"/>
+                  </a:ext>
+                </a:extLst>
+              </p:cNvPr>
+              <p:cNvPicPr/>
+              <p:nvPr/>
+            </p:nvPicPr>
+            <p:blipFill>
+              <a:blip r:embed="rId4"/>
+              <a:stretch>
+                <a:fillRect/>
+              </a:stretch>
+            </p:blipFill>
+            <p:spPr>
+              <a:xfrm>
+                <a:off x="7220720" y="611840"/>
+                <a:ext cx="1665360" cy="149400"/>
+              </a:xfrm>
+              <a:prstGeom prst="rect">
+                <a:avLst/>
+              </a:prstGeom>
+            </p:spPr>
+          </p:pic>
+        </mc:Fallback>
+      </mc:AlternateContent>
     </p:spTree>
     <p:extLst>
       <p:ext uri="{BB962C8B-B14F-4D97-AF65-F5344CB8AC3E}">
@@ -21622,6 +23468,210 @@
           </a:ln>
         </p:spPr>
       </p:cxnSp>
+      <mc:AlternateContent xmlns:mc="http://schemas.openxmlformats.org/markup-compatibility/2006">
+        <mc:Choice xmlns:p14="http://schemas.microsoft.com/office/powerpoint/2010/main" Requires="p14">
+          <p:contentPart p14:bwMode="auto" r:id="rId3">
+            <p14:nvContentPartPr>
+              <p14:cNvPr id="3" name="Ink 2">
+                <a:extLst>
+                  <a:ext uri="{FF2B5EF4-FFF2-40B4-BE49-F238E27FC236}">
+                    <a16:creationId xmlns:a16="http://schemas.microsoft.com/office/drawing/2014/main" id="{534D3A43-0863-7A55-7C27-1ADB6089631F}"/>
+                  </a:ext>
+                </a:extLst>
+              </p14:cNvPr>
+              <p14:cNvContentPartPr/>
+              <p14:nvPr/>
+            </p14:nvContentPartPr>
+            <p14:xfrm>
+              <a:off x="999720" y="1799311"/>
+              <a:ext cx="792720" cy="3960"/>
+            </p14:xfrm>
+          </p:contentPart>
+        </mc:Choice>
+        <mc:Fallback>
+          <p:pic>
+            <p:nvPicPr>
+              <p:cNvPr id="3" name="Ink 2">
+                <a:extLst>
+                  <a:ext uri="{FF2B5EF4-FFF2-40B4-BE49-F238E27FC236}">
+                    <a16:creationId xmlns:a16="http://schemas.microsoft.com/office/drawing/2014/main" id="{534D3A43-0863-7A55-7C27-1ADB6089631F}"/>
+                  </a:ext>
+                </a:extLst>
+              </p:cNvPr>
+              <p:cNvPicPr/>
+              <p:nvPr/>
+            </p:nvPicPr>
+            <p:blipFill>
+              <a:blip r:embed="rId4"/>
+              <a:stretch>
+                <a:fillRect/>
+              </a:stretch>
+            </p:blipFill>
+            <p:spPr>
+              <a:xfrm>
+                <a:off x="964080" y="1727311"/>
+                <a:ext cx="864360" cy="147600"/>
+              </a:xfrm>
+              <a:prstGeom prst="rect">
+                <a:avLst/>
+              </a:prstGeom>
+            </p:spPr>
+          </p:pic>
+        </mc:Fallback>
+      </mc:AlternateContent>
+      <mc:AlternateContent xmlns:mc="http://schemas.openxmlformats.org/markup-compatibility/2006">
+        <mc:Choice xmlns:p14="http://schemas.microsoft.com/office/powerpoint/2010/main" Requires="p14">
+          <p:contentPart p14:bwMode="auto" r:id="rId5">
+            <p14:nvContentPartPr>
+              <p14:cNvPr id="11" name="Ink 10">
+                <a:extLst>
+                  <a:ext uri="{FF2B5EF4-FFF2-40B4-BE49-F238E27FC236}">
+                    <a16:creationId xmlns:a16="http://schemas.microsoft.com/office/drawing/2014/main" id="{3F743458-8830-77AA-7AA9-367851128B90}"/>
+                  </a:ext>
+                </a:extLst>
+              </p14:cNvPr>
+              <p14:cNvContentPartPr/>
+              <p14:nvPr/>
+            </p14:nvContentPartPr>
+            <p14:xfrm>
+              <a:off x="437040" y="3372871"/>
+              <a:ext cx="1386360" cy="34560"/>
+            </p14:xfrm>
+          </p:contentPart>
+        </mc:Choice>
+        <mc:Fallback>
+          <p:pic>
+            <p:nvPicPr>
+              <p:cNvPr id="11" name="Ink 10">
+                <a:extLst>
+                  <a:ext uri="{FF2B5EF4-FFF2-40B4-BE49-F238E27FC236}">
+                    <a16:creationId xmlns:a16="http://schemas.microsoft.com/office/drawing/2014/main" id="{3F743458-8830-77AA-7AA9-367851128B90}"/>
+                  </a:ext>
+                </a:extLst>
+              </p:cNvPr>
+              <p:cNvPicPr/>
+              <p:nvPr/>
+            </p:nvPicPr>
+            <p:blipFill>
+              <a:blip r:embed="rId6"/>
+              <a:stretch>
+                <a:fillRect/>
+              </a:stretch>
+            </p:blipFill>
+            <p:spPr>
+              <a:xfrm>
+                <a:off x="401400" y="3301231"/>
+                <a:ext cx="1458000" cy="178200"/>
+              </a:xfrm>
+              <a:prstGeom prst="rect">
+                <a:avLst/>
+              </a:prstGeom>
+            </p:spPr>
+          </p:pic>
+        </mc:Fallback>
+      </mc:AlternateContent>
+      <mc:AlternateContent xmlns:mc="http://schemas.openxmlformats.org/markup-compatibility/2006">
+        <mc:Choice xmlns:p14="http://schemas.microsoft.com/office/powerpoint/2010/main" Requires="p14">
+          <p:contentPart p14:bwMode="auto" r:id="rId7">
+            <p14:nvContentPartPr>
+              <p14:cNvPr id="14" name="Ink 13">
+                <a:extLst>
+                  <a:ext uri="{FF2B5EF4-FFF2-40B4-BE49-F238E27FC236}">
+                    <a16:creationId xmlns:a16="http://schemas.microsoft.com/office/drawing/2014/main" id="{20910F96-B53D-EE59-9B72-819846AC48C5}"/>
+                  </a:ext>
+                </a:extLst>
+              </p14:cNvPr>
+              <p14:cNvContentPartPr/>
+              <p14:nvPr/>
+            </p14:nvContentPartPr>
+            <p14:xfrm>
+              <a:off x="356040" y="4099351"/>
+              <a:ext cx="1529280" cy="49680"/>
+            </p14:xfrm>
+          </p:contentPart>
+        </mc:Choice>
+        <mc:Fallback>
+          <p:pic>
+            <p:nvPicPr>
+              <p:cNvPr id="14" name="Ink 13">
+                <a:extLst>
+                  <a:ext uri="{FF2B5EF4-FFF2-40B4-BE49-F238E27FC236}">
+                    <a16:creationId xmlns:a16="http://schemas.microsoft.com/office/drawing/2014/main" id="{20910F96-B53D-EE59-9B72-819846AC48C5}"/>
+                  </a:ext>
+                </a:extLst>
+              </p:cNvPr>
+              <p:cNvPicPr/>
+              <p:nvPr/>
+            </p:nvPicPr>
+            <p:blipFill>
+              <a:blip r:embed="rId8"/>
+              <a:stretch>
+                <a:fillRect/>
+              </a:stretch>
+            </p:blipFill>
+            <p:spPr>
+              <a:xfrm>
+                <a:off x="320400" y="4027351"/>
+                <a:ext cx="1600920" cy="193320"/>
+              </a:xfrm>
+              <a:prstGeom prst="rect">
+                <a:avLst/>
+              </a:prstGeom>
+            </p:spPr>
+          </p:pic>
+        </mc:Fallback>
+      </mc:AlternateContent>
+      <mc:AlternateContent xmlns:mc="http://schemas.openxmlformats.org/markup-compatibility/2006">
+        <mc:Choice xmlns:p14="http://schemas.microsoft.com/office/powerpoint/2010/main" Requires="p14">
+          <p:contentPart p14:bwMode="auto" r:id="rId9">
+            <p14:nvContentPartPr>
+              <p14:cNvPr id="16" name="Ink 15">
+                <a:extLst>
+                  <a:ext uri="{FF2B5EF4-FFF2-40B4-BE49-F238E27FC236}">
+                    <a16:creationId xmlns:a16="http://schemas.microsoft.com/office/drawing/2014/main" id="{B7736036-5276-D1D4-5881-EDAB97A93949}"/>
+                  </a:ext>
+                </a:extLst>
+              </p14:cNvPr>
+              <p14:cNvContentPartPr/>
+              <p14:nvPr/>
+            </p14:nvContentPartPr>
+            <p14:xfrm>
+              <a:off x="1068120" y="2658991"/>
+              <a:ext cx="811080" cy="2160"/>
+            </p14:xfrm>
+          </p:contentPart>
+        </mc:Choice>
+        <mc:Fallback>
+          <p:pic>
+            <p:nvPicPr>
+              <p:cNvPr id="16" name="Ink 15">
+                <a:extLst>
+                  <a:ext uri="{FF2B5EF4-FFF2-40B4-BE49-F238E27FC236}">
+                    <a16:creationId xmlns:a16="http://schemas.microsoft.com/office/drawing/2014/main" id="{B7736036-5276-D1D4-5881-EDAB97A93949}"/>
+                  </a:ext>
+                </a:extLst>
+              </p:cNvPr>
+              <p:cNvPicPr/>
+              <p:nvPr/>
+            </p:nvPicPr>
+            <p:blipFill>
+              <a:blip r:embed="rId10"/>
+              <a:stretch>
+                <a:fillRect/>
+              </a:stretch>
+            </p:blipFill>
+            <p:spPr>
+              <a:xfrm>
+                <a:off x="1032480" y="2587351"/>
+                <a:ext cx="882720" cy="145800"/>
+              </a:xfrm>
+              <a:prstGeom prst="rect">
+                <a:avLst/>
+              </a:prstGeom>
+            </p:spPr>
+          </p:pic>
+        </mc:Fallback>
+      </mc:AlternateContent>
     </p:spTree>
     <p:extLst>
       <p:ext uri="{BB962C8B-B14F-4D97-AF65-F5344CB8AC3E}">

--- a/MRP - Lusha Zhang 0318.pptx
+++ b/MRP - Lusha Zhang 0318.pptx
@@ -5,7 +5,7 @@
     <p:sldMasterId id="2147483672" r:id="rId1"/>
   </p:sldMasterIdLst>
   <p:notesMasterIdLst>
-    <p:notesMasterId r:id="rId15"/>
+    <p:notesMasterId r:id="rId23"/>
   </p:notesMasterIdLst>
   <p:sldIdLst>
     <p:sldId id="256" r:id="rId2"/>
@@ -21,34 +21,42 @@
     <p:sldId id="302" r:id="rId12"/>
     <p:sldId id="295" r:id="rId13"/>
     <p:sldId id="303" r:id="rId14"/>
+    <p:sldId id="308" r:id="rId15"/>
+    <p:sldId id="309" r:id="rId16"/>
+    <p:sldId id="310" r:id="rId17"/>
+    <p:sldId id="312" r:id="rId18"/>
+    <p:sldId id="313" r:id="rId19"/>
+    <p:sldId id="316" r:id="rId20"/>
+    <p:sldId id="314" r:id="rId21"/>
+    <p:sldId id="315" r:id="rId22"/>
   </p:sldIdLst>
   <p:sldSz cx="9144000" cy="5143500" type="screen16x9"/>
   <p:notesSz cx="6858000" cy="9144000"/>
   <p:embeddedFontLst>
     <p:embeddedFont>
       <p:font typeface="Archivo" pitchFamily="2" charset="77"/>
-      <p:regular r:id="rId16"/>
-      <p:bold r:id="rId17"/>
-      <p:italic r:id="rId18"/>
-      <p:boldItalic r:id="rId19"/>
-    </p:embeddedFont>
-    <p:embeddedFont>
-      <p:font typeface="Raleway" pitchFamily="2" charset="77"/>
-      <p:regular r:id="rId20"/>
-      <p:bold r:id="rId21"/>
-      <p:italic r:id="rId22"/>
-      <p:boldItalic r:id="rId23"/>
-    </p:embeddedFont>
-    <p:embeddedFont>
-      <p:font typeface="Red Hat Mono" panose="02010509040201060303" pitchFamily="49" charset="0"/>
       <p:regular r:id="rId24"/>
       <p:bold r:id="rId25"/>
       <p:italic r:id="rId26"/>
       <p:boldItalic r:id="rId27"/>
     </p:embeddedFont>
     <p:embeddedFont>
+      <p:font typeface="Raleway" pitchFamily="2" charset="77"/>
+      <p:regular r:id="rId28"/>
+      <p:bold r:id="rId29"/>
+      <p:italic r:id="rId30"/>
+      <p:boldItalic r:id="rId31"/>
+    </p:embeddedFont>
+    <p:embeddedFont>
+      <p:font typeface="Red Hat Mono" panose="02010509040201060303" pitchFamily="49" charset="0"/>
+      <p:regular r:id="rId32"/>
+      <p:bold r:id="rId33"/>
+      <p:italic r:id="rId34"/>
+      <p:boldItalic r:id="rId35"/>
+    </p:embeddedFont>
+    <p:embeddedFont>
       <p:font typeface="VT323" pitchFamily="49" charset="77"/>
-      <p:regular r:id="rId28"/>
+      <p:regular r:id="rId36"/>
     </p:embeddedFont>
   </p:embeddedFontLst>
   <p:defaultTextStyle>
@@ -683,6 +691,62 @@
 </inkml:ink>
 </file>
 
+<file path=ppt/ink/ink22.xml><?xml version="1.0" encoding="utf-8"?>
+<inkml:ink xmlns:inkml="http://www.w3.org/2003/InkML">
+  <inkml:definitions>
+    <inkml:context xml:id="ctx0">
+      <inkml:inkSource xml:id="inkSrc0">
+        <inkml:traceFormat>
+          <inkml:channel name="X" type="integer" min="-2.14748E9" max="2.14748E9" units="cm"/>
+          <inkml:channel name="Y" type="integer" min="-2.14748E9" max="2.14748E9" units="cm"/>
+        </inkml:traceFormat>
+        <inkml:channelProperties>
+          <inkml:channelProperty channel="X" name="resolution" value="1000" units="1/cm"/>
+          <inkml:channelProperty channel="Y" name="resolution" value="1000" units="1/cm"/>
+        </inkml:channelProperties>
+      </inkml:inkSource>
+      <inkml:timestamp xml:id="ts0" timeString="2026-03-22T02:41:04.802"/>
+    </inkml:context>
+    <inkml:brush xml:id="br0">
+      <inkml:brushProperty name="width" value="0.2" units="cm"/>
+      <inkml:brushProperty name="height" value="0.4" units="cm"/>
+      <inkml:brushProperty name="color" value="#FFFC00"/>
+      <inkml:brushProperty name="tip" value="rectangle"/>
+      <inkml:brushProperty name="rasterOp" value="maskPen"/>
+    </inkml:brush>
+  </inkml:definitions>
+  <inkml:trace contextRef="#ctx0" brushRef="#br0">1 24,'42'0,"-6"0,1 0,-4 0,-4 0,27 0,-28 0,36 0,-24 0,6 0,-1 0,-1 0,-4 0,11 0,-5 0,6 0,7 0,1 0,0 0,6 0,-12 0,4 0,1-5,-5 3,19-3,-11 5,13 0,-1 0,3 0,7 0,-1 0,1 0,-14 0,10 0,-10 0,7 0,5 0,2 0,-18 0,29 0,-29 0,18 0,-2 0,-5 0,7 0,-15 0,12-5,-11 4,6-5,-1 6,-1 0,-5 0,6 0,-8 0,-7 0,21 0,-16 0,5 0,-6 0,-10 5,13-3,-6 2,-3-4,-12 0,-1 0,-12 0,-1 4,-6-3,1 7,-1-7,6 3,-4-4,9 0,-4 0,12 0,-5 0,4 0,-6 0,1 0,-1 0,1 0,5 0,-4 0,5 0,-7 0,1 0,-6 0,-1 0,-10 0,-2 0,-7 0,-2 0,-1 0,-2 0,3 0</inkml:trace>
+</inkml:ink>
+</file>
+
+<file path=ppt/ink/ink23.xml><?xml version="1.0" encoding="utf-8"?>
+<inkml:ink xmlns:inkml="http://www.w3.org/2003/InkML">
+  <inkml:definitions>
+    <inkml:context xml:id="ctx0">
+      <inkml:inkSource xml:id="inkSrc0">
+        <inkml:traceFormat>
+          <inkml:channel name="X" type="integer" min="-2.14748E9" max="2.14748E9" units="cm"/>
+          <inkml:channel name="Y" type="integer" min="-2.14748E9" max="2.14748E9" units="cm"/>
+        </inkml:traceFormat>
+        <inkml:channelProperties>
+          <inkml:channelProperty channel="X" name="resolution" value="1000" units="1/cm"/>
+          <inkml:channelProperty channel="Y" name="resolution" value="1000" units="1/cm"/>
+        </inkml:channelProperties>
+      </inkml:inkSource>
+      <inkml:timestamp xml:id="ts0" timeString="2026-03-22T02:41:44.912"/>
+    </inkml:context>
+    <inkml:brush xml:id="br0">
+      <inkml:brushProperty name="width" value="0.1" units="cm"/>
+      <inkml:brushProperty name="height" value="0.2" units="cm"/>
+      <inkml:brushProperty name="color" value="#A2D762"/>
+      <inkml:brushProperty name="tip" value="rectangle"/>
+      <inkml:brushProperty name="rasterOp" value="maskPen"/>
+    </inkml:brush>
+  </inkml:definitions>
+  <inkml:trace contextRef="#ctx0" brushRef="#br0">0 20,'37'0,"16"0,-11 0,31 0,-3 0,13 0,10 0,-44 0,4 0,43 0,4 0,-33 0,-1 0,32 0,-3 0,-41 0,-5 0,45 0,-44 0,0 0,44 0,-39 0,1 0,-3 0,-2 0,38 0,-1 0,-18 0,14 0,-34 0,1 0,37 0,-38 0,1 0,41 0,-6 0,-36 0,0 0,44 0,-43 0,0 0,43 0,-42 0,-3 0,16 0,-7 0,-2 0,0 0,5 0,2 0,3 0,33 0,-22 0,7 0,-1 0,-19 0,15 0,-23 0,19 0,-1 0,19 0,-13 0,-27 0,0 0,18 0,-1 0,-6 0,-10 0,21 0,-6 0,5 0,-13 0,4 0,-11 0,5 0,-7 0,0 0,-6-5,4 4,-10-3,11 4,-11 0,4 0,-5 0,5 0,-4 0,5-4,-12 2,-1-2,11 4,-17 0,12 0,-22 0,-4 0,0 0,-5 0,0 0,0 0,-3 0,-1 0</inkml:trace>
+</inkml:ink>
+</file>
+
 <file path=ppt/ink/ink3.xml><?xml version="1.0" encoding="utf-8"?>
 <inkml:ink xmlns:inkml="http://www.w3.org/2003/InkML">
   <inkml:definitions>
@@ -1805,6 +1869,199 @@
 </p:notes>
 </file>
 
+<file path=ppt/notesSlides/notesSlide13.xml><?xml version="1.0" encoding="utf-8"?>
+<p:notes xmlns:a="http://schemas.openxmlformats.org/drawingml/2006/main" xmlns:r="http://schemas.openxmlformats.org/officeDocument/2006/relationships" xmlns:p="http://schemas.openxmlformats.org/presentationml/2006/main">
+  <p:cSld>
+    <p:spTree>
+      <p:nvGrpSpPr>
+        <p:cNvPr id="1" name=""/>
+        <p:cNvGrpSpPr/>
+        <p:nvPr/>
+      </p:nvGrpSpPr>
+      <p:grpSpPr>
+        <a:xfrm>
+          <a:off x="0" y="0"/>
+          <a:ext cx="0" cy="0"/>
+          <a:chOff x="0" y="0"/>
+          <a:chExt cx="0" cy="0"/>
+        </a:xfrm>
+      </p:grpSpPr>
+      <p:sp>
+        <p:nvSpPr>
+          <p:cNvPr id="2" name="Slide Image Placeholder 1"/>
+          <p:cNvSpPr>
+            <a:spLocks noGrp="1" noRot="1" noChangeAspect="1"/>
+          </p:cNvSpPr>
+          <p:nvPr>
+            <p:ph type="sldImg"/>
+          </p:nvPr>
+        </p:nvSpPr>
+        <p:spPr>
+          <a:xfrm>
+            <a:off x="381000" y="685800"/>
+            <a:ext cx="6096000" cy="3429000"/>
+          </a:xfrm>
+        </p:spPr>
+      </p:sp>
+      <p:sp>
+        <p:nvSpPr>
+          <p:cNvPr id="3" name="Notes Placeholder 2"/>
+          <p:cNvSpPr>
+            <a:spLocks noGrp="1"/>
+          </p:cNvSpPr>
+          <p:nvPr>
+            <p:ph type="body" idx="1"/>
+          </p:nvPr>
+        </p:nvSpPr>
+        <p:spPr/>
+        <p:txBody>
+          <a:bodyPr/>
+          <a:lstStyle/>
+          <a:p>
+            <a:endParaRPr lang="en-US" dirty="0"/>
+          </a:p>
+        </p:txBody>
+      </p:sp>
+    </p:spTree>
+    <p:extLst>
+      <p:ext uri="{BB962C8B-B14F-4D97-AF65-F5344CB8AC3E}">
+        <p14:creationId xmlns:p14="http://schemas.microsoft.com/office/powerpoint/2010/main" val="3601438132"/>
+      </p:ext>
+    </p:extLst>
+  </p:cSld>
+  <p:clrMapOvr>
+    <a:masterClrMapping/>
+  </p:clrMapOvr>
+</p:notes>
+</file>
+
+<file path=ppt/notesSlides/notesSlide14.xml><?xml version="1.0" encoding="utf-8"?>
+<p:notes xmlns:a="http://schemas.openxmlformats.org/drawingml/2006/main" xmlns:r="http://schemas.openxmlformats.org/officeDocument/2006/relationships" xmlns:p="http://schemas.openxmlformats.org/presentationml/2006/main" showMasterSp="0" showMasterPhAnim="0">
+  <p:cSld>
+    <p:spTree>
+      <p:nvGrpSpPr>
+        <p:cNvPr id="1" name="Shape 209">
+          <a:extLst>
+            <a:ext uri="{FF2B5EF4-FFF2-40B4-BE49-F238E27FC236}">
+              <a16:creationId xmlns:a16="http://schemas.microsoft.com/office/drawing/2014/main" id="{47AAE0FB-B375-943D-A5D1-50CCD94D83FD}"/>
+            </a:ext>
+          </a:extLst>
+        </p:cNvPr>
+        <p:cNvGrpSpPr/>
+        <p:nvPr/>
+      </p:nvGrpSpPr>
+      <p:grpSpPr>
+        <a:xfrm>
+          <a:off x="0" y="0"/>
+          <a:ext cx="0" cy="0"/>
+          <a:chOff x="0" y="0"/>
+          <a:chExt cx="0" cy="0"/>
+        </a:xfrm>
+      </p:grpSpPr>
+      <p:sp>
+        <p:nvSpPr>
+          <p:cNvPr id="210" name="Google Shape;210;ge1d838b627_4_0:notes">
+            <a:extLst>
+              <a:ext uri="{FF2B5EF4-FFF2-40B4-BE49-F238E27FC236}">
+                <a16:creationId xmlns:a16="http://schemas.microsoft.com/office/drawing/2014/main" id="{B60FD27E-0B54-24F4-53B5-CE4AC264E04B}"/>
+              </a:ext>
+            </a:extLst>
+          </p:cNvPr>
+          <p:cNvSpPr>
+            <a:spLocks noGrp="1" noRot="1" noChangeAspect="1"/>
+          </p:cNvSpPr>
+          <p:nvPr>
+            <p:ph type="sldImg" idx="2"/>
+          </p:nvPr>
+        </p:nvSpPr>
+        <p:spPr>
+          <a:xfrm>
+            <a:off x="381000" y="685800"/>
+            <a:ext cx="6096000" cy="3429000"/>
+          </a:xfrm>
+          <a:custGeom>
+            <a:avLst/>
+            <a:gdLst/>
+            <a:ahLst/>
+            <a:cxnLst/>
+            <a:rect l="l" t="t" r="r" b="b"/>
+            <a:pathLst>
+              <a:path w="120000" h="120000" extrusionOk="0">
+                <a:moveTo>
+                  <a:pt x="0" y="0"/>
+                </a:moveTo>
+                <a:lnTo>
+                  <a:pt x="120000" y="0"/>
+                </a:lnTo>
+                <a:lnTo>
+                  <a:pt x="120000" y="120000"/>
+                </a:lnTo>
+                <a:lnTo>
+                  <a:pt x="0" y="120000"/>
+                </a:lnTo>
+                <a:close/>
+              </a:path>
+            </a:pathLst>
+          </a:custGeom>
+        </p:spPr>
+      </p:sp>
+      <p:sp>
+        <p:nvSpPr>
+          <p:cNvPr id="211" name="Google Shape;211;ge1d838b627_4_0:notes">
+            <a:extLst>
+              <a:ext uri="{FF2B5EF4-FFF2-40B4-BE49-F238E27FC236}">
+                <a16:creationId xmlns:a16="http://schemas.microsoft.com/office/drawing/2014/main" id="{537EC22C-6DAF-F320-1454-5360355987D8}"/>
+              </a:ext>
+            </a:extLst>
+          </p:cNvPr>
+          <p:cNvSpPr txBox="1">
+            <a:spLocks noGrp="1"/>
+          </p:cNvSpPr>
+          <p:nvPr>
+            <p:ph type="body" idx="1"/>
+          </p:nvPr>
+        </p:nvSpPr>
+        <p:spPr>
+          <a:xfrm>
+            <a:off x="685800" y="4343400"/>
+            <a:ext cx="5486400" cy="4114800"/>
+          </a:xfrm>
+          <a:prstGeom prst="rect">
+            <a:avLst/>
+          </a:prstGeom>
+        </p:spPr>
+        <p:txBody>
+          <a:bodyPr spcFirstLastPara="1" wrap="square" lIns="91425" tIns="91425" rIns="91425" bIns="91425" anchor="t" anchorCtr="0">
+            <a:noAutofit/>
+          </a:bodyPr>
+          <a:lstStyle/>
+          <a:p>
+            <a:pPr marL="0" lvl="0" indent="0" algn="l" rtl="0">
+              <a:spcBef>
+                <a:spcPts val="0"/>
+              </a:spcBef>
+              <a:spcAft>
+                <a:spcPts val="0"/>
+              </a:spcAft>
+              <a:buNone/>
+            </a:pPr>
+            <a:endParaRPr/>
+          </a:p>
+        </p:txBody>
+      </p:sp>
+    </p:spTree>
+    <p:extLst>
+      <p:ext uri="{BB962C8B-B14F-4D97-AF65-F5344CB8AC3E}">
+        <p14:creationId xmlns:p14="http://schemas.microsoft.com/office/powerpoint/2010/main" val="3376031118"/>
+      </p:ext>
+    </p:extLst>
+  </p:cSld>
+  <p:clrMapOvr>
+    <a:masterClrMapping/>
+  </p:clrMapOvr>
+</p:notes>
+</file>
+
 <file path=ppt/notesSlides/notesSlide2.xml><?xml version="1.0" encoding="utf-8"?>
 <p:notes xmlns:a="http://schemas.openxmlformats.org/drawingml/2006/main" xmlns:r="http://schemas.openxmlformats.org/officeDocument/2006/relationships" xmlns:p="http://schemas.openxmlformats.org/presentationml/2006/main" showMasterSp="0" showMasterPhAnim="0">
   <p:cSld>
@@ -3351,190 +3608,6 @@
 </file>
 
 <file path=ppt/slideLayouts/slideLayout10.xml><?xml version="1.0" encoding="utf-8"?>
-<p:sldLayout xmlns:a="http://schemas.openxmlformats.org/drawingml/2006/main" xmlns:r="http://schemas.openxmlformats.org/officeDocument/2006/relationships" xmlns:p="http://schemas.openxmlformats.org/presentationml/2006/main" matchingName="Title only 1">
-  <p:cSld name="TITLE_ONLY_1">
-    <p:spTree>
-      <p:nvGrpSpPr>
-        <p:cNvPr id="1" name="Shape 80"/>
-        <p:cNvGrpSpPr/>
-        <p:nvPr/>
-      </p:nvGrpSpPr>
-      <p:grpSpPr>
-        <a:xfrm>
-          <a:off x="0" y="0"/>
-          <a:ext cx="0" cy="0"/>
-          <a:chOff x="0" y="0"/>
-          <a:chExt cx="0" cy="0"/>
-        </a:xfrm>
-      </p:grpSpPr>
-      <p:sp>
-        <p:nvSpPr>
-          <p:cNvPr id="81" name="Google Shape;81;p16"/>
-          <p:cNvSpPr txBox="1">
-            <a:spLocks noGrp="1"/>
-          </p:cNvSpPr>
-          <p:nvPr>
-            <p:ph type="title"/>
-          </p:nvPr>
-        </p:nvSpPr>
-        <p:spPr>
-          <a:xfrm>
-            <a:off x="228600" y="329146"/>
-            <a:ext cx="8686800" cy="572700"/>
-          </a:xfrm>
-          <a:prstGeom prst="rect">
-            <a:avLst/>
-          </a:prstGeom>
-          <a:ln>
-            <a:noFill/>
-          </a:ln>
-        </p:spPr>
-        <p:txBody>
-          <a:bodyPr spcFirstLastPara="1" wrap="square" lIns="91425" tIns="91425" rIns="91425" bIns="91425" anchor="t" anchorCtr="0">
-            <a:noAutofit/>
-          </a:bodyPr>
-          <a:lstStyle>
-            <a:lvl1pPr lvl="0">
-              <a:spcBef>
-                <a:spcPts val="0"/>
-              </a:spcBef>
-              <a:spcAft>
-                <a:spcPts val="0"/>
-              </a:spcAft>
-              <a:buSzPts val="2600"/>
-              <a:buNone/>
-              <a:defRPr sz="2600" b="0"/>
-            </a:lvl1pPr>
-            <a:lvl2pPr lvl="1">
-              <a:spcBef>
-                <a:spcPts val="0"/>
-              </a:spcBef>
-              <a:spcAft>
-                <a:spcPts val="0"/>
-              </a:spcAft>
-              <a:buSzPts val="2600"/>
-              <a:buNone/>
-              <a:defRPr/>
-            </a:lvl2pPr>
-            <a:lvl3pPr lvl="2">
-              <a:spcBef>
-                <a:spcPts val="0"/>
-              </a:spcBef>
-              <a:spcAft>
-                <a:spcPts val="0"/>
-              </a:spcAft>
-              <a:buSzPts val="2600"/>
-              <a:buNone/>
-              <a:defRPr/>
-            </a:lvl3pPr>
-            <a:lvl4pPr lvl="3">
-              <a:spcBef>
-                <a:spcPts val="0"/>
-              </a:spcBef>
-              <a:spcAft>
-                <a:spcPts val="0"/>
-              </a:spcAft>
-              <a:buSzPts val="2600"/>
-              <a:buNone/>
-              <a:defRPr/>
-            </a:lvl4pPr>
-            <a:lvl5pPr lvl="4">
-              <a:spcBef>
-                <a:spcPts val="0"/>
-              </a:spcBef>
-              <a:spcAft>
-                <a:spcPts val="0"/>
-              </a:spcAft>
-              <a:buSzPts val="2600"/>
-              <a:buNone/>
-              <a:defRPr/>
-            </a:lvl5pPr>
-            <a:lvl6pPr lvl="5">
-              <a:spcBef>
-                <a:spcPts val="0"/>
-              </a:spcBef>
-              <a:spcAft>
-                <a:spcPts val="0"/>
-              </a:spcAft>
-              <a:buSzPts val="2600"/>
-              <a:buNone/>
-              <a:defRPr/>
-            </a:lvl6pPr>
-            <a:lvl7pPr lvl="6">
-              <a:spcBef>
-                <a:spcPts val="0"/>
-              </a:spcBef>
-              <a:spcAft>
-                <a:spcPts val="0"/>
-              </a:spcAft>
-              <a:buSzPts val="2600"/>
-              <a:buNone/>
-              <a:defRPr/>
-            </a:lvl7pPr>
-            <a:lvl8pPr lvl="7">
-              <a:spcBef>
-                <a:spcPts val="0"/>
-              </a:spcBef>
-              <a:spcAft>
-                <a:spcPts val="0"/>
-              </a:spcAft>
-              <a:buSzPts val="2600"/>
-              <a:buNone/>
-              <a:defRPr/>
-            </a:lvl8pPr>
-            <a:lvl9pPr lvl="8">
-              <a:spcBef>
-                <a:spcPts val="0"/>
-              </a:spcBef>
-              <a:spcAft>
-                <a:spcPts val="0"/>
-              </a:spcAft>
-              <a:buSzPts val="2600"/>
-              <a:buNone/>
-              <a:defRPr/>
-            </a:lvl9pPr>
-          </a:lstStyle>
-          <a:p>
-            <a:endParaRPr/>
-          </a:p>
-        </p:txBody>
-      </p:sp>
-      <p:pic>
-        <p:nvPicPr>
-          <p:cNvPr id="82" name="Google Shape;82;p16" title="tech.png"/>
-          <p:cNvPicPr preferRelativeResize="0"/>
-          <p:nvPr/>
-        </p:nvPicPr>
-        <p:blipFill rotWithShape="1">
-          <a:blip r:embed="rId2">
-            <a:alphaModFix amt="66000"/>
-          </a:blip>
-          <a:srcRect l="16171" r="18704"/>
-          <a:stretch/>
-        </p:blipFill>
-        <p:spPr>
-          <a:xfrm rot="2517579">
-            <a:off x="3900887" y="-3385324"/>
-            <a:ext cx="9692321" cy="8371198"/>
-          </a:xfrm>
-          <a:prstGeom prst="rect">
-            <a:avLst/>
-          </a:prstGeom>
-          <a:noFill/>
-          <a:ln>
-            <a:noFill/>
-          </a:ln>
-        </p:spPr>
-      </p:pic>
-    </p:spTree>
-  </p:cSld>
-  <p:clrMapOvr>
-    <a:masterClrMapping/>
-  </p:clrMapOvr>
-</p:sldLayout>
-</file>
-
-<file path=ppt/slideLayouts/slideLayout11.xml><?xml version="1.0" encoding="utf-8"?>
 <p:sldLayout xmlns:a="http://schemas.openxmlformats.org/drawingml/2006/main" xmlns:r="http://schemas.openxmlformats.org/officeDocument/2006/relationships" xmlns:p="http://schemas.openxmlformats.org/presentationml/2006/main" matchingName="Title and three columns">
   <p:cSld name="BLANK_1_1_1_2">
     <p:spTree>
@@ -4604,7 +4677,7 @@
 </p:sldLayout>
 </file>
 
-<file path=ppt/slideLayouts/slideLayout12.xml><?xml version="1.0" encoding="utf-8"?>
+<file path=ppt/slideLayouts/slideLayout11.xml><?xml version="1.0" encoding="utf-8"?>
 <p:sldLayout xmlns:a="http://schemas.openxmlformats.org/drawingml/2006/main" xmlns:r="http://schemas.openxmlformats.org/officeDocument/2006/relationships" xmlns:p="http://schemas.openxmlformats.org/presentationml/2006/main" matchingName="Numbers and text">
   <p:cSld name="BLANK_1_1_1_1_1_1">
     <p:spTree>
@@ -5246,7 +5319,7 @@
 </p:sldLayout>
 </file>
 
-<file path=ppt/slideLayouts/slideLayout13.xml><?xml version="1.0" encoding="utf-8"?>
+<file path=ppt/slideLayouts/slideLayout12.xml><?xml version="1.0" encoding="utf-8"?>
 <p:sldLayout xmlns:a="http://schemas.openxmlformats.org/drawingml/2006/main" xmlns:r="http://schemas.openxmlformats.org/officeDocument/2006/relationships" xmlns:p="http://schemas.openxmlformats.org/presentationml/2006/main" matchingName="Background">
   <p:cSld name="BLANK_1_1_1_1_1_1_1">
     <p:spTree>
@@ -5298,7 +5371,7 @@
 </p:sldLayout>
 </file>
 
-<file path=ppt/slideLayouts/slideLayout14.xml><?xml version="1.0" encoding="utf-8"?>
+<file path=ppt/slideLayouts/slideLayout13.xml><?xml version="1.0" encoding="utf-8"?>
 <p:sldLayout xmlns:a="http://schemas.openxmlformats.org/drawingml/2006/main" xmlns:r="http://schemas.openxmlformats.org/officeDocument/2006/relationships" xmlns:p="http://schemas.openxmlformats.org/presentationml/2006/main" matchingName="Background 1">
   <p:cSld name="BLANK_1_1_1_1_1_1_1_1">
     <p:spTree>
@@ -6418,6 +6491,13 @@
             <a:noFill/>
           </a:ln>
         </p:spPr>
+        <p:txBody>
+          <a:bodyPr/>
+          <a:lstStyle/>
+          <a:p>
+            <a:endParaRPr lang="en-US"/>
+          </a:p>
+        </p:txBody>
       </p:sp>
       <p:pic>
         <p:nvPicPr>
@@ -6639,502 +6719,6 @@
 </file>
 
 <file path=ppt/slideLayouts/slideLayout6.xml><?xml version="1.0" encoding="utf-8"?>
-<p:sldLayout xmlns:a="http://schemas.openxmlformats.org/drawingml/2006/main" xmlns:r="http://schemas.openxmlformats.org/officeDocument/2006/relationships" xmlns:p="http://schemas.openxmlformats.org/presentationml/2006/main" matchingName="Section title and description">
-  <p:cSld name="SECTION_TITLE_AND_DESCRIPTION">
-    <p:spTree>
-      <p:nvGrpSpPr>
-        <p:cNvPr id="1" name="Shape 39"/>
-        <p:cNvGrpSpPr/>
-        <p:nvPr/>
-      </p:nvGrpSpPr>
-      <p:grpSpPr>
-        <a:xfrm>
-          <a:off x="0" y="0"/>
-          <a:ext cx="0" cy="0"/>
-          <a:chOff x="0" y="0"/>
-          <a:chExt cx="0" cy="0"/>
-        </a:xfrm>
-      </p:grpSpPr>
-      <p:sp>
-        <p:nvSpPr>
-          <p:cNvPr id="40" name="Google Shape;40;p9"/>
-          <p:cNvSpPr txBox="1">
-            <a:spLocks noGrp="1"/>
-          </p:cNvSpPr>
-          <p:nvPr>
-            <p:ph type="subTitle" idx="1"/>
-          </p:nvPr>
-        </p:nvSpPr>
-        <p:spPr>
-          <a:xfrm>
-            <a:off x="720064" y="1580125"/>
-            <a:ext cx="3597000" cy="2389800"/>
-          </a:xfrm>
-          <a:prstGeom prst="rect">
-            <a:avLst/>
-          </a:prstGeom>
-        </p:spPr>
-        <p:txBody>
-          <a:bodyPr spcFirstLastPara="1" wrap="square" lIns="91425" tIns="91425" rIns="91425" bIns="91425" anchor="t" anchorCtr="0">
-            <a:noAutofit/>
-          </a:bodyPr>
-          <a:lstStyle>
-            <a:lvl1pPr lvl="0" rtl="0">
-              <a:lnSpc>
-                <a:spcPct val="100000"/>
-              </a:lnSpc>
-              <a:spcBef>
-                <a:spcPts val="0"/>
-              </a:spcBef>
-              <a:spcAft>
-                <a:spcPts val="0"/>
-              </a:spcAft>
-              <a:buSzPts val="1400"/>
-              <a:buNone/>
-              <a:defRPr/>
-            </a:lvl1pPr>
-            <a:lvl2pPr lvl="1" rtl="0">
-              <a:lnSpc>
-                <a:spcPct val="100000"/>
-              </a:lnSpc>
-              <a:spcBef>
-                <a:spcPts val="0"/>
-              </a:spcBef>
-              <a:spcAft>
-                <a:spcPts val="0"/>
-              </a:spcAft>
-              <a:buSzPts val="1400"/>
-              <a:buNone/>
-              <a:defRPr/>
-            </a:lvl2pPr>
-            <a:lvl3pPr lvl="2" rtl="0">
-              <a:lnSpc>
-                <a:spcPct val="100000"/>
-              </a:lnSpc>
-              <a:spcBef>
-                <a:spcPts val="0"/>
-              </a:spcBef>
-              <a:spcAft>
-                <a:spcPts val="0"/>
-              </a:spcAft>
-              <a:buSzPts val="1400"/>
-              <a:buNone/>
-              <a:defRPr/>
-            </a:lvl3pPr>
-            <a:lvl4pPr lvl="3" rtl="0">
-              <a:lnSpc>
-                <a:spcPct val="100000"/>
-              </a:lnSpc>
-              <a:spcBef>
-                <a:spcPts val="0"/>
-              </a:spcBef>
-              <a:spcAft>
-                <a:spcPts val="0"/>
-              </a:spcAft>
-              <a:buSzPts val="1400"/>
-              <a:buNone/>
-              <a:defRPr/>
-            </a:lvl4pPr>
-            <a:lvl5pPr lvl="4" rtl="0">
-              <a:lnSpc>
-                <a:spcPct val="100000"/>
-              </a:lnSpc>
-              <a:spcBef>
-                <a:spcPts val="0"/>
-              </a:spcBef>
-              <a:spcAft>
-                <a:spcPts val="0"/>
-              </a:spcAft>
-              <a:buSzPts val="1400"/>
-              <a:buNone/>
-              <a:defRPr/>
-            </a:lvl5pPr>
-            <a:lvl6pPr lvl="5" rtl="0">
-              <a:lnSpc>
-                <a:spcPct val="100000"/>
-              </a:lnSpc>
-              <a:spcBef>
-                <a:spcPts val="0"/>
-              </a:spcBef>
-              <a:spcAft>
-                <a:spcPts val="0"/>
-              </a:spcAft>
-              <a:buSzPts val="1400"/>
-              <a:buNone/>
-              <a:defRPr/>
-            </a:lvl6pPr>
-            <a:lvl7pPr lvl="6" rtl="0">
-              <a:lnSpc>
-                <a:spcPct val="100000"/>
-              </a:lnSpc>
-              <a:spcBef>
-                <a:spcPts val="0"/>
-              </a:spcBef>
-              <a:spcAft>
-                <a:spcPts val="0"/>
-              </a:spcAft>
-              <a:buSzPts val="1400"/>
-              <a:buNone/>
-              <a:defRPr/>
-            </a:lvl7pPr>
-            <a:lvl8pPr lvl="7" rtl="0">
-              <a:lnSpc>
-                <a:spcPct val="100000"/>
-              </a:lnSpc>
-              <a:spcBef>
-                <a:spcPts val="0"/>
-              </a:spcBef>
-              <a:spcAft>
-                <a:spcPts val="0"/>
-              </a:spcAft>
-              <a:buSzPts val="1400"/>
-              <a:buNone/>
-              <a:defRPr/>
-            </a:lvl8pPr>
-            <a:lvl9pPr lvl="8" rtl="0">
-              <a:lnSpc>
-                <a:spcPct val="100000"/>
-              </a:lnSpc>
-              <a:spcBef>
-                <a:spcPts val="0"/>
-              </a:spcBef>
-              <a:spcAft>
-                <a:spcPts val="0"/>
-              </a:spcAft>
-              <a:buSzPts val="1400"/>
-              <a:buNone/>
-              <a:defRPr/>
-            </a:lvl9pPr>
-          </a:lstStyle>
-          <a:p>
-            <a:endParaRPr/>
-          </a:p>
-        </p:txBody>
-      </p:sp>
-      <p:sp>
-        <p:nvSpPr>
-          <p:cNvPr id="41" name="Google Shape;41;p9"/>
-          <p:cNvSpPr txBox="1">
-            <a:spLocks noGrp="1"/>
-          </p:cNvSpPr>
-          <p:nvPr>
-            <p:ph type="title"/>
-          </p:nvPr>
-        </p:nvSpPr>
-        <p:spPr>
-          <a:xfrm>
-            <a:off x="720000" y="445025"/>
-            <a:ext cx="7704000" cy="572700"/>
-          </a:xfrm>
-          <a:prstGeom prst="rect">
-            <a:avLst/>
-          </a:prstGeom>
-          <a:ln>
-            <a:noFill/>
-          </a:ln>
-        </p:spPr>
-        <p:txBody>
-          <a:bodyPr spcFirstLastPara="1" wrap="square" lIns="91425" tIns="91425" rIns="91425" bIns="91425" anchor="t" anchorCtr="0">
-            <a:noAutofit/>
-          </a:bodyPr>
-          <a:lstStyle>
-            <a:lvl1pPr lvl="0" algn="ctr" rtl="0">
-              <a:spcBef>
-                <a:spcPts val="0"/>
-              </a:spcBef>
-              <a:spcAft>
-                <a:spcPts val="0"/>
-              </a:spcAft>
-              <a:buSzPts val="2600"/>
-              <a:buNone/>
-              <a:defRPr sz="2600"/>
-            </a:lvl1pPr>
-            <a:lvl2pPr lvl="1" rtl="0">
-              <a:spcBef>
-                <a:spcPts val="0"/>
-              </a:spcBef>
-              <a:spcAft>
-                <a:spcPts val="0"/>
-              </a:spcAft>
-              <a:buSzPts val="2600"/>
-              <a:buNone/>
-              <a:defRPr/>
-            </a:lvl2pPr>
-            <a:lvl3pPr lvl="2" rtl="0">
-              <a:spcBef>
-                <a:spcPts val="0"/>
-              </a:spcBef>
-              <a:spcAft>
-                <a:spcPts val="0"/>
-              </a:spcAft>
-              <a:buSzPts val="2600"/>
-              <a:buNone/>
-              <a:defRPr/>
-            </a:lvl3pPr>
-            <a:lvl4pPr lvl="3" rtl="0">
-              <a:spcBef>
-                <a:spcPts val="0"/>
-              </a:spcBef>
-              <a:spcAft>
-                <a:spcPts val="0"/>
-              </a:spcAft>
-              <a:buSzPts val="2600"/>
-              <a:buNone/>
-              <a:defRPr/>
-            </a:lvl4pPr>
-            <a:lvl5pPr lvl="4" rtl="0">
-              <a:spcBef>
-                <a:spcPts val="0"/>
-              </a:spcBef>
-              <a:spcAft>
-                <a:spcPts val="0"/>
-              </a:spcAft>
-              <a:buSzPts val="2600"/>
-              <a:buNone/>
-              <a:defRPr/>
-            </a:lvl5pPr>
-            <a:lvl6pPr lvl="5" rtl="0">
-              <a:spcBef>
-                <a:spcPts val="0"/>
-              </a:spcBef>
-              <a:spcAft>
-                <a:spcPts val="0"/>
-              </a:spcAft>
-              <a:buSzPts val="2600"/>
-              <a:buNone/>
-              <a:defRPr/>
-            </a:lvl6pPr>
-            <a:lvl7pPr lvl="6" rtl="0">
-              <a:spcBef>
-                <a:spcPts val="0"/>
-              </a:spcBef>
-              <a:spcAft>
-                <a:spcPts val="0"/>
-              </a:spcAft>
-              <a:buSzPts val="2600"/>
-              <a:buNone/>
-              <a:defRPr/>
-            </a:lvl7pPr>
-            <a:lvl8pPr lvl="7" rtl="0">
-              <a:spcBef>
-                <a:spcPts val="0"/>
-              </a:spcBef>
-              <a:spcAft>
-                <a:spcPts val="0"/>
-              </a:spcAft>
-              <a:buSzPts val="2600"/>
-              <a:buNone/>
-              <a:defRPr/>
-            </a:lvl8pPr>
-            <a:lvl9pPr lvl="8" rtl="0">
-              <a:spcBef>
-                <a:spcPts val="0"/>
-              </a:spcBef>
-              <a:spcAft>
-                <a:spcPts val="0"/>
-              </a:spcAft>
-              <a:buSzPts val="2600"/>
-              <a:buNone/>
-              <a:defRPr/>
-            </a:lvl9pPr>
-          </a:lstStyle>
-          <a:p>
-            <a:endParaRPr/>
-          </a:p>
-        </p:txBody>
-      </p:sp>
-      <p:sp>
-        <p:nvSpPr>
-          <p:cNvPr id="42" name="Google Shape;42;p9"/>
-          <p:cNvSpPr txBox="1">
-            <a:spLocks noGrp="1"/>
-          </p:cNvSpPr>
-          <p:nvPr>
-            <p:ph type="subTitle" idx="2"/>
-          </p:nvPr>
-        </p:nvSpPr>
-        <p:spPr>
-          <a:xfrm>
-            <a:off x="4826936" y="1580125"/>
-            <a:ext cx="3597000" cy="2389800"/>
-          </a:xfrm>
-          <a:prstGeom prst="rect">
-            <a:avLst/>
-          </a:prstGeom>
-        </p:spPr>
-        <p:txBody>
-          <a:bodyPr spcFirstLastPara="1" wrap="square" lIns="91425" tIns="91425" rIns="91425" bIns="91425" anchor="t" anchorCtr="0">
-            <a:noAutofit/>
-          </a:bodyPr>
-          <a:lstStyle>
-            <a:lvl1pPr lvl="0" rtl="0">
-              <a:lnSpc>
-                <a:spcPct val="100000"/>
-              </a:lnSpc>
-              <a:spcBef>
-                <a:spcPts val="0"/>
-              </a:spcBef>
-              <a:spcAft>
-                <a:spcPts val="0"/>
-              </a:spcAft>
-              <a:buSzPts val="1400"/>
-              <a:buNone/>
-              <a:defRPr/>
-            </a:lvl1pPr>
-            <a:lvl2pPr lvl="1" rtl="0">
-              <a:lnSpc>
-                <a:spcPct val="100000"/>
-              </a:lnSpc>
-              <a:spcBef>
-                <a:spcPts val="0"/>
-              </a:spcBef>
-              <a:spcAft>
-                <a:spcPts val="0"/>
-              </a:spcAft>
-              <a:buSzPts val="1400"/>
-              <a:buNone/>
-              <a:defRPr/>
-            </a:lvl2pPr>
-            <a:lvl3pPr lvl="2" rtl="0">
-              <a:lnSpc>
-                <a:spcPct val="100000"/>
-              </a:lnSpc>
-              <a:spcBef>
-                <a:spcPts val="0"/>
-              </a:spcBef>
-              <a:spcAft>
-                <a:spcPts val="0"/>
-              </a:spcAft>
-              <a:buSzPts val="1400"/>
-              <a:buNone/>
-              <a:defRPr/>
-            </a:lvl3pPr>
-            <a:lvl4pPr lvl="3" rtl="0">
-              <a:lnSpc>
-                <a:spcPct val="100000"/>
-              </a:lnSpc>
-              <a:spcBef>
-                <a:spcPts val="0"/>
-              </a:spcBef>
-              <a:spcAft>
-                <a:spcPts val="0"/>
-              </a:spcAft>
-              <a:buSzPts val="1400"/>
-              <a:buNone/>
-              <a:defRPr/>
-            </a:lvl4pPr>
-            <a:lvl5pPr lvl="4" rtl="0">
-              <a:lnSpc>
-                <a:spcPct val="100000"/>
-              </a:lnSpc>
-              <a:spcBef>
-                <a:spcPts val="0"/>
-              </a:spcBef>
-              <a:spcAft>
-                <a:spcPts val="0"/>
-              </a:spcAft>
-              <a:buSzPts val="1400"/>
-              <a:buNone/>
-              <a:defRPr/>
-            </a:lvl5pPr>
-            <a:lvl6pPr lvl="5" rtl="0">
-              <a:lnSpc>
-                <a:spcPct val="100000"/>
-              </a:lnSpc>
-              <a:spcBef>
-                <a:spcPts val="0"/>
-              </a:spcBef>
-              <a:spcAft>
-                <a:spcPts val="0"/>
-              </a:spcAft>
-              <a:buSzPts val="1400"/>
-              <a:buNone/>
-              <a:defRPr/>
-            </a:lvl6pPr>
-            <a:lvl7pPr lvl="6" rtl="0">
-              <a:lnSpc>
-                <a:spcPct val="100000"/>
-              </a:lnSpc>
-              <a:spcBef>
-                <a:spcPts val="0"/>
-              </a:spcBef>
-              <a:spcAft>
-                <a:spcPts val="0"/>
-              </a:spcAft>
-              <a:buSzPts val="1400"/>
-              <a:buNone/>
-              <a:defRPr/>
-            </a:lvl7pPr>
-            <a:lvl8pPr lvl="7" rtl="0">
-              <a:lnSpc>
-                <a:spcPct val="100000"/>
-              </a:lnSpc>
-              <a:spcBef>
-                <a:spcPts val="0"/>
-              </a:spcBef>
-              <a:spcAft>
-                <a:spcPts val="0"/>
-              </a:spcAft>
-              <a:buSzPts val="1400"/>
-              <a:buNone/>
-              <a:defRPr/>
-            </a:lvl8pPr>
-            <a:lvl9pPr lvl="8" rtl="0">
-              <a:lnSpc>
-                <a:spcPct val="100000"/>
-              </a:lnSpc>
-              <a:spcBef>
-                <a:spcPts val="0"/>
-              </a:spcBef>
-              <a:spcAft>
-                <a:spcPts val="0"/>
-              </a:spcAft>
-              <a:buSzPts val="1400"/>
-              <a:buNone/>
-              <a:defRPr/>
-            </a:lvl9pPr>
-          </a:lstStyle>
-          <a:p>
-            <a:endParaRPr/>
-          </a:p>
-        </p:txBody>
-      </p:sp>
-      <p:pic>
-        <p:nvPicPr>
-          <p:cNvPr id="43" name="Google Shape;43;p9" title="tech.png"/>
-          <p:cNvPicPr preferRelativeResize="0"/>
-          <p:nvPr/>
-        </p:nvPicPr>
-        <p:blipFill rotWithShape="1">
-          <a:blip r:embed="rId2">
-            <a:alphaModFix amt="56000"/>
-          </a:blip>
-          <a:srcRect l="16171" r="18704"/>
-          <a:stretch/>
-        </p:blipFill>
-        <p:spPr>
-          <a:xfrm flipH="1">
-            <a:off x="1806050" y="3231600"/>
-            <a:ext cx="7337952" cy="5739150"/>
-          </a:xfrm>
-          <a:prstGeom prst="rect">
-            <a:avLst/>
-          </a:prstGeom>
-          <a:noFill/>
-          <a:ln>
-            <a:noFill/>
-          </a:ln>
-        </p:spPr>
-      </p:pic>
-    </p:spTree>
-  </p:cSld>
-  <p:clrMapOvr>
-    <a:masterClrMapping/>
-  </p:clrMapOvr>
-</p:sldLayout>
-</file>
-
-<file path=ppt/slideLayouts/slideLayout7.xml><?xml version="1.0" encoding="utf-8"?>
 <p:sldLayout xmlns:a="http://schemas.openxmlformats.org/drawingml/2006/main" xmlns:r="http://schemas.openxmlformats.org/officeDocument/2006/relationships" xmlns:p="http://schemas.openxmlformats.org/presentationml/2006/main" matchingName="Big number">
   <p:cSld name="BIG_NUMBER">
     <p:spTree>
@@ -7480,7 +7064,7 @@
 </p:sldLayout>
 </file>
 
-<file path=ppt/slideLayouts/slideLayout8.xml><?xml version="1.0" encoding="utf-8"?>
+<file path=ppt/slideLayouts/slideLayout7.xml><?xml version="1.0" encoding="utf-8"?>
 <p:sldLayout xmlns:a="http://schemas.openxmlformats.org/drawingml/2006/main" xmlns:r="http://schemas.openxmlformats.org/officeDocument/2006/relationships" xmlns:p="http://schemas.openxmlformats.org/presentationml/2006/main" matchingName="Table of contents">
   <p:cSld name="BLANK_1_1_1_1_2_1">
     <p:spTree>
@@ -10509,7 +10093,7 @@
 </p:sldLayout>
 </file>
 
-<file path=ppt/slideLayouts/slideLayout9.xml><?xml version="1.0" encoding="utf-8"?>
+<file path=ppt/slideLayouts/slideLayout8.xml><?xml version="1.0" encoding="utf-8"?>
 <p:sldLayout xmlns:a="http://schemas.openxmlformats.org/drawingml/2006/main" xmlns:r="http://schemas.openxmlformats.org/officeDocument/2006/relationships" xmlns:p="http://schemas.openxmlformats.org/presentationml/2006/main" matchingName="Title and text">
   <p:cSld name="CUSTOM">
     <p:spTree>
@@ -10804,6 +10388,190 @@
           <a:xfrm rot="-5111130">
             <a:off x="5582875" y="-1103551"/>
             <a:ext cx="7337952" cy="5739149"/>
+          </a:xfrm>
+          <a:prstGeom prst="rect">
+            <a:avLst/>
+          </a:prstGeom>
+          <a:noFill/>
+          <a:ln>
+            <a:noFill/>
+          </a:ln>
+        </p:spPr>
+      </p:pic>
+    </p:spTree>
+  </p:cSld>
+  <p:clrMapOvr>
+    <a:masterClrMapping/>
+  </p:clrMapOvr>
+</p:sldLayout>
+</file>
+
+<file path=ppt/slideLayouts/slideLayout9.xml><?xml version="1.0" encoding="utf-8"?>
+<p:sldLayout xmlns:a="http://schemas.openxmlformats.org/drawingml/2006/main" xmlns:r="http://schemas.openxmlformats.org/officeDocument/2006/relationships" xmlns:p="http://schemas.openxmlformats.org/presentationml/2006/main" matchingName="Title only 1">
+  <p:cSld name="TITLE_ONLY_1">
+    <p:spTree>
+      <p:nvGrpSpPr>
+        <p:cNvPr id="1" name="Shape 80"/>
+        <p:cNvGrpSpPr/>
+        <p:nvPr/>
+      </p:nvGrpSpPr>
+      <p:grpSpPr>
+        <a:xfrm>
+          <a:off x="0" y="0"/>
+          <a:ext cx="0" cy="0"/>
+          <a:chOff x="0" y="0"/>
+          <a:chExt cx="0" cy="0"/>
+        </a:xfrm>
+      </p:grpSpPr>
+      <p:sp>
+        <p:nvSpPr>
+          <p:cNvPr id="81" name="Google Shape;81;p16"/>
+          <p:cNvSpPr txBox="1">
+            <a:spLocks noGrp="1"/>
+          </p:cNvSpPr>
+          <p:nvPr>
+            <p:ph type="title"/>
+          </p:nvPr>
+        </p:nvSpPr>
+        <p:spPr>
+          <a:xfrm>
+            <a:off x="228600" y="329146"/>
+            <a:ext cx="8686800" cy="572700"/>
+          </a:xfrm>
+          <a:prstGeom prst="rect">
+            <a:avLst/>
+          </a:prstGeom>
+          <a:ln>
+            <a:noFill/>
+          </a:ln>
+        </p:spPr>
+        <p:txBody>
+          <a:bodyPr spcFirstLastPara="1" wrap="square" lIns="91425" tIns="91425" rIns="91425" bIns="91425" anchor="t" anchorCtr="0">
+            <a:noAutofit/>
+          </a:bodyPr>
+          <a:lstStyle>
+            <a:lvl1pPr lvl="0">
+              <a:spcBef>
+                <a:spcPts val="0"/>
+              </a:spcBef>
+              <a:spcAft>
+                <a:spcPts val="0"/>
+              </a:spcAft>
+              <a:buSzPts val="2600"/>
+              <a:buNone/>
+              <a:defRPr sz="2600" b="0"/>
+            </a:lvl1pPr>
+            <a:lvl2pPr lvl="1">
+              <a:spcBef>
+                <a:spcPts val="0"/>
+              </a:spcBef>
+              <a:spcAft>
+                <a:spcPts val="0"/>
+              </a:spcAft>
+              <a:buSzPts val="2600"/>
+              <a:buNone/>
+              <a:defRPr/>
+            </a:lvl2pPr>
+            <a:lvl3pPr lvl="2">
+              <a:spcBef>
+                <a:spcPts val="0"/>
+              </a:spcBef>
+              <a:spcAft>
+                <a:spcPts val="0"/>
+              </a:spcAft>
+              <a:buSzPts val="2600"/>
+              <a:buNone/>
+              <a:defRPr/>
+            </a:lvl3pPr>
+            <a:lvl4pPr lvl="3">
+              <a:spcBef>
+                <a:spcPts val="0"/>
+              </a:spcBef>
+              <a:spcAft>
+                <a:spcPts val="0"/>
+              </a:spcAft>
+              <a:buSzPts val="2600"/>
+              <a:buNone/>
+              <a:defRPr/>
+            </a:lvl4pPr>
+            <a:lvl5pPr lvl="4">
+              <a:spcBef>
+                <a:spcPts val="0"/>
+              </a:spcBef>
+              <a:spcAft>
+                <a:spcPts val="0"/>
+              </a:spcAft>
+              <a:buSzPts val="2600"/>
+              <a:buNone/>
+              <a:defRPr/>
+            </a:lvl5pPr>
+            <a:lvl6pPr lvl="5">
+              <a:spcBef>
+                <a:spcPts val="0"/>
+              </a:spcBef>
+              <a:spcAft>
+                <a:spcPts val="0"/>
+              </a:spcAft>
+              <a:buSzPts val="2600"/>
+              <a:buNone/>
+              <a:defRPr/>
+            </a:lvl6pPr>
+            <a:lvl7pPr lvl="6">
+              <a:spcBef>
+                <a:spcPts val="0"/>
+              </a:spcBef>
+              <a:spcAft>
+                <a:spcPts val="0"/>
+              </a:spcAft>
+              <a:buSzPts val="2600"/>
+              <a:buNone/>
+              <a:defRPr/>
+            </a:lvl7pPr>
+            <a:lvl8pPr lvl="7">
+              <a:spcBef>
+                <a:spcPts val="0"/>
+              </a:spcBef>
+              <a:spcAft>
+                <a:spcPts val="0"/>
+              </a:spcAft>
+              <a:buSzPts val="2600"/>
+              <a:buNone/>
+              <a:defRPr/>
+            </a:lvl8pPr>
+            <a:lvl9pPr lvl="8">
+              <a:spcBef>
+                <a:spcPts val="0"/>
+              </a:spcBef>
+              <a:spcAft>
+                <a:spcPts val="0"/>
+              </a:spcAft>
+              <a:buSzPts val="2600"/>
+              <a:buNone/>
+              <a:defRPr/>
+            </a:lvl9pPr>
+          </a:lstStyle>
+          <a:p>
+            <a:endParaRPr/>
+          </a:p>
+        </p:txBody>
+      </p:sp>
+      <p:pic>
+        <p:nvPicPr>
+          <p:cNvPr id="82" name="Google Shape;82;p16" title="tech.png"/>
+          <p:cNvPicPr preferRelativeResize="0"/>
+          <p:nvPr/>
+        </p:nvPicPr>
+        <p:blipFill rotWithShape="1">
+          <a:blip r:embed="rId2">
+            <a:alphaModFix amt="66000"/>
+          </a:blip>
+          <a:srcRect l="16171" r="18704"/>
+          <a:stretch/>
+        </p:blipFill>
+        <p:spPr>
+          <a:xfrm rot="2517579">
+            <a:off x="3900887" y="-3385324"/>
+            <a:ext cx="9692321" cy="8371198"/>
           </a:xfrm>
           <a:prstGeom prst="rect">
             <a:avLst/>
@@ -11392,15 +11160,14 @@
     <p:sldLayoutId id="2147483650" r:id="rId3"/>
     <p:sldLayoutId id="2147483653" r:id="rId4"/>
     <p:sldLayoutId id="2147483654" r:id="rId5"/>
-    <p:sldLayoutId id="2147483655" r:id="rId6"/>
-    <p:sldLayoutId id="2147483657" r:id="rId7"/>
-    <p:sldLayoutId id="2147483659" r:id="rId8"/>
-    <p:sldLayoutId id="2147483660" r:id="rId9"/>
-    <p:sldLayoutId id="2147483662" r:id="rId10"/>
-    <p:sldLayoutId id="2147483663" r:id="rId11"/>
-    <p:sldLayoutId id="2147483665" r:id="rId12"/>
-    <p:sldLayoutId id="2147483667" r:id="rId13"/>
-    <p:sldLayoutId id="2147483668" r:id="rId14"/>
+    <p:sldLayoutId id="2147483657" r:id="rId6"/>
+    <p:sldLayoutId id="2147483659" r:id="rId7"/>
+    <p:sldLayoutId id="2147483660" r:id="rId8"/>
+    <p:sldLayoutId id="2147483662" r:id="rId9"/>
+    <p:sldLayoutId id="2147483663" r:id="rId10"/>
+    <p:sldLayoutId id="2147483665" r:id="rId11"/>
+    <p:sldLayoutId id="2147483667" r:id="rId12"/>
+    <p:sldLayoutId id="2147483668" r:id="rId13"/>
   </p:sldLayoutIdLst>
   <p:hf hdr="0" ftr="0" dt="0"/>
   <p:txStyles>
@@ -13618,7 +13385,7 @@
           <p:nvPr>
             <p:extLst>
               <p:ext uri="{D42A27DB-BD31-4B8C-83A1-F6EECF244321}">
-                <p14:modId xmlns:p14="http://schemas.microsoft.com/office/powerpoint/2010/main" val="500829377"/>
+                <p14:modId xmlns:p14="http://schemas.microsoft.com/office/powerpoint/2010/main" val="2691362125"/>
               </p:ext>
             </p:extLst>
           </p:nvPr>
@@ -13674,7 +13441,14 @@
                         <a:buNone/>
                       </a:pPr>
                       <a:r>
-                        <a:rPr lang="en-US" sz="1200" b="1" dirty="0"/>
+                        <a:rPr lang="en-US" sz="1100" b="1" i="0" u="none" strike="noStrike" cap="none" dirty="0">
+                          <a:solidFill>
+                            <a:schemeClr val="dk1"/>
+                          </a:solidFill>
+                          <a:latin typeface="Archivo"/>
+                          <a:cs typeface="Archivo"/>
+                          <a:sym typeface="Arial"/>
+                        </a:rPr>
                         <a:t>Method</a:t>
                       </a:r>
                     </a:p>
@@ -13733,7 +13507,14 @@
                         <a:buNone/>
                       </a:pPr>
                       <a:r>
-                        <a:rPr lang="en-US" sz="1200" b="1" dirty="0"/>
+                        <a:rPr lang="en-US" sz="1100" b="1" i="0" u="none" strike="noStrike" cap="none" dirty="0">
+                          <a:solidFill>
+                            <a:schemeClr val="dk1"/>
+                          </a:solidFill>
+                          <a:latin typeface="Archivo"/>
+                          <a:cs typeface="Archivo"/>
+                          <a:sym typeface="Arial"/>
+                        </a:rPr>
                         <a:t>Main idea</a:t>
                       </a:r>
                     </a:p>
@@ -13792,7 +13573,14 @@
                         <a:buNone/>
                       </a:pPr>
                       <a:r>
-                        <a:rPr lang="en-US" sz="1200" b="1" dirty="0"/>
+                        <a:rPr lang="en-US" sz="1100" b="1" i="0" u="none" strike="noStrike" cap="none" dirty="0">
+                          <a:solidFill>
+                            <a:schemeClr val="dk1"/>
+                          </a:solidFill>
+                          <a:latin typeface="Archivo"/>
+                          <a:cs typeface="Archivo"/>
+                          <a:sym typeface="Arial"/>
+                        </a:rPr>
                         <a:t>Pros</a:t>
                       </a:r>
                     </a:p>
@@ -13851,7 +13639,14 @@
                         <a:buNone/>
                       </a:pPr>
                       <a:r>
-                        <a:rPr lang="en-US" sz="1200" b="1" dirty="0"/>
+                        <a:rPr lang="en-US" sz="1100" b="1" i="0" u="none" strike="noStrike" cap="none" dirty="0">
+                          <a:solidFill>
+                            <a:schemeClr val="dk1"/>
+                          </a:solidFill>
+                          <a:latin typeface="Archivo"/>
+                          <a:cs typeface="Archivo"/>
+                          <a:sym typeface="Arial"/>
+                        </a:rPr>
                         <a:t>Cons</a:t>
                       </a:r>
                     </a:p>
@@ -13917,10 +13712,24 @@
                         <a:buNone/>
                       </a:pPr>
                       <a:r>
-                        <a:rPr lang="en-US" sz="1200" b="1"/>
+                        <a:rPr lang="en-US" sz="1100" b="1" i="0" u="none" strike="noStrike" cap="none" dirty="0" err="1">
+                          <a:solidFill>
+                            <a:schemeClr val="dk1"/>
+                          </a:solidFill>
+                          <a:latin typeface="Archivo"/>
+                          <a:cs typeface="Archivo"/>
+                          <a:sym typeface="Arial"/>
+                        </a:rPr>
                         <a:t>LoRA</a:t>
                       </a:r>
-                      <a:endParaRPr lang="en-US" sz="1200"/>
+                      <a:endParaRPr lang="en-US" sz="1100" b="1" i="0" u="none" strike="noStrike" cap="none" dirty="0">
+                        <a:solidFill>
+                          <a:schemeClr val="dk1"/>
+                        </a:solidFill>
+                        <a:latin typeface="Archivo"/>
+                        <a:cs typeface="Archivo"/>
+                        <a:sym typeface="Arial"/>
+                      </a:endParaRPr>
                     </a:p>
                   </a:txBody>
                   <a:tcPr anchor="ctr">
@@ -13973,7 +13782,14 @@
                         <a:buNone/>
                       </a:pPr>
                       <a:r>
-                        <a:rPr lang="en-US" sz="1200" dirty="0"/>
+                        <a:rPr lang="en-US" sz="1100" b="0" i="0" u="none" strike="noStrike" cap="none" dirty="0">
+                          <a:solidFill>
+                            <a:schemeClr val="dk1"/>
+                          </a:solidFill>
+                          <a:latin typeface="Archivo"/>
+                          <a:cs typeface="Archivo"/>
+                          <a:sym typeface="Archivo"/>
+                        </a:rPr>
                         <a:t>Low-rank adapters</a:t>
                       </a:r>
                     </a:p>
@@ -14026,7 +13842,14 @@
                         <a:buNone/>
                       </a:pPr>
                       <a:r>
-                        <a:rPr lang="en-US" sz="1200" dirty="0"/>
+                        <a:rPr lang="en-US" sz="1100" b="0" i="0" u="none" strike="noStrike" cap="none" dirty="0">
+                          <a:solidFill>
+                            <a:schemeClr val="dk1"/>
+                          </a:solidFill>
+                          <a:latin typeface="Archivo"/>
+                          <a:cs typeface="Archivo"/>
+                          <a:sym typeface="Archivo"/>
+                        </a:rPr>
                         <a:t>Simple, effective, widely used</a:t>
                       </a:r>
                     </a:p>
@@ -14079,7 +13902,14 @@
                         <a:buNone/>
                       </a:pPr>
                       <a:r>
-                        <a:rPr lang="en-US" sz="1200" dirty="0"/>
+                        <a:rPr lang="en-US" sz="1100" b="0" i="0" u="none" strike="noStrike" cap="none" dirty="0">
+                          <a:solidFill>
+                            <a:schemeClr val="dk1"/>
+                          </a:solidFill>
+                          <a:latin typeface="Archivo"/>
+                          <a:cs typeface="Archivo"/>
+                          <a:sym typeface="Archivo"/>
+                        </a:rPr>
                         <a:t>Still needs more parameters than newer variants</a:t>
                       </a:r>
                     </a:p>
@@ -14141,10 +13971,27 @@
                         <a:buNone/>
                       </a:pPr>
                       <a:r>
-                        <a:rPr lang="en-US" sz="1200" b="1"/>
-                        <a:t>LoRA-XS</a:t>
+                        <a:rPr lang="en-US" sz="1100" b="1" i="0" u="none" strike="noStrike" cap="none" dirty="0" err="1">
+                          <a:solidFill>
+                            <a:schemeClr val="dk1"/>
+                          </a:solidFill>
+                          <a:latin typeface="Archivo"/>
+                          <a:cs typeface="Archivo"/>
+                          <a:sym typeface="Arial"/>
+                        </a:rPr>
+                        <a:t>LoRA</a:t>
                       </a:r>
-                      <a:endParaRPr lang="en-US" sz="1200"/>
+                      <a:r>
+                        <a:rPr lang="en-US" sz="1100" b="1" i="0" u="none" strike="noStrike" cap="none" dirty="0">
+                          <a:solidFill>
+                            <a:schemeClr val="dk1"/>
+                          </a:solidFill>
+                          <a:latin typeface="Archivo"/>
+                          <a:cs typeface="Archivo"/>
+                          <a:sym typeface="Arial"/>
+                        </a:rPr>
+                        <a:t>-XS</a:t>
+                      </a:r>
                     </a:p>
                   </a:txBody>
                   <a:tcPr anchor="ctr">
@@ -14197,7 +14044,14 @@
                         <a:buNone/>
                       </a:pPr>
                       <a:r>
-                        <a:rPr lang="en-US" sz="1200" dirty="0"/>
+                        <a:rPr lang="en-US" sz="1100" b="0" i="0" u="none" strike="noStrike" cap="none" dirty="0">
+                          <a:solidFill>
+                            <a:schemeClr val="dk1"/>
+                          </a:solidFill>
+                          <a:latin typeface="Archivo"/>
+                          <a:cs typeface="Archivo"/>
+                          <a:sym typeface="Archivo"/>
+                        </a:rPr>
                         <a:t>Fixed SVD structure + small core</a:t>
                       </a:r>
                     </a:p>
@@ -14250,9 +14104,35 @@
                         <a:buNone/>
                       </a:pPr>
                       <a:r>
-                        <a:rPr lang="en-US" sz="1200"/>
-                        <a:t>Smaller and more parameter-efficient than LoRA</a:t>
+                        <a:rPr lang="en-US" sz="1100" b="0" i="0" u="none" strike="noStrike" cap="none" dirty="0">
+                          <a:solidFill>
+                            <a:schemeClr val="dk1"/>
+                          </a:solidFill>
+                          <a:latin typeface="Archivo"/>
+                          <a:cs typeface="Archivo"/>
+                          <a:sym typeface="Archivo"/>
+                        </a:rPr>
+                        <a:t>Smaller and more parameter-efficient than </a:t>
                       </a:r>
+                      <a:r>
+                        <a:rPr lang="en-US" sz="1100" b="0" i="0" u="none" strike="noStrike" cap="none" dirty="0" err="1">
+                          <a:solidFill>
+                            <a:schemeClr val="dk1"/>
+                          </a:solidFill>
+                          <a:latin typeface="Archivo"/>
+                          <a:cs typeface="Archivo"/>
+                          <a:sym typeface="Archivo"/>
+                        </a:rPr>
+                        <a:t>LoRA</a:t>
+                      </a:r>
+                      <a:endParaRPr lang="en-US" sz="1100" b="0" i="0" u="none" strike="noStrike" cap="none" dirty="0">
+                        <a:solidFill>
+                          <a:schemeClr val="dk1"/>
+                        </a:solidFill>
+                        <a:latin typeface="Archivo"/>
+                        <a:cs typeface="Archivo"/>
+                        <a:sym typeface="Archivo"/>
+                      </a:endParaRPr>
                     </a:p>
                   </a:txBody>
                   <a:tcPr anchor="ctr">
@@ -14303,7 +14183,14 @@
                         <a:buNone/>
                       </a:pPr>
                       <a:r>
-                        <a:rPr lang="en-US" sz="1200" dirty="0"/>
+                        <a:rPr lang="en-US" sz="1100" b="0" i="0" u="none" strike="noStrike" cap="none" dirty="0">
+                          <a:solidFill>
+                            <a:schemeClr val="dk1"/>
+                          </a:solidFill>
+                          <a:latin typeface="Archivo"/>
+                          <a:cs typeface="Archivo"/>
+                          <a:sym typeface="Archivo"/>
+                        </a:rPr>
                         <a:t>More specialized, less standard</a:t>
                       </a:r>
                     </a:p>
@@ -14365,10 +14252,24 @@
                         <a:buNone/>
                       </a:pPr>
                       <a:r>
-                        <a:rPr lang="en-US" sz="1200" b="1"/>
+                        <a:rPr lang="en-US" sz="1100" b="1" i="0" u="none" strike="noStrike" cap="none" dirty="0" err="1">
+                          <a:solidFill>
+                            <a:schemeClr val="dk1"/>
+                          </a:solidFill>
+                          <a:latin typeface="Archivo"/>
+                          <a:cs typeface="Archivo"/>
+                          <a:sym typeface="Arial"/>
+                        </a:rPr>
                         <a:t>TinyLoRA</a:t>
                       </a:r>
-                      <a:endParaRPr lang="en-US" sz="1200"/>
+                      <a:endParaRPr lang="en-US" sz="1100" b="1" i="0" u="none" strike="noStrike" cap="none" dirty="0">
+                        <a:solidFill>
+                          <a:schemeClr val="dk1"/>
+                        </a:solidFill>
+                        <a:latin typeface="Archivo"/>
+                        <a:cs typeface="Archivo"/>
+                        <a:sym typeface="Arial"/>
+                      </a:endParaRPr>
                     </a:p>
                   </a:txBody>
                   <a:tcPr anchor="ctr">
@@ -14421,7 +14322,14 @@
                         <a:buNone/>
                       </a:pPr>
                       <a:r>
-                        <a:rPr lang="en-US" sz="1200" dirty="0"/>
+                        <a:rPr lang="en-US" sz="1100" b="0" i="0" u="none" strike="noStrike" cap="none" dirty="0">
+                          <a:solidFill>
+                            <a:schemeClr val="dk1"/>
+                          </a:solidFill>
+                          <a:latin typeface="Archivo"/>
+                          <a:cs typeface="Archivo"/>
+                          <a:sym typeface="Archivo"/>
+                        </a:rPr>
                         <a:t>Tiny projected trainable vector</a:t>
                       </a:r>
                     </a:p>
@@ -14474,7 +14382,14 @@
                         <a:buNone/>
                       </a:pPr>
                       <a:r>
-                        <a:rPr lang="en-US" sz="1200"/>
+                        <a:rPr lang="en-US" sz="1100" b="0" i="0" u="none" strike="noStrike" cap="none">
+                          <a:solidFill>
+                            <a:schemeClr val="dk1"/>
+                          </a:solidFill>
+                          <a:latin typeface="Archivo"/>
+                          <a:cs typeface="Archivo"/>
+                          <a:sym typeface="Archivo"/>
+                        </a:rPr>
                         <a:t>Extreme parameter efficiency</a:t>
                       </a:r>
                     </a:p>
@@ -14527,7 +14442,14 @@
                         <a:buNone/>
                       </a:pPr>
                       <a:r>
-                        <a:rPr lang="en-US" sz="1200" dirty="0"/>
+                        <a:rPr lang="en-US" sz="1100" b="0" i="0" u="none" strike="noStrike" cap="none" dirty="0">
+                          <a:solidFill>
+                            <a:schemeClr val="dk1"/>
+                          </a:solidFill>
+                          <a:latin typeface="Archivo"/>
+                          <a:cs typeface="Archivo"/>
+                          <a:sym typeface="Archivo"/>
+                        </a:rPr>
                         <a:t>More experimental, harder to validate broadly</a:t>
                       </a:r>
                     </a:p>
@@ -14866,10 +14788,10 @@
         </p:nvGrpSpPr>
         <p:grpSpPr>
           <a:xfrm>
-            <a:off x="5600891" y="400348"/>
-            <a:ext cx="3302407" cy="1134692"/>
+            <a:off x="5414173" y="369236"/>
+            <a:ext cx="3661479" cy="1273191"/>
             <a:chOff x="5897918" y="3170712"/>
-            <a:chExt cx="3302407" cy="1134692"/>
+            <a:chExt cx="3661479" cy="1273191"/>
           </a:xfrm>
         </p:grpSpPr>
         <p:grpSp>
@@ -15397,7 +15319,7 @@
           <p:spPr>
             <a:xfrm>
               <a:off x="8028209" y="3843739"/>
-              <a:ext cx="1172116" cy="461665"/>
+              <a:ext cx="1531188" cy="600164"/>
             </a:xfrm>
             <a:prstGeom prst="rect">
               <a:avLst/>
@@ -15411,15 +15333,28 @@
             <a:lstStyle/>
             <a:p>
               <a:r>
-                <a:rPr lang="en-US" sz="2400" dirty="0">
+                <a:rPr lang="en-US" altLang="zh-CN" sz="2400" dirty="0">
                   <a:solidFill>
                     <a:schemeClr val="dk1"/>
                   </a:solidFill>
                   <a:latin typeface="VT323"/>
                   <a:sym typeface="VT323"/>
                 </a:rPr>
-                <a:t>Olympiad</a:t>
+                <a:t>AIMO</a:t>
               </a:r>
+            </a:p>
+            <a:p>
+              <a:r>
+                <a:rPr lang="en-US" sz="900" i="1" dirty="0"/>
+                <a:t>AI Mathematical Olympiad</a:t>
+              </a:r>
+              <a:endParaRPr lang="en-US" sz="900" i="1" dirty="0">
+                <a:solidFill>
+                  <a:schemeClr val="dk1"/>
+                </a:solidFill>
+                <a:latin typeface="VT323"/>
+                <a:sym typeface="VT323"/>
+              </a:endParaRPr>
             </a:p>
           </p:txBody>
         </p:sp>
@@ -17550,6 +17485,4299 @@
 </p:sld>
 </file>
 
+<file path=ppt/slides/slide14.xml><?xml version="1.0" encoding="utf-8"?>
+<p:sld xmlns:a="http://schemas.openxmlformats.org/drawingml/2006/main" xmlns:r="http://schemas.openxmlformats.org/officeDocument/2006/relationships" xmlns:p="http://schemas.openxmlformats.org/presentationml/2006/main">
+  <p:cSld>
+    <p:spTree>
+      <p:nvGrpSpPr>
+        <p:cNvPr id="1" name=""/>
+        <p:cNvGrpSpPr/>
+        <p:nvPr/>
+      </p:nvGrpSpPr>
+      <p:grpSpPr>
+        <a:xfrm>
+          <a:off x="0" y="0"/>
+          <a:ext cx="0" cy="0"/>
+          <a:chOff x="0" y="0"/>
+          <a:chExt cx="0" cy="0"/>
+        </a:xfrm>
+      </p:grpSpPr>
+      <p:sp>
+        <p:nvSpPr>
+          <p:cNvPr id="35" name="Rectangle 34">
+            <a:extLst>
+              <a:ext uri="{FF2B5EF4-FFF2-40B4-BE49-F238E27FC236}">
+                <a16:creationId xmlns:a16="http://schemas.microsoft.com/office/drawing/2014/main" id="{B626C95F-FE13-68A4-5FF8-E332614FEFD8}"/>
+              </a:ext>
+            </a:extLst>
+          </p:cNvPr>
+          <p:cNvSpPr/>
+          <p:nvPr/>
+        </p:nvSpPr>
+        <p:spPr>
+          <a:xfrm flipV="1">
+            <a:off x="129786" y="734091"/>
+            <a:ext cx="8733477" cy="9144"/>
+          </a:xfrm>
+          <a:prstGeom prst="rect">
+            <a:avLst/>
+          </a:prstGeom>
+          <a:solidFill>
+            <a:srgbClr val="E2E4E8"/>
+          </a:solidFill>
+          <a:ln>
+            <a:solidFill>
+              <a:srgbClr val="E2E4E8"/>
+            </a:solidFill>
+          </a:ln>
+        </p:spPr>
+        <p:style>
+          <a:lnRef idx="1">
+            <a:schemeClr val="accent1"/>
+          </a:lnRef>
+          <a:fillRef idx="3">
+            <a:schemeClr val="accent1"/>
+          </a:fillRef>
+          <a:effectRef idx="2">
+            <a:schemeClr val="accent1"/>
+          </a:effectRef>
+          <a:fontRef idx="minor">
+            <a:schemeClr val="lt1"/>
+          </a:fontRef>
+        </p:style>
+        <p:txBody>
+          <a:bodyPr rtlCol="0" anchor="ctr"/>
+          <a:lstStyle/>
+          <a:p>
+            <a:pPr algn="ctr"/>
+            <a:endParaRPr/>
+          </a:p>
+        </p:txBody>
+      </p:sp>
+      <p:grpSp>
+        <p:nvGrpSpPr>
+          <p:cNvPr id="93" name="Group 92">
+            <a:extLst>
+              <a:ext uri="{FF2B5EF4-FFF2-40B4-BE49-F238E27FC236}">
+                <a16:creationId xmlns:a16="http://schemas.microsoft.com/office/drawing/2014/main" id="{6A5166AA-AEFC-3AB4-A633-2240BFD9BD9C}"/>
+              </a:ext>
+            </a:extLst>
+          </p:cNvPr>
+          <p:cNvGrpSpPr/>
+          <p:nvPr/>
+        </p:nvGrpSpPr>
+        <p:grpSpPr>
+          <a:xfrm>
+            <a:off x="572582" y="4623493"/>
+            <a:ext cx="8141764" cy="253916"/>
+            <a:chOff x="384048" y="6382512"/>
+            <a:chExt cx="8464978" cy="253916"/>
+          </a:xfrm>
+        </p:grpSpPr>
+        <p:sp>
+          <p:nvSpPr>
+            <p:cNvPr id="60" name="Rounded Rectangle 59">
+              <a:extLst>
+                <a:ext uri="{FF2B5EF4-FFF2-40B4-BE49-F238E27FC236}">
+                  <a16:creationId xmlns:a16="http://schemas.microsoft.com/office/drawing/2014/main" id="{3D565973-8117-1CC8-F23D-CDA68A4EAD1A}"/>
+                </a:ext>
+              </a:extLst>
+            </p:cNvPr>
+            <p:cNvSpPr/>
+            <p:nvPr/>
+          </p:nvSpPr>
+          <p:spPr>
+            <a:xfrm>
+              <a:off x="384048" y="6388494"/>
+              <a:ext cx="8464978" cy="240905"/>
+            </a:xfrm>
+            <a:prstGeom prst="roundRect">
+              <a:avLst/>
+            </a:prstGeom>
+            <a:solidFill>
+              <a:srgbClr val="F5F6F8"/>
+            </a:solidFill>
+            <a:ln>
+              <a:solidFill>
+                <a:srgbClr val="E2E4E8"/>
+              </a:solidFill>
+            </a:ln>
+          </p:spPr>
+          <p:style>
+            <a:lnRef idx="1">
+              <a:schemeClr val="accent1"/>
+            </a:lnRef>
+            <a:fillRef idx="3">
+              <a:schemeClr val="accent1"/>
+            </a:fillRef>
+            <a:effectRef idx="2">
+              <a:schemeClr val="accent1"/>
+            </a:effectRef>
+            <a:fontRef idx="minor">
+              <a:schemeClr val="lt1"/>
+            </a:fontRef>
+          </p:style>
+          <p:txBody>
+            <a:bodyPr rtlCol="0" anchor="ctr"/>
+            <a:lstStyle/>
+            <a:p>
+              <a:pPr algn="ctr"/>
+              <a:endParaRPr/>
+            </a:p>
+          </p:txBody>
+        </p:sp>
+        <p:sp>
+          <p:nvSpPr>
+            <p:cNvPr id="61" name="TextBox 60">
+              <a:extLst>
+                <a:ext uri="{FF2B5EF4-FFF2-40B4-BE49-F238E27FC236}">
+                  <a16:creationId xmlns:a16="http://schemas.microsoft.com/office/drawing/2014/main" id="{BDCBD4DA-A260-F2EA-0DC6-E8E1A2C20A5C}"/>
+                </a:ext>
+              </a:extLst>
+            </p:cNvPr>
+            <p:cNvSpPr txBox="1"/>
+            <p:nvPr/>
+          </p:nvSpPr>
+          <p:spPr>
+            <a:xfrm>
+              <a:off x="502920" y="6382512"/>
+              <a:ext cx="5841905" cy="253916"/>
+            </a:xfrm>
+            <a:prstGeom prst="rect">
+              <a:avLst/>
+            </a:prstGeom>
+            <a:noFill/>
+          </p:spPr>
+          <p:txBody>
+            <a:bodyPr wrap="none">
+              <a:spAutoFit/>
+            </a:bodyPr>
+            <a:lstStyle/>
+            <a:p>
+              <a:r>
+                <a:rPr sz="1050" dirty="0">
+                  <a:solidFill>
+                    <a:srgbClr val="8E9299"/>
+                  </a:solidFill>
+                  <a:latin typeface="Arial"/>
+                </a:rPr>
+                <a:t>SFT + </a:t>
+              </a:r>
+              <a:r>
+                <a:rPr sz="1050" dirty="0" err="1">
+                  <a:solidFill>
+                    <a:srgbClr val="8E9299"/>
+                  </a:solidFill>
+                  <a:latin typeface="Arial"/>
+                </a:rPr>
+                <a:t>LoRA</a:t>
+              </a:r>
+              <a:r>
+                <a:rPr lang="zh-CN" altLang="en-US" sz="1050" dirty="0">
+                  <a:solidFill>
+                    <a:srgbClr val="8E9299"/>
+                  </a:solidFill>
+                  <a:latin typeface="Arial"/>
+                </a:rPr>
+                <a:t> </a:t>
+              </a:r>
+              <a:r>
+                <a:rPr lang="en-US" altLang="zh-CN" sz="1050" dirty="0">
+                  <a:solidFill>
+                    <a:srgbClr val="8E9299"/>
+                  </a:solidFill>
+                  <a:latin typeface="Arial"/>
+                </a:rPr>
+                <a:t>has</a:t>
+              </a:r>
+              <a:r>
+                <a:rPr lang="zh-CN" altLang="en-US" sz="1050" dirty="0">
+                  <a:solidFill>
+                    <a:srgbClr val="8E9299"/>
+                  </a:solidFill>
+                  <a:latin typeface="Arial"/>
+                </a:rPr>
+                <a:t> </a:t>
+              </a:r>
+              <a:r>
+                <a:rPr lang="en-US" altLang="zh-CN" sz="1050" dirty="0">
+                  <a:solidFill>
+                    <a:srgbClr val="8E9299"/>
+                  </a:solidFill>
+                  <a:latin typeface="Arial"/>
+                </a:rPr>
+                <a:t>better</a:t>
+              </a:r>
+              <a:r>
+                <a:rPr lang="zh-CN" altLang="en-US" sz="1050" dirty="0">
+                  <a:solidFill>
+                    <a:srgbClr val="8E9299"/>
+                  </a:solidFill>
+                  <a:latin typeface="Arial"/>
+                </a:rPr>
+                <a:t> </a:t>
+              </a:r>
+              <a:r>
+                <a:rPr lang="en-US" altLang="zh-CN" sz="1050" dirty="0">
+                  <a:solidFill>
+                    <a:srgbClr val="8E9299"/>
+                  </a:solidFill>
+                  <a:latin typeface="Arial"/>
+                </a:rPr>
+                <a:t>accuracy</a:t>
+              </a:r>
+              <a:r>
+                <a:rPr sz="1050" dirty="0">
+                  <a:solidFill>
+                    <a:srgbClr val="8E9299"/>
+                  </a:solidFill>
+                  <a:latin typeface="Arial"/>
+                </a:rPr>
+                <a:t>, while GRPO remained the most compact trainable setup.</a:t>
+              </a:r>
+            </a:p>
+          </p:txBody>
+        </p:sp>
+      </p:grpSp>
+      <p:sp>
+        <p:nvSpPr>
+          <p:cNvPr id="62" name="Google Shape;268;p37">
+            <a:extLst>
+              <a:ext uri="{FF2B5EF4-FFF2-40B4-BE49-F238E27FC236}">
+                <a16:creationId xmlns:a16="http://schemas.microsoft.com/office/drawing/2014/main" id="{C7850438-AF2B-7CA0-E0B8-DBC64135241D}"/>
+              </a:ext>
+            </a:extLst>
+          </p:cNvPr>
+          <p:cNvSpPr txBox="1">
+            <a:spLocks noGrp="1"/>
+          </p:cNvSpPr>
+          <p:nvPr>
+            <p:ph type="title"/>
+          </p:nvPr>
+        </p:nvSpPr>
+        <p:spPr>
+          <a:xfrm>
+            <a:off x="228600" y="273120"/>
+            <a:ext cx="8686800" cy="572700"/>
+          </a:xfrm>
+          <a:prstGeom prst="rect">
+            <a:avLst/>
+          </a:prstGeom>
+        </p:spPr>
+        <p:txBody>
+          <a:bodyPr spcFirstLastPara="1" wrap="square" lIns="91425" tIns="91425" rIns="91425" bIns="91425" anchor="t" anchorCtr="0">
+            <a:noAutofit/>
+          </a:bodyPr>
+          <a:lstStyle/>
+          <a:p>
+            <a:pPr marL="0" lvl="0" indent="0" algn="l" rtl="0">
+              <a:spcBef>
+                <a:spcPts val="0"/>
+              </a:spcBef>
+              <a:spcAft>
+                <a:spcPts val="0"/>
+              </a:spcAft>
+              <a:buNone/>
+            </a:pPr>
+            <a:r>
+              <a:rPr lang="en-US" sz="2600" dirty="0"/>
+              <a:t>Results at a Glance</a:t>
+            </a:r>
+            <a:br>
+              <a:rPr lang="en-US" sz="2600" dirty="0"/>
+            </a:br>
+            <a:endParaRPr lang="en-US" sz="2600" dirty="0"/>
+          </a:p>
+        </p:txBody>
+      </p:sp>
+      <p:sp>
+        <p:nvSpPr>
+          <p:cNvPr id="63" name="Text 1">
+            <a:extLst>
+              <a:ext uri="{FF2B5EF4-FFF2-40B4-BE49-F238E27FC236}">
+                <a16:creationId xmlns:a16="http://schemas.microsoft.com/office/drawing/2014/main" id="{0E478F88-E156-F686-8FC3-B957A83394EB}"/>
+              </a:ext>
+            </a:extLst>
+          </p:cNvPr>
+          <p:cNvSpPr/>
+          <p:nvPr/>
+        </p:nvSpPr>
+        <p:spPr>
+          <a:xfrm>
+            <a:off x="384048" y="832104"/>
+            <a:ext cx="7955280" cy="219456"/>
+          </a:xfrm>
+          <a:prstGeom prst="rect">
+            <a:avLst/>
+          </a:prstGeom>
+          <a:noFill/>
+          <a:ln/>
+        </p:spPr>
+        <p:txBody>
+          <a:bodyPr wrap="square" lIns="0" tIns="0" rIns="0" bIns="0" rtlCol="0" anchor="ctr"/>
+          <a:lstStyle/>
+          <a:p>
+            <a:pPr marL="0" indent="0">
+              <a:buNone/>
+            </a:pPr>
+            <a:r>
+              <a:rPr lang="en-US" altLang="zh-CN" sz="1050" i="1" dirty="0">
+                <a:solidFill>
+                  <a:srgbClr val="5B5B5B"/>
+                </a:solidFill>
+                <a:latin typeface="Arial" pitchFamily="34" charset="0"/>
+                <a:ea typeface="Arial" pitchFamily="34" charset="-122"/>
+                <a:cs typeface="Arial" pitchFamily="34" charset="-120"/>
+              </a:rPr>
+              <a:t>N</a:t>
+            </a:r>
+            <a:r>
+              <a:rPr lang="en-US" sz="1050" i="1" dirty="0">
+                <a:solidFill>
+                  <a:srgbClr val="5B5B5B"/>
+                </a:solidFill>
+                <a:latin typeface="Arial" pitchFamily="34" charset="0"/>
+                <a:ea typeface="Arial" pitchFamily="34" charset="-122"/>
+                <a:cs typeface="Arial" pitchFamily="34" charset="-120"/>
+              </a:rPr>
+              <a:t>otebook run on </a:t>
+            </a:r>
+            <a:r>
+              <a:rPr lang="en-US" sz="1050" i="1" dirty="0">
+                <a:solidFill>
+                  <a:srgbClr val="5B5B5B"/>
+                </a:solidFill>
+                <a:latin typeface="Arial" pitchFamily="34" charset="0"/>
+                <a:cs typeface="Arial" pitchFamily="34" charset="-120"/>
+              </a:rPr>
+              <a:t>Reasoning</a:t>
+            </a:r>
+            <a:r>
+              <a:rPr lang="zh-CN" altLang="en-US" sz="1050" i="1" dirty="0">
+                <a:solidFill>
+                  <a:srgbClr val="5B5B5B"/>
+                </a:solidFill>
+                <a:latin typeface="Arial" pitchFamily="34" charset="0"/>
+                <a:cs typeface="Arial" pitchFamily="34" charset="-120"/>
+              </a:rPr>
+              <a:t> </a:t>
+            </a:r>
+            <a:r>
+              <a:rPr lang="en-US" altLang="zh-CN" sz="1050" i="1" dirty="0">
+                <a:solidFill>
+                  <a:srgbClr val="5B5B5B"/>
+                </a:solidFill>
+                <a:latin typeface="Arial" pitchFamily="34" charset="0"/>
+                <a:cs typeface="Arial" pitchFamily="34" charset="-120"/>
+              </a:rPr>
+              <a:t>(</a:t>
+            </a:r>
+            <a:r>
+              <a:rPr lang="en-US" sz="1050" i="1" dirty="0">
+                <a:solidFill>
+                  <a:srgbClr val="5B5B5B"/>
+                </a:solidFill>
+                <a:latin typeface="Arial" pitchFamily="34" charset="0"/>
+                <a:cs typeface="Arial" pitchFamily="34" charset="-120"/>
+              </a:rPr>
+              <a:t>GSM8K</a:t>
+            </a:r>
+            <a:r>
+              <a:rPr lang="en-US" altLang="zh-CN" sz="1050" i="1" dirty="0">
+                <a:solidFill>
+                  <a:srgbClr val="5B5B5B"/>
+                </a:solidFill>
+                <a:latin typeface="Arial" pitchFamily="34" charset="0"/>
+                <a:cs typeface="Arial" pitchFamily="34" charset="-120"/>
+              </a:rPr>
+              <a:t>)</a:t>
+            </a:r>
+            <a:r>
+              <a:rPr lang="zh-CN" altLang="en-US" sz="1050" i="1" dirty="0">
+                <a:solidFill>
+                  <a:srgbClr val="5B5B5B"/>
+                </a:solidFill>
+                <a:latin typeface="Arial" pitchFamily="34" charset="0"/>
+                <a:cs typeface="Arial" pitchFamily="34" charset="-120"/>
+              </a:rPr>
+              <a:t> </a:t>
+            </a:r>
+            <a:r>
+              <a:rPr lang="en-US" sz="1050" i="1" dirty="0">
+                <a:solidFill>
+                  <a:srgbClr val="5B5B5B"/>
+                </a:solidFill>
+                <a:latin typeface="Arial" pitchFamily="34" charset="0"/>
+                <a:cs typeface="Arial" pitchFamily="34" charset="-120"/>
+              </a:rPr>
+              <a:t>-100</a:t>
+            </a:r>
+            <a:r>
+              <a:rPr lang="zh-CN" altLang="en-US" sz="1050" i="1" dirty="0">
+                <a:solidFill>
+                  <a:srgbClr val="5B5B5B"/>
+                </a:solidFill>
+                <a:latin typeface="Arial" pitchFamily="34" charset="0"/>
+                <a:cs typeface="Arial" pitchFamily="34" charset="-120"/>
+              </a:rPr>
+              <a:t> </a:t>
+            </a:r>
+            <a:r>
+              <a:rPr lang="en-US" altLang="zh-CN" sz="1050" i="1" dirty="0">
+                <a:solidFill>
+                  <a:srgbClr val="5B5B5B"/>
+                </a:solidFill>
+                <a:latin typeface="Arial" pitchFamily="34" charset="0"/>
+                <a:cs typeface="Arial" pitchFamily="34" charset="-120"/>
+              </a:rPr>
+              <a:t>problems</a:t>
+            </a:r>
+            <a:r>
+              <a:rPr lang="en-US" sz="1050" i="1" dirty="0">
+                <a:solidFill>
+                  <a:srgbClr val="5B5B5B"/>
+                </a:solidFill>
+                <a:latin typeface="Arial" pitchFamily="34" charset="0"/>
+                <a:cs typeface="Arial" pitchFamily="34" charset="-120"/>
+              </a:rPr>
+              <a:t>, Olympiad-100</a:t>
+            </a:r>
+            <a:r>
+              <a:rPr lang="zh-CN" altLang="en-US" sz="1050" i="1" dirty="0">
+                <a:solidFill>
+                  <a:srgbClr val="5B5B5B"/>
+                </a:solidFill>
+                <a:latin typeface="Arial" pitchFamily="34" charset="0"/>
+                <a:cs typeface="Arial" pitchFamily="34" charset="-120"/>
+              </a:rPr>
+              <a:t> </a:t>
+            </a:r>
+            <a:r>
+              <a:rPr lang="en-US" altLang="zh-CN" sz="1050" i="1" dirty="0">
+                <a:solidFill>
+                  <a:srgbClr val="5B5B5B"/>
+                </a:solidFill>
+                <a:latin typeface="Arial" pitchFamily="34" charset="0"/>
+                <a:cs typeface="Arial" pitchFamily="34" charset="-120"/>
+              </a:rPr>
+              <a:t>problems</a:t>
+            </a:r>
+            <a:r>
+              <a:rPr lang="en-US" sz="1050" i="1" dirty="0">
+                <a:solidFill>
+                  <a:srgbClr val="5B5B5B"/>
+                </a:solidFill>
+                <a:latin typeface="Arial" pitchFamily="34" charset="0"/>
+                <a:ea typeface="Arial" pitchFamily="34" charset="-122"/>
+                <a:cs typeface="Arial" pitchFamily="34" charset="-120"/>
+              </a:rPr>
+              <a:t>, and AIMO-150</a:t>
+            </a:r>
+            <a:r>
+              <a:rPr lang="zh-CN" altLang="en-US" sz="1050" i="1" dirty="0">
+                <a:solidFill>
+                  <a:srgbClr val="5B5B5B"/>
+                </a:solidFill>
+                <a:latin typeface="Arial" pitchFamily="34" charset="0"/>
+                <a:ea typeface="Arial" pitchFamily="34" charset="-122"/>
+                <a:cs typeface="Arial" pitchFamily="34" charset="-120"/>
+              </a:rPr>
+              <a:t> </a:t>
+            </a:r>
+            <a:r>
+              <a:rPr lang="en-US" altLang="zh-CN" sz="1050" i="1" dirty="0">
+                <a:solidFill>
+                  <a:srgbClr val="5B5B5B"/>
+                </a:solidFill>
+                <a:latin typeface="Arial" pitchFamily="34" charset="0"/>
+                <a:cs typeface="Arial" pitchFamily="34" charset="-120"/>
+              </a:rPr>
+              <a:t>problems</a:t>
+            </a:r>
+            <a:endParaRPr lang="en-US" sz="1050" dirty="0"/>
+          </a:p>
+        </p:txBody>
+      </p:sp>
+      <p:grpSp>
+        <p:nvGrpSpPr>
+          <p:cNvPr id="94" name="Group 93">
+            <a:extLst>
+              <a:ext uri="{FF2B5EF4-FFF2-40B4-BE49-F238E27FC236}">
+                <a16:creationId xmlns:a16="http://schemas.microsoft.com/office/drawing/2014/main" id="{917A311C-CDB0-13EA-CB2F-9ED64FD260F0}"/>
+              </a:ext>
+            </a:extLst>
+          </p:cNvPr>
+          <p:cNvGrpSpPr/>
+          <p:nvPr/>
+        </p:nvGrpSpPr>
+        <p:grpSpPr>
+          <a:xfrm>
+            <a:off x="572582" y="1196715"/>
+            <a:ext cx="8330905" cy="1468655"/>
+            <a:chOff x="584495" y="1495765"/>
+            <a:chExt cx="8330905" cy="1468655"/>
+          </a:xfrm>
+        </p:grpSpPr>
+        <p:grpSp>
+          <p:nvGrpSpPr>
+            <p:cNvPr id="65" name="Group 64">
+              <a:extLst>
+                <a:ext uri="{FF2B5EF4-FFF2-40B4-BE49-F238E27FC236}">
+                  <a16:creationId xmlns:a16="http://schemas.microsoft.com/office/drawing/2014/main" id="{10F76708-D4B6-5802-0478-B6446C525639}"/>
+                </a:ext>
+              </a:extLst>
+            </p:cNvPr>
+            <p:cNvGrpSpPr/>
+            <p:nvPr/>
+          </p:nvGrpSpPr>
+          <p:grpSpPr>
+            <a:xfrm>
+              <a:off x="584495" y="1495765"/>
+              <a:ext cx="3082249" cy="1459511"/>
+              <a:chOff x="384048" y="1562581"/>
+              <a:chExt cx="3082249" cy="1459511"/>
+            </a:xfrm>
+          </p:grpSpPr>
+          <p:sp>
+            <p:nvSpPr>
+              <p:cNvPr id="36" name="Rounded Rectangle 35">
+                <a:extLst>
+                  <a:ext uri="{FF2B5EF4-FFF2-40B4-BE49-F238E27FC236}">
+                    <a16:creationId xmlns:a16="http://schemas.microsoft.com/office/drawing/2014/main" id="{563707FA-3C9C-78CE-2A26-6FA74E2A0915}"/>
+                  </a:ext>
+                </a:extLst>
+              </p:cNvPr>
+              <p:cNvSpPr/>
+              <p:nvPr/>
+            </p:nvSpPr>
+            <p:spPr>
+              <a:xfrm>
+                <a:off x="384048" y="1562581"/>
+                <a:ext cx="2415299" cy="1459511"/>
+              </a:xfrm>
+              <a:prstGeom prst="roundRect">
+                <a:avLst/>
+              </a:prstGeom>
+              <a:solidFill>
+                <a:srgbClr val="FFFFFF"/>
+              </a:solidFill>
+              <a:ln w="12700">
+                <a:solidFill>
+                  <a:srgbClr val="E2E4E8"/>
+                </a:solidFill>
+              </a:ln>
+            </p:spPr>
+            <p:style>
+              <a:lnRef idx="1">
+                <a:schemeClr val="accent1"/>
+              </a:lnRef>
+              <a:fillRef idx="3">
+                <a:schemeClr val="accent1"/>
+              </a:fillRef>
+              <a:effectRef idx="2">
+                <a:schemeClr val="accent1"/>
+              </a:effectRef>
+              <a:fontRef idx="minor">
+                <a:schemeClr val="lt1"/>
+              </a:fontRef>
+            </p:style>
+            <p:txBody>
+              <a:bodyPr rtlCol="0" anchor="ctr"/>
+              <a:lstStyle/>
+              <a:p>
+                <a:pPr algn="ctr"/>
+                <a:endParaRPr/>
+              </a:p>
+            </p:txBody>
+          </p:sp>
+          <p:sp>
+            <p:nvSpPr>
+              <p:cNvPr id="37" name="TextBox 36">
+                <a:extLst>
+                  <a:ext uri="{FF2B5EF4-FFF2-40B4-BE49-F238E27FC236}">
+                    <a16:creationId xmlns:a16="http://schemas.microsoft.com/office/drawing/2014/main" id="{375A318A-B8C7-BB6F-255F-ECDC5C11DB4F}"/>
+                  </a:ext>
+                </a:extLst>
+              </p:cNvPr>
+              <p:cNvSpPr txBox="1"/>
+              <p:nvPr/>
+            </p:nvSpPr>
+            <p:spPr>
+              <a:xfrm>
+                <a:off x="467065" y="1627632"/>
+                <a:ext cx="2999232" cy="256032"/>
+              </a:xfrm>
+              <a:prstGeom prst="rect">
+                <a:avLst/>
+              </a:prstGeom>
+              <a:noFill/>
+            </p:spPr>
+            <p:txBody>
+              <a:bodyPr wrap="none">
+                <a:spAutoFit/>
+              </a:bodyPr>
+              <a:lstStyle/>
+              <a:p>
+                <a:r>
+                  <a:rPr sz="1300" b="1" dirty="0">
+                    <a:solidFill>
+                      <a:srgbClr val="3F79E5"/>
+                    </a:solidFill>
+                    <a:latin typeface="Arial"/>
+                  </a:rPr>
+                  <a:t>Reasoning-100</a:t>
+                </a:r>
+              </a:p>
+            </p:txBody>
+          </p:sp>
+          <p:sp>
+            <p:nvSpPr>
+              <p:cNvPr id="38" name="TextBox 37">
+                <a:extLst>
+                  <a:ext uri="{FF2B5EF4-FFF2-40B4-BE49-F238E27FC236}">
+                    <a16:creationId xmlns:a16="http://schemas.microsoft.com/office/drawing/2014/main" id="{2F01B1AB-79F5-C03D-F1B2-E22393BDB8D7}"/>
+                  </a:ext>
+                </a:extLst>
+              </p:cNvPr>
+              <p:cNvSpPr txBox="1"/>
+              <p:nvPr/>
+            </p:nvSpPr>
+            <p:spPr>
+              <a:xfrm>
+                <a:off x="467065" y="1883438"/>
+                <a:ext cx="2332282" cy="584775"/>
+              </a:xfrm>
+              <a:prstGeom prst="rect">
+                <a:avLst/>
+              </a:prstGeom>
+              <a:noFill/>
+            </p:spPr>
+            <p:txBody>
+              <a:bodyPr wrap="square">
+                <a:spAutoFit/>
+              </a:bodyPr>
+              <a:lstStyle/>
+              <a:p>
+                <a:pPr>
+                  <a:spcAft>
+                    <a:spcPts val="0"/>
+                  </a:spcAft>
+                </a:pPr>
+                <a:r>
+                  <a:rPr sz="1600" b="1" dirty="0">
+                    <a:solidFill>
+                      <a:srgbClr val="1F242C"/>
+                    </a:solidFill>
+                    <a:latin typeface="Arial"/>
+                  </a:rPr>
+                  <a:t>SFT </a:t>
+                </a:r>
+                <a:r>
+                  <a:rPr sz="1600" b="1" dirty="0" err="1">
+                    <a:solidFill>
+                      <a:srgbClr val="1F242C"/>
+                    </a:solidFill>
+                    <a:latin typeface="Arial"/>
+                  </a:rPr>
+                  <a:t>LoRA</a:t>
+                </a:r>
+                <a:r>
+                  <a:rPr sz="1600" b="1" dirty="0">
+                    <a:solidFill>
+                      <a:srgbClr val="1F242C"/>
+                    </a:solidFill>
+                    <a:latin typeface="Arial"/>
+                  </a:rPr>
+                  <a:t> r=2</a:t>
+                </a:r>
+              </a:p>
+              <a:p>
+                <a:pPr>
+                  <a:spcAft>
+                    <a:spcPts val="0"/>
+                  </a:spcAft>
+                </a:pPr>
+                <a:r>
+                  <a:rPr lang="en-US" altLang="zh-CN" sz="1600" b="1" dirty="0">
+                    <a:solidFill>
+                      <a:srgbClr val="1F242C"/>
+                    </a:solidFill>
+                    <a:latin typeface="Arial"/>
+                  </a:rPr>
+                  <a:t>ACC</a:t>
+                </a:r>
+                <a:r>
+                  <a:rPr lang="zh-CN" altLang="en-US" sz="1600" b="1" dirty="0">
+                    <a:solidFill>
+                      <a:srgbClr val="1F242C"/>
+                    </a:solidFill>
+                    <a:latin typeface="Arial"/>
+                  </a:rPr>
+                  <a:t> </a:t>
+                </a:r>
+                <a:r>
+                  <a:rPr lang="en-US" altLang="zh-CN" sz="1600" b="1" dirty="0">
+                    <a:solidFill>
+                      <a:srgbClr val="1F242C"/>
+                    </a:solidFill>
+                    <a:latin typeface="Arial"/>
+                  </a:rPr>
+                  <a:t>=</a:t>
+                </a:r>
+                <a:r>
+                  <a:rPr lang="zh-CN" altLang="en-US" sz="1600" b="1" dirty="0">
+                    <a:solidFill>
+                      <a:srgbClr val="1F242C"/>
+                    </a:solidFill>
+                    <a:latin typeface="Arial"/>
+                  </a:rPr>
+                  <a:t> </a:t>
+                </a:r>
+                <a:r>
+                  <a:rPr sz="1600" b="1" dirty="0">
+                    <a:solidFill>
+                      <a:srgbClr val="1F242C"/>
+                    </a:solidFill>
+                    <a:latin typeface="Arial"/>
+                  </a:rPr>
+                  <a:t>0.88</a:t>
+                </a:r>
+              </a:p>
+            </p:txBody>
+          </p:sp>
+          <p:sp>
+            <p:nvSpPr>
+              <p:cNvPr id="39" name="TextBox 38">
+                <a:extLst>
+                  <a:ext uri="{FF2B5EF4-FFF2-40B4-BE49-F238E27FC236}">
+                    <a16:creationId xmlns:a16="http://schemas.microsoft.com/office/drawing/2014/main" id="{F6642BA5-9CCF-F853-E5BD-D2600F7D0429}"/>
+                  </a:ext>
+                </a:extLst>
+              </p:cNvPr>
+              <p:cNvSpPr txBox="1"/>
+              <p:nvPr/>
+            </p:nvSpPr>
+            <p:spPr>
+              <a:xfrm>
+                <a:off x="467065" y="2603232"/>
+                <a:ext cx="2999232" cy="384048"/>
+              </a:xfrm>
+              <a:prstGeom prst="rect">
+                <a:avLst/>
+              </a:prstGeom>
+              <a:noFill/>
+            </p:spPr>
+            <p:txBody>
+              <a:bodyPr wrap="square">
+                <a:spAutoFit/>
+              </a:bodyPr>
+              <a:lstStyle/>
+              <a:p>
+                <a:pPr>
+                  <a:spcAft>
+                    <a:spcPts val="0"/>
+                  </a:spcAft>
+                </a:pPr>
+                <a:r>
+                  <a:rPr sz="900" dirty="0">
+                    <a:solidFill>
+                      <a:srgbClr val="8E9299"/>
+                    </a:solidFill>
+                    <a:latin typeface="Arial"/>
+                  </a:rPr>
+                  <a:t>Highest score on Reasoning-100; about</a:t>
+                </a:r>
+              </a:p>
+              <a:p>
+                <a:pPr>
+                  <a:spcAft>
+                    <a:spcPts val="0"/>
+                  </a:spcAft>
+                </a:pPr>
+                <a:r>
+                  <a:rPr sz="900" dirty="0">
+                    <a:solidFill>
+                      <a:srgbClr val="8E9299"/>
+                    </a:solidFill>
+                    <a:latin typeface="Arial"/>
+                  </a:rPr>
+                  <a:t>+0.02 over the base model.</a:t>
+                </a:r>
+              </a:p>
+            </p:txBody>
+          </p:sp>
+        </p:grpSp>
+        <p:grpSp>
+          <p:nvGrpSpPr>
+            <p:cNvPr id="66" name="Group 65">
+              <a:extLst>
+                <a:ext uri="{FF2B5EF4-FFF2-40B4-BE49-F238E27FC236}">
+                  <a16:creationId xmlns:a16="http://schemas.microsoft.com/office/drawing/2014/main" id="{408398BF-56A6-5EDE-3B64-DEFB6BEB12DB}"/>
+                </a:ext>
+              </a:extLst>
+            </p:cNvPr>
+            <p:cNvGrpSpPr/>
+            <p:nvPr/>
+          </p:nvGrpSpPr>
+          <p:grpSpPr>
+            <a:xfrm>
+              <a:off x="3437344" y="1504909"/>
+              <a:ext cx="3082249" cy="1459511"/>
+              <a:chOff x="384048" y="1562581"/>
+              <a:chExt cx="3082249" cy="1459511"/>
+            </a:xfrm>
+          </p:grpSpPr>
+          <p:sp>
+            <p:nvSpPr>
+              <p:cNvPr id="67" name="Rounded Rectangle 66">
+                <a:extLst>
+                  <a:ext uri="{FF2B5EF4-FFF2-40B4-BE49-F238E27FC236}">
+                    <a16:creationId xmlns:a16="http://schemas.microsoft.com/office/drawing/2014/main" id="{1B149047-9C69-4743-3A5C-C5707A08F107}"/>
+                  </a:ext>
+                </a:extLst>
+              </p:cNvPr>
+              <p:cNvSpPr/>
+              <p:nvPr/>
+            </p:nvSpPr>
+            <p:spPr>
+              <a:xfrm>
+                <a:off x="384048" y="1562581"/>
+                <a:ext cx="2415299" cy="1459511"/>
+              </a:xfrm>
+              <a:prstGeom prst="roundRect">
+                <a:avLst/>
+              </a:prstGeom>
+              <a:solidFill>
+                <a:srgbClr val="FFFFFF"/>
+              </a:solidFill>
+              <a:ln w="12700">
+                <a:solidFill>
+                  <a:srgbClr val="E2E4E8"/>
+                </a:solidFill>
+              </a:ln>
+            </p:spPr>
+            <p:style>
+              <a:lnRef idx="1">
+                <a:schemeClr val="accent1"/>
+              </a:lnRef>
+              <a:fillRef idx="3">
+                <a:schemeClr val="accent1"/>
+              </a:fillRef>
+              <a:effectRef idx="2">
+                <a:schemeClr val="accent1"/>
+              </a:effectRef>
+              <a:fontRef idx="minor">
+                <a:schemeClr val="lt1"/>
+              </a:fontRef>
+            </p:style>
+            <p:txBody>
+              <a:bodyPr rtlCol="0" anchor="ctr"/>
+              <a:lstStyle/>
+              <a:p>
+                <a:pPr algn="ctr"/>
+                <a:endParaRPr/>
+              </a:p>
+            </p:txBody>
+          </p:sp>
+          <p:sp>
+            <p:nvSpPr>
+              <p:cNvPr id="68" name="TextBox 67">
+                <a:extLst>
+                  <a:ext uri="{FF2B5EF4-FFF2-40B4-BE49-F238E27FC236}">
+                    <a16:creationId xmlns:a16="http://schemas.microsoft.com/office/drawing/2014/main" id="{C77F217F-CE7F-3C26-30C1-C9E81ACDBFB4}"/>
+                  </a:ext>
+                </a:extLst>
+              </p:cNvPr>
+              <p:cNvSpPr txBox="1"/>
+              <p:nvPr/>
+            </p:nvSpPr>
+            <p:spPr>
+              <a:xfrm>
+                <a:off x="467065" y="1627632"/>
+                <a:ext cx="1281120" cy="292388"/>
+              </a:xfrm>
+              <a:prstGeom prst="rect">
+                <a:avLst/>
+              </a:prstGeom>
+              <a:noFill/>
+            </p:spPr>
+            <p:txBody>
+              <a:bodyPr wrap="none">
+                <a:spAutoFit/>
+              </a:bodyPr>
+              <a:lstStyle/>
+              <a:p>
+                <a:r>
+                  <a:rPr lang="en-US" sz="1300" b="1" dirty="0">
+                    <a:solidFill>
+                      <a:srgbClr val="3F79E5"/>
+                    </a:solidFill>
+                    <a:latin typeface="Arial"/>
+                  </a:rPr>
+                  <a:t>Olympiad-100</a:t>
+                </a:r>
+              </a:p>
+            </p:txBody>
+          </p:sp>
+          <p:sp>
+            <p:nvSpPr>
+              <p:cNvPr id="69" name="TextBox 68">
+                <a:extLst>
+                  <a:ext uri="{FF2B5EF4-FFF2-40B4-BE49-F238E27FC236}">
+                    <a16:creationId xmlns:a16="http://schemas.microsoft.com/office/drawing/2014/main" id="{38BF078B-352A-535C-E8E7-423F7A897040}"/>
+                  </a:ext>
+                </a:extLst>
+              </p:cNvPr>
+              <p:cNvSpPr txBox="1"/>
+              <p:nvPr/>
+            </p:nvSpPr>
+            <p:spPr>
+              <a:xfrm>
+                <a:off x="467065" y="1883438"/>
+                <a:ext cx="2332282" cy="584775"/>
+              </a:xfrm>
+              <a:prstGeom prst="rect">
+                <a:avLst/>
+              </a:prstGeom>
+              <a:noFill/>
+            </p:spPr>
+            <p:txBody>
+              <a:bodyPr wrap="square">
+                <a:spAutoFit/>
+              </a:bodyPr>
+              <a:lstStyle/>
+              <a:p>
+                <a:r>
+                  <a:rPr lang="en-US" sz="1600" b="1" dirty="0">
+                    <a:solidFill>
+                      <a:srgbClr val="1F242C"/>
+                    </a:solidFill>
+                  </a:rPr>
+                  <a:t>SFT </a:t>
+                </a:r>
+                <a:r>
+                  <a:rPr lang="en-US" sz="1600" b="1" dirty="0" err="1">
+                    <a:solidFill>
+                      <a:srgbClr val="1F242C"/>
+                    </a:solidFill>
+                  </a:rPr>
+                  <a:t>LoRA</a:t>
+                </a:r>
+                <a:endParaRPr lang="en-US" sz="1600" b="1" dirty="0">
+                  <a:solidFill>
+                    <a:srgbClr val="1F242C"/>
+                  </a:solidFill>
+                </a:endParaRPr>
+              </a:p>
+              <a:p>
+                <a:r>
+                  <a:rPr lang="en-US" sz="1600" b="1" dirty="0">
+                    <a:solidFill>
+                      <a:srgbClr val="1F242C"/>
+                    </a:solidFill>
+                  </a:rPr>
+                  <a:t>r=2 / r=4</a:t>
+                </a:r>
+              </a:p>
+            </p:txBody>
+          </p:sp>
+          <p:sp>
+            <p:nvSpPr>
+              <p:cNvPr id="70" name="TextBox 69">
+                <a:extLst>
+                  <a:ext uri="{FF2B5EF4-FFF2-40B4-BE49-F238E27FC236}">
+                    <a16:creationId xmlns:a16="http://schemas.microsoft.com/office/drawing/2014/main" id="{C60008E5-C00B-1D0C-C2BF-9ECB764F8D5D}"/>
+                  </a:ext>
+                </a:extLst>
+              </p:cNvPr>
+              <p:cNvSpPr txBox="1"/>
+              <p:nvPr/>
+            </p:nvSpPr>
+            <p:spPr>
+              <a:xfrm>
+                <a:off x="467065" y="2603232"/>
+                <a:ext cx="2999232" cy="384048"/>
+              </a:xfrm>
+              <a:prstGeom prst="rect">
+                <a:avLst/>
+              </a:prstGeom>
+              <a:noFill/>
+            </p:spPr>
+            <p:txBody>
+              <a:bodyPr wrap="square">
+                <a:spAutoFit/>
+              </a:bodyPr>
+              <a:lstStyle/>
+              <a:p>
+                <a:r>
+                  <a:rPr lang="en-US" sz="900" dirty="0">
+                    <a:solidFill>
+                      <a:srgbClr val="8E9299"/>
+                    </a:solidFill>
+                  </a:rPr>
+                  <a:t>Top Olympiad result; both r=2 and r=4</a:t>
+                </a:r>
+              </a:p>
+              <a:p>
+                <a:r>
+                  <a:rPr lang="en-US" sz="900" dirty="0">
+                    <a:solidFill>
+                      <a:srgbClr val="8E9299"/>
+                    </a:solidFill>
+                  </a:rPr>
+                  <a:t>reached 0.59.</a:t>
+                </a:r>
+              </a:p>
+            </p:txBody>
+          </p:sp>
+        </p:grpSp>
+        <p:grpSp>
+          <p:nvGrpSpPr>
+            <p:cNvPr id="71" name="Group 70">
+              <a:extLst>
+                <a:ext uri="{FF2B5EF4-FFF2-40B4-BE49-F238E27FC236}">
+                  <a16:creationId xmlns:a16="http://schemas.microsoft.com/office/drawing/2014/main" id="{7D074551-534B-BE72-12F4-4DB60140F883}"/>
+                </a:ext>
+              </a:extLst>
+            </p:cNvPr>
+            <p:cNvGrpSpPr/>
+            <p:nvPr/>
+          </p:nvGrpSpPr>
+          <p:grpSpPr>
+            <a:xfrm>
+              <a:off x="6290192" y="1495765"/>
+              <a:ext cx="2625208" cy="1459511"/>
+              <a:chOff x="384048" y="1562581"/>
+              <a:chExt cx="2625208" cy="1459511"/>
+            </a:xfrm>
+          </p:grpSpPr>
+          <p:sp>
+            <p:nvSpPr>
+              <p:cNvPr id="72" name="Rounded Rectangle 71">
+                <a:extLst>
+                  <a:ext uri="{FF2B5EF4-FFF2-40B4-BE49-F238E27FC236}">
+                    <a16:creationId xmlns:a16="http://schemas.microsoft.com/office/drawing/2014/main" id="{A3D810D2-64DD-EDF0-E803-56E455603EDE}"/>
+                  </a:ext>
+                </a:extLst>
+              </p:cNvPr>
+              <p:cNvSpPr/>
+              <p:nvPr/>
+            </p:nvSpPr>
+            <p:spPr>
+              <a:xfrm>
+                <a:off x="384048" y="1562581"/>
+                <a:ext cx="2415299" cy="1459511"/>
+              </a:xfrm>
+              <a:prstGeom prst="roundRect">
+                <a:avLst/>
+              </a:prstGeom>
+              <a:solidFill>
+                <a:srgbClr val="FFFFFF"/>
+              </a:solidFill>
+              <a:ln w="12700">
+                <a:solidFill>
+                  <a:srgbClr val="E2E4E8"/>
+                </a:solidFill>
+              </a:ln>
+            </p:spPr>
+            <p:style>
+              <a:lnRef idx="1">
+                <a:schemeClr val="accent1"/>
+              </a:lnRef>
+              <a:fillRef idx="3">
+                <a:schemeClr val="accent1"/>
+              </a:fillRef>
+              <a:effectRef idx="2">
+                <a:schemeClr val="accent1"/>
+              </a:effectRef>
+              <a:fontRef idx="minor">
+                <a:schemeClr val="lt1"/>
+              </a:fontRef>
+            </p:style>
+            <p:txBody>
+              <a:bodyPr rtlCol="0" anchor="ctr"/>
+              <a:lstStyle/>
+              <a:p>
+                <a:pPr algn="ctr"/>
+                <a:endParaRPr/>
+              </a:p>
+            </p:txBody>
+          </p:sp>
+          <p:sp>
+            <p:nvSpPr>
+              <p:cNvPr id="73" name="TextBox 72">
+                <a:extLst>
+                  <a:ext uri="{FF2B5EF4-FFF2-40B4-BE49-F238E27FC236}">
+                    <a16:creationId xmlns:a16="http://schemas.microsoft.com/office/drawing/2014/main" id="{A79A7A8B-207B-1981-DB25-0891AC178E0F}"/>
+                  </a:ext>
+                </a:extLst>
+              </p:cNvPr>
+              <p:cNvSpPr txBox="1"/>
+              <p:nvPr/>
+            </p:nvSpPr>
+            <p:spPr>
+              <a:xfrm>
+                <a:off x="467065" y="1627632"/>
+                <a:ext cx="955711" cy="292388"/>
+              </a:xfrm>
+              <a:prstGeom prst="rect">
+                <a:avLst/>
+              </a:prstGeom>
+              <a:noFill/>
+            </p:spPr>
+            <p:txBody>
+              <a:bodyPr wrap="none">
+                <a:spAutoFit/>
+              </a:bodyPr>
+              <a:lstStyle/>
+              <a:p>
+                <a:r>
+                  <a:rPr lang="en-US" sz="1300" b="1" dirty="0">
+                    <a:solidFill>
+                      <a:srgbClr val="3F79E5"/>
+                    </a:solidFill>
+                  </a:rPr>
+                  <a:t>AIMO-150</a:t>
+                </a:r>
+              </a:p>
+            </p:txBody>
+          </p:sp>
+          <p:sp>
+            <p:nvSpPr>
+              <p:cNvPr id="74" name="TextBox 73">
+                <a:extLst>
+                  <a:ext uri="{FF2B5EF4-FFF2-40B4-BE49-F238E27FC236}">
+                    <a16:creationId xmlns:a16="http://schemas.microsoft.com/office/drawing/2014/main" id="{522E3445-057E-2821-6CA8-65885DD6BCD2}"/>
+                  </a:ext>
+                </a:extLst>
+              </p:cNvPr>
+              <p:cNvSpPr txBox="1"/>
+              <p:nvPr/>
+            </p:nvSpPr>
+            <p:spPr>
+              <a:xfrm>
+                <a:off x="467065" y="1883438"/>
+                <a:ext cx="2332282" cy="584775"/>
+              </a:xfrm>
+              <a:prstGeom prst="rect">
+                <a:avLst/>
+              </a:prstGeom>
+              <a:noFill/>
+            </p:spPr>
+            <p:txBody>
+              <a:bodyPr wrap="square">
+                <a:spAutoFit/>
+              </a:bodyPr>
+              <a:lstStyle/>
+              <a:p>
+                <a:r>
+                  <a:rPr lang="en-US" sz="1600" b="1" dirty="0">
+                    <a:solidFill>
+                      <a:srgbClr val="1F242C"/>
+                    </a:solidFill>
+                  </a:rPr>
+                  <a:t>SFT </a:t>
+                </a:r>
+                <a:r>
+                  <a:rPr lang="en-US" sz="1600" b="1" dirty="0" err="1">
+                    <a:solidFill>
+                      <a:srgbClr val="1F242C"/>
+                    </a:solidFill>
+                  </a:rPr>
+                  <a:t>LoRA</a:t>
+                </a:r>
+                <a:r>
+                  <a:rPr lang="en-US" sz="1600" b="1" dirty="0">
+                    <a:solidFill>
+                      <a:srgbClr val="1F242C"/>
+                    </a:solidFill>
+                  </a:rPr>
+                  <a:t> r=4</a:t>
+                </a:r>
+              </a:p>
+              <a:p>
+                <a:r>
+                  <a:rPr lang="en-US" sz="1600" b="1" dirty="0">
+                    <a:solidFill>
+                      <a:srgbClr val="1F242C"/>
+                    </a:solidFill>
+                  </a:rPr>
+                  <a:t>0.733</a:t>
+                </a:r>
+              </a:p>
+            </p:txBody>
+          </p:sp>
+          <p:sp>
+            <p:nvSpPr>
+              <p:cNvPr id="75" name="TextBox 74">
+                <a:extLst>
+                  <a:ext uri="{FF2B5EF4-FFF2-40B4-BE49-F238E27FC236}">
+                    <a16:creationId xmlns:a16="http://schemas.microsoft.com/office/drawing/2014/main" id="{9B421273-6021-4299-944F-F6767B0A4DDA}"/>
+                  </a:ext>
+                </a:extLst>
+              </p:cNvPr>
+              <p:cNvSpPr txBox="1"/>
+              <p:nvPr/>
+            </p:nvSpPr>
+            <p:spPr>
+              <a:xfrm>
+                <a:off x="467065" y="2473466"/>
+                <a:ext cx="2542191" cy="507831"/>
+              </a:xfrm>
+              <a:prstGeom prst="rect">
+                <a:avLst/>
+              </a:prstGeom>
+              <a:noFill/>
+            </p:spPr>
+            <p:txBody>
+              <a:bodyPr wrap="square">
+                <a:spAutoFit/>
+              </a:bodyPr>
+              <a:lstStyle/>
+              <a:p>
+                <a:r>
+                  <a:rPr lang="en-US" sz="900" dirty="0">
+                    <a:solidFill>
+                      <a:srgbClr val="8E9299"/>
+                    </a:solidFill>
+                  </a:rPr>
+                  <a:t>Best AIMO score in the final run; the</a:t>
+                </a:r>
+              </a:p>
+              <a:p>
+                <a:r>
+                  <a:rPr lang="en-US" sz="900" dirty="0">
+                    <a:solidFill>
+                      <a:srgbClr val="8E9299"/>
+                    </a:solidFill>
+                  </a:rPr>
+                  <a:t>harder set favored a slightly larger</a:t>
+                </a:r>
+              </a:p>
+              <a:p>
+                <a:r>
+                  <a:rPr lang="en-US" sz="900" dirty="0">
+                    <a:solidFill>
+                      <a:srgbClr val="8E9299"/>
+                    </a:solidFill>
+                  </a:rPr>
+                  <a:t>adapter.</a:t>
+                </a:r>
+              </a:p>
+            </p:txBody>
+          </p:sp>
+        </p:grpSp>
+      </p:grpSp>
+      <p:grpSp>
+        <p:nvGrpSpPr>
+          <p:cNvPr id="91" name="Group 90">
+            <a:extLst>
+              <a:ext uri="{FF2B5EF4-FFF2-40B4-BE49-F238E27FC236}">
+                <a16:creationId xmlns:a16="http://schemas.microsoft.com/office/drawing/2014/main" id="{3E4465A8-9FDC-4E12-8C43-CA1BFC26F25F}"/>
+              </a:ext>
+            </a:extLst>
+          </p:cNvPr>
+          <p:cNvGrpSpPr/>
+          <p:nvPr/>
+        </p:nvGrpSpPr>
+        <p:grpSpPr>
+          <a:xfrm>
+            <a:off x="572582" y="2921754"/>
+            <a:ext cx="8120996" cy="1468655"/>
+            <a:chOff x="736895" y="1648165"/>
+            <a:chExt cx="8120996" cy="1468655"/>
+          </a:xfrm>
+        </p:grpSpPr>
+        <p:grpSp>
+          <p:nvGrpSpPr>
+            <p:cNvPr id="76" name="Group 75">
+              <a:extLst>
+                <a:ext uri="{FF2B5EF4-FFF2-40B4-BE49-F238E27FC236}">
+                  <a16:creationId xmlns:a16="http://schemas.microsoft.com/office/drawing/2014/main" id="{78DC1A5E-6E81-8282-01FF-4AB4033B3FD2}"/>
+                </a:ext>
+              </a:extLst>
+            </p:cNvPr>
+            <p:cNvGrpSpPr/>
+            <p:nvPr/>
+          </p:nvGrpSpPr>
+          <p:grpSpPr>
+            <a:xfrm>
+              <a:off x="736895" y="1648165"/>
+              <a:ext cx="2510229" cy="1459511"/>
+              <a:chOff x="384048" y="1562581"/>
+              <a:chExt cx="2510229" cy="1459511"/>
+            </a:xfrm>
+          </p:grpSpPr>
+          <p:sp>
+            <p:nvSpPr>
+              <p:cNvPr id="77" name="Rounded Rectangle 76">
+                <a:extLst>
+                  <a:ext uri="{FF2B5EF4-FFF2-40B4-BE49-F238E27FC236}">
+                    <a16:creationId xmlns:a16="http://schemas.microsoft.com/office/drawing/2014/main" id="{29F4A94D-829C-D8C8-0568-9C524B83E6B5}"/>
+                  </a:ext>
+                </a:extLst>
+              </p:cNvPr>
+              <p:cNvSpPr/>
+              <p:nvPr/>
+            </p:nvSpPr>
+            <p:spPr>
+              <a:xfrm>
+                <a:off x="384048" y="1562581"/>
+                <a:ext cx="2415299" cy="1459511"/>
+              </a:xfrm>
+              <a:prstGeom prst="roundRect">
+                <a:avLst/>
+              </a:prstGeom>
+              <a:solidFill>
+                <a:srgbClr val="FFFFFF"/>
+              </a:solidFill>
+              <a:ln w="12700">
+                <a:solidFill>
+                  <a:srgbClr val="E2E4E8"/>
+                </a:solidFill>
+              </a:ln>
+            </p:spPr>
+            <p:style>
+              <a:lnRef idx="1">
+                <a:schemeClr val="accent1"/>
+              </a:lnRef>
+              <a:fillRef idx="3">
+                <a:schemeClr val="accent1"/>
+              </a:fillRef>
+              <a:effectRef idx="2">
+                <a:schemeClr val="accent1"/>
+              </a:effectRef>
+              <a:fontRef idx="minor">
+                <a:schemeClr val="lt1"/>
+              </a:fontRef>
+            </p:style>
+            <p:txBody>
+              <a:bodyPr rtlCol="0" anchor="ctr"/>
+              <a:lstStyle/>
+              <a:p>
+                <a:pPr algn="ctr"/>
+                <a:endParaRPr/>
+              </a:p>
+            </p:txBody>
+          </p:sp>
+          <p:sp>
+            <p:nvSpPr>
+              <p:cNvPr id="78" name="TextBox 77">
+                <a:extLst>
+                  <a:ext uri="{FF2B5EF4-FFF2-40B4-BE49-F238E27FC236}">
+                    <a16:creationId xmlns:a16="http://schemas.microsoft.com/office/drawing/2014/main" id="{73F7EA50-A0A7-FD5F-984A-75C7A165CE11}"/>
+                  </a:ext>
+                </a:extLst>
+              </p:cNvPr>
+              <p:cNvSpPr txBox="1"/>
+              <p:nvPr/>
+            </p:nvSpPr>
+            <p:spPr>
+              <a:xfrm>
+                <a:off x="467065" y="1627632"/>
+                <a:ext cx="2154757" cy="292388"/>
+              </a:xfrm>
+              <a:prstGeom prst="rect">
+                <a:avLst/>
+              </a:prstGeom>
+              <a:noFill/>
+            </p:spPr>
+            <p:txBody>
+              <a:bodyPr wrap="none">
+                <a:spAutoFit/>
+              </a:bodyPr>
+              <a:lstStyle/>
+              <a:p>
+                <a:r>
+                  <a:rPr lang="en-US" sz="1300" b="1" dirty="0">
+                    <a:solidFill>
+                      <a:srgbClr val="3F79E5"/>
+                    </a:solidFill>
+                  </a:rPr>
+                  <a:t>GRPO </a:t>
+                </a:r>
+                <a:r>
+                  <a:rPr lang="en-US" altLang="zh-CN" sz="1300" b="1" dirty="0" err="1">
+                    <a:solidFill>
+                      <a:srgbClr val="3F79E5"/>
+                    </a:solidFill>
+                  </a:rPr>
+                  <a:t>LoRA</a:t>
+                </a:r>
+                <a:r>
+                  <a:rPr lang="zh-CN" altLang="en-US" sz="1300" b="1" dirty="0">
+                    <a:solidFill>
+                      <a:srgbClr val="3F79E5"/>
+                    </a:solidFill>
+                  </a:rPr>
+                  <a:t> </a:t>
+                </a:r>
+                <a:r>
+                  <a:rPr lang="en-US" sz="1300" b="1" dirty="0">
+                    <a:solidFill>
+                      <a:srgbClr val="3F79E5"/>
+                    </a:solidFill>
+                  </a:rPr>
+                  <a:t>r=2 params</a:t>
+                </a:r>
+              </a:p>
+            </p:txBody>
+          </p:sp>
+          <p:sp>
+            <p:nvSpPr>
+              <p:cNvPr id="79" name="TextBox 78">
+                <a:extLst>
+                  <a:ext uri="{FF2B5EF4-FFF2-40B4-BE49-F238E27FC236}">
+                    <a16:creationId xmlns:a16="http://schemas.microsoft.com/office/drawing/2014/main" id="{20393671-DBC7-CB22-D8E9-1AF11F45A0D0}"/>
+                  </a:ext>
+                </a:extLst>
+              </p:cNvPr>
+              <p:cNvSpPr txBox="1"/>
+              <p:nvPr/>
+            </p:nvSpPr>
+            <p:spPr>
+              <a:xfrm>
+                <a:off x="467065" y="1883438"/>
+                <a:ext cx="2332282" cy="338554"/>
+              </a:xfrm>
+              <a:prstGeom prst="rect">
+                <a:avLst/>
+              </a:prstGeom>
+              <a:noFill/>
+            </p:spPr>
+            <p:txBody>
+              <a:bodyPr wrap="square">
+                <a:spAutoFit/>
+              </a:bodyPr>
+              <a:lstStyle/>
+              <a:p>
+                <a:pPr>
+                  <a:spcAft>
+                    <a:spcPts val="0"/>
+                  </a:spcAft>
+                </a:pPr>
+                <a:r>
+                  <a:rPr lang="en-US" sz="1600" b="1" dirty="0">
+                    <a:solidFill>
+                      <a:srgbClr val="1F242C"/>
+                    </a:solidFill>
+                    <a:latin typeface="Arial"/>
+                  </a:rPr>
+                  <a:t>272</a:t>
+                </a:r>
+                <a:r>
+                  <a:rPr lang="en-US" altLang="zh-CN" sz="1600" b="1" dirty="0">
+                    <a:solidFill>
+                      <a:srgbClr val="1F242C"/>
+                    </a:solidFill>
+                  </a:rPr>
+                  <a:t>K</a:t>
+                </a:r>
+                <a:endParaRPr lang="en-US" sz="1600" b="1" dirty="0">
+                  <a:solidFill>
+                    <a:srgbClr val="1F242C"/>
+                  </a:solidFill>
+                  <a:latin typeface="Arial"/>
+                </a:endParaRPr>
+              </a:p>
+            </p:txBody>
+          </p:sp>
+          <p:sp>
+            <p:nvSpPr>
+              <p:cNvPr id="80" name="TextBox 79">
+                <a:extLst>
+                  <a:ext uri="{FF2B5EF4-FFF2-40B4-BE49-F238E27FC236}">
+                    <a16:creationId xmlns:a16="http://schemas.microsoft.com/office/drawing/2014/main" id="{94709762-15DD-C8EB-26C1-CD067A6E4CCB}"/>
+                  </a:ext>
+                </a:extLst>
+              </p:cNvPr>
+              <p:cNvSpPr txBox="1"/>
+              <p:nvPr/>
+            </p:nvSpPr>
+            <p:spPr>
+              <a:xfrm>
+                <a:off x="478978" y="2506185"/>
+                <a:ext cx="2415299" cy="507831"/>
+              </a:xfrm>
+              <a:prstGeom prst="rect">
+                <a:avLst/>
+              </a:prstGeom>
+              <a:noFill/>
+            </p:spPr>
+            <p:txBody>
+              <a:bodyPr wrap="square">
+                <a:spAutoFit/>
+              </a:bodyPr>
+              <a:lstStyle/>
+              <a:p>
+                <a:r>
+                  <a:rPr lang="en-US" sz="900" dirty="0">
+                    <a:solidFill>
+                      <a:srgbClr val="8E9299"/>
+                    </a:solidFill>
+                  </a:rPr>
+                  <a:t>Smallest trainable budget among the</a:t>
+                </a:r>
+              </a:p>
+              <a:p>
+                <a:r>
+                  <a:rPr lang="en-US" sz="900" dirty="0">
+                    <a:solidFill>
+                      <a:srgbClr val="8E9299"/>
+                    </a:solidFill>
+                  </a:rPr>
+                  <a:t>compared methods, about 8.5× smaller than</a:t>
+                </a:r>
+                <a:r>
+                  <a:rPr lang="zh-CN" altLang="en-US" sz="900" dirty="0">
+                    <a:solidFill>
+                      <a:srgbClr val="8E9299"/>
+                    </a:solidFill>
+                  </a:rPr>
+                  <a:t> </a:t>
+                </a:r>
+                <a:r>
+                  <a:rPr lang="en-US" sz="900" dirty="0">
+                    <a:solidFill>
+                      <a:srgbClr val="8E9299"/>
+                    </a:solidFill>
+                  </a:rPr>
+                  <a:t>SFT</a:t>
+                </a:r>
+                <a:r>
+                  <a:rPr lang="zh-CN" altLang="en-US" sz="900" dirty="0">
+                    <a:solidFill>
+                      <a:srgbClr val="8E9299"/>
+                    </a:solidFill>
+                  </a:rPr>
+                  <a:t> </a:t>
+                </a:r>
+                <a:r>
+                  <a:rPr lang="en-US" altLang="zh-CN" sz="900" dirty="0" err="1">
+                    <a:solidFill>
+                      <a:srgbClr val="8E9299"/>
+                    </a:solidFill>
+                  </a:rPr>
+                  <a:t>LoRA</a:t>
+                </a:r>
+                <a:r>
+                  <a:rPr lang="en-US" sz="900" dirty="0">
+                    <a:solidFill>
+                      <a:srgbClr val="8E9299"/>
+                    </a:solidFill>
+                  </a:rPr>
+                  <a:t> r=2.</a:t>
+                </a:r>
+              </a:p>
+            </p:txBody>
+          </p:sp>
+        </p:grpSp>
+        <p:grpSp>
+          <p:nvGrpSpPr>
+            <p:cNvPr id="81" name="Group 80">
+              <a:extLst>
+                <a:ext uri="{FF2B5EF4-FFF2-40B4-BE49-F238E27FC236}">
+                  <a16:creationId xmlns:a16="http://schemas.microsoft.com/office/drawing/2014/main" id="{9D67F8BD-0B27-0A0B-6F31-09FADAA98F88}"/>
+                </a:ext>
+              </a:extLst>
+            </p:cNvPr>
+            <p:cNvGrpSpPr/>
+            <p:nvPr/>
+          </p:nvGrpSpPr>
+          <p:grpSpPr>
+            <a:xfrm>
+              <a:off x="3589744" y="1657309"/>
+              <a:ext cx="2415299" cy="1459511"/>
+              <a:chOff x="384048" y="1562581"/>
+              <a:chExt cx="2415299" cy="1459511"/>
+            </a:xfrm>
+          </p:grpSpPr>
+          <p:sp>
+            <p:nvSpPr>
+              <p:cNvPr id="82" name="Rounded Rectangle 81">
+                <a:extLst>
+                  <a:ext uri="{FF2B5EF4-FFF2-40B4-BE49-F238E27FC236}">
+                    <a16:creationId xmlns:a16="http://schemas.microsoft.com/office/drawing/2014/main" id="{00F90159-E374-9FFE-0C2C-0B35EB996F2D}"/>
+                  </a:ext>
+                </a:extLst>
+              </p:cNvPr>
+              <p:cNvSpPr/>
+              <p:nvPr/>
+            </p:nvSpPr>
+            <p:spPr>
+              <a:xfrm>
+                <a:off x="384048" y="1562581"/>
+                <a:ext cx="2415299" cy="1459511"/>
+              </a:xfrm>
+              <a:prstGeom prst="roundRect">
+                <a:avLst/>
+              </a:prstGeom>
+              <a:solidFill>
+                <a:srgbClr val="FFFFFF"/>
+              </a:solidFill>
+              <a:ln w="12700">
+                <a:solidFill>
+                  <a:srgbClr val="E2E4E8"/>
+                </a:solidFill>
+              </a:ln>
+            </p:spPr>
+            <p:style>
+              <a:lnRef idx="1">
+                <a:schemeClr val="accent1"/>
+              </a:lnRef>
+              <a:fillRef idx="3">
+                <a:schemeClr val="accent1"/>
+              </a:fillRef>
+              <a:effectRef idx="2">
+                <a:schemeClr val="accent1"/>
+              </a:effectRef>
+              <a:fontRef idx="minor">
+                <a:schemeClr val="lt1"/>
+              </a:fontRef>
+            </p:style>
+            <p:txBody>
+              <a:bodyPr rtlCol="0" anchor="ctr"/>
+              <a:lstStyle/>
+              <a:p>
+                <a:pPr algn="ctr"/>
+                <a:endParaRPr/>
+              </a:p>
+            </p:txBody>
+          </p:sp>
+          <p:sp>
+            <p:nvSpPr>
+              <p:cNvPr id="83" name="TextBox 82">
+                <a:extLst>
+                  <a:ext uri="{FF2B5EF4-FFF2-40B4-BE49-F238E27FC236}">
+                    <a16:creationId xmlns:a16="http://schemas.microsoft.com/office/drawing/2014/main" id="{1B46792F-6FDD-F798-E4F9-E3DF57D894F6}"/>
+                  </a:ext>
+                </a:extLst>
+              </p:cNvPr>
+              <p:cNvSpPr txBox="1"/>
+              <p:nvPr/>
+            </p:nvSpPr>
+            <p:spPr>
+              <a:xfrm>
+                <a:off x="467065" y="1627632"/>
+                <a:ext cx="1933543" cy="292388"/>
+              </a:xfrm>
+              <a:prstGeom prst="rect">
+                <a:avLst/>
+              </a:prstGeom>
+              <a:noFill/>
+            </p:spPr>
+            <p:txBody>
+              <a:bodyPr wrap="none">
+                <a:spAutoFit/>
+              </a:bodyPr>
+              <a:lstStyle/>
+              <a:p>
+                <a:r>
+                  <a:rPr lang="en-US" sz="1300" b="1" dirty="0">
+                    <a:solidFill>
+                      <a:srgbClr val="3F79E5"/>
+                    </a:solidFill>
+                  </a:rPr>
+                  <a:t>SFT </a:t>
+                </a:r>
+                <a:r>
+                  <a:rPr lang="en-US" altLang="zh-CN" sz="1300" b="1" dirty="0" err="1">
+                    <a:solidFill>
+                      <a:srgbClr val="3F79E5"/>
+                    </a:solidFill>
+                  </a:rPr>
+                  <a:t>LoRA</a:t>
+                </a:r>
+                <a:r>
+                  <a:rPr lang="zh-CN" altLang="en-US" sz="1300" b="1" dirty="0">
+                    <a:solidFill>
+                      <a:srgbClr val="3F79E5"/>
+                    </a:solidFill>
+                  </a:rPr>
+                  <a:t> </a:t>
+                </a:r>
+                <a:r>
+                  <a:rPr lang="en-US" sz="1300" b="1" dirty="0">
+                    <a:solidFill>
+                      <a:srgbClr val="3F79E5"/>
+                    </a:solidFill>
+                  </a:rPr>
+                  <a:t>r=2 params</a:t>
+                </a:r>
+              </a:p>
+            </p:txBody>
+          </p:sp>
+          <p:sp>
+            <p:nvSpPr>
+              <p:cNvPr id="84" name="TextBox 83">
+                <a:extLst>
+                  <a:ext uri="{FF2B5EF4-FFF2-40B4-BE49-F238E27FC236}">
+                    <a16:creationId xmlns:a16="http://schemas.microsoft.com/office/drawing/2014/main" id="{66295148-7107-2D6C-DC99-04B49E23C4D8}"/>
+                  </a:ext>
+                </a:extLst>
+              </p:cNvPr>
+              <p:cNvSpPr txBox="1"/>
+              <p:nvPr/>
+            </p:nvSpPr>
+            <p:spPr>
+              <a:xfrm>
+                <a:off x="467065" y="1883438"/>
+                <a:ext cx="2332282" cy="338554"/>
+              </a:xfrm>
+              <a:prstGeom prst="rect">
+                <a:avLst/>
+              </a:prstGeom>
+              <a:noFill/>
+            </p:spPr>
+            <p:txBody>
+              <a:bodyPr wrap="square">
+                <a:spAutoFit/>
+              </a:bodyPr>
+              <a:lstStyle/>
+              <a:p>
+                <a:r>
+                  <a:rPr lang="en-US" sz="1600" b="1" dirty="0">
+                    <a:solidFill>
+                      <a:srgbClr val="1F242C"/>
+                    </a:solidFill>
+                  </a:rPr>
+                  <a:t>2</a:t>
+                </a:r>
+                <a:r>
+                  <a:rPr lang="en-US" altLang="zh-CN" sz="1600" b="1" dirty="0">
+                    <a:solidFill>
+                      <a:srgbClr val="1F242C"/>
+                    </a:solidFill>
+                  </a:rPr>
+                  <a:t>.</a:t>
+                </a:r>
+                <a:r>
+                  <a:rPr lang="en-US" sz="1600" b="1" dirty="0">
+                    <a:solidFill>
+                      <a:srgbClr val="1F242C"/>
+                    </a:solidFill>
+                  </a:rPr>
+                  <a:t>3</a:t>
+                </a:r>
+                <a:r>
+                  <a:rPr lang="en-US" altLang="zh-CN" sz="1600" b="1" dirty="0">
+                    <a:solidFill>
+                      <a:srgbClr val="1F242C"/>
+                    </a:solidFill>
+                  </a:rPr>
+                  <a:t>M</a:t>
+                </a:r>
+                <a:endParaRPr lang="en-US" sz="1600" b="1" dirty="0">
+                  <a:solidFill>
+                    <a:srgbClr val="1F242C"/>
+                  </a:solidFill>
+                </a:endParaRPr>
+              </a:p>
+            </p:txBody>
+          </p:sp>
+          <p:sp>
+            <p:nvSpPr>
+              <p:cNvPr id="85" name="TextBox 84">
+                <a:extLst>
+                  <a:ext uri="{FF2B5EF4-FFF2-40B4-BE49-F238E27FC236}">
+                    <a16:creationId xmlns:a16="http://schemas.microsoft.com/office/drawing/2014/main" id="{40F2DE56-09A3-0998-4BE7-1E82B098D7C5}"/>
+                  </a:ext>
+                </a:extLst>
+              </p:cNvPr>
+              <p:cNvSpPr txBox="1"/>
+              <p:nvPr/>
+            </p:nvSpPr>
+            <p:spPr>
+              <a:xfrm>
+                <a:off x="467065" y="2497041"/>
+                <a:ext cx="2332282" cy="507831"/>
+              </a:xfrm>
+              <a:prstGeom prst="rect">
+                <a:avLst/>
+              </a:prstGeom>
+              <a:noFill/>
+            </p:spPr>
+            <p:txBody>
+              <a:bodyPr wrap="square">
+                <a:spAutoFit/>
+              </a:bodyPr>
+              <a:lstStyle/>
+              <a:p>
+                <a:r>
+                  <a:rPr lang="en-US" sz="900" dirty="0">
+                    <a:solidFill>
+                      <a:srgbClr val="8E9299"/>
+                    </a:solidFill>
+                  </a:rPr>
+                  <a:t>Still modest relative to full fine-tuning,</a:t>
+                </a:r>
+              </a:p>
+              <a:p>
+                <a:r>
+                  <a:rPr lang="en-US" sz="900" dirty="0">
+                    <a:solidFill>
+                      <a:srgbClr val="8E9299"/>
+                    </a:solidFill>
+                  </a:rPr>
+                  <a:t>but much stronger in raw accuracy across</a:t>
+                </a:r>
+              </a:p>
+              <a:p>
+                <a:r>
+                  <a:rPr lang="en-US" sz="900" dirty="0">
+                    <a:solidFill>
+                      <a:srgbClr val="8E9299"/>
+                    </a:solidFill>
+                  </a:rPr>
+                  <a:t>the three sets.</a:t>
+                </a:r>
+              </a:p>
+            </p:txBody>
+          </p:sp>
+        </p:grpSp>
+        <p:grpSp>
+          <p:nvGrpSpPr>
+            <p:cNvPr id="86" name="Group 85">
+              <a:extLst>
+                <a:ext uri="{FF2B5EF4-FFF2-40B4-BE49-F238E27FC236}">
+                  <a16:creationId xmlns:a16="http://schemas.microsoft.com/office/drawing/2014/main" id="{11ABA46E-A530-D5FB-0D08-0423D2735208}"/>
+                </a:ext>
+              </a:extLst>
+            </p:cNvPr>
+            <p:cNvGrpSpPr/>
+            <p:nvPr/>
+          </p:nvGrpSpPr>
+          <p:grpSpPr>
+            <a:xfrm>
+              <a:off x="6442592" y="1648165"/>
+              <a:ext cx="2415299" cy="1459511"/>
+              <a:chOff x="384048" y="1562581"/>
+              <a:chExt cx="2415299" cy="1459511"/>
+            </a:xfrm>
+          </p:grpSpPr>
+          <p:sp>
+            <p:nvSpPr>
+              <p:cNvPr id="87" name="Rounded Rectangle 86">
+                <a:extLst>
+                  <a:ext uri="{FF2B5EF4-FFF2-40B4-BE49-F238E27FC236}">
+                    <a16:creationId xmlns:a16="http://schemas.microsoft.com/office/drawing/2014/main" id="{5EDC006E-B5EE-94CC-231F-FF1831F723AA}"/>
+                  </a:ext>
+                </a:extLst>
+              </p:cNvPr>
+              <p:cNvSpPr/>
+              <p:nvPr/>
+            </p:nvSpPr>
+            <p:spPr>
+              <a:xfrm>
+                <a:off x="384048" y="1562581"/>
+                <a:ext cx="2415299" cy="1459511"/>
+              </a:xfrm>
+              <a:prstGeom prst="roundRect">
+                <a:avLst/>
+              </a:prstGeom>
+              <a:solidFill>
+                <a:srgbClr val="FFFFFF"/>
+              </a:solidFill>
+              <a:ln w="12700">
+                <a:solidFill>
+                  <a:srgbClr val="E2E4E8"/>
+                </a:solidFill>
+              </a:ln>
+            </p:spPr>
+            <p:style>
+              <a:lnRef idx="1">
+                <a:schemeClr val="accent1"/>
+              </a:lnRef>
+              <a:fillRef idx="3">
+                <a:schemeClr val="accent1"/>
+              </a:fillRef>
+              <a:effectRef idx="2">
+                <a:schemeClr val="accent1"/>
+              </a:effectRef>
+              <a:fontRef idx="minor">
+                <a:schemeClr val="lt1"/>
+              </a:fontRef>
+            </p:style>
+            <p:txBody>
+              <a:bodyPr rtlCol="0" anchor="ctr"/>
+              <a:lstStyle/>
+              <a:p>
+                <a:pPr algn="ctr"/>
+                <a:endParaRPr/>
+              </a:p>
+            </p:txBody>
+          </p:sp>
+          <p:sp>
+            <p:nvSpPr>
+              <p:cNvPr id="88" name="TextBox 87">
+                <a:extLst>
+                  <a:ext uri="{FF2B5EF4-FFF2-40B4-BE49-F238E27FC236}">
+                    <a16:creationId xmlns:a16="http://schemas.microsoft.com/office/drawing/2014/main" id="{6D01FD8F-0AC0-43A4-41D2-26AFF94C124F}"/>
+                  </a:ext>
+                </a:extLst>
+              </p:cNvPr>
+              <p:cNvSpPr txBox="1"/>
+              <p:nvPr/>
+            </p:nvSpPr>
+            <p:spPr>
+              <a:xfrm>
+                <a:off x="467065" y="1627632"/>
+                <a:ext cx="1334020" cy="292388"/>
+              </a:xfrm>
+              <a:prstGeom prst="rect">
+                <a:avLst/>
+              </a:prstGeom>
+              <a:noFill/>
+            </p:spPr>
+            <p:txBody>
+              <a:bodyPr wrap="none">
+                <a:spAutoFit/>
+              </a:bodyPr>
+              <a:lstStyle/>
+              <a:p>
+                <a:r>
+                  <a:rPr lang="en-US" sz="1300" b="1" dirty="0">
+                    <a:solidFill>
+                      <a:srgbClr val="3F79E5"/>
+                    </a:solidFill>
+                  </a:rPr>
+                  <a:t>GRPO runtime</a:t>
+                </a:r>
+              </a:p>
+            </p:txBody>
+          </p:sp>
+          <p:sp>
+            <p:nvSpPr>
+              <p:cNvPr id="89" name="TextBox 88">
+                <a:extLst>
+                  <a:ext uri="{FF2B5EF4-FFF2-40B4-BE49-F238E27FC236}">
+                    <a16:creationId xmlns:a16="http://schemas.microsoft.com/office/drawing/2014/main" id="{BB6942B8-0A56-29AB-08F3-D0B7138075BD}"/>
+                  </a:ext>
+                </a:extLst>
+              </p:cNvPr>
+              <p:cNvSpPr txBox="1"/>
+              <p:nvPr/>
+            </p:nvSpPr>
+            <p:spPr>
+              <a:xfrm>
+                <a:off x="467065" y="1883438"/>
+                <a:ext cx="2332282" cy="338554"/>
+              </a:xfrm>
+              <a:prstGeom prst="rect">
+                <a:avLst/>
+              </a:prstGeom>
+              <a:noFill/>
+            </p:spPr>
+            <p:txBody>
+              <a:bodyPr wrap="square">
+                <a:spAutoFit/>
+              </a:bodyPr>
+              <a:lstStyle/>
+              <a:p>
+                <a:r>
+                  <a:rPr lang="en-US" sz="1600" b="1" dirty="0">
+                    <a:solidFill>
+                      <a:srgbClr val="1F242C"/>
+                    </a:solidFill>
+                  </a:rPr>
+                  <a:t>30,838.75s</a:t>
+                </a:r>
+              </a:p>
+            </p:txBody>
+          </p:sp>
+          <p:sp>
+            <p:nvSpPr>
+              <p:cNvPr id="90" name="TextBox 89">
+                <a:extLst>
+                  <a:ext uri="{FF2B5EF4-FFF2-40B4-BE49-F238E27FC236}">
+                    <a16:creationId xmlns:a16="http://schemas.microsoft.com/office/drawing/2014/main" id="{D4408C7A-312E-671C-A763-2312824B5F55}"/>
+                  </a:ext>
+                </a:extLst>
+              </p:cNvPr>
+              <p:cNvSpPr txBox="1"/>
+              <p:nvPr/>
+            </p:nvSpPr>
+            <p:spPr>
+              <a:xfrm>
+                <a:off x="467065" y="2513236"/>
+                <a:ext cx="2332282" cy="507831"/>
+              </a:xfrm>
+              <a:prstGeom prst="rect">
+                <a:avLst/>
+              </a:prstGeom>
+              <a:noFill/>
+            </p:spPr>
+            <p:txBody>
+              <a:bodyPr wrap="square">
+                <a:spAutoFit/>
+              </a:bodyPr>
+              <a:lstStyle/>
+              <a:p>
+                <a:r>
+                  <a:rPr lang="en-US" sz="900" dirty="0">
+                    <a:solidFill>
+                      <a:srgbClr val="8E9299"/>
+                    </a:solidFill>
+                  </a:rPr>
+                  <a:t>Much slower than the SFT runs in this CPU</a:t>
+                </a:r>
+                <a:r>
+                  <a:rPr lang="zh-CN" altLang="en-US" sz="900" dirty="0">
+                    <a:solidFill>
+                      <a:srgbClr val="8E9299"/>
+                    </a:solidFill>
+                  </a:rPr>
+                  <a:t> </a:t>
+                </a:r>
+                <a:r>
+                  <a:rPr lang="en-US" sz="900" dirty="0">
+                    <a:solidFill>
+                      <a:srgbClr val="8E9299"/>
+                    </a:solidFill>
+                  </a:rPr>
+                  <a:t>setup, even though its adapter was</a:t>
+                </a:r>
+              </a:p>
+              <a:p>
+                <a:r>
+                  <a:rPr lang="en-US" sz="900" dirty="0">
+                    <a:solidFill>
+                      <a:srgbClr val="8E9299"/>
+                    </a:solidFill>
+                  </a:rPr>
+                  <a:t>smaller.</a:t>
+                </a:r>
+              </a:p>
+            </p:txBody>
+          </p:sp>
+        </p:grpSp>
+      </p:grpSp>
+    </p:spTree>
+    <p:extLst>
+      <p:ext uri="{BB962C8B-B14F-4D97-AF65-F5344CB8AC3E}">
+        <p14:creationId xmlns:p14="http://schemas.microsoft.com/office/powerpoint/2010/main" val="2089565310"/>
+      </p:ext>
+    </p:extLst>
+  </p:cSld>
+  <p:clrMapOvr>
+    <a:masterClrMapping/>
+  </p:clrMapOvr>
+</p:sld>
+</file>
+
+<file path=ppt/slides/slide15.xml><?xml version="1.0" encoding="utf-8"?>
+<p:sld xmlns:a="http://schemas.openxmlformats.org/drawingml/2006/main" xmlns:r="http://schemas.openxmlformats.org/officeDocument/2006/relationships" xmlns:p="http://schemas.openxmlformats.org/presentationml/2006/main">
+  <p:cSld>
+    <p:spTree>
+      <p:nvGrpSpPr>
+        <p:cNvPr id="1" name=""/>
+        <p:cNvGrpSpPr/>
+        <p:nvPr/>
+      </p:nvGrpSpPr>
+      <p:grpSpPr>
+        <a:xfrm>
+          <a:off x="0" y="0"/>
+          <a:ext cx="0" cy="0"/>
+          <a:chOff x="0" y="0"/>
+          <a:chExt cx="0" cy="0"/>
+        </a:xfrm>
+      </p:grpSpPr>
+      <p:sp>
+        <p:nvSpPr>
+          <p:cNvPr id="14" name="Text 0">
+            <a:extLst>
+              <a:ext uri="{FF2B5EF4-FFF2-40B4-BE49-F238E27FC236}">
+                <a16:creationId xmlns:a16="http://schemas.microsoft.com/office/drawing/2014/main" id="{C531FC69-45F7-843E-4E6A-02FE1901D59F}"/>
+              </a:ext>
+            </a:extLst>
+          </p:cNvPr>
+          <p:cNvSpPr/>
+          <p:nvPr/>
+        </p:nvSpPr>
+        <p:spPr>
+          <a:xfrm>
+            <a:off x="594360" y="384048"/>
+            <a:ext cx="7132320" cy="411480"/>
+          </a:xfrm>
+          <a:prstGeom prst="rect">
+            <a:avLst/>
+          </a:prstGeom>
+          <a:noFill/>
+          <a:ln/>
+        </p:spPr>
+        <p:txBody>
+          <a:bodyPr wrap="square" lIns="0" tIns="0" rIns="0" bIns="0" rtlCol="0" anchor="ctr"/>
+          <a:lstStyle/>
+          <a:p>
+            <a:pPr marL="0" indent="0">
+              <a:buNone/>
+            </a:pPr>
+            <a:r>
+              <a:rPr lang="en-US" sz="2600" dirty="0">
+                <a:solidFill>
+                  <a:schemeClr val="dk1"/>
+                </a:solidFill>
+                <a:latin typeface="Red Hat Mono"/>
+                <a:ea typeface="Red Hat Mono"/>
+                <a:cs typeface="Red Hat Mono"/>
+                <a:sym typeface="Red Hat Mono"/>
+              </a:rPr>
+              <a:t>Benchmark Performance</a:t>
+            </a:r>
+          </a:p>
+        </p:txBody>
+      </p:sp>
+      <p:sp>
+        <p:nvSpPr>
+          <p:cNvPr id="15" name="Text 1">
+            <a:extLst>
+              <a:ext uri="{FF2B5EF4-FFF2-40B4-BE49-F238E27FC236}">
+                <a16:creationId xmlns:a16="http://schemas.microsoft.com/office/drawing/2014/main" id="{23313EE4-1730-0F55-CD95-012A93F34A5A}"/>
+              </a:ext>
+            </a:extLst>
+          </p:cNvPr>
+          <p:cNvSpPr/>
+          <p:nvPr/>
+        </p:nvSpPr>
+        <p:spPr>
+          <a:xfrm>
+            <a:off x="621792" y="841248"/>
+            <a:ext cx="7955280" cy="219456"/>
+          </a:xfrm>
+          <a:prstGeom prst="rect">
+            <a:avLst/>
+          </a:prstGeom>
+          <a:noFill/>
+          <a:ln/>
+        </p:spPr>
+        <p:txBody>
+          <a:bodyPr wrap="square" lIns="0" tIns="0" rIns="0" bIns="0" rtlCol="0" anchor="ctr"/>
+          <a:lstStyle/>
+          <a:p>
+            <a:pPr marL="0" indent="0">
+              <a:buNone/>
+            </a:pPr>
+            <a:r>
+              <a:rPr lang="en-US" sz="1050" i="1" dirty="0">
+                <a:solidFill>
+                  <a:srgbClr val="5B5B5B"/>
+                </a:solidFill>
+                <a:latin typeface="Arial" pitchFamily="34" charset="0"/>
+                <a:ea typeface="Arial" pitchFamily="34" charset="-122"/>
+                <a:cs typeface="Arial" pitchFamily="34" charset="-120"/>
+              </a:rPr>
+              <a:t>Accuracy across all evaluated conditions</a:t>
+            </a:r>
+            <a:endParaRPr lang="en-US" sz="1050" dirty="0"/>
+          </a:p>
+        </p:txBody>
+      </p:sp>
+      <p:pic>
+        <p:nvPicPr>
+          <p:cNvPr id="16" name="Image 1" descr="/mnt/data/charts/accuracy_grouped.png">
+            <a:extLst>
+              <a:ext uri="{FF2B5EF4-FFF2-40B4-BE49-F238E27FC236}">
+                <a16:creationId xmlns:a16="http://schemas.microsoft.com/office/drawing/2014/main" id="{07EBDCF1-D775-7475-5015-CF833C47AADA}"/>
+              </a:ext>
+            </a:extLst>
+          </p:cNvPr>
+          <p:cNvPicPr>
+            <a:picLocks noChangeAspect="1"/>
+          </p:cNvPicPr>
+          <p:nvPr/>
+        </p:nvPicPr>
+        <p:blipFill>
+          <a:blip r:embed="rId2"/>
+          <a:stretch>
+            <a:fillRect/>
+          </a:stretch>
+        </p:blipFill>
+        <p:spPr>
+          <a:xfrm>
+            <a:off x="335280" y="1459937"/>
+            <a:ext cx="5527040" cy="2517703"/>
+          </a:xfrm>
+          <a:prstGeom prst="rect">
+            <a:avLst/>
+          </a:prstGeom>
+        </p:spPr>
+      </p:pic>
+      <p:sp>
+        <p:nvSpPr>
+          <p:cNvPr id="17" name="Text 2">
+            <a:extLst>
+              <a:ext uri="{FF2B5EF4-FFF2-40B4-BE49-F238E27FC236}">
+                <a16:creationId xmlns:a16="http://schemas.microsoft.com/office/drawing/2014/main" id="{98F9A6A5-032D-220F-E263-996E22A9E4DA}"/>
+              </a:ext>
+            </a:extLst>
+          </p:cNvPr>
+          <p:cNvSpPr/>
+          <p:nvPr/>
+        </p:nvSpPr>
+        <p:spPr>
+          <a:xfrm>
+            <a:off x="6223000" y="841248"/>
+            <a:ext cx="1261872" cy="256032"/>
+          </a:xfrm>
+          <a:prstGeom prst="rect">
+            <a:avLst/>
+          </a:prstGeom>
+          <a:solidFill>
+            <a:srgbClr val="EAF2FF"/>
+          </a:solidFill>
+          <a:ln>
+            <a:solidFill>
+              <a:srgbClr val="EAF2FF"/>
+            </a:solidFill>
+          </a:ln>
+        </p:spPr>
+        <p:txBody>
+          <a:bodyPr wrap="square" lIns="381" tIns="381" rIns="381" bIns="381" rtlCol="0" anchor="ctr"/>
+          <a:lstStyle/>
+          <a:p>
+            <a:pPr marL="0" indent="0" algn="ctr">
+              <a:buNone/>
+            </a:pPr>
+            <a:r>
+              <a:rPr lang="en-US" sz="1050" b="1" dirty="0">
+                <a:solidFill>
+                  <a:srgbClr val="1F1F1F"/>
+                </a:solidFill>
+                <a:latin typeface="Arial" pitchFamily="34" charset="0"/>
+                <a:ea typeface="Arial" pitchFamily="34" charset="-122"/>
+                <a:cs typeface="Arial" pitchFamily="34" charset="-120"/>
+              </a:rPr>
+              <a:t>Reasoning-100</a:t>
+            </a:r>
+            <a:endParaRPr lang="en-US" sz="1050" dirty="0"/>
+          </a:p>
+        </p:txBody>
+      </p:sp>
+      <p:sp>
+        <p:nvSpPr>
+          <p:cNvPr id="18" name="Text 3">
+            <a:extLst>
+              <a:ext uri="{FF2B5EF4-FFF2-40B4-BE49-F238E27FC236}">
+                <a16:creationId xmlns:a16="http://schemas.microsoft.com/office/drawing/2014/main" id="{CAC8FF6A-BB06-05DD-BECE-A0C0073F33AA}"/>
+              </a:ext>
+            </a:extLst>
+          </p:cNvPr>
+          <p:cNvSpPr/>
+          <p:nvPr/>
+        </p:nvSpPr>
+        <p:spPr>
+          <a:xfrm>
+            <a:off x="6223000" y="1051560"/>
+            <a:ext cx="2727960" cy="932688"/>
+          </a:xfrm>
+          <a:prstGeom prst="rect">
+            <a:avLst/>
+          </a:prstGeom>
+          <a:noFill/>
+          <a:ln/>
+        </p:spPr>
+        <p:txBody>
+          <a:bodyPr wrap="square" lIns="0" tIns="0" rIns="0" bIns="0" rtlCol="0" anchor="ctr">
+            <a:normAutofit/>
+          </a:bodyPr>
+          <a:lstStyle/>
+          <a:p>
+            <a:pPr marL="0" indent="0">
+              <a:buNone/>
+            </a:pPr>
+            <a:r>
+              <a:rPr lang="en-US" sz="1200" dirty="0">
+                <a:solidFill>
+                  <a:srgbClr val="1F1F1F"/>
+                </a:solidFill>
+                <a:latin typeface="Arial" pitchFamily="34" charset="0"/>
+                <a:ea typeface="Arial" pitchFamily="34" charset="-122"/>
+                <a:cs typeface="Arial" pitchFamily="34" charset="-120"/>
+              </a:rPr>
+              <a:t>Base was already strong at 0.86, but SFT LoRA r=2 still improved it to 0.88. GRPO matched the base and did not add extra gain in this run.</a:t>
+            </a:r>
+            <a:endParaRPr lang="en-US" sz="1200" dirty="0"/>
+          </a:p>
+        </p:txBody>
+      </p:sp>
+      <p:sp>
+        <p:nvSpPr>
+          <p:cNvPr id="19" name="Text 4">
+            <a:extLst>
+              <a:ext uri="{FF2B5EF4-FFF2-40B4-BE49-F238E27FC236}">
+                <a16:creationId xmlns:a16="http://schemas.microsoft.com/office/drawing/2014/main" id="{7E3ABE7A-2884-691F-BB77-3F3EC15AE11D}"/>
+              </a:ext>
+            </a:extLst>
+          </p:cNvPr>
+          <p:cNvSpPr/>
+          <p:nvPr/>
+        </p:nvSpPr>
+        <p:spPr>
+          <a:xfrm>
+            <a:off x="6223000" y="2024888"/>
+            <a:ext cx="1261872" cy="256032"/>
+          </a:xfrm>
+          <a:prstGeom prst="rect">
+            <a:avLst/>
+          </a:prstGeom>
+          <a:solidFill>
+            <a:srgbClr val="F0E9FF"/>
+          </a:solidFill>
+          <a:ln>
+            <a:solidFill>
+              <a:srgbClr val="F0E9FF"/>
+            </a:solidFill>
+          </a:ln>
+        </p:spPr>
+        <p:txBody>
+          <a:bodyPr wrap="square" lIns="381" tIns="381" rIns="381" bIns="381" rtlCol="0" anchor="ctr"/>
+          <a:lstStyle/>
+          <a:p>
+            <a:pPr marL="0" indent="0" algn="ctr">
+              <a:buNone/>
+            </a:pPr>
+            <a:r>
+              <a:rPr lang="en-US" sz="1050" b="1" dirty="0">
+                <a:solidFill>
+                  <a:srgbClr val="1F1F1F"/>
+                </a:solidFill>
+                <a:latin typeface="Arial" pitchFamily="34" charset="0"/>
+                <a:ea typeface="Arial" pitchFamily="34" charset="-122"/>
+                <a:cs typeface="Arial" pitchFamily="34" charset="-120"/>
+              </a:rPr>
+              <a:t>Olympiad-100</a:t>
+            </a:r>
+            <a:endParaRPr lang="en-US" sz="1050" dirty="0"/>
+          </a:p>
+        </p:txBody>
+      </p:sp>
+      <p:sp>
+        <p:nvSpPr>
+          <p:cNvPr id="20" name="Text 5">
+            <a:extLst>
+              <a:ext uri="{FF2B5EF4-FFF2-40B4-BE49-F238E27FC236}">
+                <a16:creationId xmlns:a16="http://schemas.microsoft.com/office/drawing/2014/main" id="{33B69364-3496-4046-7300-3DD8D7938844}"/>
+              </a:ext>
+            </a:extLst>
+          </p:cNvPr>
+          <p:cNvSpPr/>
+          <p:nvPr/>
+        </p:nvSpPr>
+        <p:spPr>
+          <a:xfrm>
+            <a:off x="6223000" y="2221484"/>
+            <a:ext cx="2727960" cy="914400"/>
+          </a:xfrm>
+          <a:prstGeom prst="rect">
+            <a:avLst/>
+          </a:prstGeom>
+          <a:noFill/>
+          <a:ln/>
+        </p:spPr>
+        <p:txBody>
+          <a:bodyPr wrap="square" lIns="0" tIns="0" rIns="0" bIns="0" rtlCol="0" anchor="ctr">
+            <a:normAutofit/>
+          </a:bodyPr>
+          <a:lstStyle/>
+          <a:p>
+            <a:r>
+              <a:rPr lang="en-US" sz="1200" dirty="0">
+                <a:solidFill>
+                  <a:srgbClr val="1F1F1F"/>
+                </a:solidFill>
+                <a:latin typeface="Arial" pitchFamily="34" charset="0"/>
+                <a:cs typeface="Arial" pitchFamily="34" charset="-120"/>
+              </a:rPr>
+              <a:t>This was the closest benchmark: SFT LoRA r=2 and r=4 both reached 0.59, while GRPO reached 0.58. The gains were modest but consistent.</a:t>
+            </a:r>
+          </a:p>
+        </p:txBody>
+      </p:sp>
+      <p:sp>
+        <p:nvSpPr>
+          <p:cNvPr id="21" name="Text 6">
+            <a:extLst>
+              <a:ext uri="{FF2B5EF4-FFF2-40B4-BE49-F238E27FC236}">
+                <a16:creationId xmlns:a16="http://schemas.microsoft.com/office/drawing/2014/main" id="{D53A28E5-8959-46E2-CF1C-8EEC3BB82310}"/>
+              </a:ext>
+            </a:extLst>
+          </p:cNvPr>
+          <p:cNvSpPr/>
+          <p:nvPr/>
+        </p:nvSpPr>
+        <p:spPr>
+          <a:xfrm>
+            <a:off x="6223000" y="3135884"/>
+            <a:ext cx="1078992" cy="256032"/>
+          </a:xfrm>
+          <a:prstGeom prst="rect">
+            <a:avLst/>
+          </a:prstGeom>
+          <a:solidFill>
+            <a:srgbClr val="FFF0E6"/>
+          </a:solidFill>
+          <a:ln>
+            <a:solidFill>
+              <a:srgbClr val="FFF0E6"/>
+            </a:solidFill>
+          </a:ln>
+        </p:spPr>
+        <p:txBody>
+          <a:bodyPr wrap="square" lIns="381" tIns="381" rIns="381" bIns="381" rtlCol="0" anchor="ctr"/>
+          <a:lstStyle/>
+          <a:p>
+            <a:pPr marL="0" indent="0" algn="ctr">
+              <a:buNone/>
+            </a:pPr>
+            <a:r>
+              <a:rPr lang="en-US" sz="1050" b="1" dirty="0">
+                <a:solidFill>
+                  <a:srgbClr val="1F1F1F"/>
+                </a:solidFill>
+                <a:latin typeface="Arial" pitchFamily="34" charset="0"/>
+                <a:ea typeface="Arial" pitchFamily="34" charset="-122"/>
+                <a:cs typeface="Arial" pitchFamily="34" charset="-120"/>
+              </a:rPr>
+              <a:t>AIMO-150</a:t>
+            </a:r>
+            <a:endParaRPr lang="en-US" sz="1050" dirty="0"/>
+          </a:p>
+        </p:txBody>
+      </p:sp>
+      <p:sp>
+        <p:nvSpPr>
+          <p:cNvPr id="22" name="Text 7">
+            <a:extLst>
+              <a:ext uri="{FF2B5EF4-FFF2-40B4-BE49-F238E27FC236}">
+                <a16:creationId xmlns:a16="http://schemas.microsoft.com/office/drawing/2014/main" id="{432D6FC0-8095-AF84-E39B-5AC59816635E}"/>
+              </a:ext>
+            </a:extLst>
+          </p:cNvPr>
+          <p:cNvSpPr/>
+          <p:nvPr/>
+        </p:nvSpPr>
+        <p:spPr>
+          <a:xfrm>
+            <a:off x="6223000" y="3433572"/>
+            <a:ext cx="2656840" cy="868680"/>
+          </a:xfrm>
+          <a:prstGeom prst="rect">
+            <a:avLst/>
+          </a:prstGeom>
+          <a:noFill/>
+          <a:ln/>
+        </p:spPr>
+        <p:txBody>
+          <a:bodyPr wrap="square" lIns="0" tIns="0" rIns="0" bIns="0" rtlCol="0" anchor="ctr">
+            <a:normAutofit/>
+          </a:bodyPr>
+          <a:lstStyle/>
+          <a:p>
+            <a:pPr marL="0" indent="0">
+              <a:buNone/>
+            </a:pPr>
+            <a:r>
+              <a:rPr lang="en-US" sz="1200" dirty="0">
+                <a:solidFill>
+                  <a:srgbClr val="1F1F1F"/>
+                </a:solidFill>
+                <a:latin typeface="Arial" pitchFamily="34" charset="0"/>
+                <a:cs typeface="Arial" pitchFamily="34" charset="-120"/>
+              </a:rPr>
+              <a:t>AIMO favored a slightly larger adapter: SFT LoRA r=4 achieved the best score at 0.733, outperforming both r=2/r=8 and GRPO.</a:t>
+            </a:r>
+          </a:p>
+        </p:txBody>
+      </p:sp>
+      <p:sp>
+        <p:nvSpPr>
+          <p:cNvPr id="23" name="Text 8">
+            <a:extLst>
+              <a:ext uri="{FF2B5EF4-FFF2-40B4-BE49-F238E27FC236}">
+                <a16:creationId xmlns:a16="http://schemas.microsoft.com/office/drawing/2014/main" id="{A0363F51-538A-CF6F-A5F1-70F4EBD36953}"/>
+              </a:ext>
+            </a:extLst>
+          </p:cNvPr>
+          <p:cNvSpPr/>
+          <p:nvPr/>
+        </p:nvSpPr>
+        <p:spPr>
+          <a:xfrm>
+            <a:off x="335280" y="4552077"/>
+            <a:ext cx="8795512" cy="346003"/>
+          </a:xfrm>
+          <a:prstGeom prst="rect">
+            <a:avLst/>
+          </a:prstGeom>
+          <a:noFill/>
+          <a:ln/>
+        </p:spPr>
+        <p:txBody>
+          <a:bodyPr wrap="square" lIns="0" tIns="0" rIns="0" bIns="0" rtlCol="0" anchor="ctr">
+            <a:normAutofit fontScale="92500" lnSpcReduction="20000"/>
+          </a:bodyPr>
+          <a:lstStyle/>
+          <a:p>
+            <a:pPr marL="0" indent="0">
+              <a:buNone/>
+            </a:pPr>
+            <a:r>
+              <a:rPr lang="en-US" sz="1550" b="1" dirty="0">
+                <a:solidFill>
+                  <a:srgbClr val="1F1F1F"/>
+                </a:solidFill>
+                <a:latin typeface="Arial" pitchFamily="34" charset="0"/>
+                <a:ea typeface="Arial" pitchFamily="34" charset="-122"/>
+                <a:cs typeface="Arial" pitchFamily="34" charset="-120"/>
+              </a:rPr>
+              <a:t>Pattern</a:t>
+            </a:r>
+            <a:r>
+              <a:rPr lang="en-US" sz="1550" dirty="0">
+                <a:solidFill>
+                  <a:srgbClr val="1F1F1F"/>
+                </a:solidFill>
+                <a:latin typeface="Arial" pitchFamily="34" charset="0"/>
+                <a:ea typeface="Arial" pitchFamily="34" charset="-122"/>
+                <a:cs typeface="Arial" pitchFamily="34" charset="-120"/>
+              </a:rPr>
+              <a:t>: </a:t>
+            </a:r>
+            <a:r>
+              <a:rPr lang="en-US" altLang="zh-CN" sz="1550" dirty="0">
+                <a:solidFill>
+                  <a:srgbClr val="1F1F1F"/>
+                </a:solidFill>
+                <a:latin typeface="Arial" pitchFamily="34" charset="0"/>
+                <a:ea typeface="Arial" pitchFamily="34" charset="-122"/>
+                <a:cs typeface="Arial" pitchFamily="34" charset="-120"/>
+              </a:rPr>
+              <a:t>S</a:t>
+            </a:r>
+            <a:r>
+              <a:rPr lang="en-US" sz="1550" dirty="0">
+                <a:solidFill>
+                  <a:srgbClr val="1F1F1F"/>
+                </a:solidFill>
+                <a:latin typeface="Arial" pitchFamily="34" charset="0"/>
+                <a:ea typeface="Arial" pitchFamily="34" charset="-122"/>
+                <a:cs typeface="Arial" pitchFamily="34" charset="-120"/>
+              </a:rPr>
+              <a:t>maller LoRA ranks were enough to help, but the best rank depended on benchmark difficulty and distribution.</a:t>
+            </a:r>
+            <a:endParaRPr lang="en-US" sz="1550" dirty="0"/>
+          </a:p>
+        </p:txBody>
+      </p:sp>
+    </p:spTree>
+    <p:extLst>
+      <p:ext uri="{BB962C8B-B14F-4D97-AF65-F5344CB8AC3E}">
+        <p14:creationId xmlns:p14="http://schemas.microsoft.com/office/powerpoint/2010/main" val="3475238305"/>
+      </p:ext>
+    </p:extLst>
+  </p:cSld>
+  <p:clrMapOvr>
+    <a:masterClrMapping/>
+  </p:clrMapOvr>
+</p:sld>
+</file>
+
+<file path=ppt/slides/slide16.xml><?xml version="1.0" encoding="utf-8"?>
+<p:sld xmlns:a="http://schemas.openxmlformats.org/drawingml/2006/main" xmlns:r="http://schemas.openxmlformats.org/officeDocument/2006/relationships" xmlns:p="http://schemas.openxmlformats.org/presentationml/2006/main">
+  <p:cSld>
+    <p:spTree>
+      <p:nvGrpSpPr>
+        <p:cNvPr id="1" name=""/>
+        <p:cNvGrpSpPr/>
+        <p:nvPr/>
+      </p:nvGrpSpPr>
+      <p:grpSpPr>
+        <a:xfrm>
+          <a:off x="0" y="0"/>
+          <a:ext cx="0" cy="0"/>
+          <a:chOff x="0" y="0"/>
+          <a:chExt cx="0" cy="0"/>
+        </a:xfrm>
+      </p:grpSpPr>
+      <p:sp>
+        <p:nvSpPr>
+          <p:cNvPr id="21" name="Rounded Rectangle 20">
+            <a:extLst>
+              <a:ext uri="{FF2B5EF4-FFF2-40B4-BE49-F238E27FC236}">
+                <a16:creationId xmlns:a16="http://schemas.microsoft.com/office/drawing/2014/main" id="{257016F7-1641-7DCC-92D9-CB9683D6064E}"/>
+              </a:ext>
+            </a:extLst>
+          </p:cNvPr>
+          <p:cNvSpPr/>
+          <p:nvPr/>
+        </p:nvSpPr>
+        <p:spPr>
+          <a:xfrm>
+            <a:off x="201930" y="3620910"/>
+            <a:ext cx="8740140" cy="1332992"/>
+          </a:xfrm>
+          <a:prstGeom prst="roundRect">
+            <a:avLst/>
+          </a:prstGeom>
+          <a:solidFill>
+            <a:srgbClr val="FAFAFB"/>
+          </a:solidFill>
+          <a:ln>
+            <a:solidFill>
+              <a:srgbClr val="E2E4E8"/>
+            </a:solidFill>
+          </a:ln>
+        </p:spPr>
+        <p:style>
+          <a:lnRef idx="1">
+            <a:schemeClr val="accent1"/>
+          </a:lnRef>
+          <a:fillRef idx="3">
+            <a:schemeClr val="accent1"/>
+          </a:fillRef>
+          <a:effectRef idx="2">
+            <a:schemeClr val="accent1"/>
+          </a:effectRef>
+          <a:fontRef idx="minor">
+            <a:schemeClr val="lt1"/>
+          </a:fontRef>
+        </p:style>
+        <p:txBody>
+          <a:bodyPr rtlCol="0" anchor="ctr"/>
+          <a:lstStyle/>
+          <a:p>
+            <a:pPr algn="ctr"/>
+            <a:endParaRPr/>
+          </a:p>
+        </p:txBody>
+      </p:sp>
+      <p:sp>
+        <p:nvSpPr>
+          <p:cNvPr id="9" name="Text 0">
+            <a:extLst>
+              <a:ext uri="{FF2B5EF4-FFF2-40B4-BE49-F238E27FC236}">
+                <a16:creationId xmlns:a16="http://schemas.microsoft.com/office/drawing/2014/main" id="{281068E5-217D-4498-8759-D555E399864F}"/>
+              </a:ext>
+            </a:extLst>
+          </p:cNvPr>
+          <p:cNvSpPr/>
+          <p:nvPr/>
+        </p:nvSpPr>
+        <p:spPr>
+          <a:xfrm>
+            <a:off x="594360" y="176078"/>
+            <a:ext cx="7132320" cy="411480"/>
+          </a:xfrm>
+          <a:prstGeom prst="rect">
+            <a:avLst/>
+          </a:prstGeom>
+          <a:noFill/>
+          <a:ln/>
+        </p:spPr>
+        <p:txBody>
+          <a:bodyPr wrap="square" lIns="0" tIns="0" rIns="0" bIns="0" rtlCol="0" anchor="ctr"/>
+          <a:lstStyle/>
+          <a:p>
+            <a:pPr marL="0" indent="0">
+              <a:buNone/>
+            </a:pPr>
+            <a:r>
+              <a:rPr lang="en-US" sz="2600" dirty="0">
+                <a:solidFill>
+                  <a:schemeClr val="dk1"/>
+                </a:solidFill>
+                <a:latin typeface="Red Hat Mono"/>
+                <a:ea typeface="Red Hat Mono"/>
+                <a:cs typeface="Red Hat Mono"/>
+              </a:rPr>
+              <a:t>Efficiency Trade-offs</a:t>
+            </a:r>
+          </a:p>
+        </p:txBody>
+      </p:sp>
+      <p:sp>
+        <p:nvSpPr>
+          <p:cNvPr id="10" name="Text 1">
+            <a:extLst>
+              <a:ext uri="{FF2B5EF4-FFF2-40B4-BE49-F238E27FC236}">
+                <a16:creationId xmlns:a16="http://schemas.microsoft.com/office/drawing/2014/main" id="{FF52EC13-272F-5E14-99E2-16CDB5F25895}"/>
+              </a:ext>
+            </a:extLst>
+          </p:cNvPr>
+          <p:cNvSpPr/>
+          <p:nvPr/>
+        </p:nvSpPr>
+        <p:spPr>
+          <a:xfrm>
+            <a:off x="594360" y="668528"/>
+            <a:ext cx="1420368" cy="1332992"/>
+          </a:xfrm>
+          <a:prstGeom prst="rect">
+            <a:avLst/>
+          </a:prstGeom>
+          <a:noFill/>
+          <a:ln/>
+        </p:spPr>
+        <p:txBody>
+          <a:bodyPr wrap="square" lIns="0" tIns="0" rIns="0" bIns="0" rtlCol="0" anchor="ctr"/>
+          <a:lstStyle/>
+          <a:p>
+            <a:pPr marL="0" indent="0">
+              <a:buNone/>
+            </a:pPr>
+            <a:r>
+              <a:rPr lang="en-US" sz="1050" i="1" dirty="0">
+                <a:solidFill>
+                  <a:srgbClr val="5B5B5B"/>
+                </a:solidFill>
+                <a:latin typeface="Arial" pitchFamily="34" charset="0"/>
+                <a:ea typeface="Arial" pitchFamily="34" charset="-122"/>
+                <a:cs typeface="Arial" pitchFamily="34" charset="-120"/>
+              </a:rPr>
+              <a:t>Parameter budget, training time, and where GRPO was strongest</a:t>
+            </a:r>
+            <a:endParaRPr lang="en-US" sz="1050" dirty="0"/>
+          </a:p>
+        </p:txBody>
+      </p:sp>
+      <p:pic>
+        <p:nvPicPr>
+          <p:cNvPr id="11" name="Image 1" descr="/mnt/data/charts/efficiency_scatter.png">
+            <a:extLst>
+              <a:ext uri="{FF2B5EF4-FFF2-40B4-BE49-F238E27FC236}">
+                <a16:creationId xmlns:a16="http://schemas.microsoft.com/office/drawing/2014/main" id="{E45B6BF5-97E7-4B52-BC51-55DE9BF4DCC4}"/>
+              </a:ext>
+            </a:extLst>
+          </p:cNvPr>
+          <p:cNvPicPr>
+            <a:picLocks noChangeAspect="1"/>
+          </p:cNvPicPr>
+          <p:nvPr/>
+        </p:nvPicPr>
+        <p:blipFill>
+          <a:blip r:embed="rId2"/>
+          <a:stretch>
+            <a:fillRect/>
+          </a:stretch>
+        </p:blipFill>
+        <p:spPr>
+          <a:xfrm>
+            <a:off x="2306321" y="772724"/>
+            <a:ext cx="6334760" cy="2616468"/>
+          </a:xfrm>
+          <a:prstGeom prst="rect">
+            <a:avLst/>
+          </a:prstGeom>
+        </p:spPr>
+      </p:pic>
+      <p:sp>
+        <p:nvSpPr>
+          <p:cNvPr id="14" name="Text 4">
+            <a:extLst>
+              <a:ext uri="{FF2B5EF4-FFF2-40B4-BE49-F238E27FC236}">
+                <a16:creationId xmlns:a16="http://schemas.microsoft.com/office/drawing/2014/main" id="{033508BE-B1A3-B400-DB41-3440DD58275C}"/>
+              </a:ext>
+            </a:extLst>
+          </p:cNvPr>
+          <p:cNvSpPr/>
+          <p:nvPr/>
+        </p:nvSpPr>
+        <p:spPr>
+          <a:xfrm>
+            <a:off x="321310" y="3590430"/>
+            <a:ext cx="8620760" cy="1569142"/>
+          </a:xfrm>
+          <a:prstGeom prst="rect">
+            <a:avLst/>
+          </a:prstGeom>
+          <a:noFill/>
+          <a:ln/>
+        </p:spPr>
+        <p:txBody>
+          <a:bodyPr wrap="square" lIns="0" tIns="0" rIns="0" bIns="0" rtlCol="0" anchor="ctr">
+            <a:normAutofit/>
+          </a:bodyPr>
+          <a:lstStyle/>
+          <a:p>
+            <a:pPr marL="285750" indent="-285750">
+              <a:lnSpc>
+                <a:spcPts val="1300"/>
+              </a:lnSpc>
+              <a:buFont typeface="Arial" panose="020B0604020202020204" pitchFamily="34" charset="0"/>
+              <a:buChar char="•"/>
+            </a:pPr>
+            <a:r>
+              <a:rPr lang="en-US" sz="1100" dirty="0">
+                <a:solidFill>
+                  <a:schemeClr val="tx2">
+                    <a:lumMod val="75000"/>
+                    <a:lumOff val="25000"/>
+                  </a:schemeClr>
+                </a:solidFill>
+                <a:latin typeface="Arial" pitchFamily="34" charset="0"/>
+                <a:ea typeface="Arial" pitchFamily="34" charset="-122"/>
+                <a:cs typeface="Arial" pitchFamily="34" charset="-120"/>
+              </a:rPr>
+              <a:t>GRPO LoRA r=2 had the smallest trainable budget: 272k parameters (0.0176% of the model), versus 2.31M / 4.62M / 9.23M for SFT r=2 / r=4 / r=8.</a:t>
+            </a:r>
+          </a:p>
+          <a:p>
+            <a:pPr marL="285750" indent="-285750">
+              <a:lnSpc>
+                <a:spcPts val="1300"/>
+              </a:lnSpc>
+              <a:buFont typeface="Arial" panose="020B0604020202020204" pitchFamily="34" charset="0"/>
+              <a:buChar char="•"/>
+            </a:pPr>
+            <a:r>
+              <a:rPr lang="en-US" sz="1100" dirty="0">
+                <a:solidFill>
+                  <a:schemeClr val="tx2">
+                    <a:lumMod val="75000"/>
+                    <a:lumOff val="25000"/>
+                  </a:schemeClr>
+                </a:solidFill>
+                <a:latin typeface="Arial" pitchFamily="34" charset="0"/>
+                <a:ea typeface="Arial" pitchFamily="34" charset="-122"/>
+                <a:cs typeface="Arial" pitchFamily="34" charset="-120"/>
+              </a:rPr>
+              <a:t>That parameter efficiency did not translate into </a:t>
+            </a:r>
+            <a:r>
+              <a:rPr lang="en-US" altLang="zh-CN" sz="1100" dirty="0">
+                <a:solidFill>
+                  <a:schemeClr val="tx2">
+                    <a:lumMod val="75000"/>
+                    <a:lumOff val="25000"/>
+                  </a:schemeClr>
+                </a:solidFill>
+                <a:latin typeface="Arial" pitchFamily="34" charset="0"/>
+                <a:ea typeface="Arial" pitchFamily="34" charset="-122"/>
+                <a:cs typeface="Arial" pitchFamily="34" charset="-120"/>
+              </a:rPr>
+              <a:t>time</a:t>
+            </a:r>
+            <a:r>
+              <a:rPr lang="en-US" sz="1100" dirty="0">
+                <a:solidFill>
+                  <a:schemeClr val="tx2">
+                    <a:lumMod val="75000"/>
+                    <a:lumOff val="25000"/>
+                  </a:schemeClr>
+                </a:solidFill>
+                <a:latin typeface="Arial" pitchFamily="34" charset="0"/>
+                <a:ea typeface="Arial" pitchFamily="34" charset="-122"/>
+                <a:cs typeface="Arial" pitchFamily="34" charset="-120"/>
+              </a:rPr>
+              <a:t> efficiency here: GRPO took about 30,839 seconds to train, while the SFT runs finished in about 439–555 seconds.</a:t>
+            </a:r>
+            <a:endParaRPr lang="en-US" sz="1100" dirty="0">
+              <a:solidFill>
+                <a:schemeClr val="tx2">
+                  <a:lumMod val="75000"/>
+                  <a:lumOff val="25000"/>
+                </a:schemeClr>
+              </a:solidFill>
+            </a:endParaRPr>
+          </a:p>
+          <a:p>
+            <a:pPr marL="285750" indent="-285750">
+              <a:lnSpc>
+                <a:spcPts val="1300"/>
+              </a:lnSpc>
+              <a:buFont typeface="Arial" panose="020B0604020202020204" pitchFamily="34" charset="0"/>
+              <a:buChar char="•"/>
+            </a:pPr>
+            <a:r>
+              <a:rPr lang="en-US" sz="1100" dirty="0">
+                <a:solidFill>
+                  <a:schemeClr val="tx2">
+                    <a:lumMod val="75000"/>
+                    <a:lumOff val="25000"/>
+                  </a:schemeClr>
+                </a:solidFill>
+                <a:latin typeface="Arial" pitchFamily="34" charset="0"/>
+                <a:ea typeface="Arial" pitchFamily="34" charset="-122"/>
+                <a:cs typeface="Arial" pitchFamily="34" charset="-120"/>
+              </a:rPr>
+              <a:t>SFT </a:t>
+            </a:r>
+            <a:r>
+              <a:rPr lang="en-US" sz="1100" dirty="0" err="1">
+                <a:solidFill>
+                  <a:schemeClr val="tx2">
+                    <a:lumMod val="75000"/>
+                    <a:lumOff val="25000"/>
+                  </a:schemeClr>
+                </a:solidFill>
+                <a:latin typeface="Arial" pitchFamily="34" charset="0"/>
+                <a:ea typeface="Arial" pitchFamily="34" charset="-122"/>
+                <a:cs typeface="Arial" pitchFamily="34" charset="-120"/>
+              </a:rPr>
+              <a:t>LoRA</a:t>
+            </a:r>
+            <a:r>
+              <a:rPr lang="en-US" sz="1100" dirty="0">
+                <a:solidFill>
+                  <a:schemeClr val="tx2">
+                    <a:lumMod val="75000"/>
+                    <a:lumOff val="25000"/>
+                  </a:schemeClr>
+                </a:solidFill>
+                <a:latin typeface="Arial" pitchFamily="34" charset="0"/>
+                <a:ea typeface="Arial" pitchFamily="34" charset="-122"/>
+                <a:cs typeface="Arial" pitchFamily="34" charset="-120"/>
+              </a:rPr>
+              <a:t> r=8 was the fastest trained model, yet it was not the most accurate; in practice, r=2 or r=4 gave a better accuracy-cost balance.</a:t>
+            </a:r>
+            <a:endParaRPr lang="en-US" sz="1100" dirty="0">
+              <a:solidFill>
+                <a:schemeClr val="tx2">
+                  <a:lumMod val="75000"/>
+                  <a:lumOff val="25000"/>
+                </a:schemeClr>
+              </a:solidFill>
+            </a:endParaRPr>
+          </a:p>
+          <a:p>
+            <a:pPr marL="0" indent="0">
+              <a:lnSpc>
+                <a:spcPts val="1300"/>
+              </a:lnSpc>
+              <a:buNone/>
+            </a:pPr>
+            <a:endParaRPr lang="en-US" sz="1100" dirty="0">
+              <a:solidFill>
+                <a:schemeClr val="tx2">
+                  <a:lumMod val="75000"/>
+                  <a:lumOff val="25000"/>
+                </a:schemeClr>
+              </a:solidFill>
+            </a:endParaRPr>
+          </a:p>
+        </p:txBody>
+      </p:sp>
+      <p:sp>
+        <p:nvSpPr>
+          <p:cNvPr id="18" name="Text 8">
+            <a:extLst>
+              <a:ext uri="{FF2B5EF4-FFF2-40B4-BE49-F238E27FC236}">
+                <a16:creationId xmlns:a16="http://schemas.microsoft.com/office/drawing/2014/main" id="{00BAD762-B902-0950-6DE8-757022E3B48E}"/>
+              </a:ext>
+            </a:extLst>
+          </p:cNvPr>
+          <p:cNvSpPr/>
+          <p:nvPr/>
+        </p:nvSpPr>
+        <p:spPr>
+          <a:xfrm>
+            <a:off x="8046720" y="3227832"/>
+            <a:ext cx="3566160" cy="566928"/>
+          </a:xfrm>
+          <a:prstGeom prst="rect">
+            <a:avLst/>
+          </a:prstGeom>
+          <a:noFill/>
+          <a:ln/>
+        </p:spPr>
+        <p:txBody>
+          <a:bodyPr wrap="square" lIns="0" tIns="0" rIns="0" bIns="0" rtlCol="0" anchor="ctr">
+            <a:normAutofit/>
+          </a:bodyPr>
+          <a:lstStyle/>
+          <a:p>
+            <a:pPr marL="0" indent="0">
+              <a:buNone/>
+            </a:pPr>
+            <a:endParaRPr lang="en-US" sz="1480" dirty="0"/>
+          </a:p>
+        </p:txBody>
+      </p:sp>
+      <p:sp>
+        <p:nvSpPr>
+          <p:cNvPr id="20" name="Text 10">
+            <a:extLst>
+              <a:ext uri="{FF2B5EF4-FFF2-40B4-BE49-F238E27FC236}">
+                <a16:creationId xmlns:a16="http://schemas.microsoft.com/office/drawing/2014/main" id="{C8D773DF-BCD3-419C-83EB-CE36EFD413A0}"/>
+              </a:ext>
+            </a:extLst>
+          </p:cNvPr>
+          <p:cNvSpPr/>
+          <p:nvPr/>
+        </p:nvSpPr>
+        <p:spPr>
+          <a:xfrm>
+            <a:off x="8046720" y="3904488"/>
+            <a:ext cx="3566160" cy="566928"/>
+          </a:xfrm>
+          <a:prstGeom prst="rect">
+            <a:avLst/>
+          </a:prstGeom>
+          <a:noFill/>
+          <a:ln/>
+        </p:spPr>
+        <p:txBody>
+          <a:bodyPr wrap="square" lIns="0" tIns="0" rIns="0" bIns="0" rtlCol="0" anchor="ctr">
+            <a:normAutofit/>
+          </a:bodyPr>
+          <a:lstStyle/>
+          <a:p>
+            <a:pPr marL="0" indent="0">
+              <a:buNone/>
+            </a:pPr>
+            <a:endParaRPr lang="en-US" sz="1480" dirty="0"/>
+          </a:p>
+        </p:txBody>
+      </p:sp>
+    </p:spTree>
+    <p:extLst>
+      <p:ext uri="{BB962C8B-B14F-4D97-AF65-F5344CB8AC3E}">
+        <p14:creationId xmlns:p14="http://schemas.microsoft.com/office/powerpoint/2010/main" val="1054880228"/>
+      </p:ext>
+    </p:extLst>
+  </p:cSld>
+  <p:clrMapOvr>
+    <a:masterClrMapping/>
+  </p:clrMapOvr>
+</p:sld>
+</file>
+
+<file path=ppt/slides/slide17.xml><?xml version="1.0" encoding="utf-8"?>
+<p:sld xmlns:a="http://schemas.openxmlformats.org/drawingml/2006/main" xmlns:r="http://schemas.openxmlformats.org/officeDocument/2006/relationships" xmlns:p="http://schemas.openxmlformats.org/presentationml/2006/main">
+  <p:cSld>
+    <p:spTree>
+      <p:nvGrpSpPr>
+        <p:cNvPr id="1" name=""/>
+        <p:cNvGrpSpPr/>
+        <p:nvPr/>
+      </p:nvGrpSpPr>
+      <p:grpSpPr>
+        <a:xfrm>
+          <a:off x="0" y="0"/>
+          <a:ext cx="0" cy="0"/>
+          <a:chOff x="0" y="0"/>
+          <a:chExt cx="0" cy="0"/>
+        </a:xfrm>
+      </p:grpSpPr>
+      <p:sp>
+        <p:nvSpPr>
+          <p:cNvPr id="13" name="Rounded Rectangle 12">
+            <a:extLst>
+              <a:ext uri="{FF2B5EF4-FFF2-40B4-BE49-F238E27FC236}">
+                <a16:creationId xmlns:a16="http://schemas.microsoft.com/office/drawing/2014/main" id="{5DAC28BE-B8CF-B65D-A94C-2C32D3E4C4C7}"/>
+              </a:ext>
+            </a:extLst>
+          </p:cNvPr>
+          <p:cNvSpPr/>
+          <p:nvPr/>
+        </p:nvSpPr>
+        <p:spPr>
+          <a:xfrm>
+            <a:off x="365760" y="4046951"/>
+            <a:ext cx="8356854" cy="907936"/>
+          </a:xfrm>
+          <a:prstGeom prst="roundRect">
+            <a:avLst/>
+          </a:prstGeom>
+          <a:solidFill>
+            <a:srgbClr val="FAFAFB"/>
+          </a:solidFill>
+          <a:ln>
+            <a:solidFill>
+              <a:srgbClr val="E2E4E8"/>
+            </a:solidFill>
+          </a:ln>
+        </p:spPr>
+        <p:style>
+          <a:lnRef idx="1">
+            <a:schemeClr val="accent1"/>
+          </a:lnRef>
+          <a:fillRef idx="3">
+            <a:schemeClr val="accent1"/>
+          </a:fillRef>
+          <a:effectRef idx="2">
+            <a:schemeClr val="accent1"/>
+          </a:effectRef>
+          <a:fontRef idx="minor">
+            <a:schemeClr val="lt1"/>
+          </a:fontRef>
+        </p:style>
+        <p:txBody>
+          <a:bodyPr rtlCol="0" anchor="ctr"/>
+          <a:lstStyle/>
+          <a:p>
+            <a:pPr algn="ctr"/>
+            <a:endParaRPr/>
+          </a:p>
+        </p:txBody>
+      </p:sp>
+      <p:sp>
+        <p:nvSpPr>
+          <p:cNvPr id="4" name="TextBox 3">
+            <a:extLst>
+              <a:ext uri="{FF2B5EF4-FFF2-40B4-BE49-F238E27FC236}">
+                <a16:creationId xmlns:a16="http://schemas.microsoft.com/office/drawing/2014/main" id="{26EC20AF-6069-328A-16A2-190544BD5166}"/>
+              </a:ext>
+            </a:extLst>
+          </p:cNvPr>
+          <p:cNvSpPr txBox="1"/>
+          <p:nvPr/>
+        </p:nvSpPr>
+        <p:spPr>
+          <a:xfrm>
+            <a:off x="365760" y="201168"/>
+            <a:ext cx="5795176" cy="492443"/>
+          </a:xfrm>
+          <a:prstGeom prst="rect">
+            <a:avLst/>
+          </a:prstGeom>
+          <a:noFill/>
+        </p:spPr>
+        <p:txBody>
+          <a:bodyPr wrap="none">
+            <a:spAutoFit/>
+          </a:bodyPr>
+          <a:lstStyle/>
+          <a:p>
+            <a:r>
+              <a:rPr lang="en-US" altLang="zh-CN" sz="2600" dirty="0">
+                <a:solidFill>
+                  <a:schemeClr val="dk1"/>
+                </a:solidFill>
+                <a:latin typeface="Red Hat Mono"/>
+                <a:ea typeface="Red Hat Mono"/>
+                <a:cs typeface="Red Hat Mono"/>
+              </a:rPr>
+              <a:t>SFT</a:t>
+            </a:r>
+            <a:r>
+              <a:rPr lang="zh-CN" altLang="en-US" sz="2600" dirty="0">
+                <a:solidFill>
+                  <a:schemeClr val="dk1"/>
+                </a:solidFill>
+                <a:latin typeface="Red Hat Mono"/>
+                <a:ea typeface="Red Hat Mono"/>
+                <a:cs typeface="Red Hat Mono"/>
+              </a:rPr>
+              <a:t> </a:t>
+            </a:r>
+            <a:r>
+              <a:rPr lang="en-US" altLang="zh-CN" sz="2600" dirty="0">
+                <a:solidFill>
+                  <a:schemeClr val="dk1"/>
+                </a:solidFill>
+                <a:latin typeface="Red Hat Mono"/>
+                <a:ea typeface="Red Hat Mono"/>
+                <a:cs typeface="Red Hat Mono"/>
+              </a:rPr>
+              <a:t>VS</a:t>
+            </a:r>
+            <a:r>
+              <a:rPr lang="zh-CN" altLang="en-US" sz="2600" dirty="0">
+                <a:solidFill>
+                  <a:schemeClr val="dk1"/>
+                </a:solidFill>
+                <a:latin typeface="Red Hat Mono"/>
+                <a:ea typeface="Red Hat Mono"/>
+                <a:cs typeface="Red Hat Mono"/>
+              </a:rPr>
+              <a:t> </a:t>
+            </a:r>
+            <a:r>
+              <a:rPr lang="en-US" altLang="zh-CN" sz="2600" dirty="0">
+                <a:solidFill>
+                  <a:schemeClr val="dk1"/>
+                </a:solidFill>
+                <a:latin typeface="Red Hat Mono"/>
+                <a:ea typeface="Red Hat Mono"/>
+                <a:cs typeface="Red Hat Mono"/>
+              </a:rPr>
+              <a:t>GRPO</a:t>
+            </a:r>
+            <a:r>
+              <a:rPr sz="2600" dirty="0">
+                <a:solidFill>
+                  <a:schemeClr val="dk1"/>
+                </a:solidFill>
+                <a:latin typeface="Red Hat Mono"/>
+                <a:ea typeface="Red Hat Mono"/>
+                <a:cs typeface="Red Hat Mono"/>
+              </a:rPr>
+              <a:t> </a:t>
+            </a:r>
+            <a:r>
+              <a:rPr lang="en-US" altLang="zh-CN" sz="2600" dirty="0">
+                <a:solidFill>
+                  <a:schemeClr val="dk1"/>
+                </a:solidFill>
+                <a:latin typeface="Red Hat Mono"/>
+                <a:ea typeface="Red Hat Mono"/>
+                <a:cs typeface="Red Hat Mono"/>
+              </a:rPr>
+              <a:t>with</a:t>
+            </a:r>
+            <a:r>
+              <a:rPr lang="zh-CN" altLang="en-US" sz="2600" dirty="0">
+                <a:solidFill>
+                  <a:schemeClr val="dk1"/>
+                </a:solidFill>
+                <a:latin typeface="Red Hat Mono"/>
+                <a:ea typeface="Red Hat Mono"/>
+                <a:cs typeface="Red Hat Mono"/>
+              </a:rPr>
+              <a:t> </a:t>
+            </a:r>
+            <a:r>
+              <a:rPr lang="en-US" altLang="zh-CN" sz="2600" dirty="0" err="1">
+                <a:solidFill>
+                  <a:schemeClr val="dk1"/>
+                </a:solidFill>
+                <a:latin typeface="Red Hat Mono"/>
+                <a:ea typeface="Red Hat Mono"/>
+                <a:cs typeface="Red Hat Mono"/>
+              </a:rPr>
+              <a:t>LoRA</a:t>
+            </a:r>
+            <a:r>
+              <a:rPr sz="2600" dirty="0">
+                <a:solidFill>
+                  <a:schemeClr val="dk1"/>
+                </a:solidFill>
+                <a:latin typeface="Red Hat Mono"/>
+                <a:ea typeface="Red Hat Mono"/>
+                <a:cs typeface="Red Hat Mono"/>
+              </a:rPr>
+              <a:t> Rank</a:t>
+            </a:r>
+            <a:r>
+              <a:rPr lang="en-US" altLang="zh-CN" sz="2600" dirty="0">
+                <a:solidFill>
+                  <a:schemeClr val="dk1"/>
+                </a:solidFill>
+                <a:latin typeface="Red Hat Mono"/>
+                <a:ea typeface="Red Hat Mono"/>
+                <a:cs typeface="Red Hat Mono"/>
+              </a:rPr>
+              <a:t>=</a:t>
+            </a:r>
+            <a:r>
+              <a:rPr sz="2600" dirty="0">
+                <a:solidFill>
+                  <a:schemeClr val="dk1"/>
+                </a:solidFill>
+                <a:latin typeface="Red Hat Mono"/>
+                <a:ea typeface="Red Hat Mono"/>
+                <a:cs typeface="Red Hat Mono"/>
+              </a:rPr>
+              <a:t>2</a:t>
+            </a:r>
+          </a:p>
+        </p:txBody>
+      </p:sp>
+      <p:sp>
+        <p:nvSpPr>
+          <p:cNvPr id="5" name="TextBox 4">
+            <a:extLst>
+              <a:ext uri="{FF2B5EF4-FFF2-40B4-BE49-F238E27FC236}">
+                <a16:creationId xmlns:a16="http://schemas.microsoft.com/office/drawing/2014/main" id="{73ED6E2E-A34D-034A-937A-45EA6F7F82ED}"/>
+              </a:ext>
+            </a:extLst>
+          </p:cNvPr>
+          <p:cNvSpPr txBox="1"/>
+          <p:nvPr/>
+        </p:nvSpPr>
+        <p:spPr>
+          <a:xfrm>
+            <a:off x="365760" y="713232"/>
+            <a:ext cx="2908168" cy="238527"/>
+          </a:xfrm>
+          <a:prstGeom prst="rect">
+            <a:avLst/>
+          </a:prstGeom>
+          <a:noFill/>
+        </p:spPr>
+        <p:txBody>
+          <a:bodyPr wrap="none">
+            <a:spAutoFit/>
+          </a:bodyPr>
+          <a:lstStyle/>
+          <a:p>
+            <a:r>
+              <a:rPr sz="950" i="1" dirty="0">
+                <a:solidFill>
+                  <a:srgbClr val="8E9299"/>
+                </a:solidFill>
+                <a:latin typeface="Arial"/>
+              </a:rPr>
+              <a:t>Same low-rank budget, different training objectives</a:t>
+            </a:r>
+          </a:p>
+        </p:txBody>
+      </p:sp>
+      <p:sp>
+        <p:nvSpPr>
+          <p:cNvPr id="6" name="Rectangle 5">
+            <a:extLst>
+              <a:ext uri="{FF2B5EF4-FFF2-40B4-BE49-F238E27FC236}">
+                <a16:creationId xmlns:a16="http://schemas.microsoft.com/office/drawing/2014/main" id="{DCC75F69-AD23-BD52-1EE5-C46D9F25B9F0}"/>
+              </a:ext>
+            </a:extLst>
+          </p:cNvPr>
+          <p:cNvSpPr/>
+          <p:nvPr/>
+        </p:nvSpPr>
+        <p:spPr>
+          <a:xfrm>
+            <a:off x="365760" y="960120"/>
+            <a:ext cx="8138160" cy="13716"/>
+          </a:xfrm>
+          <a:prstGeom prst="rect">
+            <a:avLst/>
+          </a:prstGeom>
+          <a:solidFill>
+            <a:srgbClr val="E2E4E8"/>
+          </a:solidFill>
+          <a:ln>
+            <a:solidFill>
+              <a:srgbClr val="E2E4E8"/>
+            </a:solidFill>
+          </a:ln>
+        </p:spPr>
+        <p:style>
+          <a:lnRef idx="1">
+            <a:schemeClr val="accent1"/>
+          </a:lnRef>
+          <a:fillRef idx="3">
+            <a:schemeClr val="accent1"/>
+          </a:fillRef>
+          <a:effectRef idx="2">
+            <a:schemeClr val="accent1"/>
+          </a:effectRef>
+          <a:fontRef idx="minor">
+            <a:schemeClr val="lt1"/>
+          </a:fontRef>
+        </p:style>
+        <p:txBody>
+          <a:bodyPr rtlCol="0" anchor="ctr"/>
+          <a:lstStyle/>
+          <a:p>
+            <a:pPr algn="ctr"/>
+            <a:endParaRPr/>
+          </a:p>
+        </p:txBody>
+      </p:sp>
+      <p:pic>
+        <p:nvPicPr>
+          <p:cNvPr id="7" name="Picture 6" descr="cell35_out0.png">
+            <a:extLst>
+              <a:ext uri="{FF2B5EF4-FFF2-40B4-BE49-F238E27FC236}">
+                <a16:creationId xmlns:a16="http://schemas.microsoft.com/office/drawing/2014/main" id="{AD526C5B-041E-EA79-59C8-00B129CC69F5}"/>
+              </a:ext>
+            </a:extLst>
+          </p:cNvPr>
+          <p:cNvPicPr>
+            <a:picLocks noChangeAspect="1"/>
+          </p:cNvPicPr>
+          <p:nvPr/>
+        </p:nvPicPr>
+        <p:blipFill>
+          <a:blip r:embed="rId3"/>
+          <a:stretch>
+            <a:fillRect/>
+          </a:stretch>
+        </p:blipFill>
+        <p:spPr>
+          <a:xfrm>
+            <a:off x="370840" y="1228428"/>
+            <a:ext cx="4038600" cy="2490470"/>
+          </a:xfrm>
+          <a:prstGeom prst="rect">
+            <a:avLst/>
+          </a:prstGeom>
+        </p:spPr>
+      </p:pic>
+      <p:pic>
+        <p:nvPicPr>
+          <p:cNvPr id="8" name="Picture 7" descr="cell35_out1.png">
+            <a:extLst>
+              <a:ext uri="{FF2B5EF4-FFF2-40B4-BE49-F238E27FC236}">
+                <a16:creationId xmlns:a16="http://schemas.microsoft.com/office/drawing/2014/main" id="{0EA422D7-A8AB-8245-CB1A-3941C73DB76E}"/>
+              </a:ext>
+            </a:extLst>
+          </p:cNvPr>
+          <p:cNvPicPr>
+            <a:picLocks noChangeAspect="1"/>
+          </p:cNvPicPr>
+          <p:nvPr/>
+        </p:nvPicPr>
+        <p:blipFill>
+          <a:blip r:embed="rId4"/>
+          <a:stretch>
+            <a:fillRect/>
+          </a:stretch>
+        </p:blipFill>
+        <p:spPr>
+          <a:xfrm>
+            <a:off x="4717669" y="1228428"/>
+            <a:ext cx="4004945" cy="2490470"/>
+          </a:xfrm>
+          <a:prstGeom prst="rect">
+            <a:avLst/>
+          </a:prstGeom>
+        </p:spPr>
+      </p:pic>
+      <p:sp>
+        <p:nvSpPr>
+          <p:cNvPr id="9" name="TextBox 8">
+            <a:extLst>
+              <a:ext uri="{FF2B5EF4-FFF2-40B4-BE49-F238E27FC236}">
+                <a16:creationId xmlns:a16="http://schemas.microsoft.com/office/drawing/2014/main" id="{F538B169-183C-3665-3F70-9F6B554DE643}"/>
+              </a:ext>
+            </a:extLst>
+          </p:cNvPr>
+          <p:cNvSpPr txBox="1"/>
+          <p:nvPr/>
+        </p:nvSpPr>
+        <p:spPr>
+          <a:xfrm>
+            <a:off x="1367873" y="3707298"/>
+            <a:ext cx="2307042" cy="230832"/>
+          </a:xfrm>
+          <a:prstGeom prst="rect">
+            <a:avLst/>
+          </a:prstGeom>
+          <a:noFill/>
+        </p:spPr>
+        <p:txBody>
+          <a:bodyPr wrap="none">
+            <a:spAutoFit/>
+          </a:bodyPr>
+          <a:lstStyle/>
+          <a:p>
+            <a:pPr algn="ctr"/>
+            <a:r>
+              <a:rPr sz="900" dirty="0">
+                <a:solidFill>
+                  <a:schemeClr val="tx2">
+                    <a:lumMod val="75000"/>
+                    <a:lumOff val="25000"/>
+                  </a:schemeClr>
+                </a:solidFill>
+                <a:latin typeface="Arial"/>
+              </a:rPr>
+              <a:t>Accuracy: Base vs SFT r=2 vs GRPO r=2</a:t>
+            </a:r>
+          </a:p>
+        </p:txBody>
+      </p:sp>
+      <p:sp>
+        <p:nvSpPr>
+          <p:cNvPr id="10" name="TextBox 9">
+            <a:extLst>
+              <a:ext uri="{FF2B5EF4-FFF2-40B4-BE49-F238E27FC236}">
+                <a16:creationId xmlns:a16="http://schemas.microsoft.com/office/drawing/2014/main" id="{177E92AE-7865-3BDC-D318-558654924BD2}"/>
+              </a:ext>
+            </a:extLst>
+          </p:cNvPr>
+          <p:cNvSpPr txBox="1"/>
+          <p:nvPr/>
+        </p:nvSpPr>
+        <p:spPr>
+          <a:xfrm>
+            <a:off x="5252431" y="3704560"/>
+            <a:ext cx="2935419" cy="230832"/>
+          </a:xfrm>
+          <a:prstGeom prst="rect">
+            <a:avLst/>
+          </a:prstGeom>
+          <a:noFill/>
+        </p:spPr>
+        <p:txBody>
+          <a:bodyPr wrap="none">
+            <a:spAutoFit/>
+          </a:bodyPr>
+          <a:lstStyle/>
+          <a:p>
+            <a:pPr algn="ctr"/>
+            <a:r>
+              <a:rPr sz="900" dirty="0">
+                <a:solidFill>
+                  <a:schemeClr val="tx2">
+                    <a:lumMod val="75000"/>
+                    <a:lumOff val="25000"/>
+                  </a:schemeClr>
+                </a:solidFill>
+                <a:latin typeface="Arial"/>
+              </a:rPr>
+              <a:t>Efficiency: accuracy gain per 1M trainable parameters</a:t>
+            </a:r>
+          </a:p>
+        </p:txBody>
+      </p:sp>
+      <p:sp>
+        <p:nvSpPr>
+          <p:cNvPr id="12" name="TextBox 11">
+            <a:extLst>
+              <a:ext uri="{FF2B5EF4-FFF2-40B4-BE49-F238E27FC236}">
+                <a16:creationId xmlns:a16="http://schemas.microsoft.com/office/drawing/2014/main" id="{AA316286-35FA-10BE-9EA8-20628CAFD92E}"/>
+              </a:ext>
+            </a:extLst>
+          </p:cNvPr>
+          <p:cNvSpPr txBox="1"/>
+          <p:nvPr/>
+        </p:nvSpPr>
+        <p:spPr>
+          <a:xfrm>
+            <a:off x="365760" y="4107911"/>
+            <a:ext cx="8179816" cy="764312"/>
+          </a:xfrm>
+          <a:prstGeom prst="rect">
+            <a:avLst/>
+          </a:prstGeom>
+          <a:noFill/>
+        </p:spPr>
+        <p:txBody>
+          <a:bodyPr wrap="square">
+            <a:spAutoFit/>
+          </a:bodyPr>
+          <a:lstStyle/>
+          <a:p>
+            <a:pPr marL="171450" indent="-171450">
+              <a:spcAft>
+                <a:spcPts val="200"/>
+              </a:spcAft>
+              <a:buFont typeface="Arial" panose="020B0604020202020204" pitchFamily="34" charset="0"/>
+              <a:buChar char="•"/>
+              <a:defRPr sz="1050">
+                <a:solidFill>
+                  <a:srgbClr val="1F242C"/>
+                </a:solidFill>
+                <a:latin typeface="Arial"/>
+              </a:defRPr>
+            </a:pPr>
+            <a:r>
+              <a:rPr dirty="0">
+                <a:solidFill>
+                  <a:schemeClr val="tx2">
+                    <a:lumMod val="75000"/>
+                    <a:lumOff val="25000"/>
+                  </a:schemeClr>
+                </a:solidFill>
+              </a:rPr>
+              <a:t>SFT r=2 beat GRPO r=2 on all three benchmarks in raw accuracy: 0.88 vs 0.86 on Reasoning-100, 0.59 vs 0.58 on Olympiad-100, and 0.727 vs 0.707 on AIMO-150.</a:t>
+            </a:r>
+          </a:p>
+          <a:p>
+            <a:pPr marL="171450" indent="-171450">
+              <a:spcAft>
+                <a:spcPts val="200"/>
+              </a:spcAft>
+              <a:buFont typeface="Arial" panose="020B0604020202020204" pitchFamily="34" charset="0"/>
+              <a:buChar char="•"/>
+              <a:defRPr sz="1050">
+                <a:solidFill>
+                  <a:srgbClr val="1F242C"/>
+                </a:solidFill>
+                <a:latin typeface="Arial"/>
+              </a:defRPr>
+            </a:pPr>
+            <a:r>
+              <a:rPr dirty="0">
+                <a:solidFill>
+                  <a:schemeClr val="tx2">
+                    <a:lumMod val="75000"/>
+                    <a:lumOff val="25000"/>
+                  </a:schemeClr>
+                </a:solidFill>
+              </a:rPr>
+              <a:t>GRPO r=2 was much more parameter-efficient on Olympiad-100: 0.0367 accuracy gain per 1M trainable parameters vs 0.0087 for SFT r=2.</a:t>
+            </a:r>
+          </a:p>
+        </p:txBody>
+      </p:sp>
+    </p:spTree>
+    <p:extLst>
+      <p:ext uri="{BB962C8B-B14F-4D97-AF65-F5344CB8AC3E}">
+        <p14:creationId xmlns:p14="http://schemas.microsoft.com/office/powerpoint/2010/main" val="1090486752"/>
+      </p:ext>
+    </p:extLst>
+  </p:cSld>
+  <p:clrMapOvr>
+    <a:masterClrMapping/>
+  </p:clrMapOvr>
+</p:sld>
+</file>
+
+<file path=ppt/slides/slide18.xml><?xml version="1.0" encoding="utf-8"?>
+<p:sld xmlns:a="http://schemas.openxmlformats.org/drawingml/2006/main" xmlns:r="http://schemas.openxmlformats.org/officeDocument/2006/relationships" xmlns:p="http://schemas.openxmlformats.org/presentationml/2006/main">
+  <p:cSld>
+    <p:spTree>
+      <p:nvGrpSpPr>
+        <p:cNvPr id="1" name=""/>
+        <p:cNvGrpSpPr/>
+        <p:nvPr/>
+      </p:nvGrpSpPr>
+      <p:grpSpPr>
+        <a:xfrm>
+          <a:off x="0" y="0"/>
+          <a:ext cx="0" cy="0"/>
+          <a:chOff x="0" y="0"/>
+          <a:chExt cx="0" cy="0"/>
+        </a:xfrm>
+      </p:grpSpPr>
+      <p:sp>
+        <p:nvSpPr>
+          <p:cNvPr id="4" name="TextBox 3">
+            <a:extLst>
+              <a:ext uri="{FF2B5EF4-FFF2-40B4-BE49-F238E27FC236}">
+                <a16:creationId xmlns:a16="http://schemas.microsoft.com/office/drawing/2014/main" id="{4BED85D8-72BC-A075-2A49-27849DB00FD8}"/>
+              </a:ext>
+            </a:extLst>
+          </p:cNvPr>
+          <p:cNvSpPr txBox="1"/>
+          <p:nvPr/>
+        </p:nvSpPr>
+        <p:spPr>
+          <a:xfrm>
+            <a:off x="365760" y="201168"/>
+            <a:ext cx="2989921" cy="492443"/>
+          </a:xfrm>
+          <a:prstGeom prst="rect">
+            <a:avLst/>
+          </a:prstGeom>
+          <a:noFill/>
+        </p:spPr>
+        <p:txBody>
+          <a:bodyPr wrap="none">
+            <a:spAutoFit/>
+          </a:bodyPr>
+          <a:lstStyle/>
+          <a:p>
+            <a:r>
+              <a:rPr sz="2600" dirty="0">
+                <a:solidFill>
+                  <a:schemeClr val="dk1"/>
+                </a:solidFill>
+                <a:latin typeface="Red Hat Mono"/>
+                <a:ea typeface="Red Hat Mono"/>
+                <a:cs typeface="Red Hat Mono"/>
+              </a:rPr>
+              <a:t>SFT Rank Sweep</a:t>
+            </a:r>
+          </a:p>
+        </p:txBody>
+      </p:sp>
+      <p:sp>
+        <p:nvSpPr>
+          <p:cNvPr id="5" name="TextBox 4">
+            <a:extLst>
+              <a:ext uri="{FF2B5EF4-FFF2-40B4-BE49-F238E27FC236}">
+                <a16:creationId xmlns:a16="http://schemas.microsoft.com/office/drawing/2014/main" id="{65D605A8-591D-7972-55B1-6485F23A18BC}"/>
+              </a:ext>
+            </a:extLst>
+          </p:cNvPr>
+          <p:cNvSpPr txBox="1"/>
+          <p:nvPr/>
+        </p:nvSpPr>
+        <p:spPr>
+          <a:xfrm>
+            <a:off x="365760" y="713232"/>
+            <a:ext cx="4766048" cy="238527"/>
+          </a:xfrm>
+          <a:prstGeom prst="rect">
+            <a:avLst/>
+          </a:prstGeom>
+          <a:noFill/>
+        </p:spPr>
+        <p:txBody>
+          <a:bodyPr wrap="none">
+            <a:spAutoFit/>
+          </a:bodyPr>
+          <a:lstStyle/>
+          <a:p>
+            <a:r>
+              <a:rPr sz="950" i="1" dirty="0">
+                <a:solidFill>
+                  <a:srgbClr val="8E9299"/>
+                </a:solidFill>
+                <a:latin typeface="Arial"/>
+              </a:rPr>
+              <a:t>Smaller adapters remained strong, but the best rank still depended on the benchmark</a:t>
+            </a:r>
+          </a:p>
+        </p:txBody>
+      </p:sp>
+      <p:sp>
+        <p:nvSpPr>
+          <p:cNvPr id="6" name="Rectangle 5">
+            <a:extLst>
+              <a:ext uri="{FF2B5EF4-FFF2-40B4-BE49-F238E27FC236}">
+                <a16:creationId xmlns:a16="http://schemas.microsoft.com/office/drawing/2014/main" id="{A99746C9-41F2-A077-5F59-0C2D57EBA4B0}"/>
+              </a:ext>
+            </a:extLst>
+          </p:cNvPr>
+          <p:cNvSpPr/>
+          <p:nvPr/>
+        </p:nvSpPr>
+        <p:spPr>
+          <a:xfrm>
+            <a:off x="375920" y="960120"/>
+            <a:ext cx="8138160" cy="13716"/>
+          </a:xfrm>
+          <a:prstGeom prst="rect">
+            <a:avLst/>
+          </a:prstGeom>
+          <a:solidFill>
+            <a:srgbClr val="E2E4E8"/>
+          </a:solidFill>
+          <a:ln>
+            <a:solidFill>
+              <a:srgbClr val="E2E4E8"/>
+            </a:solidFill>
+          </a:ln>
+        </p:spPr>
+        <p:style>
+          <a:lnRef idx="1">
+            <a:schemeClr val="accent1"/>
+          </a:lnRef>
+          <a:fillRef idx="3">
+            <a:schemeClr val="accent1"/>
+          </a:fillRef>
+          <a:effectRef idx="2">
+            <a:schemeClr val="accent1"/>
+          </a:effectRef>
+          <a:fontRef idx="minor">
+            <a:schemeClr val="lt1"/>
+          </a:fontRef>
+        </p:style>
+        <p:txBody>
+          <a:bodyPr rtlCol="0" anchor="ctr"/>
+          <a:lstStyle/>
+          <a:p>
+            <a:pPr algn="ctr"/>
+            <a:endParaRPr/>
+          </a:p>
+        </p:txBody>
+      </p:sp>
+      <p:pic>
+        <p:nvPicPr>
+          <p:cNvPr id="7" name="Picture 6" descr="cell35_out2.png">
+            <a:extLst>
+              <a:ext uri="{FF2B5EF4-FFF2-40B4-BE49-F238E27FC236}">
+                <a16:creationId xmlns:a16="http://schemas.microsoft.com/office/drawing/2014/main" id="{AA72AD14-6677-AFF5-FD88-C60EC850C597}"/>
+              </a:ext>
+            </a:extLst>
+          </p:cNvPr>
+          <p:cNvPicPr>
+            <a:picLocks noChangeAspect="1"/>
+          </p:cNvPicPr>
+          <p:nvPr/>
+        </p:nvPicPr>
+        <p:blipFill>
+          <a:blip r:embed="rId2"/>
+          <a:stretch>
+            <a:fillRect/>
+          </a:stretch>
+        </p:blipFill>
+        <p:spPr>
+          <a:xfrm>
+            <a:off x="282448" y="1105091"/>
+            <a:ext cx="4122548" cy="2452205"/>
+          </a:xfrm>
+          <a:prstGeom prst="rect">
+            <a:avLst/>
+          </a:prstGeom>
+        </p:spPr>
+      </p:pic>
+      <p:pic>
+        <p:nvPicPr>
+          <p:cNvPr id="8" name="Picture 7" descr="cell35_out3.png">
+            <a:extLst>
+              <a:ext uri="{FF2B5EF4-FFF2-40B4-BE49-F238E27FC236}">
+                <a16:creationId xmlns:a16="http://schemas.microsoft.com/office/drawing/2014/main" id="{E9F1F15B-F664-444E-9719-B27438A54D61}"/>
+              </a:ext>
+            </a:extLst>
+          </p:cNvPr>
+          <p:cNvPicPr>
+            <a:picLocks noChangeAspect="1"/>
+          </p:cNvPicPr>
+          <p:nvPr/>
+        </p:nvPicPr>
+        <p:blipFill>
+          <a:blip r:embed="rId3"/>
+          <a:stretch>
+            <a:fillRect/>
+          </a:stretch>
+        </p:blipFill>
+        <p:spPr>
+          <a:xfrm>
+            <a:off x="4572000" y="1101619"/>
+            <a:ext cx="4122548" cy="2452205"/>
+          </a:xfrm>
+          <a:prstGeom prst="rect">
+            <a:avLst/>
+          </a:prstGeom>
+        </p:spPr>
+      </p:pic>
+      <p:sp>
+        <p:nvSpPr>
+          <p:cNvPr id="9" name="TextBox 8">
+            <a:extLst>
+              <a:ext uri="{FF2B5EF4-FFF2-40B4-BE49-F238E27FC236}">
+                <a16:creationId xmlns:a16="http://schemas.microsoft.com/office/drawing/2014/main" id="{459E4FE8-6428-7EA7-5DCF-46836947072D}"/>
+              </a:ext>
+            </a:extLst>
+          </p:cNvPr>
+          <p:cNvSpPr txBox="1"/>
+          <p:nvPr/>
+        </p:nvSpPr>
+        <p:spPr>
+          <a:xfrm>
+            <a:off x="-308038" y="3560535"/>
+            <a:ext cx="5303520" cy="256032"/>
+          </a:xfrm>
+          <a:prstGeom prst="rect">
+            <a:avLst/>
+          </a:prstGeom>
+          <a:noFill/>
+        </p:spPr>
+        <p:txBody>
+          <a:bodyPr wrap="none">
+            <a:spAutoFit/>
+          </a:bodyPr>
+          <a:lstStyle/>
+          <a:p>
+            <a:pPr algn="ctr"/>
+            <a:r>
+              <a:rPr sz="900" dirty="0">
+                <a:solidFill>
+                  <a:srgbClr val="8E9299"/>
+                </a:solidFill>
+                <a:latin typeface="Arial"/>
+              </a:rPr>
+              <a:t>Final answer accuracy vs </a:t>
+            </a:r>
+            <a:r>
+              <a:rPr sz="900" dirty="0" err="1">
+                <a:solidFill>
+                  <a:srgbClr val="8E9299"/>
+                </a:solidFill>
+                <a:latin typeface="Arial"/>
+              </a:rPr>
+              <a:t>LoRA</a:t>
+            </a:r>
+            <a:r>
+              <a:rPr sz="900" dirty="0">
+                <a:solidFill>
+                  <a:srgbClr val="8E9299"/>
+                </a:solidFill>
+                <a:latin typeface="Arial"/>
+              </a:rPr>
+              <a:t> rank</a:t>
+            </a:r>
+          </a:p>
+        </p:txBody>
+      </p:sp>
+      <p:sp>
+        <p:nvSpPr>
+          <p:cNvPr id="10" name="TextBox 9">
+            <a:extLst>
+              <a:ext uri="{FF2B5EF4-FFF2-40B4-BE49-F238E27FC236}">
+                <a16:creationId xmlns:a16="http://schemas.microsoft.com/office/drawing/2014/main" id="{CF339164-2110-926E-E33A-0BD5342481E9}"/>
+              </a:ext>
+            </a:extLst>
+          </p:cNvPr>
+          <p:cNvSpPr txBox="1"/>
+          <p:nvPr/>
+        </p:nvSpPr>
+        <p:spPr>
+          <a:xfrm>
+            <a:off x="3981514" y="3553591"/>
+            <a:ext cx="5303520" cy="256032"/>
+          </a:xfrm>
+          <a:prstGeom prst="rect">
+            <a:avLst/>
+          </a:prstGeom>
+          <a:noFill/>
+        </p:spPr>
+        <p:txBody>
+          <a:bodyPr wrap="none">
+            <a:spAutoFit/>
+          </a:bodyPr>
+          <a:lstStyle/>
+          <a:p>
+            <a:pPr algn="ctr"/>
+            <a:r>
+              <a:rPr sz="900">
+                <a:solidFill>
+                  <a:srgbClr val="8E9299"/>
+                </a:solidFill>
+                <a:latin typeface="Arial"/>
+              </a:rPr>
+              <a:t>Accuracy gain per 1M parameters vs LoRA rank</a:t>
+            </a:r>
+          </a:p>
+        </p:txBody>
+      </p:sp>
+      <p:sp>
+        <p:nvSpPr>
+          <p:cNvPr id="11" name="Rounded Rectangle 10">
+            <a:extLst>
+              <a:ext uri="{FF2B5EF4-FFF2-40B4-BE49-F238E27FC236}">
+                <a16:creationId xmlns:a16="http://schemas.microsoft.com/office/drawing/2014/main" id="{820BC4E0-1841-A587-D581-C2555D7F2B8E}"/>
+              </a:ext>
+            </a:extLst>
+          </p:cNvPr>
+          <p:cNvSpPr/>
+          <p:nvPr/>
+        </p:nvSpPr>
+        <p:spPr>
+          <a:xfrm>
+            <a:off x="338964" y="3965304"/>
+            <a:ext cx="8303313" cy="769256"/>
+          </a:xfrm>
+          <a:prstGeom prst="roundRect">
+            <a:avLst/>
+          </a:prstGeom>
+          <a:solidFill>
+            <a:srgbClr val="FAFAFB"/>
+          </a:solidFill>
+          <a:ln>
+            <a:solidFill>
+              <a:srgbClr val="E2E4E8"/>
+            </a:solidFill>
+          </a:ln>
+        </p:spPr>
+        <p:style>
+          <a:lnRef idx="1">
+            <a:schemeClr val="accent1"/>
+          </a:lnRef>
+          <a:fillRef idx="3">
+            <a:schemeClr val="accent1"/>
+          </a:fillRef>
+          <a:effectRef idx="2">
+            <a:schemeClr val="accent1"/>
+          </a:effectRef>
+          <a:fontRef idx="minor">
+            <a:schemeClr val="lt1"/>
+          </a:fontRef>
+        </p:style>
+        <p:txBody>
+          <a:bodyPr rtlCol="0" anchor="ctr"/>
+          <a:lstStyle/>
+          <a:p>
+            <a:pPr algn="ctr"/>
+            <a:endParaRPr/>
+          </a:p>
+        </p:txBody>
+      </p:sp>
+      <p:sp>
+        <p:nvSpPr>
+          <p:cNvPr id="12" name="TextBox 11">
+            <a:extLst>
+              <a:ext uri="{FF2B5EF4-FFF2-40B4-BE49-F238E27FC236}">
+                <a16:creationId xmlns:a16="http://schemas.microsoft.com/office/drawing/2014/main" id="{C2D0A9BB-7ACC-711C-F143-E79F15A83FE1}"/>
+              </a:ext>
+            </a:extLst>
+          </p:cNvPr>
+          <p:cNvSpPr txBox="1"/>
+          <p:nvPr/>
+        </p:nvSpPr>
+        <p:spPr>
+          <a:xfrm>
+            <a:off x="416560" y="3984488"/>
+            <a:ext cx="8067040" cy="628377"/>
+          </a:xfrm>
+          <a:prstGeom prst="rect">
+            <a:avLst/>
+          </a:prstGeom>
+          <a:noFill/>
+        </p:spPr>
+        <p:txBody>
+          <a:bodyPr wrap="square">
+            <a:spAutoFit/>
+          </a:bodyPr>
+          <a:lstStyle/>
+          <a:p>
+            <a:pPr marL="171450" indent="-171450">
+              <a:spcAft>
+                <a:spcPts val="200"/>
+              </a:spcAft>
+              <a:buFont typeface="Arial" panose="020B0604020202020204" pitchFamily="34" charset="0"/>
+              <a:buChar char="•"/>
+              <a:defRPr sz="1050">
+                <a:solidFill>
+                  <a:srgbClr val="1F242C"/>
+                </a:solidFill>
+                <a:latin typeface="Arial"/>
+              </a:defRPr>
+            </a:pPr>
+            <a:r>
+              <a:rPr dirty="0">
+                <a:solidFill>
+                  <a:schemeClr val="tx2">
+                    <a:lumMod val="75000"/>
+                    <a:lumOff val="25000"/>
+                  </a:schemeClr>
+                </a:solidFill>
+                <a:latin typeface="Aptos" panose="020B0004020202020204" pitchFamily="34" charset="0"/>
+              </a:rPr>
+              <a:t>Rank 2 was best on Reasoning-100 (0.88), showing that a very small adapter was enough to improve the strongest starting benchmark.</a:t>
+            </a:r>
+          </a:p>
+          <a:p>
+            <a:pPr marL="171450" indent="-171450">
+              <a:spcAft>
+                <a:spcPts val="200"/>
+              </a:spcAft>
+              <a:buFont typeface="Arial" panose="020B0604020202020204" pitchFamily="34" charset="0"/>
+              <a:buChar char="•"/>
+              <a:defRPr sz="1050">
+                <a:solidFill>
+                  <a:srgbClr val="1F242C"/>
+                </a:solidFill>
+                <a:latin typeface="Arial"/>
+              </a:defRPr>
+            </a:pPr>
+            <a:r>
+              <a:rPr dirty="0">
+                <a:solidFill>
+                  <a:schemeClr val="tx2">
+                    <a:lumMod val="75000"/>
+                    <a:lumOff val="25000"/>
+                  </a:schemeClr>
+                </a:solidFill>
+                <a:latin typeface="Aptos" panose="020B0004020202020204" pitchFamily="34" charset="0"/>
+              </a:rPr>
+              <a:t>Rank 4 was best on AIMO-150 (0.733), while Olympiad-100 tied at 0.59 for r=2 and r=4.</a:t>
+            </a:r>
+          </a:p>
+          <a:p>
+            <a:pPr marL="171450" indent="-171450">
+              <a:spcAft>
+                <a:spcPts val="200"/>
+              </a:spcAft>
+              <a:buFont typeface="Arial" panose="020B0604020202020204" pitchFamily="34" charset="0"/>
+              <a:buChar char="•"/>
+              <a:defRPr sz="1050">
+                <a:solidFill>
+                  <a:srgbClr val="1F242C"/>
+                </a:solidFill>
+                <a:latin typeface="Arial"/>
+              </a:defRPr>
+            </a:pPr>
+            <a:r>
+              <a:rPr dirty="0">
+                <a:solidFill>
+                  <a:schemeClr val="tx2">
+                    <a:lumMod val="75000"/>
+                    <a:lumOff val="25000"/>
+                  </a:schemeClr>
+                </a:solidFill>
+                <a:latin typeface="Aptos" panose="020B0004020202020204" pitchFamily="34" charset="0"/>
+              </a:rPr>
+              <a:t>Parameter efficiency </a:t>
+            </a:r>
+            <a:r>
+              <a:rPr lang="en-US" altLang="zh-CN" dirty="0">
+                <a:solidFill>
+                  <a:schemeClr val="tx2">
+                    <a:lumMod val="75000"/>
+                    <a:lumOff val="25000"/>
+                  </a:schemeClr>
+                </a:solidFill>
+                <a:latin typeface="Aptos" panose="020B0004020202020204" pitchFamily="34" charset="0"/>
+              </a:rPr>
+              <a:t>dropped</a:t>
+            </a:r>
+            <a:r>
+              <a:rPr dirty="0">
+                <a:solidFill>
+                  <a:schemeClr val="tx2">
+                    <a:lumMod val="75000"/>
+                    <a:lumOff val="25000"/>
+                  </a:schemeClr>
+                </a:solidFill>
+                <a:latin typeface="Aptos" panose="020B0004020202020204" pitchFamily="34" charset="0"/>
+              </a:rPr>
+              <a:t> as rank increased, larger adapters added cost faster than they added accuracy.</a:t>
+            </a:r>
+          </a:p>
+        </p:txBody>
+      </p:sp>
+    </p:spTree>
+    <p:extLst>
+      <p:ext uri="{BB962C8B-B14F-4D97-AF65-F5344CB8AC3E}">
+        <p14:creationId xmlns:p14="http://schemas.microsoft.com/office/powerpoint/2010/main" val="1158735428"/>
+      </p:ext>
+    </p:extLst>
+  </p:cSld>
+  <p:clrMapOvr>
+    <a:masterClrMapping/>
+  </p:clrMapOvr>
+</p:sld>
+</file>
+
+<file path=ppt/slides/slide19.xml><?xml version="1.0" encoding="utf-8"?>
+<p:sld xmlns:a="http://schemas.openxmlformats.org/drawingml/2006/main" xmlns:r="http://schemas.openxmlformats.org/officeDocument/2006/relationships" xmlns:p="http://schemas.openxmlformats.org/presentationml/2006/main">
+  <p:cSld>
+    <p:spTree>
+      <p:nvGrpSpPr>
+        <p:cNvPr id="1" name="Shape 212">
+          <a:extLst>
+            <a:ext uri="{FF2B5EF4-FFF2-40B4-BE49-F238E27FC236}">
+              <a16:creationId xmlns:a16="http://schemas.microsoft.com/office/drawing/2014/main" id="{D76E07F5-C804-2221-9AC6-F2D60FB12293}"/>
+            </a:ext>
+          </a:extLst>
+        </p:cNvPr>
+        <p:cNvGrpSpPr/>
+        <p:nvPr/>
+      </p:nvGrpSpPr>
+      <p:grpSpPr>
+        <a:xfrm>
+          <a:off x="0" y="0"/>
+          <a:ext cx="0" cy="0"/>
+          <a:chOff x="0" y="0"/>
+          <a:chExt cx="0" cy="0"/>
+        </a:xfrm>
+      </p:grpSpPr>
+      <p:sp>
+        <p:nvSpPr>
+          <p:cNvPr id="213" name="Google Shape;213;p31">
+            <a:extLst>
+              <a:ext uri="{FF2B5EF4-FFF2-40B4-BE49-F238E27FC236}">
+                <a16:creationId xmlns:a16="http://schemas.microsoft.com/office/drawing/2014/main" id="{3CC8F3AB-87B7-C6C9-1664-3E5CA838A3D0}"/>
+              </a:ext>
+            </a:extLst>
+          </p:cNvPr>
+          <p:cNvSpPr txBox="1">
+            <a:spLocks noGrp="1"/>
+          </p:cNvSpPr>
+          <p:nvPr>
+            <p:ph type="title"/>
+          </p:nvPr>
+        </p:nvSpPr>
+        <p:spPr>
+          <a:xfrm>
+            <a:off x="4134678" y="2401800"/>
+            <a:ext cx="4780710" cy="527400"/>
+          </a:xfrm>
+          <a:prstGeom prst="rect">
+            <a:avLst/>
+          </a:prstGeom>
+        </p:spPr>
+        <p:txBody>
+          <a:bodyPr spcFirstLastPara="1" wrap="square" lIns="91425" tIns="91425" rIns="91425" bIns="91425" anchor="t" anchorCtr="0">
+            <a:noAutofit/>
+          </a:bodyPr>
+          <a:lstStyle/>
+          <a:p>
+            <a:pPr marL="0" lvl="0" indent="0" algn="l" rtl="0">
+              <a:spcBef>
+                <a:spcPts val="0"/>
+              </a:spcBef>
+              <a:spcAft>
+                <a:spcPts val="0"/>
+              </a:spcAft>
+              <a:buNone/>
+            </a:pPr>
+            <a:r>
+              <a:rPr lang="en-US" altLang="zh-CN" dirty="0">
+                <a:solidFill>
+                  <a:schemeClr val="dk1"/>
+                </a:solidFill>
+              </a:rPr>
+              <a:t>Key</a:t>
+            </a:r>
+            <a:r>
+              <a:rPr lang="zh-CN" altLang="en-US" dirty="0">
+                <a:solidFill>
+                  <a:schemeClr val="dk1"/>
+                </a:solidFill>
+              </a:rPr>
+              <a:t> </a:t>
+            </a:r>
+            <a:r>
+              <a:rPr lang="en-US" altLang="zh-CN" dirty="0">
+                <a:solidFill>
+                  <a:schemeClr val="dk1"/>
+                </a:solidFill>
+              </a:rPr>
+              <a:t>Learnings</a:t>
+            </a:r>
+            <a:endParaRPr lang="en-US" dirty="0">
+              <a:solidFill>
+                <a:schemeClr val="dk1"/>
+              </a:solidFill>
+            </a:endParaRPr>
+          </a:p>
+        </p:txBody>
+      </p:sp>
+      <p:sp>
+        <p:nvSpPr>
+          <p:cNvPr id="214" name="Google Shape;214;p31">
+            <a:extLst>
+              <a:ext uri="{FF2B5EF4-FFF2-40B4-BE49-F238E27FC236}">
+                <a16:creationId xmlns:a16="http://schemas.microsoft.com/office/drawing/2014/main" id="{CE23CE31-E026-1EB9-3264-DA5E42ED7555}"/>
+              </a:ext>
+            </a:extLst>
+          </p:cNvPr>
+          <p:cNvSpPr txBox="1">
+            <a:spLocks noGrp="1"/>
+          </p:cNvSpPr>
+          <p:nvPr>
+            <p:ph type="title" idx="2"/>
+          </p:nvPr>
+        </p:nvSpPr>
+        <p:spPr>
+          <a:xfrm>
+            <a:off x="228600" y="1498357"/>
+            <a:ext cx="3009300" cy="2066400"/>
+          </a:xfrm>
+          <a:prstGeom prst="rect">
+            <a:avLst/>
+          </a:prstGeom>
+        </p:spPr>
+        <p:txBody>
+          <a:bodyPr spcFirstLastPara="1" wrap="square" lIns="91425" tIns="91425" rIns="91425" bIns="91425" anchor="ctr" anchorCtr="0">
+            <a:noAutofit/>
+          </a:bodyPr>
+          <a:lstStyle/>
+          <a:p>
+            <a:pPr marL="0" lvl="0" indent="0" algn="ctr" rtl="0">
+              <a:spcBef>
+                <a:spcPts val="0"/>
+              </a:spcBef>
+              <a:spcAft>
+                <a:spcPts val="0"/>
+              </a:spcAft>
+              <a:buNone/>
+            </a:pPr>
+            <a:r>
+              <a:rPr lang="en" dirty="0"/>
+              <a:t>0</a:t>
+            </a:r>
+            <a:r>
+              <a:rPr lang="en-US" altLang="zh-CN" dirty="0"/>
+              <a:t>6</a:t>
+            </a:r>
+            <a:endParaRPr dirty="0"/>
+          </a:p>
+        </p:txBody>
+      </p:sp>
+    </p:spTree>
+    <p:extLst>
+      <p:ext uri="{BB962C8B-B14F-4D97-AF65-F5344CB8AC3E}">
+        <p14:creationId xmlns:p14="http://schemas.microsoft.com/office/powerpoint/2010/main" val="3557811411"/>
+      </p:ext>
+    </p:extLst>
+  </p:cSld>
+  <p:clrMapOvr>
+    <a:masterClrMapping/>
+  </p:clrMapOvr>
+</p:sld>
+</file>
+
 <file path=ppt/slides/slide2.xml><?xml version="1.0" encoding="utf-8"?>
 <p:sld xmlns:a="http://schemas.openxmlformats.org/drawingml/2006/main" xmlns:r="http://schemas.openxmlformats.org/officeDocument/2006/relationships" xmlns:p="http://schemas.openxmlformats.org/presentationml/2006/main">
   <p:cSld>
@@ -17718,18 +21946,14 @@
           </a:bodyPr>
           <a:lstStyle/>
           <a:p>
-            <a:pPr marL="0" lvl="0" indent="0" algn="l" rtl="0">
-              <a:spcBef>
-                <a:spcPts val="0"/>
-              </a:spcBef>
-              <a:spcAft>
-                <a:spcPts val="0"/>
-              </a:spcAft>
-              <a:buNone/>
-            </a:pPr>
-            <a:r>
-              <a:rPr lang="en" dirty="0"/>
-              <a:t>NAME OF THE SECTION</a:t>
+            <a:pPr marL="0" lvl="0" indent="0"/>
+            <a:r>
+              <a:rPr lang="en-US" dirty="0">
+                <a:solidFill>
+                  <a:schemeClr val="dk1"/>
+                </a:solidFill>
+              </a:rPr>
+              <a:t>Methodology</a:t>
             </a:r>
             <a:endParaRPr dirty="0"/>
           </a:p>
@@ -17747,7 +21971,7 @@
         </p:nvSpPr>
         <p:spPr>
           <a:xfrm>
-            <a:off x="1220209" y="3345458"/>
+            <a:off x="5394486" y="504325"/>
             <a:ext cx="3307500" cy="310800"/>
           </a:xfrm>
           <a:prstGeom prst="rect">
@@ -17760,18 +21984,14 @@
           </a:bodyPr>
           <a:lstStyle/>
           <a:p>
-            <a:pPr marL="0" lvl="0" indent="0" algn="l" rtl="0">
-              <a:spcBef>
-                <a:spcPts val="0"/>
-              </a:spcBef>
-              <a:spcAft>
-                <a:spcPts val="0"/>
-              </a:spcAft>
-              <a:buNone/>
-            </a:pPr>
-            <a:r>
-              <a:rPr lang="en" dirty="0"/>
-              <a:t>NAME OF THE SECTION</a:t>
+            <a:pPr marL="0" lvl="0" indent="0"/>
+            <a:r>
+              <a:rPr lang="en-US" dirty="0">
+                <a:solidFill>
+                  <a:schemeClr val="dk1"/>
+                </a:solidFill>
+              </a:rPr>
+              <a:t>Project Workflow</a:t>
             </a:r>
             <a:endParaRPr dirty="0"/>
           </a:p>
@@ -17789,7 +22009,7 @@
         </p:nvSpPr>
         <p:spPr>
           <a:xfrm>
-            <a:off x="5314804" y="504648"/>
+            <a:off x="5394486" y="1451576"/>
             <a:ext cx="3307500" cy="310800"/>
           </a:xfrm>
           <a:prstGeom prst="rect">
@@ -17802,18 +22022,14 @@
           </a:bodyPr>
           <a:lstStyle/>
           <a:p>
-            <a:pPr marL="0" lvl="0" indent="0" algn="l" rtl="0">
-              <a:spcBef>
-                <a:spcPts val="0"/>
-              </a:spcBef>
-              <a:spcAft>
-                <a:spcPts val="0"/>
-              </a:spcAft>
-              <a:buNone/>
-            </a:pPr>
-            <a:r>
-              <a:rPr lang="en" dirty="0"/>
-              <a:t>NAME OF THE SECTION</a:t>
+            <a:pPr marL="0" lvl="0" indent="0"/>
+            <a:r>
+              <a:rPr lang="en-US" dirty="0">
+                <a:solidFill>
+                  <a:schemeClr val="dk1"/>
+                </a:solidFill>
+              </a:rPr>
+              <a:t>Results Review</a:t>
             </a:r>
             <a:endParaRPr dirty="0"/>
           </a:p>
@@ -17831,7 +22047,7 @@
         </p:nvSpPr>
         <p:spPr>
           <a:xfrm>
-            <a:off x="5314804" y="1451593"/>
+            <a:off x="5394486" y="2398521"/>
             <a:ext cx="3307500" cy="310800"/>
           </a:xfrm>
           <a:prstGeom prst="rect">
@@ -17844,102 +22060,30 @@
           </a:bodyPr>
           <a:lstStyle/>
           <a:p>
-            <a:pPr marL="0" lvl="0" indent="0" algn="l" rtl="0">
-              <a:spcBef>
-                <a:spcPts val="0"/>
-              </a:spcBef>
-              <a:spcAft>
-                <a:spcPts val="0"/>
-              </a:spcAft>
-              <a:buNone/>
-            </a:pPr>
-            <a:r>
-              <a:rPr lang="en" dirty="0"/>
-              <a:t>NAME OF THE SECTION</a:t>
-            </a:r>
-            <a:endParaRPr dirty="0"/>
-          </a:p>
-        </p:txBody>
-      </p:sp>
-      <p:sp>
-        <p:nvSpPr>
-          <p:cNvPr id="192" name="Google Shape;192;p29"/>
-          <p:cNvSpPr txBox="1">
-            <a:spLocks noGrp="1"/>
-          </p:cNvSpPr>
-          <p:nvPr>
-            <p:ph type="subTitle" idx="7"/>
-          </p:nvPr>
-        </p:nvSpPr>
-        <p:spPr>
-          <a:xfrm>
-            <a:off x="5314804" y="2398539"/>
-            <a:ext cx="3307500" cy="310800"/>
-          </a:xfrm>
-          <a:prstGeom prst="rect">
-            <a:avLst/>
-          </a:prstGeom>
-        </p:spPr>
-        <p:txBody>
-          <a:bodyPr spcFirstLastPara="1" wrap="square" lIns="91425" tIns="91425" rIns="91425" bIns="91425" anchor="t" anchorCtr="0">
-            <a:noAutofit/>
-          </a:bodyPr>
-          <a:lstStyle/>
-          <a:p>
-            <a:pPr marL="0" lvl="0" indent="0" algn="l" rtl="0">
-              <a:spcBef>
-                <a:spcPts val="0"/>
-              </a:spcBef>
-              <a:spcAft>
-                <a:spcPts val="0"/>
-              </a:spcAft>
-              <a:buNone/>
-            </a:pPr>
-            <a:r>
-              <a:rPr lang="en" dirty="0"/>
-              <a:t>NAME OF THE SECTION</a:t>
-            </a:r>
-            <a:endParaRPr dirty="0"/>
-          </a:p>
-        </p:txBody>
-      </p:sp>
-      <p:sp>
-        <p:nvSpPr>
-          <p:cNvPr id="193" name="Google Shape;193;p29"/>
-          <p:cNvSpPr txBox="1">
-            <a:spLocks noGrp="1"/>
-          </p:cNvSpPr>
-          <p:nvPr>
-            <p:ph type="subTitle" idx="8"/>
-          </p:nvPr>
-        </p:nvSpPr>
-        <p:spPr>
-          <a:xfrm>
-            <a:off x="5314804" y="3345484"/>
-            <a:ext cx="3307500" cy="310800"/>
-          </a:xfrm>
-          <a:prstGeom prst="rect">
-            <a:avLst/>
-          </a:prstGeom>
-        </p:spPr>
-        <p:txBody>
-          <a:bodyPr spcFirstLastPara="1" wrap="square" lIns="91425" tIns="91425" rIns="91425" bIns="91425" anchor="t" anchorCtr="0">
-            <a:noAutofit/>
-          </a:bodyPr>
-          <a:lstStyle/>
-          <a:p>
-            <a:pPr marL="0" lvl="0" indent="0" algn="l" rtl="0">
-              <a:spcBef>
-                <a:spcPts val="0"/>
-              </a:spcBef>
-              <a:spcAft>
-                <a:spcPts val="0"/>
-              </a:spcAft>
-              <a:buNone/>
-            </a:pPr>
-            <a:r>
-              <a:rPr lang="en" dirty="0"/>
-              <a:t>NAME OF THE SECTION</a:t>
+            <a:pPr marL="0" lvl="0" indent="0"/>
+            <a:r>
+              <a:rPr lang="en-US" altLang="zh-CN" dirty="0">
+                <a:solidFill>
+                  <a:schemeClr val="dk1"/>
+                </a:solidFill>
+              </a:rPr>
+              <a:t>Key</a:t>
+            </a:r>
+            <a:r>
+              <a:rPr lang="zh-CN" altLang="en-US" dirty="0">
+                <a:solidFill>
+                  <a:schemeClr val="dk1"/>
+                </a:solidFill>
+              </a:rPr>
+              <a:t> </a:t>
+            </a:r>
+            <a:r>
+              <a:rPr lang="en-US" altLang="zh-CN" dirty="0">
+                <a:solidFill>
+                  <a:schemeClr val="dk1"/>
+                </a:solidFill>
+              </a:rPr>
+              <a:t>Learnings</a:t>
             </a:r>
             <a:endParaRPr dirty="0"/>
           </a:p>
@@ -17957,7 +22101,7 @@
         </p:nvSpPr>
         <p:spPr>
           <a:xfrm>
-            <a:off x="521691" y="3465371"/>
+            <a:off x="4695968" y="624238"/>
             <a:ext cx="712200" cy="310800"/>
           </a:xfrm>
           <a:prstGeom prst="rect">
@@ -18125,7 +22269,7 @@
         </p:nvSpPr>
         <p:spPr>
           <a:xfrm>
-            <a:off x="4627489" y="1571508"/>
+            <a:off x="4707171" y="2518436"/>
             <a:ext cx="712200" cy="310800"/>
           </a:xfrm>
           <a:prstGeom prst="rect">
@@ -18150,90 +22294,6 @@
             <a:r>
               <a:rPr lang="en" dirty="0"/>
               <a:t>06</a:t>
-            </a:r>
-            <a:endParaRPr dirty="0"/>
-          </a:p>
-        </p:txBody>
-      </p:sp>
-      <p:sp>
-        <p:nvSpPr>
-          <p:cNvPr id="199" name="Google Shape;199;p29"/>
-          <p:cNvSpPr txBox="1">
-            <a:spLocks noGrp="1"/>
-          </p:cNvSpPr>
-          <p:nvPr>
-            <p:ph type="title" idx="16"/>
-          </p:nvPr>
-        </p:nvSpPr>
-        <p:spPr>
-          <a:xfrm>
-            <a:off x="4627487" y="2518452"/>
-            <a:ext cx="712200" cy="310800"/>
-          </a:xfrm>
-          <a:prstGeom prst="rect">
-            <a:avLst/>
-          </a:prstGeom>
-        </p:spPr>
-        <p:txBody>
-          <a:bodyPr spcFirstLastPara="1" wrap="square" lIns="91425" tIns="91425" rIns="91425" bIns="91425" anchor="ctr" anchorCtr="0">
-            <a:noAutofit/>
-          </a:bodyPr>
-          <a:lstStyle/>
-          <a:p>
-            <a:pPr marL="0" lvl="0" indent="0" algn="ctr" rtl="0">
-              <a:spcBef>
-                <a:spcPts val="0"/>
-              </a:spcBef>
-              <a:spcAft>
-                <a:spcPts val="0"/>
-              </a:spcAft>
-              <a:buNone/>
-            </a:pPr>
-            <a:r>
-              <a:rPr lang="en" dirty="0"/>
-              <a:t>07</a:t>
-            </a:r>
-            <a:endParaRPr dirty="0"/>
-          </a:p>
-        </p:txBody>
-      </p:sp>
-      <p:sp>
-        <p:nvSpPr>
-          <p:cNvPr id="200" name="Google Shape;200;p29"/>
-          <p:cNvSpPr txBox="1">
-            <a:spLocks noGrp="1"/>
-          </p:cNvSpPr>
-          <p:nvPr>
-            <p:ph type="title" idx="17"/>
-          </p:nvPr>
-        </p:nvSpPr>
-        <p:spPr>
-          <a:xfrm>
-            <a:off x="4627489" y="3465396"/>
-            <a:ext cx="712200" cy="310800"/>
-          </a:xfrm>
-          <a:prstGeom prst="rect">
-            <a:avLst/>
-          </a:prstGeom>
-        </p:spPr>
-        <p:txBody>
-          <a:bodyPr spcFirstLastPara="1" wrap="square" lIns="91425" tIns="91425" rIns="91425" bIns="91425" anchor="ctr" anchorCtr="0">
-            <a:noAutofit/>
-          </a:bodyPr>
-          <a:lstStyle/>
-          <a:p>
-            <a:pPr marL="0" lvl="0" indent="0" algn="ctr" rtl="0">
-              <a:spcBef>
-                <a:spcPts val="0"/>
-              </a:spcBef>
-              <a:spcAft>
-                <a:spcPts val="0"/>
-              </a:spcAft>
-              <a:buNone/>
-            </a:pPr>
-            <a:r>
-              <a:rPr lang="en" dirty="0"/>
-              <a:t>08</a:t>
             </a:r>
             <a:endParaRPr dirty="0"/>
           </a:p>
@@ -18251,7 +22311,7 @@
         </p:nvSpPr>
         <p:spPr>
           <a:xfrm>
-            <a:off x="4627489" y="624563"/>
+            <a:off x="4707171" y="1571491"/>
             <a:ext cx="712200" cy="310800"/>
           </a:xfrm>
           <a:prstGeom prst="rect">
@@ -18282,6 +22342,1304 @@
         </p:txBody>
       </p:sp>
     </p:spTree>
+  </p:cSld>
+  <p:clrMapOvr>
+    <a:masterClrMapping/>
+  </p:clrMapOvr>
+</p:sld>
+</file>
+
+<file path=ppt/slides/slide20.xml><?xml version="1.0" encoding="utf-8"?>
+<p:sld xmlns:a="http://schemas.openxmlformats.org/drawingml/2006/main" xmlns:r="http://schemas.openxmlformats.org/officeDocument/2006/relationships" xmlns:p="http://schemas.openxmlformats.org/presentationml/2006/main">
+  <p:cSld>
+    <p:spTree>
+      <p:nvGrpSpPr>
+        <p:cNvPr id="1" name=""/>
+        <p:cNvGrpSpPr/>
+        <p:nvPr/>
+      </p:nvGrpSpPr>
+      <p:grpSpPr>
+        <a:xfrm>
+          <a:off x="0" y="0"/>
+          <a:ext cx="0" cy="0"/>
+          <a:chOff x="0" y="0"/>
+          <a:chExt cx="0" cy="0"/>
+        </a:xfrm>
+      </p:grpSpPr>
+      <p:sp>
+        <p:nvSpPr>
+          <p:cNvPr id="29" name="Rectangle 28">
+            <a:extLst>
+              <a:ext uri="{FF2B5EF4-FFF2-40B4-BE49-F238E27FC236}">
+                <a16:creationId xmlns:a16="http://schemas.microsoft.com/office/drawing/2014/main" id="{205F712E-4D5C-1047-A7B1-C259E0E2C1CD}"/>
+              </a:ext>
+            </a:extLst>
+          </p:cNvPr>
+          <p:cNvSpPr/>
+          <p:nvPr/>
+        </p:nvSpPr>
+        <p:spPr>
+          <a:xfrm>
+            <a:off x="203200" y="308844"/>
+            <a:ext cx="8735060" cy="2068068"/>
+          </a:xfrm>
+          <a:prstGeom prst="rect">
+            <a:avLst/>
+          </a:prstGeom>
+          <a:noFill/>
+          <a:ln>
+            <a:solidFill>
+              <a:srgbClr val="C7C3F1"/>
+            </a:solidFill>
+            <a:prstDash val="sysDash"/>
+          </a:ln>
+        </p:spPr>
+        <p:style>
+          <a:lnRef idx="2">
+            <a:schemeClr val="accent1">
+              <a:shade val="15000"/>
+            </a:schemeClr>
+          </a:lnRef>
+          <a:fillRef idx="1">
+            <a:schemeClr val="accent1"/>
+          </a:fillRef>
+          <a:effectRef idx="0">
+            <a:schemeClr val="accent1"/>
+          </a:effectRef>
+          <a:fontRef idx="minor">
+            <a:schemeClr val="lt1"/>
+          </a:fontRef>
+        </p:style>
+        <p:txBody>
+          <a:bodyPr rtlCol="0" anchor="ctr"/>
+          <a:lstStyle/>
+          <a:p>
+            <a:pPr algn="ctr"/>
+            <a:endParaRPr lang="en-US"/>
+          </a:p>
+        </p:txBody>
+      </p:sp>
+      <p:sp>
+        <p:nvSpPr>
+          <p:cNvPr id="5" name="Text 0">
+            <a:extLst>
+              <a:ext uri="{FF2B5EF4-FFF2-40B4-BE49-F238E27FC236}">
+                <a16:creationId xmlns:a16="http://schemas.microsoft.com/office/drawing/2014/main" id="{0CAC36DF-A942-A797-D4B9-4580AD8196A8}"/>
+              </a:ext>
+            </a:extLst>
+          </p:cNvPr>
+          <p:cNvSpPr/>
+          <p:nvPr/>
+        </p:nvSpPr>
+        <p:spPr>
+          <a:xfrm>
+            <a:off x="364998" y="319891"/>
+            <a:ext cx="3520440" cy="411480"/>
+          </a:xfrm>
+          <a:prstGeom prst="rect">
+            <a:avLst/>
+          </a:prstGeom>
+          <a:noFill/>
+          <a:ln/>
+        </p:spPr>
+        <p:txBody>
+          <a:bodyPr wrap="square" lIns="0" tIns="0" rIns="0" bIns="0" rtlCol="0" anchor="ctr"/>
+          <a:lstStyle/>
+          <a:p>
+            <a:pPr marL="0" indent="0">
+              <a:buNone/>
+            </a:pPr>
+            <a:r>
+              <a:rPr lang="en-US" sz="2000" dirty="0">
+                <a:solidFill>
+                  <a:schemeClr val="dk1"/>
+                </a:solidFill>
+                <a:latin typeface="Red Hat Mono"/>
+                <a:ea typeface="Red Hat Mono"/>
+                <a:cs typeface="Red Hat Mono"/>
+              </a:rPr>
+              <a:t>Key Learnings</a:t>
+            </a:r>
+          </a:p>
+        </p:txBody>
+      </p:sp>
+      <p:sp>
+        <p:nvSpPr>
+          <p:cNvPr id="7" name="Text 2">
+            <a:extLst>
+              <a:ext uri="{FF2B5EF4-FFF2-40B4-BE49-F238E27FC236}">
+                <a16:creationId xmlns:a16="http://schemas.microsoft.com/office/drawing/2014/main" id="{0B927EAA-8D91-EB8B-2C04-85D12DD84A88}"/>
+              </a:ext>
+            </a:extLst>
+          </p:cNvPr>
+          <p:cNvSpPr/>
+          <p:nvPr/>
+        </p:nvSpPr>
+        <p:spPr>
+          <a:xfrm>
+            <a:off x="364998" y="682307"/>
+            <a:ext cx="8387842" cy="1633495"/>
+          </a:xfrm>
+          <a:prstGeom prst="rect">
+            <a:avLst/>
+          </a:prstGeom>
+          <a:noFill/>
+          <a:ln/>
+        </p:spPr>
+        <p:txBody>
+          <a:bodyPr wrap="square" lIns="0" tIns="0" rIns="0" bIns="0" rtlCol="0" anchor="ctr">
+            <a:normAutofit/>
+          </a:bodyPr>
+          <a:lstStyle/>
+          <a:p>
+            <a:pPr marL="285750" indent="-285750">
+              <a:lnSpc>
+                <a:spcPct val="150000"/>
+              </a:lnSpc>
+              <a:buFont typeface="Arial" panose="020B0604020202020204" pitchFamily="34" charset="0"/>
+              <a:buChar char="•"/>
+            </a:pPr>
+            <a:r>
+              <a:rPr lang="en-US" sz="1200" dirty="0">
+                <a:solidFill>
+                  <a:schemeClr val="tx2">
+                    <a:lumMod val="90000"/>
+                    <a:lumOff val="10000"/>
+                  </a:schemeClr>
+                </a:solidFill>
+                <a:latin typeface="Aptos" panose="020B0004020202020204" pitchFamily="34" charset="0"/>
+                <a:ea typeface="Arial" pitchFamily="34" charset="-122"/>
+                <a:cs typeface="Arial" pitchFamily="34" charset="-120"/>
+              </a:rPr>
+              <a:t>Small LoRA adapters were enough to move reasoning quality. Even rank 2 improved the base model on Reasoning-100 and tied for best on Olympiad-100.</a:t>
+            </a:r>
+          </a:p>
+          <a:p>
+            <a:pPr marL="285750" indent="-285750">
+              <a:lnSpc>
+                <a:spcPct val="150000"/>
+              </a:lnSpc>
+              <a:buFont typeface="Arial" panose="020B0604020202020204" pitchFamily="34" charset="0"/>
+              <a:buChar char="•"/>
+            </a:pPr>
+            <a:r>
+              <a:rPr lang="en-US" sz="1200" dirty="0">
+                <a:solidFill>
+                  <a:schemeClr val="tx2">
+                    <a:lumMod val="90000"/>
+                    <a:lumOff val="10000"/>
+                  </a:schemeClr>
+                </a:solidFill>
+                <a:latin typeface="Aptos" panose="020B0004020202020204" pitchFamily="34" charset="0"/>
+                <a:ea typeface="Arial" pitchFamily="34" charset="-122"/>
+                <a:cs typeface="Arial" pitchFamily="34" charset="-120"/>
+              </a:rPr>
+              <a:t>The best </a:t>
+            </a:r>
+            <a:r>
+              <a:rPr lang="en-US" sz="1200" dirty="0" err="1">
+                <a:solidFill>
+                  <a:schemeClr val="tx2">
+                    <a:lumMod val="90000"/>
+                    <a:lumOff val="10000"/>
+                  </a:schemeClr>
+                </a:solidFill>
+                <a:latin typeface="Aptos" panose="020B0004020202020204" pitchFamily="34" charset="0"/>
+                <a:ea typeface="Arial" pitchFamily="34" charset="-122"/>
+                <a:cs typeface="Arial" pitchFamily="34" charset="-120"/>
+              </a:rPr>
+              <a:t>LoRA</a:t>
+            </a:r>
+            <a:r>
+              <a:rPr lang="en-US" sz="1200" dirty="0">
+                <a:solidFill>
+                  <a:schemeClr val="tx2">
+                    <a:lumMod val="90000"/>
+                    <a:lumOff val="10000"/>
+                  </a:schemeClr>
+                </a:solidFill>
+                <a:latin typeface="Aptos" panose="020B0004020202020204" pitchFamily="34" charset="0"/>
+                <a:ea typeface="Arial" pitchFamily="34" charset="-122"/>
+                <a:cs typeface="Arial" pitchFamily="34" charset="-120"/>
+              </a:rPr>
+              <a:t> rank was benchmark-dependent: rank 2 fit the shorter reasoning tasks best, while rank 4 was strongest on the harder AIMO-150 set.</a:t>
+            </a:r>
+            <a:endParaRPr lang="en-US" sz="1200" dirty="0">
+              <a:solidFill>
+                <a:schemeClr val="tx2">
+                  <a:lumMod val="90000"/>
+                  <a:lumOff val="10000"/>
+                </a:schemeClr>
+              </a:solidFill>
+              <a:latin typeface="Aptos" panose="020B0004020202020204" pitchFamily="34" charset="0"/>
+            </a:endParaRPr>
+          </a:p>
+          <a:p>
+            <a:pPr marL="285750" indent="-285750">
+              <a:lnSpc>
+                <a:spcPct val="150000"/>
+              </a:lnSpc>
+              <a:buFont typeface="Arial" panose="020B0604020202020204" pitchFamily="34" charset="0"/>
+              <a:buChar char="•"/>
+            </a:pPr>
+            <a:r>
+              <a:rPr lang="en-US" sz="1200" dirty="0">
+                <a:solidFill>
+                  <a:schemeClr val="tx2">
+                    <a:lumMod val="90000"/>
+                    <a:lumOff val="10000"/>
+                  </a:schemeClr>
+                </a:solidFill>
+                <a:latin typeface="Aptos" panose="020B0004020202020204" pitchFamily="34" charset="0"/>
+                <a:ea typeface="Arial" pitchFamily="34" charset="-122"/>
+                <a:cs typeface="Arial" pitchFamily="34" charset="-120"/>
+              </a:rPr>
+              <a:t>In this local notebook workflow, GRPO looked more promising as a parameter-efficiency experiment than as a raw-performance winner. It showed the smallest update budget, but not the best scores</a:t>
+            </a:r>
+          </a:p>
+        </p:txBody>
+      </p:sp>
+      <p:sp>
+        <p:nvSpPr>
+          <p:cNvPr id="9" name="Text 4">
+            <a:extLst>
+              <a:ext uri="{FF2B5EF4-FFF2-40B4-BE49-F238E27FC236}">
+                <a16:creationId xmlns:a16="http://schemas.microsoft.com/office/drawing/2014/main" id="{C198470E-E603-B963-2B6B-450E6EA30FEA}"/>
+              </a:ext>
+            </a:extLst>
+          </p:cNvPr>
+          <p:cNvSpPr/>
+          <p:nvPr/>
+        </p:nvSpPr>
+        <p:spPr>
+          <a:xfrm>
+            <a:off x="1234440" y="2340864"/>
+            <a:ext cx="4572000" cy="685800"/>
+          </a:xfrm>
+          <a:prstGeom prst="rect">
+            <a:avLst/>
+          </a:prstGeom>
+          <a:noFill/>
+          <a:ln/>
+        </p:spPr>
+        <p:txBody>
+          <a:bodyPr wrap="square" lIns="0" tIns="0" rIns="0" bIns="0" rtlCol="0" anchor="ctr">
+            <a:normAutofit/>
+          </a:bodyPr>
+          <a:lstStyle/>
+          <a:p>
+            <a:pPr marL="0" indent="0">
+              <a:buNone/>
+            </a:pPr>
+            <a:endParaRPr lang="en-US" sz="1800" dirty="0"/>
+          </a:p>
+        </p:txBody>
+      </p:sp>
+      <p:sp>
+        <p:nvSpPr>
+          <p:cNvPr id="11" name="Text 6">
+            <a:extLst>
+              <a:ext uri="{FF2B5EF4-FFF2-40B4-BE49-F238E27FC236}">
+                <a16:creationId xmlns:a16="http://schemas.microsoft.com/office/drawing/2014/main" id="{6756D3B1-333E-B549-3426-CB5CA6466A81}"/>
+              </a:ext>
+            </a:extLst>
+          </p:cNvPr>
+          <p:cNvSpPr/>
+          <p:nvPr/>
+        </p:nvSpPr>
+        <p:spPr>
+          <a:xfrm>
+            <a:off x="1447800" y="3244596"/>
+            <a:ext cx="4572000" cy="822960"/>
+          </a:xfrm>
+          <a:prstGeom prst="rect">
+            <a:avLst/>
+          </a:prstGeom>
+          <a:noFill/>
+          <a:ln/>
+        </p:spPr>
+        <p:txBody>
+          <a:bodyPr wrap="square" lIns="0" tIns="0" rIns="0" bIns="0" rtlCol="0" anchor="ctr">
+            <a:normAutofit/>
+          </a:bodyPr>
+          <a:lstStyle/>
+          <a:p>
+            <a:pPr marL="0" indent="0">
+              <a:buNone/>
+            </a:pPr>
+            <a:endParaRPr lang="en-US" sz="1800" dirty="0"/>
+          </a:p>
+        </p:txBody>
+      </p:sp>
+      <p:sp>
+        <p:nvSpPr>
+          <p:cNvPr id="13" name="Text 8">
+            <a:extLst>
+              <a:ext uri="{FF2B5EF4-FFF2-40B4-BE49-F238E27FC236}">
+                <a16:creationId xmlns:a16="http://schemas.microsoft.com/office/drawing/2014/main" id="{61231C8B-3033-CE1B-00DC-9FC371084A55}"/>
+              </a:ext>
+            </a:extLst>
+          </p:cNvPr>
+          <p:cNvSpPr/>
+          <p:nvPr/>
+        </p:nvSpPr>
+        <p:spPr>
+          <a:xfrm>
+            <a:off x="1234440" y="4425696"/>
+            <a:ext cx="4572000" cy="822960"/>
+          </a:xfrm>
+          <a:prstGeom prst="rect">
+            <a:avLst/>
+          </a:prstGeom>
+          <a:noFill/>
+          <a:ln/>
+        </p:spPr>
+        <p:txBody>
+          <a:bodyPr wrap="square" lIns="0" tIns="0" rIns="0" bIns="0" rtlCol="0" anchor="ctr">
+            <a:normAutofit/>
+          </a:bodyPr>
+          <a:lstStyle/>
+          <a:p>
+            <a:pPr marL="0" indent="0">
+              <a:buNone/>
+            </a:pPr>
+            <a:endParaRPr lang="en-US" sz="1800" dirty="0"/>
+          </a:p>
+        </p:txBody>
+      </p:sp>
+      <p:sp>
+        <p:nvSpPr>
+          <p:cNvPr id="15" name="Text 10">
+            <a:extLst>
+              <a:ext uri="{FF2B5EF4-FFF2-40B4-BE49-F238E27FC236}">
+                <a16:creationId xmlns:a16="http://schemas.microsoft.com/office/drawing/2014/main" id="{29C57213-7BF0-1C6D-7DA3-53BF55681136}"/>
+              </a:ext>
+            </a:extLst>
+          </p:cNvPr>
+          <p:cNvSpPr/>
+          <p:nvPr/>
+        </p:nvSpPr>
+        <p:spPr>
+          <a:xfrm>
+            <a:off x="1234440" y="5513832"/>
+            <a:ext cx="4572000" cy="731520"/>
+          </a:xfrm>
+          <a:prstGeom prst="rect">
+            <a:avLst/>
+          </a:prstGeom>
+          <a:noFill/>
+          <a:ln/>
+        </p:spPr>
+        <p:txBody>
+          <a:bodyPr wrap="square" lIns="0" tIns="0" rIns="0" bIns="0" rtlCol="0" anchor="ctr">
+            <a:normAutofit/>
+          </a:bodyPr>
+          <a:lstStyle/>
+          <a:p>
+            <a:pPr marL="0" indent="0">
+              <a:buNone/>
+            </a:pPr>
+            <a:endParaRPr lang="en-US" sz="1800" dirty="0"/>
+          </a:p>
+        </p:txBody>
+      </p:sp>
+      <p:sp>
+        <p:nvSpPr>
+          <p:cNvPr id="20" name="Text 15">
+            <a:extLst>
+              <a:ext uri="{FF2B5EF4-FFF2-40B4-BE49-F238E27FC236}">
+                <a16:creationId xmlns:a16="http://schemas.microsoft.com/office/drawing/2014/main" id="{C358C166-2B4A-876D-DFA9-6128F205D3E9}"/>
+              </a:ext>
+            </a:extLst>
+          </p:cNvPr>
+          <p:cNvSpPr/>
+          <p:nvPr/>
+        </p:nvSpPr>
+        <p:spPr>
+          <a:xfrm>
+            <a:off x="6858000" y="2724912"/>
+            <a:ext cx="4645152" cy="566928"/>
+          </a:xfrm>
+          <a:prstGeom prst="rect">
+            <a:avLst/>
+          </a:prstGeom>
+          <a:noFill/>
+          <a:ln/>
+        </p:spPr>
+        <p:txBody>
+          <a:bodyPr wrap="square" lIns="0" tIns="0" rIns="0" bIns="0" rtlCol="0" anchor="ctr">
+            <a:normAutofit/>
+          </a:bodyPr>
+          <a:lstStyle/>
+          <a:p>
+            <a:pPr marL="0" indent="0">
+              <a:buNone/>
+            </a:pPr>
+            <a:endParaRPr lang="en-US" sz="1570" dirty="0"/>
+          </a:p>
+        </p:txBody>
+      </p:sp>
+      <p:sp>
+        <p:nvSpPr>
+          <p:cNvPr id="22" name="Text 17">
+            <a:extLst>
+              <a:ext uri="{FF2B5EF4-FFF2-40B4-BE49-F238E27FC236}">
+                <a16:creationId xmlns:a16="http://schemas.microsoft.com/office/drawing/2014/main" id="{57327295-7EFB-A5C0-671B-3BB176D7E111}"/>
+              </a:ext>
+            </a:extLst>
+          </p:cNvPr>
+          <p:cNvSpPr/>
+          <p:nvPr/>
+        </p:nvSpPr>
+        <p:spPr>
+          <a:xfrm>
+            <a:off x="6858000" y="3419856"/>
+            <a:ext cx="4645152" cy="566928"/>
+          </a:xfrm>
+          <a:prstGeom prst="rect">
+            <a:avLst/>
+          </a:prstGeom>
+          <a:noFill/>
+          <a:ln/>
+        </p:spPr>
+        <p:txBody>
+          <a:bodyPr wrap="square" lIns="0" tIns="0" rIns="0" bIns="0" rtlCol="0" anchor="ctr">
+            <a:normAutofit/>
+          </a:bodyPr>
+          <a:lstStyle/>
+          <a:p>
+            <a:pPr marL="0" indent="0">
+              <a:buNone/>
+            </a:pPr>
+            <a:endParaRPr lang="en-US" sz="1570" dirty="0"/>
+          </a:p>
+        </p:txBody>
+      </p:sp>
+      <p:sp>
+        <p:nvSpPr>
+          <p:cNvPr id="26" name="TextBox 25">
+            <a:extLst>
+              <a:ext uri="{FF2B5EF4-FFF2-40B4-BE49-F238E27FC236}">
+                <a16:creationId xmlns:a16="http://schemas.microsoft.com/office/drawing/2014/main" id="{B9A29A71-C82C-3E31-296A-1F34E1983651}"/>
+              </a:ext>
+            </a:extLst>
+          </p:cNvPr>
+          <p:cNvSpPr txBox="1"/>
+          <p:nvPr/>
+        </p:nvSpPr>
+        <p:spPr>
+          <a:xfrm>
+            <a:off x="293878" y="2591518"/>
+            <a:ext cx="8735060" cy="2272417"/>
+          </a:xfrm>
+          <a:prstGeom prst="rect">
+            <a:avLst/>
+          </a:prstGeom>
+          <a:noFill/>
+        </p:spPr>
+        <p:txBody>
+          <a:bodyPr wrap="square">
+            <a:spAutoFit/>
+          </a:bodyPr>
+          <a:lstStyle/>
+          <a:p>
+            <a:r>
+              <a:rPr lang="en-US" altLang="zh-CN" sz="2000" dirty="0">
+                <a:solidFill>
+                  <a:schemeClr val="dk1"/>
+                </a:solidFill>
+                <a:latin typeface="Red Hat Mono"/>
+                <a:ea typeface="Red Hat Mono"/>
+                <a:cs typeface="Red Hat Mono"/>
+              </a:rPr>
+              <a:t>L</a:t>
+            </a:r>
+            <a:r>
+              <a:rPr sz="2000" dirty="0">
+                <a:solidFill>
+                  <a:schemeClr val="dk1"/>
+                </a:solidFill>
+                <a:latin typeface="Red Hat Mono"/>
+                <a:ea typeface="Red Hat Mono"/>
+                <a:cs typeface="Red Hat Mono"/>
+              </a:rPr>
+              <a:t>imitations</a:t>
+            </a:r>
+            <a:endParaRPr lang="en-US" sz="2000" dirty="0">
+              <a:solidFill>
+                <a:schemeClr val="dk1"/>
+              </a:solidFill>
+              <a:latin typeface="Red Hat Mono"/>
+              <a:ea typeface="Red Hat Mono"/>
+              <a:cs typeface="Red Hat Mono"/>
+            </a:endParaRPr>
+          </a:p>
+          <a:p>
+            <a:endParaRPr sz="900" dirty="0">
+              <a:solidFill>
+                <a:schemeClr val="dk1"/>
+              </a:solidFill>
+              <a:latin typeface="Red Hat Mono"/>
+              <a:ea typeface="Red Hat Mono"/>
+              <a:cs typeface="Red Hat Mono"/>
+            </a:endParaRPr>
+          </a:p>
+          <a:p>
+            <a:pPr marL="171450" indent="-171450">
+              <a:spcAft>
+                <a:spcPts val="400"/>
+              </a:spcAft>
+              <a:buFont typeface="Arial" panose="020B0604020202020204" pitchFamily="34" charset="0"/>
+              <a:buChar char="•"/>
+              <a:defRPr sz="1300">
+                <a:solidFill>
+                  <a:srgbClr val="282828"/>
+                </a:solidFill>
+                <a:latin typeface="Aptos"/>
+              </a:defRPr>
+            </a:pPr>
+            <a:r>
+              <a:rPr sz="1200" dirty="0">
+                <a:solidFill>
+                  <a:schemeClr val="tx2">
+                    <a:lumMod val="90000"/>
+                    <a:lumOff val="10000"/>
+                  </a:schemeClr>
+                </a:solidFill>
+              </a:rPr>
+              <a:t>This project is a compact local-environment experiment, not a definitive benchmark of post-training methods.</a:t>
+            </a:r>
+          </a:p>
+          <a:p>
+            <a:pPr marL="171450" indent="-171450">
+              <a:spcAft>
+                <a:spcPts val="400"/>
+              </a:spcAft>
+              <a:buFont typeface="Arial" panose="020B0604020202020204" pitchFamily="34" charset="0"/>
+              <a:buChar char="•"/>
+              <a:defRPr sz="1300">
+                <a:solidFill>
+                  <a:srgbClr val="282828"/>
+                </a:solidFill>
+                <a:latin typeface="Aptos"/>
+              </a:defRPr>
+            </a:pPr>
+            <a:r>
+              <a:rPr sz="1200" dirty="0">
+                <a:solidFill>
+                  <a:schemeClr val="tx2">
+                    <a:lumMod val="90000"/>
+                    <a:lumOff val="10000"/>
+                  </a:schemeClr>
+                </a:solidFill>
+              </a:rPr>
+              <a:t>The comparison is informative but narrow: SFT + </a:t>
+            </a:r>
+            <a:r>
+              <a:rPr sz="1200" dirty="0" err="1">
+                <a:solidFill>
+                  <a:schemeClr val="tx2">
+                    <a:lumMod val="90000"/>
+                    <a:lumOff val="10000"/>
+                  </a:schemeClr>
+                </a:solidFill>
+              </a:rPr>
+              <a:t>LoRA</a:t>
+            </a:r>
+            <a:r>
+              <a:rPr sz="1200" dirty="0">
+                <a:solidFill>
+                  <a:schemeClr val="tx2">
+                    <a:lumMod val="90000"/>
+                    <a:lumOff val="10000"/>
+                  </a:schemeClr>
+                </a:solidFill>
+              </a:rPr>
+              <a:t> was tested at ranks 8 / 4 / 2, while GRPO + </a:t>
+            </a:r>
+            <a:r>
+              <a:rPr sz="1200" dirty="0" err="1">
+                <a:solidFill>
+                  <a:schemeClr val="tx2">
+                    <a:lumMod val="90000"/>
+                    <a:lumOff val="10000"/>
+                  </a:schemeClr>
+                </a:solidFill>
+              </a:rPr>
+              <a:t>LoRA</a:t>
+            </a:r>
+            <a:r>
+              <a:rPr sz="1200" dirty="0">
+                <a:solidFill>
+                  <a:schemeClr val="tx2">
+                    <a:lumMod val="90000"/>
+                    <a:lumOff val="10000"/>
+                  </a:schemeClr>
+                </a:solidFill>
+              </a:rPr>
+              <a:t> was tested only at rank 2.</a:t>
+            </a:r>
+          </a:p>
+          <a:p>
+            <a:pPr marL="171450" indent="-171450">
+              <a:spcAft>
+                <a:spcPts val="400"/>
+              </a:spcAft>
+              <a:buFont typeface="Arial" panose="020B0604020202020204" pitchFamily="34" charset="0"/>
+              <a:buChar char="•"/>
+              <a:defRPr sz="1300">
+                <a:solidFill>
+                  <a:srgbClr val="282828"/>
+                </a:solidFill>
+                <a:latin typeface="Aptos"/>
+              </a:defRPr>
+            </a:pPr>
+            <a:r>
+              <a:rPr sz="1200" dirty="0">
+                <a:solidFill>
+                  <a:schemeClr val="tx2">
+                    <a:lumMod val="90000"/>
+                    <a:lumOff val="10000"/>
+                  </a:schemeClr>
+                </a:solidFill>
+              </a:rPr>
+              <a:t>Held-out evaluation covered Reasoning-100, Olympiad-100, and AIMO-150; larger benchmark slices would make the conclusions more robust.</a:t>
+            </a:r>
+          </a:p>
+          <a:p>
+            <a:pPr marL="171450" lvl="1" indent="-171450">
+              <a:spcAft>
+                <a:spcPts val="400"/>
+              </a:spcAft>
+              <a:buFont typeface="Arial" panose="020B0604020202020204" pitchFamily="34" charset="0"/>
+              <a:buChar char="•"/>
+              <a:defRPr sz="1300">
+                <a:solidFill>
+                  <a:srgbClr val="282828"/>
+                </a:solidFill>
+                <a:latin typeface="Aptos"/>
+              </a:defRPr>
+            </a:pPr>
+            <a:r>
+              <a:rPr sz="1200" dirty="0">
+                <a:solidFill>
+                  <a:schemeClr val="tx2">
+                    <a:lumMod val="90000"/>
+                    <a:lumOff val="10000"/>
+                  </a:schemeClr>
+                </a:solidFill>
+              </a:rPr>
+              <a:t>The shared deterministic evaluation protocol improved fairness, but training </a:t>
+            </a:r>
+            <a:r>
+              <a:rPr lang="en-US" altLang="zh-CN" sz="1200" dirty="0">
+                <a:solidFill>
+                  <a:schemeClr val="tx2">
+                    <a:lumMod val="90000"/>
+                    <a:lumOff val="10000"/>
+                  </a:schemeClr>
+                </a:solidFill>
+              </a:rPr>
+              <a:t>conditions</a:t>
+            </a:r>
+            <a:r>
+              <a:rPr lang="zh-CN" altLang="en-US" sz="1200" dirty="0">
+                <a:solidFill>
+                  <a:schemeClr val="tx2">
+                    <a:lumMod val="90000"/>
+                    <a:lumOff val="10000"/>
+                  </a:schemeClr>
+                </a:solidFill>
+              </a:rPr>
+              <a:t> </a:t>
+            </a:r>
+            <a:r>
+              <a:rPr sz="1200" dirty="0">
+                <a:solidFill>
+                  <a:schemeClr val="tx2">
+                    <a:lumMod val="90000"/>
+                    <a:lumOff val="10000"/>
+                  </a:schemeClr>
+                </a:solidFill>
+              </a:rPr>
+              <a:t>were not perfectly matched.</a:t>
+            </a:r>
+            <a:endParaRPr lang="en-US" sz="1200" dirty="0">
+              <a:solidFill>
+                <a:schemeClr val="tx2">
+                  <a:lumMod val="90000"/>
+                  <a:lumOff val="10000"/>
+                </a:schemeClr>
+              </a:solidFill>
+            </a:endParaRPr>
+          </a:p>
+          <a:p>
+            <a:pPr marL="342900" lvl="7" indent="-171450" defTabSz="822960">
+              <a:spcAft>
+                <a:spcPts val="400"/>
+              </a:spcAft>
+              <a:buFont typeface="Courier New" panose="02070309020205020404" pitchFamily="49" charset="0"/>
+              <a:buChar char="o"/>
+              <a:tabLst>
+                <a:tab pos="365760" algn="l"/>
+              </a:tabLst>
+              <a:defRPr sz="1300">
+                <a:solidFill>
+                  <a:srgbClr val="282828"/>
+                </a:solidFill>
+                <a:latin typeface="Aptos"/>
+              </a:defRPr>
+            </a:pPr>
+            <a:r>
+              <a:rPr lang="en-US" sz="1200" dirty="0">
+                <a:solidFill>
+                  <a:schemeClr val="tx2">
+                    <a:lumMod val="90000"/>
+                    <a:lumOff val="10000"/>
+                  </a:schemeClr>
+                </a:solidFill>
+              </a:rPr>
+              <a:t>SFT + </a:t>
+            </a:r>
+            <a:r>
+              <a:rPr lang="en-US" sz="1200" dirty="0" err="1">
+                <a:solidFill>
+                  <a:schemeClr val="tx2">
+                    <a:lumMod val="90000"/>
+                    <a:lumOff val="10000"/>
+                  </a:schemeClr>
+                </a:solidFill>
+              </a:rPr>
+              <a:t>LoRA</a:t>
+            </a:r>
+            <a:r>
+              <a:rPr lang="en-US" sz="1200" dirty="0">
+                <a:solidFill>
+                  <a:schemeClr val="tx2">
+                    <a:lumMod val="90000"/>
+                    <a:lumOff val="10000"/>
+                  </a:schemeClr>
+                </a:solidFill>
+              </a:rPr>
+              <a:t>: local MLX workflow with a more efficient training path</a:t>
+            </a:r>
+          </a:p>
+          <a:p>
+            <a:pPr marL="342900" lvl="7" indent="-171450" defTabSz="822960">
+              <a:spcAft>
+                <a:spcPts val="400"/>
+              </a:spcAft>
+              <a:buFont typeface="Courier New" panose="02070309020205020404" pitchFamily="49" charset="0"/>
+              <a:buChar char="o"/>
+              <a:tabLst>
+                <a:tab pos="365760" algn="l"/>
+              </a:tabLst>
+              <a:defRPr sz="1300">
+                <a:solidFill>
+                  <a:srgbClr val="282828"/>
+                </a:solidFill>
+                <a:latin typeface="Aptos"/>
+              </a:defRPr>
+            </a:pPr>
+            <a:r>
+              <a:rPr lang="en-US" sz="1200" dirty="0">
+                <a:solidFill>
+                  <a:schemeClr val="tx2">
+                    <a:lumMod val="90000"/>
+                    <a:lumOff val="10000"/>
+                  </a:schemeClr>
+                </a:solidFill>
+              </a:rPr>
+              <a:t>GRPO + </a:t>
+            </a:r>
+            <a:r>
+              <a:rPr lang="en-US" sz="1200" dirty="0" err="1">
+                <a:solidFill>
+                  <a:schemeClr val="tx2">
+                    <a:lumMod val="90000"/>
+                    <a:lumOff val="10000"/>
+                  </a:schemeClr>
+                </a:solidFill>
+              </a:rPr>
+              <a:t>LoRA</a:t>
+            </a:r>
+            <a:r>
+              <a:rPr lang="en-US" sz="1200" dirty="0">
+                <a:solidFill>
+                  <a:schemeClr val="tx2">
+                    <a:lumMod val="90000"/>
+                    <a:lumOff val="10000"/>
+                  </a:schemeClr>
+                </a:solidFill>
+              </a:rPr>
+              <a:t>: local CPU workflow using Transformers + TRL + PEFT</a:t>
+            </a:r>
+            <a:endParaRPr sz="1200" dirty="0"/>
+          </a:p>
+        </p:txBody>
+      </p:sp>
+      <p:sp>
+        <p:nvSpPr>
+          <p:cNvPr id="30" name="Rectangle 29">
+            <a:extLst>
+              <a:ext uri="{FF2B5EF4-FFF2-40B4-BE49-F238E27FC236}">
+                <a16:creationId xmlns:a16="http://schemas.microsoft.com/office/drawing/2014/main" id="{997FDA34-A41A-54A8-F7CA-F4C801C432A0}"/>
+              </a:ext>
+            </a:extLst>
+          </p:cNvPr>
+          <p:cNvSpPr/>
+          <p:nvPr/>
+        </p:nvSpPr>
+        <p:spPr>
+          <a:xfrm>
+            <a:off x="203200" y="2560702"/>
+            <a:ext cx="8735060" cy="2468498"/>
+          </a:xfrm>
+          <a:prstGeom prst="rect">
+            <a:avLst/>
+          </a:prstGeom>
+          <a:noFill/>
+          <a:ln>
+            <a:solidFill>
+              <a:srgbClr val="91C6F8"/>
+            </a:solidFill>
+            <a:prstDash val="sysDash"/>
+          </a:ln>
+        </p:spPr>
+        <p:style>
+          <a:lnRef idx="2">
+            <a:schemeClr val="accent1">
+              <a:shade val="15000"/>
+            </a:schemeClr>
+          </a:lnRef>
+          <a:fillRef idx="1">
+            <a:schemeClr val="accent1"/>
+          </a:fillRef>
+          <a:effectRef idx="0">
+            <a:schemeClr val="accent1"/>
+          </a:effectRef>
+          <a:fontRef idx="minor">
+            <a:schemeClr val="lt1"/>
+          </a:fontRef>
+        </p:style>
+        <p:txBody>
+          <a:bodyPr rtlCol="0" anchor="ctr"/>
+          <a:lstStyle/>
+          <a:p>
+            <a:pPr algn="ctr"/>
+            <a:endParaRPr lang="en-US"/>
+          </a:p>
+        </p:txBody>
+      </p:sp>
+      <mc:AlternateContent xmlns:mc="http://schemas.openxmlformats.org/markup-compatibility/2006">
+        <mc:Choice xmlns:p14="http://schemas.microsoft.com/office/powerpoint/2010/main" Requires="p14">
+          <p:contentPart p14:bwMode="auto" r:id="rId2">
+            <p14:nvContentPartPr>
+              <p14:cNvPr id="34" name="Ink 33">
+                <a:extLst>
+                  <a:ext uri="{FF2B5EF4-FFF2-40B4-BE49-F238E27FC236}">
+                    <a16:creationId xmlns:a16="http://schemas.microsoft.com/office/drawing/2014/main" id="{E62B91B0-0FA3-8A77-7B96-77C199810EEE}"/>
+                  </a:ext>
+                </a:extLst>
+              </p14:cNvPr>
+              <p14:cNvContentPartPr/>
+              <p14:nvPr/>
+            </p14:nvContentPartPr>
+            <p14:xfrm>
+              <a:off x="404040" y="2845280"/>
+              <a:ext cx="1814040" cy="10800"/>
+            </p14:xfrm>
+          </p:contentPart>
+        </mc:Choice>
+        <mc:Fallback>
+          <p:pic>
+            <p:nvPicPr>
+              <p:cNvPr id="34" name="Ink 33">
+                <a:extLst>
+                  <a:ext uri="{FF2B5EF4-FFF2-40B4-BE49-F238E27FC236}">
+                    <a16:creationId xmlns:a16="http://schemas.microsoft.com/office/drawing/2014/main" id="{E62B91B0-0FA3-8A77-7B96-77C199810EEE}"/>
+                  </a:ext>
+                </a:extLst>
+              </p:cNvPr>
+              <p:cNvPicPr/>
+              <p:nvPr/>
+            </p:nvPicPr>
+            <p:blipFill>
+              <a:blip r:embed="rId3"/>
+              <a:stretch>
+                <a:fillRect/>
+              </a:stretch>
+            </p:blipFill>
+            <p:spPr>
+              <a:xfrm>
+                <a:off x="368400" y="2773280"/>
+                <a:ext cx="1885680" cy="154440"/>
+              </a:xfrm>
+              <a:prstGeom prst="rect">
+                <a:avLst/>
+              </a:prstGeom>
+            </p:spPr>
+          </p:pic>
+        </mc:Fallback>
+      </mc:AlternateContent>
+      <mc:AlternateContent xmlns:mc="http://schemas.openxmlformats.org/markup-compatibility/2006">
+        <mc:Choice xmlns:p14="http://schemas.microsoft.com/office/powerpoint/2010/main" Requires="p14">
+          <p:contentPart p14:bwMode="auto" r:id="rId4">
+            <p14:nvContentPartPr>
+              <p14:cNvPr id="39" name="Ink 38">
+                <a:extLst>
+                  <a:ext uri="{FF2B5EF4-FFF2-40B4-BE49-F238E27FC236}">
+                    <a16:creationId xmlns:a16="http://schemas.microsoft.com/office/drawing/2014/main" id="{FC60FB99-03FE-4896-ABBD-F8F7997B8C92}"/>
+                  </a:ext>
+                </a:extLst>
+              </p14:cNvPr>
+              <p14:cNvContentPartPr/>
+              <p14:nvPr/>
+            </p14:nvContentPartPr>
+            <p14:xfrm>
+              <a:off x="342120" y="596360"/>
+              <a:ext cx="2111760" cy="7200"/>
+            </p14:xfrm>
+          </p:contentPart>
+        </mc:Choice>
+        <mc:Fallback>
+          <p:pic>
+            <p:nvPicPr>
+              <p:cNvPr id="39" name="Ink 38">
+                <a:extLst>
+                  <a:ext uri="{FF2B5EF4-FFF2-40B4-BE49-F238E27FC236}">
+                    <a16:creationId xmlns:a16="http://schemas.microsoft.com/office/drawing/2014/main" id="{FC60FB99-03FE-4896-ABBD-F8F7997B8C92}"/>
+                  </a:ext>
+                </a:extLst>
+              </p:cNvPr>
+              <p:cNvPicPr/>
+              <p:nvPr/>
+            </p:nvPicPr>
+            <p:blipFill>
+              <a:blip r:embed="rId5"/>
+              <a:stretch>
+                <a:fillRect/>
+              </a:stretch>
+            </p:blipFill>
+            <p:spPr>
+              <a:xfrm>
+                <a:off x="324120" y="560360"/>
+                <a:ext cx="2147400" cy="78840"/>
+              </a:xfrm>
+              <a:prstGeom prst="rect">
+                <a:avLst/>
+              </a:prstGeom>
+            </p:spPr>
+          </p:pic>
+        </mc:Fallback>
+      </mc:AlternateContent>
+    </p:spTree>
+    <p:extLst>
+      <p:ext uri="{BB962C8B-B14F-4D97-AF65-F5344CB8AC3E}">
+        <p14:creationId xmlns:p14="http://schemas.microsoft.com/office/powerpoint/2010/main" val="3926568166"/>
+      </p:ext>
+    </p:extLst>
+  </p:cSld>
+  <p:clrMapOvr>
+    <a:masterClrMapping/>
+  </p:clrMapOvr>
+</p:sld>
+</file>
+
+<file path=ppt/slides/slide21.xml><?xml version="1.0" encoding="utf-8"?>
+<p:sld xmlns:a="http://schemas.openxmlformats.org/drawingml/2006/main" xmlns:r="http://schemas.openxmlformats.org/officeDocument/2006/relationships" xmlns:p="http://schemas.openxmlformats.org/presentationml/2006/main">
+  <p:cSld>
+    <p:spTree>
+      <p:nvGrpSpPr>
+        <p:cNvPr id="1" name=""/>
+        <p:cNvGrpSpPr/>
+        <p:nvPr/>
+      </p:nvGrpSpPr>
+      <p:grpSpPr>
+        <a:xfrm>
+          <a:off x="0" y="0"/>
+          <a:ext cx="0" cy="0"/>
+          <a:chOff x="0" y="0"/>
+          <a:chExt cx="0" cy="0"/>
+        </a:xfrm>
+      </p:grpSpPr>
+      <p:sp>
+        <p:nvSpPr>
+          <p:cNvPr id="2" name="Google Shape;315;p40">
+            <a:extLst>
+              <a:ext uri="{FF2B5EF4-FFF2-40B4-BE49-F238E27FC236}">
+                <a16:creationId xmlns:a16="http://schemas.microsoft.com/office/drawing/2014/main" id="{18977A09-EDC3-8895-F041-B46D2EC1D941}"/>
+              </a:ext>
+            </a:extLst>
+          </p:cNvPr>
+          <p:cNvSpPr txBox="1">
+            <a:spLocks/>
+          </p:cNvSpPr>
+          <p:nvPr/>
+        </p:nvSpPr>
+        <p:spPr>
+          <a:xfrm>
+            <a:off x="5024650" y="2003760"/>
+            <a:ext cx="3578100" cy="678300"/>
+          </a:xfrm>
+          <a:prstGeom prst="rect">
+            <a:avLst/>
+          </a:prstGeom>
+        </p:spPr>
+        <p:txBody>
+          <a:bodyPr spcFirstLastPara="1" wrap="square" lIns="91425" tIns="91425" rIns="91425" bIns="91425" anchor="b" anchorCtr="0">
+            <a:noAutofit/>
+          </a:bodyPr>
+          <a:lstStyle>
+            <a:defPPr marR="0" lvl="0" algn="l" rtl="0">
+              <a:lnSpc>
+                <a:spcPct val="100000"/>
+              </a:lnSpc>
+              <a:spcBef>
+                <a:spcPts val="0"/>
+              </a:spcBef>
+              <a:spcAft>
+                <a:spcPts val="0"/>
+              </a:spcAft>
+            </a:defPPr>
+            <a:lvl1pPr marR="0" lvl="0" algn="l" rtl="0">
+              <a:lnSpc>
+                <a:spcPct val="100000"/>
+              </a:lnSpc>
+              <a:spcBef>
+                <a:spcPts val="0"/>
+              </a:spcBef>
+              <a:spcAft>
+                <a:spcPts val="0"/>
+              </a:spcAft>
+              <a:buClr>
+                <a:srgbClr val="000000"/>
+              </a:buClr>
+              <a:buFont typeface="Arial"/>
+              <a:defRPr sz="1400" b="0" i="0" u="none" strike="noStrike" cap="none">
+                <a:solidFill>
+                  <a:srgbClr val="000000"/>
+                </a:solidFill>
+                <a:latin typeface="Arial"/>
+                <a:ea typeface="Arial"/>
+                <a:cs typeface="Arial"/>
+                <a:sym typeface="Arial"/>
+              </a:defRPr>
+            </a:lvl1pPr>
+            <a:lvl2pPr marR="0" lvl="1" algn="l" rtl="0">
+              <a:lnSpc>
+                <a:spcPct val="100000"/>
+              </a:lnSpc>
+              <a:spcBef>
+                <a:spcPts val="0"/>
+              </a:spcBef>
+              <a:spcAft>
+                <a:spcPts val="0"/>
+              </a:spcAft>
+              <a:buClr>
+                <a:srgbClr val="000000"/>
+              </a:buClr>
+              <a:buFont typeface="Arial"/>
+              <a:defRPr sz="1400" b="0" i="0" u="none" strike="noStrike" cap="none">
+                <a:solidFill>
+                  <a:srgbClr val="000000"/>
+                </a:solidFill>
+                <a:latin typeface="Arial"/>
+                <a:ea typeface="Arial"/>
+                <a:cs typeface="Arial"/>
+                <a:sym typeface="Arial"/>
+              </a:defRPr>
+            </a:lvl2pPr>
+            <a:lvl3pPr marR="0" lvl="2" algn="l" rtl="0">
+              <a:lnSpc>
+                <a:spcPct val="100000"/>
+              </a:lnSpc>
+              <a:spcBef>
+                <a:spcPts val="0"/>
+              </a:spcBef>
+              <a:spcAft>
+                <a:spcPts val="0"/>
+              </a:spcAft>
+              <a:buClr>
+                <a:srgbClr val="000000"/>
+              </a:buClr>
+              <a:buFont typeface="Arial"/>
+              <a:defRPr sz="1400" b="0" i="0" u="none" strike="noStrike" cap="none">
+                <a:solidFill>
+                  <a:srgbClr val="000000"/>
+                </a:solidFill>
+                <a:latin typeface="Arial"/>
+                <a:ea typeface="Arial"/>
+                <a:cs typeface="Arial"/>
+                <a:sym typeface="Arial"/>
+              </a:defRPr>
+            </a:lvl3pPr>
+            <a:lvl4pPr marR="0" lvl="3" algn="l" rtl="0">
+              <a:lnSpc>
+                <a:spcPct val="100000"/>
+              </a:lnSpc>
+              <a:spcBef>
+                <a:spcPts val="0"/>
+              </a:spcBef>
+              <a:spcAft>
+                <a:spcPts val="0"/>
+              </a:spcAft>
+              <a:buClr>
+                <a:srgbClr val="000000"/>
+              </a:buClr>
+              <a:buFont typeface="Arial"/>
+              <a:defRPr sz="1400" b="0" i="0" u="none" strike="noStrike" cap="none">
+                <a:solidFill>
+                  <a:srgbClr val="000000"/>
+                </a:solidFill>
+                <a:latin typeface="Arial"/>
+                <a:ea typeface="Arial"/>
+                <a:cs typeface="Arial"/>
+                <a:sym typeface="Arial"/>
+              </a:defRPr>
+            </a:lvl4pPr>
+            <a:lvl5pPr marR="0" lvl="4" algn="l" rtl="0">
+              <a:lnSpc>
+                <a:spcPct val="100000"/>
+              </a:lnSpc>
+              <a:spcBef>
+                <a:spcPts val="0"/>
+              </a:spcBef>
+              <a:spcAft>
+                <a:spcPts val="0"/>
+              </a:spcAft>
+              <a:buClr>
+                <a:srgbClr val="000000"/>
+              </a:buClr>
+              <a:buFont typeface="Arial"/>
+              <a:defRPr sz="1400" b="0" i="0" u="none" strike="noStrike" cap="none">
+                <a:solidFill>
+                  <a:srgbClr val="000000"/>
+                </a:solidFill>
+                <a:latin typeface="Arial"/>
+                <a:ea typeface="Arial"/>
+                <a:cs typeface="Arial"/>
+                <a:sym typeface="Arial"/>
+              </a:defRPr>
+            </a:lvl5pPr>
+            <a:lvl6pPr marR="0" lvl="5" algn="l" rtl="0">
+              <a:lnSpc>
+                <a:spcPct val="100000"/>
+              </a:lnSpc>
+              <a:spcBef>
+                <a:spcPts val="0"/>
+              </a:spcBef>
+              <a:spcAft>
+                <a:spcPts val="0"/>
+              </a:spcAft>
+              <a:buClr>
+                <a:srgbClr val="000000"/>
+              </a:buClr>
+              <a:buFont typeface="Arial"/>
+              <a:defRPr sz="1400" b="0" i="0" u="none" strike="noStrike" cap="none">
+                <a:solidFill>
+                  <a:srgbClr val="000000"/>
+                </a:solidFill>
+                <a:latin typeface="Arial"/>
+                <a:ea typeface="Arial"/>
+                <a:cs typeface="Arial"/>
+                <a:sym typeface="Arial"/>
+              </a:defRPr>
+            </a:lvl6pPr>
+            <a:lvl7pPr marR="0" lvl="6" algn="l" rtl="0">
+              <a:lnSpc>
+                <a:spcPct val="100000"/>
+              </a:lnSpc>
+              <a:spcBef>
+                <a:spcPts val="0"/>
+              </a:spcBef>
+              <a:spcAft>
+                <a:spcPts val="0"/>
+              </a:spcAft>
+              <a:buClr>
+                <a:srgbClr val="000000"/>
+              </a:buClr>
+              <a:buFont typeface="Arial"/>
+              <a:defRPr sz="1400" b="0" i="0" u="none" strike="noStrike" cap="none">
+                <a:solidFill>
+                  <a:srgbClr val="000000"/>
+                </a:solidFill>
+                <a:latin typeface="Arial"/>
+                <a:ea typeface="Arial"/>
+                <a:cs typeface="Arial"/>
+                <a:sym typeface="Arial"/>
+              </a:defRPr>
+            </a:lvl7pPr>
+            <a:lvl8pPr marR="0" lvl="7" algn="l" rtl="0">
+              <a:lnSpc>
+                <a:spcPct val="100000"/>
+              </a:lnSpc>
+              <a:spcBef>
+                <a:spcPts val="0"/>
+              </a:spcBef>
+              <a:spcAft>
+                <a:spcPts val="0"/>
+              </a:spcAft>
+              <a:buClr>
+                <a:srgbClr val="000000"/>
+              </a:buClr>
+              <a:buFont typeface="Arial"/>
+              <a:defRPr sz="1400" b="0" i="0" u="none" strike="noStrike" cap="none">
+                <a:solidFill>
+                  <a:srgbClr val="000000"/>
+                </a:solidFill>
+                <a:latin typeface="Arial"/>
+                <a:ea typeface="Arial"/>
+                <a:cs typeface="Arial"/>
+                <a:sym typeface="Arial"/>
+              </a:defRPr>
+            </a:lvl8pPr>
+            <a:lvl9pPr marR="0" lvl="8" algn="l" rtl="0">
+              <a:lnSpc>
+                <a:spcPct val="100000"/>
+              </a:lnSpc>
+              <a:spcBef>
+                <a:spcPts val="0"/>
+              </a:spcBef>
+              <a:spcAft>
+                <a:spcPts val="0"/>
+              </a:spcAft>
+              <a:buClr>
+                <a:srgbClr val="000000"/>
+              </a:buClr>
+              <a:buFont typeface="Arial"/>
+              <a:defRPr sz="1400" b="0" i="0" u="none" strike="noStrike" cap="none">
+                <a:solidFill>
+                  <a:srgbClr val="000000"/>
+                </a:solidFill>
+                <a:latin typeface="Arial"/>
+                <a:ea typeface="Arial"/>
+                <a:cs typeface="Arial"/>
+                <a:sym typeface="Arial"/>
+              </a:defRPr>
+            </a:lvl9pPr>
+          </a:lstStyle>
+          <a:p>
+            <a:r>
+              <a:rPr lang="en-US" sz="4000" dirty="0">
+                <a:solidFill>
+                  <a:schemeClr val="dk1"/>
+                </a:solidFill>
+                <a:latin typeface="Red Hat Mono"/>
+                <a:ea typeface="Red Hat Mono"/>
+                <a:cs typeface="Red Hat Mono"/>
+              </a:rPr>
+              <a:t>THANK YOU</a:t>
+            </a:r>
+          </a:p>
+        </p:txBody>
+      </p:sp>
+    </p:spTree>
+    <p:extLst>
+      <p:ext uri="{BB962C8B-B14F-4D97-AF65-F5344CB8AC3E}">
+        <p14:creationId xmlns:p14="http://schemas.microsoft.com/office/powerpoint/2010/main" val="98816045"/>
+      </p:ext>
+    </p:extLst>
   </p:cSld>
   <p:clrMapOvr>
     <a:masterClrMapping/>
@@ -20219,7 +25577,7 @@
         <p:spPr>
           <a:xfrm>
             <a:off x="494398" y="2279533"/>
-            <a:ext cx="4697804" cy="448200"/>
+            <a:ext cx="6983362" cy="448200"/>
           </a:xfrm>
           <a:prstGeom prst="rect">
             <a:avLst/>
@@ -20234,7 +25592,19 @@
             <a:pPr marL="0" lvl="0" indent="0"/>
             <a:r>
               <a:rPr lang="en-US" dirty="0"/>
-              <a:t>Full Base </a:t>
+              <a:t>Full</a:t>
+            </a:r>
+            <a:r>
+              <a:rPr lang="zh-CN" altLang="en-US" dirty="0"/>
+              <a:t> </a:t>
+            </a:r>
+            <a:r>
+              <a:rPr lang="en-US" altLang="zh-CN" dirty="0"/>
+              <a:t>model</a:t>
+            </a:r>
+            <a:r>
+              <a:rPr lang="en-US" dirty="0"/>
+              <a:t> </a:t>
             </a:r>
             <a:r>
               <a:rPr lang="en-US" i="1" u="sng" dirty="0"/>
@@ -20242,18 +25612,54 @@
             </a:r>
             <a:r>
               <a:rPr lang="en-US" dirty="0"/>
-              <a:t> parameters (</a:t>
+              <a:t> parameters</a:t>
+            </a:r>
+            <a:r>
+              <a:rPr lang="zh-CN" altLang="en-US" dirty="0"/>
+              <a:t> </a:t>
+            </a:r>
+            <a:r>
+              <a:rPr lang="en-US" dirty="0"/>
+              <a:t>update on </a:t>
+            </a:r>
+            <a:r>
+              <a:rPr lang="en-US" i="1" u="sng" dirty="0"/>
+              <a:t>GSM8K</a:t>
+            </a:r>
+            <a:r>
+              <a:rPr lang="zh-CN" altLang="en-US" i="1" dirty="0"/>
+              <a:t> </a:t>
+            </a:r>
+            <a:r>
+              <a:rPr lang="en-US" dirty="0"/>
+              <a:t>(</a:t>
             </a:r>
             <a:r>
               <a:rPr lang="en-US" i="1" dirty="0"/>
               <a:t>accuracy </a:t>
             </a:r>
             <a:r>
+              <a:rPr lang="en-US" altLang="zh-CN" b="1" i="1" dirty="0"/>
+              <a:t>76%-</a:t>
+            </a:r>
+            <a:r>
               <a:rPr lang="en-US" b="1" i="1" dirty="0"/>
-              <a:t>76%</a:t>
-            </a:r>
-            <a:r>
-              <a:rPr lang="en-US" i="1" dirty="0"/>
+              <a:t>9</a:t>
+            </a:r>
+            <a:r>
+              <a:rPr lang="en-US" altLang="zh-CN" b="1" i="1" dirty="0"/>
+              <a:t>7</a:t>
+            </a:r>
+            <a:r>
+              <a:rPr lang="en-US" b="1" i="1" dirty="0"/>
+              <a:t>%</a:t>
+            </a:r>
+            <a:r>
+              <a:rPr lang="zh-CN" altLang="en-US" b="1" i="1" dirty="0"/>
+              <a:t>**</a:t>
+            </a:r>
+            <a:r>
+              <a:rPr lang="en-US" dirty="0"/>
               <a:t>)</a:t>
             </a:r>
             <a:endParaRPr i="1" dirty="0"/>
@@ -20277,7 +25683,7 @@
         <p:spPr>
           <a:xfrm>
             <a:off x="405516" y="297236"/>
-            <a:ext cx="8603312" cy="960123"/>
+            <a:ext cx="8951844" cy="960123"/>
           </a:xfrm>
           <a:prstGeom prst="rect">
             <a:avLst/>
@@ -20552,7 +25958,16 @@
                 <a:cs typeface="Red Hat Mono"/>
                 <a:sym typeface="Red Hat Mono"/>
               </a:rPr>
-              <a:t>     Paper </a:t>
+              <a:t>    Paper</a:t>
+            </a:r>
+            <a:r>
+              <a:rPr lang="zh-CN" altLang="en-US" sz="2400" dirty="0">
+                <a:latin typeface="Red Hat Mono"/>
+                <a:ea typeface="Red Hat Mono"/>
+                <a:cs typeface="Red Hat Mono"/>
+                <a:sym typeface="Red Hat Mono"/>
+              </a:rPr>
+              <a:t> </a:t>
             </a:r>
             <a:r>
               <a:rPr lang="en-US" sz="2400" dirty="0">
@@ -20563,6 +25978,15 @@
                 <a:hlinkClick r:id="rId3"/>
               </a:rPr>
               <a:t>Learning to Reason in 13 Parameters</a:t>
+            </a:r>
+            <a:r>
+              <a:rPr lang="zh-CN" altLang="en-US" sz="2400" dirty="0">
+                <a:latin typeface="Red Hat Mono"/>
+                <a:ea typeface="Red Hat Mono"/>
+                <a:cs typeface="Red Hat Mono"/>
+                <a:sym typeface="Red Hat Mono"/>
+              </a:rPr>
+              <a:t>*</a:t>
             </a:r>
             <a:endParaRPr lang="en-US" sz="4000" dirty="0">
               <a:latin typeface="Red Hat Mono"/>
@@ -20573,8 +25997,8 @@
           </a:p>
         </p:txBody>
       </p:sp>
-      <mc:AlternateContent xmlns:mc="http://schemas.openxmlformats.org/markup-compatibility/2006" xmlns:p14="http://schemas.microsoft.com/office/powerpoint/2010/main">
-        <mc:Choice Requires="p14">
+      <mc:AlternateContent xmlns:mc="http://schemas.openxmlformats.org/markup-compatibility/2006">
+        <mc:Choice xmlns:p14="http://schemas.microsoft.com/office/powerpoint/2010/main" Requires="p14">
           <p:contentPart p14:bwMode="auto" r:id="rId4">
             <p14:nvContentPartPr>
               <p14:cNvPr id="3" name="Ink 2">
@@ -20588,12 +26012,12 @@
               <p14:nvPr/>
             </p14:nvContentPartPr>
             <p14:xfrm>
-              <a:off x="1405190" y="1236631"/>
+              <a:off x="1262950" y="1236631"/>
               <a:ext cx="894960" cy="12240"/>
             </p14:xfrm>
           </p:contentPart>
         </mc:Choice>
-        <mc:Fallback xmlns="">
+        <mc:Fallback>
           <p:pic>
             <p:nvPicPr>
               <p:cNvPr id="3" name="Ink 2">
@@ -20614,8 +26038,8 @@
             </p:blipFill>
             <p:spPr>
               <a:xfrm>
-                <a:off x="1369550" y="1164991"/>
-                <a:ext cx="966600" cy="155880"/>
+                <a:off x="1226950" y="1162449"/>
+                <a:ext cx="966600" cy="160233"/>
               </a:xfrm>
               <a:prstGeom prst="rect">
                 <a:avLst/>
@@ -20927,7 +26351,7 @@
         <p:spPr>
           <a:xfrm>
             <a:off x="494397" y="3322479"/>
-            <a:ext cx="4594437" cy="448200"/>
+            <a:ext cx="5768523" cy="448200"/>
           </a:xfrm>
           <a:prstGeom prst="rect">
             <a:avLst/>
@@ -21200,19 +26624,39 @@
             </a:r>
             <a:r>
               <a:rPr lang="en-US" dirty="0"/>
-              <a:t> / SFT-scale update on </a:t>
-            </a:r>
-            <a:r>
-              <a:rPr lang="en-US" i="1" u="sng" dirty="0"/>
+              <a:t> / SFT</a:t>
+            </a:r>
+            <a:r>
+              <a:rPr lang="zh-CN" altLang="en-US" dirty="0"/>
+              <a:t> </a:t>
+            </a:r>
+            <a:r>
+              <a:rPr lang="en-US" altLang="zh-CN" dirty="0"/>
+              <a:t>setup</a:t>
+            </a:r>
+            <a:r>
+              <a:rPr lang="en-US" dirty="0"/>
+              <a:t> update on </a:t>
+            </a:r>
+            <a:r>
+              <a:rPr lang="en-US" i="1" dirty="0"/>
               <a:t>GSM8K</a:t>
             </a:r>
             <a:r>
+              <a:rPr lang="zh-CN" altLang="en-US" i="1" dirty="0"/>
+              <a:t> </a:t>
+            </a:r>
+            <a:r>
               <a:rPr lang="en-US" dirty="0"/>
-              <a:t> (</a:t>
+              <a:t>(</a:t>
             </a:r>
             <a:r>
               <a:rPr lang="en-US" i="1" dirty="0"/>
               <a:t>accuracy </a:t>
+            </a:r>
+            <a:r>
+              <a:rPr lang="en-US" altLang="zh-CN" b="1" i="1" dirty="0"/>
+              <a:t>76%-</a:t>
             </a:r>
             <a:r>
               <a:rPr lang="en-US" b="1" i="1" dirty="0"/>
@@ -21528,7 +26972,7 @@
         <p:spPr>
           <a:xfrm>
             <a:off x="494398" y="4301815"/>
-            <a:ext cx="3361984" cy="448200"/>
+            <a:ext cx="3799306" cy="448200"/>
           </a:xfrm>
           <a:prstGeom prst="rect">
             <a:avLst/>
@@ -21802,6 +27246,10 @@
             <a:r>
               <a:rPr lang="en-US" i="1" dirty="0"/>
               <a:t>accuracy </a:t>
+            </a:r>
+            <a:r>
+              <a:rPr lang="en-US" altLang="zh-CN" b="1" i="1" dirty="0"/>
+              <a:t>76%- </a:t>
             </a:r>
             <a:r>
               <a:rPr lang="en-US" b="1" i="1" dirty="0"/>
@@ -22089,6 +27537,245 @@
               <a:rPr lang="en-US" dirty="0"/>
               <a:t>? </a:t>
             </a:r>
+          </a:p>
+        </p:txBody>
+      </p:sp>
+      <p:sp>
+        <p:nvSpPr>
+          <p:cNvPr id="30" name="TextBox 29">
+            <a:extLst>
+              <a:ext uri="{FF2B5EF4-FFF2-40B4-BE49-F238E27FC236}">
+                <a16:creationId xmlns:a16="http://schemas.microsoft.com/office/drawing/2014/main" id="{930B2D98-494A-A926-D92A-D774312D147B}"/>
+              </a:ext>
+            </a:extLst>
+          </p:cNvPr>
+          <p:cNvSpPr txBox="1"/>
+          <p:nvPr/>
+        </p:nvSpPr>
+        <p:spPr>
+          <a:xfrm>
+            <a:off x="494397" y="4858415"/>
+            <a:ext cx="1526380" cy="276999"/>
+          </a:xfrm>
+          <a:prstGeom prst="rect">
+            <a:avLst/>
+          </a:prstGeom>
+          <a:noFill/>
+        </p:spPr>
+        <p:txBody>
+          <a:bodyPr wrap="none" rtlCol="0">
+            <a:spAutoFit/>
+          </a:bodyPr>
+          <a:lstStyle/>
+          <a:p>
+            <a:r>
+              <a:rPr lang="zh-CN" altLang="en-US" sz="600" dirty="0">
+                <a:solidFill>
+                  <a:schemeClr val="tx2">
+                    <a:lumMod val="75000"/>
+                    <a:lumOff val="25000"/>
+                  </a:schemeClr>
+                </a:solidFill>
+              </a:rPr>
+              <a:t>* </a:t>
+            </a:r>
+            <a:r>
+              <a:rPr lang="en-US" altLang="zh-CN" sz="600" dirty="0">
+                <a:solidFill>
+                  <a:schemeClr val="tx2">
+                    <a:lumMod val="75000"/>
+                    <a:lumOff val="25000"/>
+                  </a:schemeClr>
+                </a:solidFill>
+              </a:rPr>
+              <a:t>https://</a:t>
+            </a:r>
+            <a:r>
+              <a:rPr lang="en-US" altLang="zh-CN" sz="600" dirty="0" err="1">
+                <a:solidFill>
+                  <a:schemeClr val="tx2">
+                    <a:lumMod val="75000"/>
+                    <a:lumOff val="25000"/>
+                  </a:schemeClr>
+                </a:solidFill>
+              </a:rPr>
+              <a:t>arxiv.org</a:t>
+            </a:r>
+            <a:r>
+              <a:rPr lang="en-US" altLang="zh-CN" sz="600" dirty="0">
+                <a:solidFill>
+                  <a:schemeClr val="tx2">
+                    <a:lumMod val="75000"/>
+                    <a:lumOff val="25000"/>
+                  </a:schemeClr>
+                </a:solidFill>
+              </a:rPr>
+              <a:t>/pdf/2602.04118</a:t>
+            </a:r>
+          </a:p>
+          <a:p>
+            <a:r>
+              <a:rPr lang="zh-CN" altLang="en-US" sz="600" dirty="0">
+                <a:solidFill>
+                  <a:schemeClr val="tx2">
+                    <a:lumMod val="75000"/>
+                    <a:lumOff val="25000"/>
+                  </a:schemeClr>
+                </a:solidFill>
+              </a:rPr>
+              <a:t>** </a:t>
+            </a:r>
+            <a:r>
+              <a:rPr lang="en-US" altLang="zh-CN" sz="600" dirty="0">
+                <a:solidFill>
+                  <a:schemeClr val="tx2">
+                    <a:lumMod val="75000"/>
+                    <a:lumOff val="25000"/>
+                  </a:schemeClr>
+                </a:solidFill>
+              </a:rPr>
+              <a:t>estimated</a:t>
+            </a:r>
+            <a:r>
+              <a:rPr lang="zh-CN" altLang="en-US" sz="600" dirty="0">
+                <a:solidFill>
+                  <a:schemeClr val="tx2">
+                    <a:lumMod val="75000"/>
+                    <a:lumOff val="25000"/>
+                  </a:schemeClr>
+                </a:solidFill>
+              </a:rPr>
+              <a:t> </a:t>
+            </a:r>
+            <a:r>
+              <a:rPr lang="en-US" altLang="zh-CN" sz="600" dirty="0">
+                <a:solidFill>
+                  <a:schemeClr val="tx2">
+                    <a:lumMod val="75000"/>
+                    <a:lumOff val="25000"/>
+                  </a:schemeClr>
+                </a:solidFill>
+              </a:rPr>
+              <a:t>from</a:t>
+            </a:r>
+            <a:r>
+              <a:rPr lang="zh-CN" altLang="en-US" sz="600" dirty="0">
+                <a:solidFill>
+                  <a:schemeClr val="tx2">
+                    <a:lumMod val="75000"/>
+                    <a:lumOff val="25000"/>
+                  </a:schemeClr>
+                </a:solidFill>
+              </a:rPr>
+              <a:t> </a:t>
+            </a:r>
+            <a:r>
+              <a:rPr lang="en-US" altLang="zh-CN" sz="600" dirty="0">
+                <a:solidFill>
+                  <a:schemeClr val="tx2">
+                    <a:lumMod val="75000"/>
+                    <a:lumOff val="25000"/>
+                  </a:schemeClr>
+                </a:solidFill>
+              </a:rPr>
+              <a:t>the</a:t>
+            </a:r>
+            <a:r>
+              <a:rPr lang="zh-CN" altLang="en-US" sz="600" dirty="0">
+                <a:solidFill>
+                  <a:schemeClr val="tx2">
+                    <a:lumMod val="75000"/>
+                    <a:lumOff val="25000"/>
+                  </a:schemeClr>
+                </a:solidFill>
+              </a:rPr>
+              <a:t> </a:t>
+            </a:r>
+            <a:r>
+              <a:rPr lang="en-US" altLang="zh-CN" sz="600" dirty="0">
+                <a:solidFill>
+                  <a:schemeClr val="tx2">
+                    <a:lumMod val="75000"/>
+                    <a:lumOff val="25000"/>
+                  </a:schemeClr>
+                </a:solidFill>
+              </a:rPr>
+              <a:t>chart</a:t>
+            </a:r>
+            <a:r>
+              <a:rPr lang="zh-CN" altLang="en-US" sz="600" dirty="0">
+                <a:solidFill>
+                  <a:schemeClr val="tx2">
+                    <a:lumMod val="75000"/>
+                    <a:lumOff val="25000"/>
+                  </a:schemeClr>
+                </a:solidFill>
+              </a:rPr>
+              <a:t> </a:t>
+            </a:r>
+            <a:r>
+              <a:rPr lang="en-US" altLang="zh-CN" sz="600" dirty="0">
+                <a:solidFill>
+                  <a:schemeClr val="tx2">
+                    <a:lumMod val="75000"/>
+                    <a:lumOff val="25000"/>
+                  </a:schemeClr>
+                </a:solidFill>
+              </a:rPr>
+              <a:t>in</a:t>
+            </a:r>
+            <a:r>
+              <a:rPr lang="zh-CN" altLang="en-US" sz="600" dirty="0">
+                <a:solidFill>
+                  <a:schemeClr val="tx2">
+                    <a:lumMod val="75000"/>
+                    <a:lumOff val="25000"/>
+                  </a:schemeClr>
+                </a:solidFill>
+              </a:rPr>
+              <a:t> </a:t>
+            </a:r>
+            <a:r>
+              <a:rPr lang="en-US" altLang="zh-CN" sz="600" dirty="0">
+                <a:solidFill>
+                  <a:schemeClr val="tx2">
+                    <a:lumMod val="75000"/>
+                    <a:lumOff val="25000"/>
+                  </a:schemeClr>
+                </a:solidFill>
+              </a:rPr>
+              <a:t>the</a:t>
+            </a:r>
+            <a:r>
+              <a:rPr lang="zh-CN" altLang="en-US" sz="600" dirty="0">
+                <a:solidFill>
+                  <a:schemeClr val="tx2">
+                    <a:lumMod val="75000"/>
+                    <a:lumOff val="25000"/>
+                  </a:schemeClr>
+                </a:solidFill>
+              </a:rPr>
+              <a:t> </a:t>
+            </a:r>
+            <a:r>
+              <a:rPr lang="en-US" altLang="zh-CN" sz="600" dirty="0">
+                <a:solidFill>
+                  <a:schemeClr val="tx2">
+                    <a:lumMod val="75000"/>
+                    <a:lumOff val="25000"/>
+                  </a:schemeClr>
+                </a:solidFill>
+              </a:rPr>
+              <a:t>paper</a:t>
+            </a:r>
+            <a:endParaRPr lang="en-US" sz="600" dirty="0">
+              <a:solidFill>
+                <a:schemeClr val="tx2">
+                  <a:lumMod val="75000"/>
+                  <a:lumOff val="25000"/>
+                </a:schemeClr>
+              </a:solidFill>
+            </a:endParaRPr>
           </a:p>
         </p:txBody>
       </p:sp>
